--- a/Brain_MRI_Project_Presentation_Improved_v2.pptx
+++ b/Brain_MRI_Project_Presentation_Improved_v2.pptx
@@ -11,6 +11,7 @@
     <p:sldId id="259" r:id="rId5"/>
     <p:sldId id="260" r:id="rId6"/>
     <p:sldId id="261" r:id="rId7"/>
+    <p:sldId id="276" r:id="rId26"/>
     <p:sldId id="275" r:id="rId25"/>
     <p:sldId id="262" r:id="rId8"/>
     <p:sldId id="263" r:id="rId9"/>
@@ -3677,6 +3678,595 @@
     <p:bg>
       <p:bgPr>
         <a:solidFill>
+          <a:srgbClr val="F7F9F7"/>
+        </a:solidFill>
+        <a:effectLst/>
+      </p:bgPr>
+    </p:bg>
+    <p:spTree>
+      <p:nvGrpSpPr>
+        <p:cNvPr id="1" name=""/>
+        <p:cNvGrpSpPr/>
+        <p:nvPr/>
+      </p:nvGrpSpPr>
+      <p:grpSpPr>
+        <a:xfrm>
+          <a:off x="0" y="0"/>
+          <a:ext cx="0" cy="0"/>
+          <a:chOff x="0" y="0"/>
+          <a:chExt cx="0" cy="0"/>
+        </a:xfrm>
+      </p:grpSpPr>
+      <p:sp>
+        <p:nvSpPr>
+          <p:cNvPr id="2" name="TextBox 1"/>
+          <p:cNvSpPr txBox="1"/>
+          <p:nvPr/>
+        </p:nvSpPr>
+        <p:spPr>
+          <a:xfrm>
+            <a:off x="502920" y="320040"/>
+            <a:ext cx="4572000" cy="256032"/>
+          </a:xfrm>
+          <a:prstGeom prst="rect">
+            <a:avLst/>
+          </a:prstGeom>
+          <a:noFill/>
+        </p:spPr>
+        <p:txBody>
+          <a:bodyPr wrap="none" lIns="18288" tIns="9144" rIns="18288" bIns="9144">
+            <a:spAutoFit/>
+          </a:bodyPr>
+          <a:lstStyle/>
+          <a:p>
+            <a:pPr>
+              <a:defRPr sz="900" b="1">
+                <a:solidFill>
+                  <a:srgbClr val="008074"/>
+                </a:solidFill>
+                <a:latin typeface="Aptos"/>
+              </a:defRPr>
+            </a:pPr>
+            <a:r>
+              <a:t>TASK 1 | DISTORTED SUPER-RESOLUTION</a:t>
+            </a:r>
+          </a:p>
+        </p:txBody>
+      </p:sp>
+      <p:sp>
+        <p:nvSpPr>
+          <p:cNvPr id="3" name="TextBox 2"/>
+          <p:cNvSpPr txBox="1"/>
+          <p:nvPr/>
+        </p:nvSpPr>
+        <p:spPr>
+          <a:xfrm>
+            <a:off x="502920" y="640080"/>
+            <a:ext cx="8961120" cy="603504"/>
+          </a:xfrm>
+          <a:prstGeom prst="rect">
+            <a:avLst/>
+          </a:prstGeom>
+          <a:noFill/>
+        </p:spPr>
+        <p:txBody>
+          <a:bodyPr wrap="none" lIns="18288" tIns="9144" rIns="18288" bIns="9144">
+            <a:spAutoFit/>
+          </a:bodyPr>
+          <a:lstStyle/>
+          <a:p>
+            <a:pPr>
+              <a:defRPr sz="2400" b="1">
+                <a:solidFill>
+                  <a:srgbClr val="182228"/>
+                </a:solidFill>
+                <a:latin typeface="Aptos"/>
+              </a:defRPr>
+            </a:pPr>
+            <a:r>
+              <a:t>Restored inputs usually recover PSNR before sharpened_lanczos reconstruction.</a:t>
+            </a:r>
+          </a:p>
+        </p:txBody>
+      </p:sp>
+      <p:sp>
+        <p:nvSpPr>
+          <p:cNvPr id="4" name="TextBox 3"/>
+          <p:cNvSpPr txBox="1"/>
+          <p:nvPr/>
+        </p:nvSpPr>
+        <p:spPr>
+          <a:xfrm>
+            <a:off x="521207" y="1225296"/>
+            <a:ext cx="9052560" cy="292608"/>
+          </a:xfrm>
+          <a:prstGeom prst="rect">
+            <a:avLst/>
+          </a:prstGeom>
+          <a:noFill/>
+        </p:spPr>
+        <p:txBody>
+          <a:bodyPr wrap="none" lIns="18288" tIns="9144" rIns="18288" bIns="9144">
+            <a:spAutoFit/>
+          </a:bodyPr>
+          <a:lstStyle/>
+          <a:p>
+            <a:pPr>
+              <a:defRPr sz="1050" b="0">
+                <a:solidFill>
+                  <a:srgbClr val="56636B"/>
+                </a:solidFill>
+                <a:latin typeface="Aptos"/>
+              </a:defRPr>
+            </a:pPr>
+            <a:r>
+              <a:t>Each graph includes a dashed clean baseline.</a:t>
+            </a:r>
+          </a:p>
+        </p:txBody>
+      </p:sp>
+      <p:sp>
+        <p:nvSpPr>
+          <p:cNvPr id="5" name="TextBox 4"/>
+          <p:cNvSpPr txBox="1"/>
+          <p:nvPr/>
+        </p:nvSpPr>
+        <p:spPr>
+          <a:xfrm>
+            <a:off x="9692640" y="347472"/>
+            <a:ext cx="1920240" cy="228600"/>
+          </a:xfrm>
+          <a:prstGeom prst="rect">
+            <a:avLst/>
+          </a:prstGeom>
+          <a:noFill/>
+        </p:spPr>
+        <p:txBody>
+          <a:bodyPr wrap="none" lIns="18288" tIns="9144" rIns="18288" bIns="9144">
+            <a:spAutoFit/>
+          </a:bodyPr>
+          <a:lstStyle/>
+          <a:p>
+            <a:pPr algn="r">
+              <a:defRPr sz="850" b="0">
+                <a:solidFill>
+                  <a:srgbClr val="56636B"/>
+                </a:solidFill>
+                <a:latin typeface="Aptos"/>
+              </a:defRPr>
+            </a:pPr>
+            <a:r>
+              <a:t>Brain MRI robustness</a:t>
+            </a:r>
+          </a:p>
+        </p:txBody>
+      </p:sp>
+      <p:sp>
+        <p:nvSpPr>
+          <p:cNvPr id="6" name="TextBox 5"/>
+          <p:cNvSpPr txBox="1"/>
+          <p:nvPr/>
+        </p:nvSpPr>
+        <p:spPr>
+          <a:xfrm>
+            <a:off x="11292840" y="6446520"/>
+            <a:ext cx="411480" cy="182880"/>
+          </a:xfrm>
+          <a:prstGeom prst="rect">
+            <a:avLst/>
+          </a:prstGeom>
+          <a:noFill/>
+        </p:spPr>
+        <p:txBody>
+          <a:bodyPr wrap="none" lIns="18288" tIns="9144" rIns="18288" bIns="9144">
+            <a:spAutoFit/>
+          </a:bodyPr>
+          <a:lstStyle/>
+          <a:p>
+            <a:pPr algn="r">
+              <a:defRPr sz="800" b="0">
+                <a:solidFill>
+                  <a:srgbClr val="56636B"/>
+                </a:solidFill>
+                <a:latin typeface="Aptos"/>
+              </a:defRPr>
+            </a:pPr>
+            <a:r>
+              <a:t>09</a:t>
+            </a:r>
+          </a:p>
+        </p:txBody>
+      </p:sp>
+      <p:sp>
+        <p:nvSpPr>
+          <p:cNvPr id="7" name="Rounded Rectangle 6"/>
+          <p:cNvSpPr/>
+          <p:nvPr/>
+        </p:nvSpPr>
+        <p:spPr>
+          <a:xfrm>
+            <a:off x="502920" y="1508760"/>
+            <a:ext cx="3657600" cy="2240280"/>
+          </a:xfrm>
+          <a:prstGeom prst="roundRect">
+            <a:avLst/>
+          </a:prstGeom>
+          <a:solidFill>
+            <a:srgbClr val="FFFFFF"/>
+          </a:solidFill>
+          <a:ln w="8890">
+            <a:solidFill>
+              <a:srgbClr val="D6DEDE"/>
+            </a:solidFill>
+          </a:ln>
+        </p:spPr>
+        <p:style>
+          <a:lnRef idx="1">
+            <a:schemeClr val="accent1"/>
+          </a:lnRef>
+          <a:fillRef idx="3">
+            <a:schemeClr val="accent1"/>
+          </a:fillRef>
+          <a:effectRef idx="2">
+            <a:schemeClr val="accent1"/>
+          </a:effectRef>
+          <a:fontRef idx="minor">
+            <a:schemeClr val="lt1"/>
+          </a:fontRef>
+        </p:style>
+        <p:txBody>
+          <a:bodyPr rtlCol="0" anchor="ctr"/>
+          <a:lstStyle/>
+          <a:p>
+            <a:pPr algn="ctr"/>
+            <a:endParaRPr/>
+          </a:p>
+        </p:txBody>
+      </p:sp>
+      <p:pic>
+        <p:nvPicPr>
+          <p:cNvPr id="8" name="Picture 7" descr="gaussian_noise_snr_psnr_graph.png"/>
+          <p:cNvPicPr>
+            <a:picLocks noChangeAspect="1"/>
+          </p:cNvPicPr>
+          <p:nvPr/>
+        </p:nvPicPr>
+        <p:blipFill>
+          <a:blip r:embed="rId2"/>
+          <a:stretch>
+            <a:fillRect/>
+          </a:stretch>
+        </p:blipFill>
+        <p:spPr>
+          <a:xfrm>
+            <a:off x="502920" y="1612900"/>
+            <a:ext cx="3657600" cy="2032000"/>
+          </a:xfrm>
+          <a:prstGeom prst="rect">
+            <a:avLst/>
+          </a:prstGeom>
+        </p:spPr>
+      </p:pic>
+      <p:sp>
+        <p:nvSpPr>
+          <p:cNvPr id="9" name="Rounded Rectangle 8"/>
+          <p:cNvSpPr/>
+          <p:nvPr/>
+        </p:nvSpPr>
+        <p:spPr>
+          <a:xfrm>
+            <a:off x="4251960" y="1508760"/>
+            <a:ext cx="3657600" cy="2240280"/>
+          </a:xfrm>
+          <a:prstGeom prst="roundRect">
+            <a:avLst/>
+          </a:prstGeom>
+          <a:solidFill>
+            <a:srgbClr val="FFFFFF"/>
+          </a:solidFill>
+          <a:ln w="8890">
+            <a:solidFill>
+              <a:srgbClr val="D6DEDE"/>
+            </a:solidFill>
+          </a:ln>
+        </p:spPr>
+        <p:style>
+          <a:lnRef idx="1">
+            <a:schemeClr val="accent1"/>
+          </a:lnRef>
+          <a:fillRef idx="3">
+            <a:schemeClr val="accent1"/>
+          </a:fillRef>
+          <a:effectRef idx="2">
+            <a:schemeClr val="accent1"/>
+          </a:effectRef>
+          <a:fontRef idx="minor">
+            <a:schemeClr val="lt1"/>
+          </a:fontRef>
+        </p:style>
+        <p:txBody>
+          <a:bodyPr rtlCol="0" anchor="ctr"/>
+          <a:lstStyle/>
+          <a:p>
+            <a:pPr algn="ctr"/>
+            <a:endParaRPr/>
+          </a:p>
+        </p:txBody>
+      </p:sp>
+      <p:pic>
+        <p:nvPicPr>
+          <p:cNvPr id="10" name="Picture 9" descr="salt_and_pepper_density_psnr_graph.png"/>
+          <p:cNvPicPr>
+            <a:picLocks noChangeAspect="1"/>
+          </p:cNvPicPr>
+          <p:nvPr/>
+        </p:nvPicPr>
+        <p:blipFill>
+          <a:blip r:embed="rId3"/>
+          <a:stretch>
+            <a:fillRect/>
+          </a:stretch>
+        </p:blipFill>
+        <p:spPr>
+          <a:xfrm>
+            <a:off x="4251960" y="1612900"/>
+            <a:ext cx="3657600" cy="2032000"/>
+          </a:xfrm>
+          <a:prstGeom prst="rect">
+            <a:avLst/>
+          </a:prstGeom>
+        </p:spPr>
+      </p:pic>
+      <p:sp>
+        <p:nvSpPr>
+          <p:cNvPr id="11" name="Rounded Rectangle 10"/>
+          <p:cNvSpPr/>
+          <p:nvPr/>
+        </p:nvSpPr>
+        <p:spPr>
+          <a:xfrm>
+            <a:off x="8001000" y="1508760"/>
+            <a:ext cx="3657600" cy="2240280"/>
+          </a:xfrm>
+          <a:prstGeom prst="roundRect">
+            <a:avLst/>
+          </a:prstGeom>
+          <a:solidFill>
+            <a:srgbClr val="FFFFFF"/>
+          </a:solidFill>
+          <a:ln w="8890">
+            <a:solidFill>
+              <a:srgbClr val="D6DEDE"/>
+            </a:solidFill>
+          </a:ln>
+        </p:spPr>
+        <p:style>
+          <a:lnRef idx="1">
+            <a:schemeClr val="accent1"/>
+          </a:lnRef>
+          <a:fillRef idx="3">
+            <a:schemeClr val="accent1"/>
+          </a:fillRef>
+          <a:effectRef idx="2">
+            <a:schemeClr val="accent1"/>
+          </a:effectRef>
+          <a:fontRef idx="minor">
+            <a:schemeClr val="lt1"/>
+          </a:fontRef>
+        </p:style>
+        <p:txBody>
+          <a:bodyPr rtlCol="0" anchor="ctr"/>
+          <a:lstStyle/>
+          <a:p>
+            <a:pPr algn="ctr"/>
+            <a:endParaRPr/>
+          </a:p>
+        </p:txBody>
+      </p:sp>
+      <p:pic>
+        <p:nvPicPr>
+          <p:cNvPr id="12" name="Picture 11" descr="gaussian_blur_sigma_psnr_graph.png"/>
+          <p:cNvPicPr>
+            <a:picLocks noChangeAspect="1"/>
+          </p:cNvPicPr>
+          <p:nvPr/>
+        </p:nvPicPr>
+        <p:blipFill>
+          <a:blip r:embed="rId4"/>
+          <a:stretch>
+            <a:fillRect/>
+          </a:stretch>
+        </p:blipFill>
+        <p:spPr>
+          <a:xfrm>
+            <a:off x="8001000" y="1612900"/>
+            <a:ext cx="3657600" cy="2032000"/>
+          </a:xfrm>
+          <a:prstGeom prst="rect">
+            <a:avLst/>
+          </a:prstGeom>
+        </p:spPr>
+      </p:pic>
+      <p:sp>
+        <p:nvSpPr>
+          <p:cNvPr id="13" name="TextBox 12"/>
+          <p:cNvSpPr txBox="1"/>
+          <p:nvPr/>
+        </p:nvSpPr>
+        <p:spPr>
+          <a:xfrm>
+            <a:off x="868680" y="4136658"/>
+            <a:ext cx="10424160" cy="731520"/>
+          </a:xfrm>
+          <a:prstGeom prst="rect">
+            <a:avLst/>
+          </a:prstGeom>
+          <a:noFill/>
+        </p:spPr>
+        <p:txBody>
+          <a:bodyPr wrap="square">
+            <a:spAutoFit/>
+          </a:bodyPr>
+          <a:lstStyle/>
+          <a:p>
+            <a:pPr>
+              <a:spcAft>
+                <a:spcPts val="800"/>
+              </a:spcAft>
+              <a:defRPr sz="1400">
+                <a:solidFill>
+                  <a:srgbClr val="182228"/>
+                </a:solidFill>
+                <a:latin typeface="Aptos"/>
+              </a:defRPr>
+            </a:pPr>
+            <a:r>
+              <a:rPr dirty="0"/>
+              <a:t>Main metric: PSNR. Restoration helps most when noise can be reduced without destroying structure. Severe salt-and-pepper is the hardest setting.</a:t>
+            </a:r>
+          </a:p>
+        </p:txBody>
+      </p:sp>
+      <p:sp>
+        <p:nvSpPr>
+          <p:cNvPr id="14" name="TextBox 13">
+            <a:extLst>
+              <a:ext uri="{FF2B5EF4-FFF2-40B4-BE49-F238E27FC236}">
+                <a16:creationId xmlns:a16="http://schemas.microsoft.com/office/drawing/2014/main" id="{D83512F5-C7CB-89E4-B85E-1DC52C38B301}"/>
+              </a:ext>
+            </a:extLst>
+          </p:cNvPr>
+          <p:cNvSpPr txBox="1"/>
+          <p:nvPr/>
+        </p:nvSpPr>
+        <p:spPr>
+          <a:xfrm>
+            <a:off x="1376885" y="4606558"/>
+            <a:ext cx="9201633" cy="2308324"/>
+          </a:xfrm>
+          <a:prstGeom prst="rect">
+            <a:avLst/>
+          </a:prstGeom>
+          <a:noFill/>
+        </p:spPr>
+        <p:txBody>
+          <a:bodyPr wrap="square" rtlCol="0">
+            <a:spAutoFit/>
+          </a:bodyPr>
+          <a:lstStyle/>
+          <a:p>
+            <a:r>
+              <a:rPr lang="he-IL" dirty="0"/>
+              <a:t>האהרה : בגלל טיב המשימה של הסופר </a:t>
+            </a:r>
+            <a:r>
+              <a:rPr lang="he-IL" dirty="0" err="1"/>
+              <a:t>רזלוציה</a:t>
+            </a:r>
+            <a:r>
+              <a:rPr lang="he-IL" dirty="0"/>
+              <a:t> אין היגיון בהשוואת התוצר הסופי לעומת התמונה המקורית כי הרעש משפיע באופן שונה על כל </a:t>
+            </a:r>
+            <a:r>
+              <a:rPr lang="he-IL" dirty="0" err="1"/>
+              <a:t>ץמונה</a:t>
+            </a:r>
+            <a:r>
+              <a:rPr lang="he-IL" dirty="0"/>
+              <a:t>, לכן בכל ניסוי התוצר הסופי מושווה לתמונה עם הרעש\עם </a:t>
+            </a:r>
+            <a:r>
+              <a:rPr lang="he-IL" dirty="0" err="1"/>
+              <a:t>הרסטורשין</a:t>
+            </a:r>
+            <a:r>
+              <a:rPr lang="he-IL" dirty="0"/>
+              <a:t>.</a:t>
+            </a:r>
+          </a:p>
+          <a:p>
+            <a:r>
+              <a:rPr lang="he-IL" dirty="0"/>
+              <a:t>בעקבות שינויים אלו קוראת תופעה מעניינת שבגלל רעש </a:t>
+            </a:r>
+            <a:r>
+              <a:rPr lang="he-IL" dirty="0" err="1"/>
+              <a:t>מסויים</a:t>
+            </a:r>
+            <a:r>
+              <a:rPr lang="he-IL" dirty="0"/>
+              <a:t>, ההקטנה פי 2 מאבדת פחות מידע.</a:t>
+            </a:r>
+          </a:p>
+          <a:p>
+            <a:r>
+              <a:rPr lang="he-IL" dirty="0"/>
+              <a:t>אתן </a:t>
+            </a:r>
+            <a:r>
+              <a:rPr lang="he-IL" dirty="0" err="1"/>
+              <a:t>דוכמה</a:t>
+            </a:r>
+            <a:r>
+              <a:rPr lang="he-IL" dirty="0"/>
+              <a:t>: אם אקח תמונה ואקח רעש קיצוני שהופך אותה ללבנה – ואז אחרי שאני מחלק ל2 ואז מחזיר אותה לתמונה המקורית , אני אקבל תמונה לבנה , כך שקיבלנו אותה תמונה ולא איבדנו מידע.</a:t>
+            </a:r>
+          </a:p>
+          <a:p>
+            <a:r>
+              <a:rPr lang="he-IL" dirty="0"/>
+              <a:t>אני יודע שזו לא </a:t>
+            </a:r>
+            <a:r>
+              <a:rPr lang="he-IL" dirty="0" err="1"/>
+              <a:t>היתה</a:t>
+            </a:r>
+            <a:r>
+              <a:rPr lang="he-IL" dirty="0"/>
+              <a:t> המטרה של העבודה אך לצערי סופר </a:t>
+            </a:r>
+            <a:r>
+              <a:rPr lang="he-IL" dirty="0" err="1"/>
+              <a:t>רזלושין</a:t>
+            </a:r>
+            <a:r>
+              <a:rPr lang="he-IL" dirty="0"/>
+              <a:t> היא </a:t>
+            </a:r>
+            <a:r>
+              <a:rPr lang="he-IL" dirty="0" err="1"/>
+              <a:t>לוא</a:t>
+            </a:r>
+            <a:r>
+              <a:rPr lang="he-IL" dirty="0"/>
+              <a:t> לבלב </a:t>
+            </a:r>
+            <a:r>
+              <a:rPr lang="he-IL" dirty="0" err="1"/>
+              <a:t>טסק</a:t>
+            </a:r>
+            <a:r>
+              <a:rPr lang="he-IL" dirty="0"/>
+              <a:t> היחיד שמתאים לדאטה</a:t>
+            </a:r>
+            <a:endParaRPr lang="en-IL" dirty="0"/>
+          </a:p>
+        </p:txBody>
+      </p:sp>
+    </p:spTree>
+  </p:cSld>
+  <p:clrMapOvr>
+    <a:masterClrMapping/>
+  </p:clrMapOvr>
+</p:sld>
+</file>
+
+<file path=ppt/slides/slide11.xml><?xml version="1.0" encoding="utf-8"?>
+<p:sld xmlns:a="http://schemas.openxmlformats.org/drawingml/2006/main" xmlns:r="http://schemas.openxmlformats.org/officeDocument/2006/relationships" xmlns:p="http://schemas.openxmlformats.org/presentationml/2006/main">
+  <p:cSld>
+    <p:bg>
+      <p:bgPr>
+        <a:solidFill>
           <a:srgbClr val="1B262C"/>
         </a:solidFill>
         <a:effectLst/>
@@ -3835,595 +4425,6 @@
             </a:pPr>
             <a:r>
               <a:t>Classify Data 1 images as tumor or no_tumor, then test robustness.</a:t>
-            </a:r>
-          </a:p>
-        </p:txBody>
-      </p:sp>
-    </p:spTree>
-  </p:cSld>
-  <p:clrMapOvr>
-    <a:masterClrMapping/>
-  </p:clrMapOvr>
-</p:sld>
-</file>
-
-<file path=ppt/slides/slide11.xml><?xml version="1.0" encoding="utf-8"?>
-<p:sld xmlns:a="http://schemas.openxmlformats.org/drawingml/2006/main" xmlns:r="http://schemas.openxmlformats.org/officeDocument/2006/relationships" xmlns:p="http://schemas.openxmlformats.org/presentationml/2006/main">
-  <p:cSld>
-    <p:bg>
-      <p:bgPr>
-        <a:solidFill>
-          <a:srgbClr val="F7F9F7"/>
-        </a:solidFill>
-        <a:effectLst/>
-      </p:bgPr>
-    </p:bg>
-    <p:spTree>
-      <p:nvGrpSpPr>
-        <p:cNvPr id="1" name=""/>
-        <p:cNvGrpSpPr/>
-        <p:nvPr/>
-      </p:nvGrpSpPr>
-      <p:grpSpPr>
-        <a:xfrm>
-          <a:off x="0" y="0"/>
-          <a:ext cx="0" cy="0"/>
-          <a:chOff x="0" y="0"/>
-          <a:chExt cx="0" cy="0"/>
-        </a:xfrm>
-      </p:grpSpPr>
-      <p:sp>
-        <p:nvSpPr>
-          <p:cNvPr id="2" name="TextBox 1"/>
-          <p:cNvSpPr txBox="1"/>
-          <p:nvPr/>
-        </p:nvSpPr>
-        <p:spPr>
-          <a:xfrm>
-            <a:off x="502920" y="320040"/>
-            <a:ext cx="4572000" cy="256032"/>
-          </a:xfrm>
-          <a:prstGeom prst="rect">
-            <a:avLst/>
-          </a:prstGeom>
-          <a:noFill/>
-        </p:spPr>
-        <p:txBody>
-          <a:bodyPr wrap="none" lIns="18288" tIns="9144" rIns="18288" bIns="9144">
-            <a:spAutoFit/>
-          </a:bodyPr>
-          <a:lstStyle/>
-          <a:p>
-            <a:pPr>
-              <a:defRPr sz="900" b="1">
-                <a:solidFill>
-                  <a:srgbClr val="008074"/>
-                </a:solidFill>
-                <a:latin typeface="Aptos"/>
-              </a:defRPr>
-            </a:pPr>
-            <a:r>
-              <a:t>TASK 2 | BASIC CNN</a:t>
-            </a:r>
-          </a:p>
-        </p:txBody>
-      </p:sp>
-      <p:sp>
-        <p:nvSpPr>
-          <p:cNvPr id="3" name="TextBox 2"/>
-          <p:cNvSpPr txBox="1"/>
-          <p:nvPr/>
-        </p:nvSpPr>
-        <p:spPr>
-          <a:xfrm>
-            <a:off x="502920" y="640080"/>
-            <a:ext cx="8961120" cy="603504"/>
-          </a:xfrm>
-          <a:prstGeom prst="rect">
-            <a:avLst/>
-          </a:prstGeom>
-          <a:noFill/>
-        </p:spPr>
-        <p:txBody>
-          <a:bodyPr wrap="none" lIns="18288" tIns="9144" rIns="18288" bIns="9144">
-            <a:spAutoFit/>
-          </a:bodyPr>
-          <a:lstStyle/>
-          <a:p>
-            <a:pPr>
-              <a:defRPr sz="2400" b="1">
-                <a:solidFill>
-                  <a:srgbClr val="182228"/>
-                </a:solidFill>
-                <a:latin typeface="Aptos"/>
-              </a:defRPr>
-            </a:pPr>
-            <a:r>
-              <a:t>The basic CNN reaches 78.95% accuracy on clean Data 1 test images.</a:t>
-            </a:r>
-          </a:p>
-        </p:txBody>
-      </p:sp>
-      <p:sp>
-        <p:nvSpPr>
-          <p:cNvPr id="4" name="TextBox 3"/>
-          <p:cNvSpPr txBox="1"/>
-          <p:nvPr/>
-        </p:nvSpPr>
-        <p:spPr>
-          <a:xfrm>
-            <a:off x="521207" y="1225296"/>
-            <a:ext cx="9052560" cy="292608"/>
-          </a:xfrm>
-          <a:prstGeom prst="rect">
-            <a:avLst/>
-          </a:prstGeom>
-          <a:noFill/>
-        </p:spPr>
-        <p:txBody>
-          <a:bodyPr wrap="none" lIns="18288" tIns="9144" rIns="18288" bIns="9144">
-            <a:spAutoFit/>
-          </a:bodyPr>
-          <a:lstStyle/>
-          <a:p>
-            <a:pPr>
-              <a:defRPr sz="1050" b="0">
-                <a:solidFill>
-                  <a:srgbClr val="56636B"/>
-                </a:solidFill>
-                <a:latin typeface="Aptos"/>
-              </a:defRPr>
-            </a:pPr>
-            <a:r>
-              <a:t>The confusion matrix shows actual labels as rows and predicted labels as columns.</a:t>
-            </a:r>
-          </a:p>
-        </p:txBody>
-      </p:sp>
-      <p:sp>
-        <p:nvSpPr>
-          <p:cNvPr id="5" name="TextBox 4"/>
-          <p:cNvSpPr txBox="1"/>
-          <p:nvPr/>
-        </p:nvSpPr>
-        <p:spPr>
-          <a:xfrm>
-            <a:off x="9692640" y="347472"/>
-            <a:ext cx="1920240" cy="228600"/>
-          </a:xfrm>
-          <a:prstGeom prst="rect">
-            <a:avLst/>
-          </a:prstGeom>
-          <a:noFill/>
-        </p:spPr>
-        <p:txBody>
-          <a:bodyPr wrap="none" lIns="18288" tIns="9144" rIns="18288" bIns="9144">
-            <a:spAutoFit/>
-          </a:bodyPr>
-          <a:lstStyle/>
-          <a:p>
-            <a:pPr algn="r">
-              <a:defRPr sz="850" b="0">
-                <a:solidFill>
-                  <a:srgbClr val="56636B"/>
-                </a:solidFill>
-                <a:latin typeface="Aptos"/>
-              </a:defRPr>
-            </a:pPr>
-            <a:r>
-              <a:t>Brain MRI robustness</a:t>
-            </a:r>
-          </a:p>
-        </p:txBody>
-      </p:sp>
-      <p:sp>
-        <p:nvSpPr>
-          <p:cNvPr id="6" name="TextBox 5"/>
-          <p:cNvSpPr txBox="1"/>
-          <p:nvPr/>
-        </p:nvSpPr>
-        <p:spPr>
-          <a:xfrm>
-            <a:off x="11292840" y="6446520"/>
-            <a:ext cx="411480" cy="182880"/>
-          </a:xfrm>
-          <a:prstGeom prst="rect">
-            <a:avLst/>
-          </a:prstGeom>
-          <a:noFill/>
-        </p:spPr>
-        <p:txBody>
-          <a:bodyPr wrap="none" lIns="18288" tIns="9144" rIns="18288" bIns="9144">
-            <a:spAutoFit/>
-          </a:bodyPr>
-          <a:lstStyle/>
-          <a:p>
-            <a:pPr algn="r">
-              <a:defRPr sz="800" b="0">
-                <a:solidFill>
-                  <a:srgbClr val="56636B"/>
-                </a:solidFill>
-                <a:latin typeface="Aptos"/>
-              </a:defRPr>
-            </a:pPr>
-            <a:r>
-              <a:t>11</a:t>
-            </a:r>
-          </a:p>
-        </p:txBody>
-      </p:sp>
-      <p:sp>
-        <p:nvSpPr>
-          <p:cNvPr id="7" name="Rounded Rectangle 6"/>
-          <p:cNvSpPr/>
-          <p:nvPr/>
-        </p:nvSpPr>
-        <p:spPr>
-          <a:xfrm>
-            <a:off x="868680" y="1691640"/>
-            <a:ext cx="3840480" cy="3291840"/>
-          </a:xfrm>
-          <a:prstGeom prst="roundRect">
-            <a:avLst/>
-          </a:prstGeom>
-          <a:solidFill>
-            <a:srgbClr val="FFFFFF"/>
-          </a:solidFill>
-          <a:ln w="8890">
-            <a:solidFill>
-              <a:srgbClr val="D6DEDE"/>
-            </a:solidFill>
-          </a:ln>
-        </p:spPr>
-        <p:style>
-          <a:lnRef idx="1">
-            <a:schemeClr val="accent1"/>
-          </a:lnRef>
-          <a:fillRef idx="3">
-            <a:schemeClr val="accent1"/>
-          </a:fillRef>
-          <a:effectRef idx="2">
-            <a:schemeClr val="accent1"/>
-          </a:effectRef>
-          <a:fontRef idx="minor">
-            <a:schemeClr val="lt1"/>
-          </a:fontRef>
-        </p:style>
-        <p:txBody>
-          <a:bodyPr rtlCol="0" anchor="ctr"/>
-          <a:lstStyle/>
-          <a:p>
-            <a:pPr algn="ctr"/>
-            <a:endParaRPr/>
-          </a:p>
-        </p:txBody>
-      </p:sp>
-      <p:pic>
-        <p:nvPicPr>
-          <p:cNvPr id="8" name="Picture 7" descr="confusion_matrix.png"/>
-          <p:cNvPicPr>
-            <a:picLocks noChangeAspect="1"/>
-          </p:cNvPicPr>
-          <p:nvPr/>
-        </p:nvPicPr>
-        <p:blipFill>
-          <a:blip r:embed="rId2"/>
-          <a:stretch>
-            <a:fillRect/>
-          </a:stretch>
-        </p:blipFill>
-        <p:spPr>
-          <a:xfrm>
-            <a:off x="868680" y="1801368"/>
-            <a:ext cx="3840480" cy="3072384"/>
-          </a:xfrm>
-          <a:prstGeom prst="rect">
-            <a:avLst/>
-          </a:prstGeom>
-        </p:spPr>
-      </p:pic>
-      <p:sp>
-        <p:nvSpPr>
-          <p:cNvPr id="9" name="Rounded Rectangle 8"/>
-          <p:cNvSpPr/>
-          <p:nvPr/>
-        </p:nvSpPr>
-        <p:spPr>
-          <a:xfrm>
-            <a:off x="5577840" y="1691640"/>
-            <a:ext cx="5166360" cy="3291840"/>
-          </a:xfrm>
-          <a:prstGeom prst="roundRect">
-            <a:avLst/>
-          </a:prstGeom>
-          <a:solidFill>
-            <a:srgbClr val="FFFFFF"/>
-          </a:solidFill>
-          <a:ln w="8890">
-            <a:solidFill>
-              <a:srgbClr val="D6DEDE"/>
-            </a:solidFill>
-          </a:ln>
-        </p:spPr>
-        <p:style>
-          <a:lnRef idx="1">
-            <a:schemeClr val="accent1"/>
-          </a:lnRef>
-          <a:fillRef idx="3">
-            <a:schemeClr val="accent1"/>
-          </a:fillRef>
-          <a:effectRef idx="2">
-            <a:schemeClr val="accent1"/>
-          </a:effectRef>
-          <a:fontRef idx="minor">
-            <a:schemeClr val="lt1"/>
-          </a:fontRef>
-        </p:style>
-        <p:txBody>
-          <a:bodyPr rtlCol="0" anchor="ctr"/>
-          <a:lstStyle/>
-          <a:p>
-            <a:pPr algn="ctr"/>
-            <a:endParaRPr/>
-          </a:p>
-        </p:txBody>
-      </p:sp>
-      <p:pic>
-        <p:nvPicPr>
-          <p:cNvPr id="10" name="Picture 9" descr="training_history.png"/>
-          <p:cNvPicPr>
-            <a:picLocks noChangeAspect="1"/>
-          </p:cNvPicPr>
-          <p:nvPr/>
-        </p:nvPicPr>
-        <p:blipFill>
-          <a:blip r:embed="rId3"/>
-          <a:stretch>
-            <a:fillRect/>
-          </a:stretch>
-        </p:blipFill>
-        <p:spPr>
-          <a:xfrm>
-            <a:off x="5577840" y="2304288"/>
-            <a:ext cx="5166360" cy="2066544"/>
-          </a:xfrm>
-          <a:prstGeom prst="rect">
-            <a:avLst/>
-          </a:prstGeom>
-        </p:spPr>
-      </p:pic>
-      <p:sp>
-        <p:nvSpPr>
-          <p:cNvPr id="11" name="Rounded Rectangle 10"/>
-          <p:cNvSpPr/>
-          <p:nvPr/>
-        </p:nvSpPr>
-        <p:spPr>
-          <a:xfrm>
-            <a:off x="1005840" y="5394960"/>
-            <a:ext cx="2240280" cy="914400"/>
-          </a:xfrm>
-          <a:prstGeom prst="roundRect">
-            <a:avLst/>
-          </a:prstGeom>
-          <a:solidFill>
-            <a:srgbClr val="FAFCFC"/>
-          </a:solidFill>
-          <a:ln w="8890">
-            <a:solidFill>
-              <a:srgbClr val="D2DBDB"/>
-            </a:solidFill>
-          </a:ln>
-        </p:spPr>
-        <p:style>
-          <a:lnRef idx="1">
-            <a:schemeClr val="accent1"/>
-          </a:lnRef>
-          <a:fillRef idx="3">
-            <a:schemeClr val="accent1"/>
-          </a:fillRef>
-          <a:effectRef idx="2">
-            <a:schemeClr val="accent1"/>
-          </a:effectRef>
-          <a:fontRef idx="minor">
-            <a:schemeClr val="lt1"/>
-          </a:fontRef>
-        </p:style>
-        <p:txBody>
-          <a:bodyPr rtlCol="0" anchor="ctr"/>
-          <a:lstStyle/>
-          <a:p>
-            <a:pPr algn="ctr"/>
-            <a:endParaRPr/>
-          </a:p>
-        </p:txBody>
-      </p:sp>
-      <p:sp>
-        <p:nvSpPr>
-          <p:cNvPr id="12" name="TextBox 11"/>
-          <p:cNvSpPr txBox="1"/>
-          <p:nvPr/>
-        </p:nvSpPr>
-        <p:spPr>
-          <a:xfrm>
-            <a:off x="1170432" y="5504688"/>
-            <a:ext cx="1874519" cy="320040"/>
-          </a:xfrm>
-          <a:prstGeom prst="rect">
-            <a:avLst/>
-          </a:prstGeom>
-          <a:noFill/>
-        </p:spPr>
-        <p:txBody>
-          <a:bodyPr wrap="none" lIns="18288" tIns="9144" rIns="18288" bIns="9144">
-            <a:spAutoFit/>
-          </a:bodyPr>
-          <a:lstStyle/>
-          <a:p>
-            <a:pPr>
-              <a:defRPr sz="2100" b="1">
-                <a:solidFill>
-                  <a:srgbClr val="2666AC"/>
-                </a:solidFill>
-                <a:latin typeface="Aptos"/>
-              </a:defRPr>
-            </a:pPr>
-            <a:r>
-              <a:t>78.95%</a:t>
-            </a:r>
-          </a:p>
-        </p:txBody>
-      </p:sp>
-      <p:sp>
-        <p:nvSpPr>
-          <p:cNvPr id="13" name="TextBox 12"/>
-          <p:cNvSpPr txBox="1"/>
-          <p:nvPr/>
-        </p:nvSpPr>
-        <p:spPr>
-          <a:xfrm>
-            <a:off x="1170432" y="5925312"/>
-            <a:ext cx="1901952" cy="228600"/>
-          </a:xfrm>
-          <a:prstGeom prst="rect">
-            <a:avLst/>
-          </a:prstGeom>
-          <a:noFill/>
-        </p:spPr>
-        <p:txBody>
-          <a:bodyPr wrap="none" lIns="18288" tIns="9144" rIns="18288" bIns="9144">
-            <a:spAutoFit/>
-          </a:bodyPr>
-          <a:lstStyle/>
-          <a:p>
-            <a:pPr>
-              <a:defRPr sz="850" b="0">
-                <a:solidFill>
-                  <a:srgbClr val="56636B"/>
-                </a:solidFill>
-                <a:latin typeface="Aptos"/>
-              </a:defRPr>
-            </a:pPr>
-            <a:r>
-              <a:t>Basic CNN test accuracy</a:t>
-            </a:r>
-          </a:p>
-        </p:txBody>
-      </p:sp>
-      <p:sp>
-        <p:nvSpPr>
-          <p:cNvPr id="14" name="Rounded Rectangle 13"/>
-          <p:cNvSpPr/>
-          <p:nvPr/>
-        </p:nvSpPr>
-        <p:spPr>
-          <a:xfrm>
-            <a:off x="3566160" y="5394960"/>
-            <a:ext cx="2240280" cy="914400"/>
-          </a:xfrm>
-          <a:prstGeom prst="roundRect">
-            <a:avLst/>
-          </a:prstGeom>
-          <a:solidFill>
-            <a:srgbClr val="FAFCFC"/>
-          </a:solidFill>
-          <a:ln w="8890">
-            <a:solidFill>
-              <a:srgbClr val="D2DBDB"/>
-            </a:solidFill>
-          </a:ln>
-        </p:spPr>
-        <p:style>
-          <a:lnRef idx="1">
-            <a:schemeClr val="accent1"/>
-          </a:lnRef>
-          <a:fillRef idx="3">
-            <a:schemeClr val="accent1"/>
-          </a:fillRef>
-          <a:effectRef idx="2">
-            <a:schemeClr val="accent1"/>
-          </a:effectRef>
-          <a:fontRef idx="minor">
-            <a:schemeClr val="lt1"/>
-          </a:fontRef>
-        </p:style>
-        <p:txBody>
-          <a:bodyPr rtlCol="0" anchor="ctr"/>
-          <a:lstStyle/>
-          <a:p>
-            <a:pPr algn="ctr"/>
-            <a:endParaRPr/>
-          </a:p>
-        </p:txBody>
-      </p:sp>
-      <p:sp>
-        <p:nvSpPr>
-          <p:cNvPr id="15" name="TextBox 14"/>
-          <p:cNvSpPr txBox="1"/>
-          <p:nvPr/>
-        </p:nvSpPr>
-        <p:spPr>
-          <a:xfrm>
-            <a:off x="3730752" y="5504688"/>
-            <a:ext cx="1874519" cy="320040"/>
-          </a:xfrm>
-          <a:prstGeom prst="rect">
-            <a:avLst/>
-          </a:prstGeom>
-          <a:noFill/>
-        </p:spPr>
-        <p:txBody>
-          <a:bodyPr wrap="none" lIns="18288" tIns="9144" rIns="18288" bIns="9144">
-            <a:spAutoFit/>
-          </a:bodyPr>
-          <a:lstStyle/>
-          <a:p>
-            <a:pPr>
-              <a:defRPr sz="2100" b="1">
-                <a:solidFill>
-                  <a:srgbClr val="008074"/>
-                </a:solidFill>
-                <a:latin typeface="Aptos"/>
-              </a:defRPr>
-            </a:pPr>
-            <a:r>
-              <a:t>38</a:t>
-            </a:r>
-          </a:p>
-        </p:txBody>
-      </p:sp>
-      <p:sp>
-        <p:nvSpPr>
-          <p:cNvPr id="16" name="TextBox 15"/>
-          <p:cNvSpPr txBox="1"/>
-          <p:nvPr/>
-        </p:nvSpPr>
-        <p:spPr>
-          <a:xfrm>
-            <a:off x="3730752" y="5925312"/>
-            <a:ext cx="1901952" cy="228600"/>
-          </a:xfrm>
-          <a:prstGeom prst="rect">
-            <a:avLst/>
-          </a:prstGeom>
-          <a:noFill/>
-        </p:spPr>
-        <p:txBody>
-          <a:bodyPr wrap="none" lIns="18288" tIns="9144" rIns="18288" bIns="9144">
-            <a:spAutoFit/>
-          </a:bodyPr>
-          <a:lstStyle/>
-          <a:p>
-            <a:pPr>
-              <a:defRPr sz="850" b="0">
-                <a:solidFill>
-                  <a:srgbClr val="56636B"/>
-                </a:solidFill>
-                <a:latin typeface="Aptos"/>
-              </a:defRPr>
-            </a:pPr>
-            <a:r>
-              <a:t>test images</a:t>
             </a:r>
           </a:p>
         </p:txBody>
@@ -4492,8 +4493,7 @@
               </a:defRPr>
             </a:pPr>
             <a:r>
-              <a:rPr dirty="0"/>
-              <a:t>TASK 2 | AUGMENTATION</a:t>
+              <a:t>TASK 2 | BASIC CNN</a:t>
             </a:r>
           </a:p>
         </p:txBody>
@@ -4507,7 +4507,7 @@
         <p:spPr>
           <a:xfrm>
             <a:off x="502920" y="640080"/>
-            <a:ext cx="10745827" cy="387798"/>
+            <a:ext cx="8961120" cy="603504"/>
           </a:xfrm>
           <a:prstGeom prst="rect">
             <a:avLst/>
@@ -4529,12 +4529,7 @@
               </a:defRPr>
             </a:pPr>
             <a:r>
-              <a:rPr lang="en-US" dirty="0"/>
-              <a:t>Extra: </a:t>
-            </a:r>
-            <a:r>
-              <a:rPr dirty="0"/>
-              <a:t>Rotation augmentation improved the CNN, but only by a small amount.</a:t>
+              <a:t>The basic CNN reaches 78.95% accuracy on clean Data 1 test images.</a:t>
             </a:r>
           </a:p>
         </p:txBody>
@@ -4570,7 +4565,7 @@
               </a:defRPr>
             </a:pPr>
             <a:r>
-              <a:t>Because the dataset is small, augmentation adds examples; changing head position did not create a large gain.</a:t>
+              <a:t>The confusion matrix shows actual labels as rows and predicted labels as columns.</a:t>
             </a:r>
           </a:p>
         </p:txBody>
@@ -4642,7 +4637,7 @@
               </a:defRPr>
             </a:pPr>
             <a:r>
-              <a:t>12</a:t>
+              <a:t>11</a:t>
             </a:r>
           </a:p>
         </p:txBody>
@@ -4655,8 +4650,8 @@
         </p:nvSpPr>
         <p:spPr>
           <a:xfrm>
-            <a:off x="731520" y="1691640"/>
-            <a:ext cx="3337560" cy="2834640"/>
+            <a:off x="868680" y="1691640"/>
+            <a:ext cx="3840480" cy="3291840"/>
           </a:xfrm>
           <a:prstGeom prst="roundRect">
             <a:avLst/>
@@ -4709,8 +4704,8 @@
         </p:blipFill>
         <p:spPr>
           <a:xfrm>
-            <a:off x="731520" y="1773936"/>
-            <a:ext cx="3337560" cy="2670048"/>
+            <a:off x="868680" y="1801368"/>
+            <a:ext cx="3840480" cy="3072384"/>
           </a:xfrm>
           <a:prstGeom prst="rect">
             <a:avLst/>
@@ -4725,8 +4720,8 @@
         </p:nvSpPr>
         <p:spPr>
           <a:xfrm>
-            <a:off x="4617720" y="1874519"/>
-            <a:ext cx="2011680" cy="1920240"/>
+            <a:off x="5577840" y="1691640"/>
+            <a:ext cx="5166360" cy="3291840"/>
           </a:xfrm>
           <a:prstGeom prst="roundRect">
             <a:avLst/>
@@ -4765,7 +4760,7 @@
       </p:sp>
       <p:pic>
         <p:nvPicPr>
-          <p:cNvPr id="10" name="Picture 9" descr="task2_cnn_original_example.jpg"/>
+          <p:cNvPr id="10" name="Picture 9" descr="training_history.png"/>
           <p:cNvPicPr>
             <a:picLocks noChangeAspect="1"/>
           </p:cNvPicPr>
@@ -4779,8 +4774,8 @@
         </p:blipFill>
         <p:spPr>
           <a:xfrm>
-            <a:off x="4663440" y="1874519"/>
-            <a:ext cx="1920240" cy="1920240"/>
+            <a:off x="5577840" y="2304288"/>
+            <a:ext cx="5166360" cy="2066544"/>
           </a:xfrm>
           <a:prstGeom prst="rect">
             <a:avLst/>
@@ -4795,77 +4790,7 @@
         </p:nvSpPr>
         <p:spPr>
           <a:xfrm>
-            <a:off x="6903720" y="1874519"/>
-            <a:ext cx="2011680" cy="1920240"/>
-          </a:xfrm>
-          <a:prstGeom prst="roundRect">
-            <a:avLst/>
-          </a:prstGeom>
-          <a:solidFill>
-            <a:srgbClr val="FFFFFF"/>
-          </a:solidFill>
-          <a:ln w="8890">
-            <a:solidFill>
-              <a:srgbClr val="D6DEDE"/>
-            </a:solidFill>
-          </a:ln>
-        </p:spPr>
-        <p:style>
-          <a:lnRef idx="1">
-            <a:schemeClr val="accent1"/>
-          </a:lnRef>
-          <a:fillRef idx="3">
-            <a:schemeClr val="accent1"/>
-          </a:fillRef>
-          <a:effectRef idx="2">
-            <a:schemeClr val="accent1"/>
-          </a:effectRef>
-          <a:fontRef idx="minor">
-            <a:schemeClr val="lt1"/>
-          </a:fontRef>
-        </p:style>
-        <p:txBody>
-          <a:bodyPr rtlCol="0" anchor="ctr"/>
-          <a:lstStyle/>
-          <a:p>
-            <a:pPr algn="ctr"/>
-            <a:endParaRPr/>
-          </a:p>
-        </p:txBody>
-      </p:sp>
-      <p:pic>
-        <p:nvPicPr>
-          <p:cNvPr id="12" name="Picture 11" descr="task2_cnn_augmented_rot20_example.jpg"/>
-          <p:cNvPicPr>
-            <a:picLocks noChangeAspect="1"/>
-          </p:cNvPicPr>
-          <p:nvPr/>
-        </p:nvPicPr>
-        <p:blipFill>
-          <a:blip r:embed="rId4"/>
-          <a:stretch>
-            <a:fillRect/>
-          </a:stretch>
-        </p:blipFill>
-        <p:spPr>
-          <a:xfrm>
-            <a:off x="6949440" y="1874519"/>
-            <a:ext cx="1920240" cy="1920240"/>
-          </a:xfrm>
-          <a:prstGeom prst="rect">
-            <a:avLst/>
-          </a:prstGeom>
-        </p:spPr>
-      </p:pic>
-      <p:sp>
-        <p:nvSpPr>
-          <p:cNvPr id="13" name="Rounded Rectangle 12"/>
-          <p:cNvSpPr/>
-          <p:nvPr/>
-        </p:nvSpPr>
-        <p:spPr>
-          <a:xfrm>
-            <a:off x="9326880" y="1920240"/>
+            <a:off x="1005840" y="5394960"/>
             <a:ext cx="2240280" cy="914400"/>
           </a:xfrm>
           <a:prstGeom prst="roundRect">
@@ -4905,13 +4830,13 @@
       </p:sp>
       <p:sp>
         <p:nvSpPr>
-          <p:cNvPr id="14" name="TextBox 13"/>
-          <p:cNvSpPr txBox="1"/>
-          <p:nvPr/>
-        </p:nvSpPr>
-        <p:spPr>
-          <a:xfrm>
-            <a:off x="9491472" y="2029968"/>
+          <p:cNvPr id="12" name="TextBox 11"/>
+          <p:cNvSpPr txBox="1"/>
+          <p:nvPr/>
+        </p:nvSpPr>
+        <p:spPr>
+          <a:xfrm>
+            <a:off x="1170432" y="5504688"/>
             <a:ext cx="1874519" cy="320040"/>
           </a:xfrm>
           <a:prstGeom prst="rect">
@@ -4928,26 +4853,26 @@
             <a:pPr>
               <a:defRPr sz="2100" b="1">
                 <a:solidFill>
-                  <a:srgbClr val="008074"/>
-                </a:solidFill>
-                <a:latin typeface="Aptos"/>
-              </a:defRPr>
-            </a:pPr>
-            <a:r>
-              <a:t>81.58%</a:t>
-            </a:r>
-          </a:p>
-        </p:txBody>
-      </p:sp>
-      <p:sp>
-        <p:nvSpPr>
-          <p:cNvPr id="15" name="TextBox 14"/>
-          <p:cNvSpPr txBox="1"/>
-          <p:nvPr/>
-        </p:nvSpPr>
-        <p:spPr>
-          <a:xfrm>
-            <a:off x="9491472" y="2450592"/>
+                  <a:srgbClr val="2666AC"/>
+                </a:solidFill>
+                <a:latin typeface="Aptos"/>
+              </a:defRPr>
+            </a:pPr>
+            <a:r>
+              <a:t>78.95%</a:t>
+            </a:r>
+          </a:p>
+        </p:txBody>
+      </p:sp>
+      <p:sp>
+        <p:nvSpPr>
+          <p:cNvPr id="13" name="TextBox 12"/>
+          <p:cNvSpPr txBox="1"/>
+          <p:nvPr/>
+        </p:nvSpPr>
+        <p:spPr>
+          <a:xfrm>
+            <a:off x="1170432" y="5925312"/>
             <a:ext cx="1901952" cy="228600"/>
           </a:xfrm>
           <a:prstGeom prst="rect">
@@ -4970,20 +4895,20 @@
               </a:defRPr>
             </a:pPr>
             <a:r>
-              <a:t>Augmented CNN accuracy</a:t>
-            </a:r>
-          </a:p>
-        </p:txBody>
-      </p:sp>
-      <p:sp>
-        <p:nvSpPr>
-          <p:cNvPr id="16" name="Rounded Rectangle 15"/>
+              <a:t>Basic CNN test accuracy</a:t>
+            </a:r>
+          </a:p>
+        </p:txBody>
+      </p:sp>
+      <p:sp>
+        <p:nvSpPr>
+          <p:cNvPr id="14" name="Rounded Rectangle 13"/>
           <p:cNvSpPr/>
           <p:nvPr/>
         </p:nvSpPr>
         <p:spPr>
           <a:xfrm>
-            <a:off x="9326880" y="3063240"/>
+            <a:off x="3566160" y="5394960"/>
             <a:ext cx="2240280" cy="914400"/>
           </a:xfrm>
           <a:prstGeom prst="roundRect">
@@ -5023,13 +4948,13 @@
       </p:sp>
       <p:sp>
         <p:nvSpPr>
-          <p:cNvPr id="17" name="TextBox 16"/>
-          <p:cNvSpPr txBox="1"/>
-          <p:nvPr/>
-        </p:nvSpPr>
-        <p:spPr>
-          <a:xfrm>
-            <a:off x="9491472" y="3172968"/>
+          <p:cNvPr id="15" name="TextBox 14"/>
+          <p:cNvSpPr txBox="1"/>
+          <p:nvPr/>
+        </p:nvSpPr>
+        <p:spPr>
+          <a:xfrm>
+            <a:off x="3730752" y="5504688"/>
             <a:ext cx="1874519" cy="320040"/>
           </a:xfrm>
           <a:prstGeom prst="rect">
@@ -5046,26 +4971,26 @@
             <a:pPr>
               <a:defRPr sz="2100" b="1">
                 <a:solidFill>
-                  <a:srgbClr val="B88630"/>
-                </a:solidFill>
-                <a:latin typeface="Aptos"/>
-              </a:defRPr>
-            </a:pPr>
-            <a:r>
-              <a:t>+2.63 pp</a:t>
-            </a:r>
-          </a:p>
-        </p:txBody>
-      </p:sp>
-      <p:sp>
-        <p:nvSpPr>
-          <p:cNvPr id="18" name="TextBox 17"/>
-          <p:cNvSpPr txBox="1"/>
-          <p:nvPr/>
-        </p:nvSpPr>
-        <p:spPr>
-          <a:xfrm>
-            <a:off x="9491472" y="3593592"/>
+                  <a:srgbClr val="008074"/>
+                </a:solidFill>
+                <a:latin typeface="Aptos"/>
+              </a:defRPr>
+            </a:pPr>
+            <a:r>
+              <a:t>38</a:t>
+            </a:r>
+          </a:p>
+        </p:txBody>
+      </p:sp>
+      <p:sp>
+        <p:nvSpPr>
+          <p:cNvPr id="16" name="TextBox 15"/>
+          <p:cNvSpPr txBox="1"/>
+          <p:nvPr/>
+        </p:nvSpPr>
+        <p:spPr>
+          <a:xfrm>
+            <a:off x="3730752" y="5925312"/>
             <a:ext cx="1901952" cy="228600"/>
           </a:xfrm>
           <a:prstGeom prst="rect">
@@ -5088,79 +5013,7 @@
               </a:defRPr>
             </a:pPr>
             <a:r>
-              <a:t>gain over basic CNN</a:t>
-            </a:r>
-          </a:p>
-        </p:txBody>
-      </p:sp>
-      <p:sp>
-        <p:nvSpPr>
-          <p:cNvPr id="19" name="TextBox 18"/>
-          <p:cNvSpPr txBox="1"/>
-          <p:nvPr/>
-        </p:nvSpPr>
-        <p:spPr>
-          <a:xfrm>
-            <a:off x="4892040" y="4160520"/>
-            <a:ext cx="1463040" cy="228600"/>
-          </a:xfrm>
-          <a:prstGeom prst="rect">
-            <a:avLst/>
-          </a:prstGeom>
-          <a:noFill/>
-        </p:spPr>
-        <p:txBody>
-          <a:bodyPr wrap="none" lIns="18288" tIns="9144" rIns="18288" bIns="9144">
-            <a:spAutoFit/>
-          </a:bodyPr>
-          <a:lstStyle/>
-          <a:p>
-            <a:pPr algn="ctr">
-              <a:defRPr sz="1200" b="1">
-                <a:solidFill>
-                  <a:srgbClr val="182228"/>
-                </a:solidFill>
-                <a:latin typeface="Aptos"/>
-              </a:defRPr>
-            </a:pPr>
-            <a:r>
-              <a:t>Original</a:t>
-            </a:r>
-          </a:p>
-        </p:txBody>
-      </p:sp>
-      <p:sp>
-        <p:nvSpPr>
-          <p:cNvPr id="20" name="TextBox 19"/>
-          <p:cNvSpPr txBox="1"/>
-          <p:nvPr/>
-        </p:nvSpPr>
-        <p:spPr>
-          <a:xfrm>
-            <a:off x="7132320" y="4160520"/>
-            <a:ext cx="1645920" cy="228600"/>
-          </a:xfrm>
-          <a:prstGeom prst="rect">
-            <a:avLst/>
-          </a:prstGeom>
-          <a:noFill/>
-        </p:spPr>
-        <p:txBody>
-          <a:bodyPr wrap="none" lIns="18288" tIns="9144" rIns="18288" bIns="9144">
-            <a:spAutoFit/>
-          </a:bodyPr>
-          <a:lstStyle/>
-          <a:p>
-            <a:pPr algn="ctr">
-              <a:defRPr sz="1200" b="1">
-                <a:solidFill>
-                  <a:srgbClr val="182228"/>
-                </a:solidFill>
-                <a:latin typeface="Aptos"/>
-              </a:defRPr>
-            </a:pPr>
-            <a:r>
-              <a:t>Augmented</a:t>
+              <a:t>test images</a:t>
             </a:r>
           </a:p>
         </p:txBody>
@@ -5174,6 +5027,743 @@
 </file>
 
 <file path=ppt/slides/slide13.xml><?xml version="1.0" encoding="utf-8"?>
+<p:sld xmlns:a="http://schemas.openxmlformats.org/drawingml/2006/main" xmlns:r="http://schemas.openxmlformats.org/officeDocument/2006/relationships" xmlns:p="http://schemas.openxmlformats.org/presentationml/2006/main">
+  <p:cSld>
+    <p:bg>
+      <p:bgPr>
+        <a:solidFill>
+          <a:srgbClr val="F7F9F7"/>
+        </a:solidFill>
+        <a:effectLst/>
+      </p:bgPr>
+    </p:bg>
+    <p:spTree>
+      <p:nvGrpSpPr>
+        <p:cNvPr id="1" name=""/>
+        <p:cNvGrpSpPr/>
+        <p:nvPr/>
+      </p:nvGrpSpPr>
+      <p:grpSpPr>
+        <a:xfrm>
+          <a:off x="0" y="0"/>
+          <a:ext cx="0" cy="0"/>
+          <a:chOff x="0" y="0"/>
+          <a:chExt cx="0" cy="0"/>
+        </a:xfrm>
+      </p:grpSpPr>
+      <p:sp>
+        <p:nvSpPr>
+          <p:cNvPr id="2" name="TextBox 1"/>
+          <p:cNvSpPr txBox="1"/>
+          <p:nvPr/>
+        </p:nvSpPr>
+        <p:spPr>
+          <a:xfrm>
+            <a:off x="502920" y="320040"/>
+            <a:ext cx="4572000" cy="256032"/>
+          </a:xfrm>
+          <a:prstGeom prst="rect">
+            <a:avLst/>
+          </a:prstGeom>
+          <a:noFill/>
+        </p:spPr>
+        <p:txBody>
+          <a:bodyPr wrap="none" lIns="18288" tIns="9144" rIns="18288" bIns="9144">
+            <a:spAutoFit/>
+          </a:bodyPr>
+          <a:lstStyle/>
+          <a:p>
+            <a:pPr>
+              <a:defRPr sz="900" b="1">
+                <a:solidFill>
+                  <a:srgbClr val="008074"/>
+                </a:solidFill>
+                <a:latin typeface="Aptos"/>
+              </a:defRPr>
+            </a:pPr>
+            <a:r>
+              <a:rPr dirty="0"/>
+              <a:t>TASK 2 | AUGMENTATION</a:t>
+            </a:r>
+          </a:p>
+        </p:txBody>
+      </p:sp>
+      <p:sp>
+        <p:nvSpPr>
+          <p:cNvPr id="3" name="TextBox 2"/>
+          <p:cNvSpPr txBox="1"/>
+          <p:nvPr/>
+        </p:nvSpPr>
+        <p:spPr>
+          <a:xfrm>
+            <a:off x="502920" y="640080"/>
+            <a:ext cx="10745827" cy="387798"/>
+          </a:xfrm>
+          <a:prstGeom prst="rect">
+            <a:avLst/>
+          </a:prstGeom>
+          <a:noFill/>
+        </p:spPr>
+        <p:txBody>
+          <a:bodyPr wrap="none" lIns="18288" tIns="9144" rIns="18288" bIns="9144">
+            <a:spAutoFit/>
+          </a:bodyPr>
+          <a:lstStyle/>
+          <a:p>
+            <a:pPr>
+              <a:defRPr sz="2400" b="1">
+                <a:solidFill>
+                  <a:srgbClr val="182228"/>
+                </a:solidFill>
+                <a:latin typeface="Aptos"/>
+              </a:defRPr>
+            </a:pPr>
+            <a:r>
+              <a:rPr lang="en-US" dirty="0"/>
+              <a:t>Extra: </a:t>
+            </a:r>
+            <a:r>
+              <a:rPr dirty="0"/>
+              <a:t>Rotation augmentation improved the CNN, but only by a small amount.</a:t>
+            </a:r>
+          </a:p>
+        </p:txBody>
+      </p:sp>
+      <p:sp>
+        <p:nvSpPr>
+          <p:cNvPr id="4" name="TextBox 3"/>
+          <p:cNvSpPr txBox="1"/>
+          <p:nvPr/>
+        </p:nvSpPr>
+        <p:spPr>
+          <a:xfrm>
+            <a:off x="521207" y="1225296"/>
+            <a:ext cx="9052560" cy="292608"/>
+          </a:xfrm>
+          <a:prstGeom prst="rect">
+            <a:avLst/>
+          </a:prstGeom>
+          <a:noFill/>
+        </p:spPr>
+        <p:txBody>
+          <a:bodyPr wrap="none" lIns="18288" tIns="9144" rIns="18288" bIns="9144">
+            <a:spAutoFit/>
+          </a:bodyPr>
+          <a:lstStyle/>
+          <a:p>
+            <a:pPr>
+              <a:defRPr sz="1050" b="0">
+                <a:solidFill>
+                  <a:srgbClr val="56636B"/>
+                </a:solidFill>
+                <a:latin typeface="Aptos"/>
+              </a:defRPr>
+            </a:pPr>
+            <a:r>
+              <a:t>Because the dataset is small, augmentation adds examples; changing head position did not create a large gain.</a:t>
+            </a:r>
+          </a:p>
+        </p:txBody>
+      </p:sp>
+      <p:sp>
+        <p:nvSpPr>
+          <p:cNvPr id="5" name="TextBox 4"/>
+          <p:cNvSpPr txBox="1"/>
+          <p:nvPr/>
+        </p:nvSpPr>
+        <p:spPr>
+          <a:xfrm>
+            <a:off x="9692640" y="347472"/>
+            <a:ext cx="1920240" cy="228600"/>
+          </a:xfrm>
+          <a:prstGeom prst="rect">
+            <a:avLst/>
+          </a:prstGeom>
+          <a:noFill/>
+        </p:spPr>
+        <p:txBody>
+          <a:bodyPr wrap="none" lIns="18288" tIns="9144" rIns="18288" bIns="9144">
+            <a:spAutoFit/>
+          </a:bodyPr>
+          <a:lstStyle/>
+          <a:p>
+            <a:pPr algn="r">
+              <a:defRPr sz="850" b="0">
+                <a:solidFill>
+                  <a:srgbClr val="56636B"/>
+                </a:solidFill>
+                <a:latin typeface="Aptos"/>
+              </a:defRPr>
+            </a:pPr>
+            <a:r>
+              <a:t>Brain MRI robustness</a:t>
+            </a:r>
+          </a:p>
+        </p:txBody>
+      </p:sp>
+      <p:sp>
+        <p:nvSpPr>
+          <p:cNvPr id="6" name="TextBox 5"/>
+          <p:cNvSpPr txBox="1"/>
+          <p:nvPr/>
+        </p:nvSpPr>
+        <p:spPr>
+          <a:xfrm>
+            <a:off x="11292840" y="6446520"/>
+            <a:ext cx="411480" cy="182880"/>
+          </a:xfrm>
+          <a:prstGeom prst="rect">
+            <a:avLst/>
+          </a:prstGeom>
+          <a:noFill/>
+        </p:spPr>
+        <p:txBody>
+          <a:bodyPr wrap="none" lIns="18288" tIns="9144" rIns="18288" bIns="9144">
+            <a:spAutoFit/>
+          </a:bodyPr>
+          <a:lstStyle/>
+          <a:p>
+            <a:pPr algn="r">
+              <a:defRPr sz="800" b="0">
+                <a:solidFill>
+                  <a:srgbClr val="56636B"/>
+                </a:solidFill>
+                <a:latin typeface="Aptos"/>
+              </a:defRPr>
+            </a:pPr>
+            <a:r>
+              <a:t>12</a:t>
+            </a:r>
+          </a:p>
+        </p:txBody>
+      </p:sp>
+      <p:sp>
+        <p:nvSpPr>
+          <p:cNvPr id="7" name="Rounded Rectangle 6"/>
+          <p:cNvSpPr/>
+          <p:nvPr/>
+        </p:nvSpPr>
+        <p:spPr>
+          <a:xfrm>
+            <a:off x="731520" y="1691640"/>
+            <a:ext cx="3337560" cy="2834640"/>
+          </a:xfrm>
+          <a:prstGeom prst="roundRect">
+            <a:avLst/>
+          </a:prstGeom>
+          <a:solidFill>
+            <a:srgbClr val="FFFFFF"/>
+          </a:solidFill>
+          <a:ln w="8890">
+            <a:solidFill>
+              <a:srgbClr val="D6DEDE"/>
+            </a:solidFill>
+          </a:ln>
+        </p:spPr>
+        <p:style>
+          <a:lnRef idx="1">
+            <a:schemeClr val="accent1"/>
+          </a:lnRef>
+          <a:fillRef idx="3">
+            <a:schemeClr val="accent1"/>
+          </a:fillRef>
+          <a:effectRef idx="2">
+            <a:schemeClr val="accent1"/>
+          </a:effectRef>
+          <a:fontRef idx="minor">
+            <a:schemeClr val="lt1"/>
+          </a:fontRef>
+        </p:style>
+        <p:txBody>
+          <a:bodyPr rtlCol="0" anchor="ctr"/>
+          <a:lstStyle/>
+          <a:p>
+            <a:pPr algn="ctr"/>
+            <a:endParaRPr/>
+          </a:p>
+        </p:txBody>
+      </p:sp>
+      <p:pic>
+        <p:nvPicPr>
+          <p:cNvPr id="8" name="Picture 7" descr="confusion_matrix.png"/>
+          <p:cNvPicPr>
+            <a:picLocks noChangeAspect="1"/>
+          </p:cNvPicPr>
+          <p:nvPr/>
+        </p:nvPicPr>
+        <p:blipFill>
+          <a:blip r:embed="rId2"/>
+          <a:stretch>
+            <a:fillRect/>
+          </a:stretch>
+        </p:blipFill>
+        <p:spPr>
+          <a:xfrm>
+            <a:off x="731520" y="1773936"/>
+            <a:ext cx="3337560" cy="2670048"/>
+          </a:xfrm>
+          <a:prstGeom prst="rect">
+            <a:avLst/>
+          </a:prstGeom>
+        </p:spPr>
+      </p:pic>
+      <p:sp>
+        <p:nvSpPr>
+          <p:cNvPr id="9" name="Rounded Rectangle 8"/>
+          <p:cNvSpPr/>
+          <p:nvPr/>
+        </p:nvSpPr>
+        <p:spPr>
+          <a:xfrm>
+            <a:off x="4617720" y="1874519"/>
+            <a:ext cx="2011680" cy="1920240"/>
+          </a:xfrm>
+          <a:prstGeom prst="roundRect">
+            <a:avLst/>
+          </a:prstGeom>
+          <a:solidFill>
+            <a:srgbClr val="FFFFFF"/>
+          </a:solidFill>
+          <a:ln w="8890">
+            <a:solidFill>
+              <a:srgbClr val="D6DEDE"/>
+            </a:solidFill>
+          </a:ln>
+        </p:spPr>
+        <p:style>
+          <a:lnRef idx="1">
+            <a:schemeClr val="accent1"/>
+          </a:lnRef>
+          <a:fillRef idx="3">
+            <a:schemeClr val="accent1"/>
+          </a:fillRef>
+          <a:effectRef idx="2">
+            <a:schemeClr val="accent1"/>
+          </a:effectRef>
+          <a:fontRef idx="minor">
+            <a:schemeClr val="lt1"/>
+          </a:fontRef>
+        </p:style>
+        <p:txBody>
+          <a:bodyPr rtlCol="0" anchor="ctr"/>
+          <a:lstStyle/>
+          <a:p>
+            <a:pPr algn="ctr"/>
+            <a:endParaRPr/>
+          </a:p>
+        </p:txBody>
+      </p:sp>
+      <p:pic>
+        <p:nvPicPr>
+          <p:cNvPr id="10" name="Picture 9" descr="task2_cnn_original_example.jpg"/>
+          <p:cNvPicPr>
+            <a:picLocks noChangeAspect="1"/>
+          </p:cNvPicPr>
+          <p:nvPr/>
+        </p:nvPicPr>
+        <p:blipFill>
+          <a:blip r:embed="rId3"/>
+          <a:stretch>
+            <a:fillRect/>
+          </a:stretch>
+        </p:blipFill>
+        <p:spPr>
+          <a:xfrm>
+            <a:off x="4663440" y="1874519"/>
+            <a:ext cx="1920240" cy="1920240"/>
+          </a:xfrm>
+          <a:prstGeom prst="rect">
+            <a:avLst/>
+          </a:prstGeom>
+        </p:spPr>
+      </p:pic>
+      <p:sp>
+        <p:nvSpPr>
+          <p:cNvPr id="11" name="Rounded Rectangle 10"/>
+          <p:cNvSpPr/>
+          <p:nvPr/>
+        </p:nvSpPr>
+        <p:spPr>
+          <a:xfrm>
+            <a:off x="6903720" y="1874519"/>
+            <a:ext cx="2011680" cy="1920240"/>
+          </a:xfrm>
+          <a:prstGeom prst="roundRect">
+            <a:avLst/>
+          </a:prstGeom>
+          <a:solidFill>
+            <a:srgbClr val="FFFFFF"/>
+          </a:solidFill>
+          <a:ln w="8890">
+            <a:solidFill>
+              <a:srgbClr val="D6DEDE"/>
+            </a:solidFill>
+          </a:ln>
+        </p:spPr>
+        <p:style>
+          <a:lnRef idx="1">
+            <a:schemeClr val="accent1"/>
+          </a:lnRef>
+          <a:fillRef idx="3">
+            <a:schemeClr val="accent1"/>
+          </a:fillRef>
+          <a:effectRef idx="2">
+            <a:schemeClr val="accent1"/>
+          </a:effectRef>
+          <a:fontRef idx="minor">
+            <a:schemeClr val="lt1"/>
+          </a:fontRef>
+        </p:style>
+        <p:txBody>
+          <a:bodyPr rtlCol="0" anchor="ctr"/>
+          <a:lstStyle/>
+          <a:p>
+            <a:pPr algn="ctr"/>
+            <a:endParaRPr/>
+          </a:p>
+        </p:txBody>
+      </p:sp>
+      <p:pic>
+        <p:nvPicPr>
+          <p:cNvPr id="12" name="Picture 11" descr="task2_cnn_augmented_rot20_example.jpg"/>
+          <p:cNvPicPr>
+            <a:picLocks noChangeAspect="1"/>
+          </p:cNvPicPr>
+          <p:nvPr/>
+        </p:nvPicPr>
+        <p:blipFill>
+          <a:blip r:embed="rId4"/>
+          <a:stretch>
+            <a:fillRect/>
+          </a:stretch>
+        </p:blipFill>
+        <p:spPr>
+          <a:xfrm>
+            <a:off x="6949440" y="1874519"/>
+            <a:ext cx="1920240" cy="1920240"/>
+          </a:xfrm>
+          <a:prstGeom prst="rect">
+            <a:avLst/>
+          </a:prstGeom>
+        </p:spPr>
+      </p:pic>
+      <p:sp>
+        <p:nvSpPr>
+          <p:cNvPr id="13" name="Rounded Rectangle 12"/>
+          <p:cNvSpPr/>
+          <p:nvPr/>
+        </p:nvSpPr>
+        <p:spPr>
+          <a:xfrm>
+            <a:off x="9326880" y="1920240"/>
+            <a:ext cx="2240280" cy="914400"/>
+          </a:xfrm>
+          <a:prstGeom prst="roundRect">
+            <a:avLst/>
+          </a:prstGeom>
+          <a:solidFill>
+            <a:srgbClr val="FAFCFC"/>
+          </a:solidFill>
+          <a:ln w="8890">
+            <a:solidFill>
+              <a:srgbClr val="D2DBDB"/>
+            </a:solidFill>
+          </a:ln>
+        </p:spPr>
+        <p:style>
+          <a:lnRef idx="1">
+            <a:schemeClr val="accent1"/>
+          </a:lnRef>
+          <a:fillRef idx="3">
+            <a:schemeClr val="accent1"/>
+          </a:fillRef>
+          <a:effectRef idx="2">
+            <a:schemeClr val="accent1"/>
+          </a:effectRef>
+          <a:fontRef idx="minor">
+            <a:schemeClr val="lt1"/>
+          </a:fontRef>
+        </p:style>
+        <p:txBody>
+          <a:bodyPr rtlCol="0" anchor="ctr"/>
+          <a:lstStyle/>
+          <a:p>
+            <a:pPr algn="ctr"/>
+            <a:endParaRPr/>
+          </a:p>
+        </p:txBody>
+      </p:sp>
+      <p:sp>
+        <p:nvSpPr>
+          <p:cNvPr id="14" name="TextBox 13"/>
+          <p:cNvSpPr txBox="1"/>
+          <p:nvPr/>
+        </p:nvSpPr>
+        <p:spPr>
+          <a:xfrm>
+            <a:off x="9491472" y="2029968"/>
+            <a:ext cx="1874519" cy="320040"/>
+          </a:xfrm>
+          <a:prstGeom prst="rect">
+            <a:avLst/>
+          </a:prstGeom>
+          <a:noFill/>
+        </p:spPr>
+        <p:txBody>
+          <a:bodyPr wrap="none" lIns="18288" tIns="9144" rIns="18288" bIns="9144">
+            <a:spAutoFit/>
+          </a:bodyPr>
+          <a:lstStyle/>
+          <a:p>
+            <a:pPr>
+              <a:defRPr sz="2100" b="1">
+                <a:solidFill>
+                  <a:srgbClr val="008074"/>
+                </a:solidFill>
+                <a:latin typeface="Aptos"/>
+              </a:defRPr>
+            </a:pPr>
+            <a:r>
+              <a:t>81.58%</a:t>
+            </a:r>
+          </a:p>
+        </p:txBody>
+      </p:sp>
+      <p:sp>
+        <p:nvSpPr>
+          <p:cNvPr id="15" name="TextBox 14"/>
+          <p:cNvSpPr txBox="1"/>
+          <p:nvPr/>
+        </p:nvSpPr>
+        <p:spPr>
+          <a:xfrm>
+            <a:off x="9491472" y="2450592"/>
+            <a:ext cx="1901952" cy="228600"/>
+          </a:xfrm>
+          <a:prstGeom prst="rect">
+            <a:avLst/>
+          </a:prstGeom>
+          <a:noFill/>
+        </p:spPr>
+        <p:txBody>
+          <a:bodyPr wrap="none" lIns="18288" tIns="9144" rIns="18288" bIns="9144">
+            <a:spAutoFit/>
+          </a:bodyPr>
+          <a:lstStyle/>
+          <a:p>
+            <a:pPr>
+              <a:defRPr sz="850" b="0">
+                <a:solidFill>
+                  <a:srgbClr val="56636B"/>
+                </a:solidFill>
+                <a:latin typeface="Aptos"/>
+              </a:defRPr>
+            </a:pPr>
+            <a:r>
+              <a:t>Augmented CNN accuracy</a:t>
+            </a:r>
+          </a:p>
+        </p:txBody>
+      </p:sp>
+      <p:sp>
+        <p:nvSpPr>
+          <p:cNvPr id="16" name="Rounded Rectangle 15"/>
+          <p:cNvSpPr/>
+          <p:nvPr/>
+        </p:nvSpPr>
+        <p:spPr>
+          <a:xfrm>
+            <a:off x="9326880" y="3063240"/>
+            <a:ext cx="2240280" cy="914400"/>
+          </a:xfrm>
+          <a:prstGeom prst="roundRect">
+            <a:avLst/>
+          </a:prstGeom>
+          <a:solidFill>
+            <a:srgbClr val="FAFCFC"/>
+          </a:solidFill>
+          <a:ln w="8890">
+            <a:solidFill>
+              <a:srgbClr val="D2DBDB"/>
+            </a:solidFill>
+          </a:ln>
+        </p:spPr>
+        <p:style>
+          <a:lnRef idx="1">
+            <a:schemeClr val="accent1"/>
+          </a:lnRef>
+          <a:fillRef idx="3">
+            <a:schemeClr val="accent1"/>
+          </a:fillRef>
+          <a:effectRef idx="2">
+            <a:schemeClr val="accent1"/>
+          </a:effectRef>
+          <a:fontRef idx="minor">
+            <a:schemeClr val="lt1"/>
+          </a:fontRef>
+        </p:style>
+        <p:txBody>
+          <a:bodyPr rtlCol="0" anchor="ctr"/>
+          <a:lstStyle/>
+          <a:p>
+            <a:pPr algn="ctr"/>
+            <a:endParaRPr/>
+          </a:p>
+        </p:txBody>
+      </p:sp>
+      <p:sp>
+        <p:nvSpPr>
+          <p:cNvPr id="17" name="TextBox 16"/>
+          <p:cNvSpPr txBox="1"/>
+          <p:nvPr/>
+        </p:nvSpPr>
+        <p:spPr>
+          <a:xfrm>
+            <a:off x="9491472" y="3172968"/>
+            <a:ext cx="1874519" cy="320040"/>
+          </a:xfrm>
+          <a:prstGeom prst="rect">
+            <a:avLst/>
+          </a:prstGeom>
+          <a:noFill/>
+        </p:spPr>
+        <p:txBody>
+          <a:bodyPr wrap="none" lIns="18288" tIns="9144" rIns="18288" bIns="9144">
+            <a:spAutoFit/>
+          </a:bodyPr>
+          <a:lstStyle/>
+          <a:p>
+            <a:pPr>
+              <a:defRPr sz="2100" b="1">
+                <a:solidFill>
+                  <a:srgbClr val="B88630"/>
+                </a:solidFill>
+                <a:latin typeface="Aptos"/>
+              </a:defRPr>
+            </a:pPr>
+            <a:r>
+              <a:t>+2.63 pp</a:t>
+            </a:r>
+          </a:p>
+        </p:txBody>
+      </p:sp>
+      <p:sp>
+        <p:nvSpPr>
+          <p:cNvPr id="18" name="TextBox 17"/>
+          <p:cNvSpPr txBox="1"/>
+          <p:nvPr/>
+        </p:nvSpPr>
+        <p:spPr>
+          <a:xfrm>
+            <a:off x="9491472" y="3593592"/>
+            <a:ext cx="1901952" cy="228600"/>
+          </a:xfrm>
+          <a:prstGeom prst="rect">
+            <a:avLst/>
+          </a:prstGeom>
+          <a:noFill/>
+        </p:spPr>
+        <p:txBody>
+          <a:bodyPr wrap="none" lIns="18288" tIns="9144" rIns="18288" bIns="9144">
+            <a:spAutoFit/>
+          </a:bodyPr>
+          <a:lstStyle/>
+          <a:p>
+            <a:pPr>
+              <a:defRPr sz="850" b="0">
+                <a:solidFill>
+                  <a:srgbClr val="56636B"/>
+                </a:solidFill>
+                <a:latin typeface="Aptos"/>
+              </a:defRPr>
+            </a:pPr>
+            <a:r>
+              <a:t>gain over basic CNN</a:t>
+            </a:r>
+          </a:p>
+        </p:txBody>
+      </p:sp>
+      <p:sp>
+        <p:nvSpPr>
+          <p:cNvPr id="19" name="TextBox 18"/>
+          <p:cNvSpPr txBox="1"/>
+          <p:nvPr/>
+        </p:nvSpPr>
+        <p:spPr>
+          <a:xfrm>
+            <a:off x="4892040" y="4160520"/>
+            <a:ext cx="1463040" cy="228600"/>
+          </a:xfrm>
+          <a:prstGeom prst="rect">
+            <a:avLst/>
+          </a:prstGeom>
+          <a:noFill/>
+        </p:spPr>
+        <p:txBody>
+          <a:bodyPr wrap="none" lIns="18288" tIns="9144" rIns="18288" bIns="9144">
+            <a:spAutoFit/>
+          </a:bodyPr>
+          <a:lstStyle/>
+          <a:p>
+            <a:pPr algn="ctr">
+              <a:defRPr sz="1200" b="1">
+                <a:solidFill>
+                  <a:srgbClr val="182228"/>
+                </a:solidFill>
+                <a:latin typeface="Aptos"/>
+              </a:defRPr>
+            </a:pPr>
+            <a:r>
+              <a:t>Original</a:t>
+            </a:r>
+          </a:p>
+        </p:txBody>
+      </p:sp>
+      <p:sp>
+        <p:nvSpPr>
+          <p:cNvPr id="20" name="TextBox 19"/>
+          <p:cNvSpPr txBox="1"/>
+          <p:nvPr/>
+        </p:nvSpPr>
+        <p:spPr>
+          <a:xfrm>
+            <a:off x="7132320" y="4160520"/>
+            <a:ext cx="1645920" cy="228600"/>
+          </a:xfrm>
+          <a:prstGeom prst="rect">
+            <a:avLst/>
+          </a:prstGeom>
+          <a:noFill/>
+        </p:spPr>
+        <p:txBody>
+          <a:bodyPr wrap="none" lIns="18288" tIns="9144" rIns="18288" bIns="9144">
+            <a:spAutoFit/>
+          </a:bodyPr>
+          <a:lstStyle/>
+          <a:p>
+            <a:pPr algn="ctr">
+              <a:defRPr sz="1200" b="1">
+                <a:solidFill>
+                  <a:srgbClr val="182228"/>
+                </a:solidFill>
+                <a:latin typeface="Aptos"/>
+              </a:defRPr>
+            </a:pPr>
+            <a:r>
+              <a:t>Augmented</a:t>
+            </a:r>
+          </a:p>
+        </p:txBody>
+      </p:sp>
+    </p:spTree>
+  </p:cSld>
+  <p:clrMapOvr>
+    <a:masterClrMapping/>
+  </p:clrMapOvr>
+</p:sld>
+</file>
+
+<file path=ppt/slides/slide14.xml><?xml version="1.0" encoding="utf-8"?>
 <p:sld xmlns:a="http://schemas.openxmlformats.org/drawingml/2006/main" xmlns:r="http://schemas.openxmlformats.org/officeDocument/2006/relationships" xmlns:p="http://schemas.openxmlformats.org/presentationml/2006/main">
   <p:cSld>
     <p:bg>
@@ -5429,288 +6019,6 @@
         <p14:creationId xmlns:p14="http://schemas.microsoft.com/office/powerpoint/2010/main" val="484880413"/>
       </p:ext>
     </p:extLst>
-  </p:cSld>
-  <p:clrMapOvr>
-    <a:masterClrMapping/>
-  </p:clrMapOvr>
-</p:sld>
-</file>
-
-<file path=ppt/slides/slide14.xml><?xml version="1.0" encoding="utf-8"?>
-<p:sld xmlns:a="http://schemas.openxmlformats.org/drawingml/2006/main" xmlns:r="http://schemas.openxmlformats.org/officeDocument/2006/relationships" xmlns:p="http://schemas.openxmlformats.org/presentationml/2006/main">
-  <p:cSld>
-    <p:bg>
-      <p:bgPr>
-        <a:solidFill>
-          <a:srgbClr val="F7F9F7"/>
-        </a:solidFill>
-        <a:effectLst/>
-      </p:bgPr>
-    </p:bg>
-    <p:spTree>
-      <p:nvGrpSpPr>
-        <p:cNvPr id="1" name=""/>
-        <p:cNvGrpSpPr/>
-        <p:nvPr/>
-      </p:nvGrpSpPr>
-      <p:grpSpPr>
-        <a:xfrm>
-          <a:off x="0" y="0"/>
-          <a:ext cx="0" cy="0"/>
-          <a:chOff x="0" y="0"/>
-          <a:chExt cx="0" cy="0"/>
-        </a:xfrm>
-      </p:grpSpPr>
-      <p:sp>
-        <p:nvSpPr>
-          <p:cNvPr id="2" name="TextBox 1"/>
-          <p:cNvSpPr txBox="1"/>
-          <p:nvPr/>
-        </p:nvSpPr>
-        <p:spPr>
-          <a:xfrm>
-            <a:off x="502920" y="320040"/>
-            <a:ext cx="4572000" cy="256032"/>
-          </a:xfrm>
-          <a:prstGeom prst="rect">
-            <a:avLst/>
-          </a:prstGeom>
-          <a:noFill/>
-        </p:spPr>
-        <p:txBody>
-          <a:bodyPr wrap="none" lIns="18288" tIns="9144" rIns="18288" bIns="9144">
-            <a:spAutoFit/>
-          </a:bodyPr>
-          <a:lstStyle/>
-          <a:p>
-            <a:pPr>
-              <a:defRPr sz="900" b="1">
-                <a:solidFill>
-                  <a:srgbClr val="008074"/>
-                </a:solidFill>
-                <a:latin typeface="Aptos"/>
-              </a:defRPr>
-            </a:pPr>
-            <a:r>
-              <a:t>TASK 2 | RESTORATION AND FINE-TUNING</a:t>
-            </a:r>
-          </a:p>
-        </p:txBody>
-      </p:sp>
-      <p:sp>
-        <p:nvSpPr>
-          <p:cNvPr id="3" name="TextBox 2"/>
-          <p:cNvSpPr txBox="1"/>
-          <p:nvPr/>
-        </p:nvSpPr>
-        <p:spPr>
-          <a:xfrm>
-            <a:off x="502920" y="640080"/>
-            <a:ext cx="8961120" cy="603504"/>
-          </a:xfrm>
-          <a:prstGeom prst="rect">
-            <a:avLst/>
-          </a:prstGeom>
-          <a:noFill/>
-        </p:spPr>
-        <p:txBody>
-          <a:bodyPr wrap="none" lIns="18288" tIns="9144" rIns="18288" bIns="9144">
-            <a:spAutoFit/>
-          </a:bodyPr>
-          <a:lstStyle/>
-          <a:p>
-            <a:pPr>
-              <a:defRPr sz="2400" b="1">
-                <a:solidFill>
-                  <a:srgbClr val="182228"/>
-                </a:solidFill>
-                <a:latin typeface="Aptos"/>
-              </a:defRPr>
-            </a:pPr>
-            <a:r>
-              <a:t>Fine-tuning and restoration are compared against the same clean CNN baseline.</a:t>
-            </a:r>
-          </a:p>
-        </p:txBody>
-      </p:sp>
-      <p:sp>
-        <p:nvSpPr>
-          <p:cNvPr id="4" name="TextBox 3"/>
-          <p:cNvSpPr txBox="1"/>
-          <p:nvPr/>
-        </p:nvSpPr>
-        <p:spPr>
-          <a:xfrm>
-            <a:off x="521207" y="1225296"/>
-            <a:ext cx="9052560" cy="292608"/>
-          </a:xfrm>
-          <a:prstGeom prst="rect">
-            <a:avLst/>
-          </a:prstGeom>
-          <a:noFill/>
-        </p:spPr>
-        <p:txBody>
-          <a:bodyPr wrap="none" lIns="18288" tIns="9144" rIns="18288" bIns="9144">
-            <a:spAutoFit/>
-          </a:bodyPr>
-          <a:lstStyle/>
-          <a:p>
-            <a:pPr>
-              <a:defRPr sz="1050" b="0">
-                <a:solidFill>
-                  <a:srgbClr val="56636B"/>
-                </a:solidFill>
-                <a:latin typeface="Aptos"/>
-              </a:defRPr>
-            </a:pPr>
-            <a:r>
-              <a:t>Total true percent summarizes how many tumor/no-tumor predictions are correct.</a:t>
-            </a:r>
-          </a:p>
-        </p:txBody>
-      </p:sp>
-      <p:sp>
-        <p:nvSpPr>
-          <p:cNvPr id="5" name="TextBox 4"/>
-          <p:cNvSpPr txBox="1"/>
-          <p:nvPr/>
-        </p:nvSpPr>
-        <p:spPr>
-          <a:xfrm>
-            <a:off x="9692640" y="347472"/>
-            <a:ext cx="1920240" cy="228600"/>
-          </a:xfrm>
-          <a:prstGeom prst="rect">
-            <a:avLst/>
-          </a:prstGeom>
-          <a:noFill/>
-        </p:spPr>
-        <p:txBody>
-          <a:bodyPr wrap="none" lIns="18288" tIns="9144" rIns="18288" bIns="9144">
-            <a:spAutoFit/>
-          </a:bodyPr>
-          <a:lstStyle/>
-          <a:p>
-            <a:pPr algn="r">
-              <a:defRPr sz="850" b="0">
-                <a:solidFill>
-                  <a:srgbClr val="56636B"/>
-                </a:solidFill>
-                <a:latin typeface="Aptos"/>
-              </a:defRPr>
-            </a:pPr>
-            <a:r>
-              <a:t>Brain MRI robustness</a:t>
-            </a:r>
-          </a:p>
-        </p:txBody>
-      </p:sp>
-      <p:sp>
-        <p:nvSpPr>
-          <p:cNvPr id="6" name="TextBox 5"/>
-          <p:cNvSpPr txBox="1"/>
-          <p:nvPr/>
-        </p:nvSpPr>
-        <p:spPr>
-          <a:xfrm>
-            <a:off x="11292840" y="6446520"/>
-            <a:ext cx="411480" cy="182880"/>
-          </a:xfrm>
-          <a:prstGeom prst="rect">
-            <a:avLst/>
-          </a:prstGeom>
-          <a:noFill/>
-        </p:spPr>
-        <p:txBody>
-          <a:bodyPr wrap="none" lIns="18288" tIns="9144" rIns="18288" bIns="9144">
-            <a:spAutoFit/>
-          </a:bodyPr>
-          <a:lstStyle/>
-          <a:p>
-            <a:pPr algn="r">
-              <a:defRPr sz="800" b="0">
-                <a:solidFill>
-                  <a:srgbClr val="56636B"/>
-                </a:solidFill>
-                <a:latin typeface="Aptos"/>
-              </a:defRPr>
-            </a:pPr>
-            <a:r>
-              <a:t>13</a:t>
-            </a:r>
-          </a:p>
-        </p:txBody>
-      </p:sp>
-      <p:sp>
-        <p:nvSpPr>
-          <p:cNvPr id="11" name="TextBox 10"/>
-          <p:cNvSpPr txBox="1"/>
-          <p:nvPr/>
-        </p:nvSpPr>
-        <p:spPr>
-          <a:xfrm>
-            <a:off x="822960" y="5486400"/>
-            <a:ext cx="10515600" cy="457200"/>
-          </a:xfrm>
-          <a:prstGeom prst="rect">
-            <a:avLst/>
-          </a:prstGeom>
-          <a:noFill/>
-        </p:spPr>
-        <p:txBody>
-          <a:bodyPr wrap="square">
-            <a:spAutoFit/>
-          </a:bodyPr>
-          <a:lstStyle/>
-          <a:p>
-            <a:pPr>
-              <a:spcAft>
-                <a:spcPts val="800"/>
-              </a:spcAft>
-              <a:defRPr sz="1300">
-                <a:solidFill>
-                  <a:srgbClr val="182228"/>
-                </a:solidFill>
-                <a:latin typeface="Aptos"/>
-              </a:defRPr>
-            </a:pPr>
-            <a:r>
-              <a:t>Salt-and-pepper noise is the clearest CNN failure mode. Restoration recovers some cases; fine-tuning is the stronger model-level improvement.</a:t>
-            </a:r>
-          </a:p>
-        </p:txBody>
-      </p:sp>
-      <p:pic>
-        <p:nvPicPr>
-          <p:cNvPr id="13" name="Picture 12" descr="cnn_compare_distortion_restoration_fine_tune_total_true_percent_graph.png">
-            <a:extLst>
-              <a:ext uri="{FF2B5EF4-FFF2-40B4-BE49-F238E27FC236}">
-                <a16:creationId xmlns:a16="http://schemas.microsoft.com/office/drawing/2014/main" id="{6F80A51B-92A1-8241-610F-B2985B1F9CE1}"/>
-              </a:ext>
-            </a:extLst>
-          </p:cNvPr>
-          <p:cNvPicPr>
-            <a:picLocks noChangeAspect="1"/>
-          </p:cNvPicPr>
-          <p:nvPr/>
-        </p:nvPicPr>
-        <p:blipFill>
-          <a:blip r:embed="rId2"/>
-          <a:stretch>
-            <a:fillRect/>
-          </a:stretch>
-        </p:blipFill>
-        <p:spPr>
-          <a:xfrm>
-            <a:off x="1500930" y="1612080"/>
-            <a:ext cx="7800003" cy="3600000"/>
-          </a:xfrm>
-          <a:prstGeom prst="rect">
-            <a:avLst/>
-          </a:prstGeom>
-        </p:spPr>
-      </p:pic>
-    </p:spTree>
   </p:cSld>
   <p:clrMapOvr>
     <a:masterClrMapping/>
@@ -5774,7 +6082,7 @@
               </a:defRPr>
             </a:pPr>
             <a:r>
-              <a:t>TASK 2 | CNN SNR AND LEVEL ANALYSIS</a:t>
+              <a:t>TASK 2 | RESTORATION AND FINE-TUNING</a:t>
             </a:r>
           </a:p>
         </p:txBody>
@@ -5810,7 +6118,7 @@
               </a:defRPr>
             </a:pPr>
             <a:r>
-              <a:t>Separate distortion-level graphs show where classification begins to break.</a:t>
+              <a:t>Fine-tuning and restoration are compared against the same clean CNN baseline.</a:t>
             </a:r>
           </a:p>
         </p:txBody>
@@ -5846,7 +6154,7 @@
               </a:defRPr>
             </a:pPr>
             <a:r>
-              <a:t>The dashed line is the basic CNN on clean, non-distorted images.</a:t>
+              <a:t>Total true percent summarizes how many tumor/no-tumor predictions are correct.</a:t>
             </a:r>
           </a:p>
         </p:txBody>
@@ -5918,60 +6226,59 @@
               </a:defRPr>
             </a:pPr>
             <a:r>
-              <a:t>14</a:t>
-            </a:r>
-          </a:p>
-        </p:txBody>
-      </p:sp>
-      <p:sp>
-        <p:nvSpPr>
-          <p:cNvPr id="7" name="Rounded Rectangle 6"/>
-          <p:cNvSpPr/>
-          <p:nvPr/>
-        </p:nvSpPr>
-        <p:spPr>
-          <a:xfrm>
-            <a:off x="502920" y="1508760"/>
-            <a:ext cx="3657600" cy="2331720"/>
-          </a:xfrm>
-          <a:prstGeom prst="roundRect">
-            <a:avLst/>
-          </a:prstGeom>
-          <a:solidFill>
-            <a:srgbClr val="FFFFFF"/>
-          </a:solidFill>
-          <a:ln w="8890">
-            <a:solidFill>
-              <a:srgbClr val="D6DEDE"/>
-            </a:solidFill>
-          </a:ln>
-        </p:spPr>
-        <p:style>
-          <a:lnRef idx="1">
-            <a:schemeClr val="accent1"/>
-          </a:lnRef>
-          <a:fillRef idx="3">
-            <a:schemeClr val="accent1"/>
-          </a:fillRef>
-          <a:effectRef idx="2">
-            <a:schemeClr val="accent1"/>
-          </a:effectRef>
-          <a:fontRef idx="minor">
-            <a:schemeClr val="lt1"/>
-          </a:fontRef>
-        </p:style>
-        <p:txBody>
-          <a:bodyPr rtlCol="0" anchor="ctr"/>
-          <a:lstStyle/>
-          <a:p>
-            <a:pPr algn="ctr"/>
-            <a:endParaRPr/>
+              <a:t>13</a:t>
+            </a:r>
+          </a:p>
+        </p:txBody>
+      </p:sp>
+      <p:sp>
+        <p:nvSpPr>
+          <p:cNvPr id="11" name="TextBox 10"/>
+          <p:cNvSpPr txBox="1"/>
+          <p:nvPr/>
+        </p:nvSpPr>
+        <p:spPr>
+          <a:xfrm>
+            <a:off x="822960" y="5486400"/>
+            <a:ext cx="10515600" cy="457200"/>
+          </a:xfrm>
+          <a:prstGeom prst="rect">
+            <a:avLst/>
+          </a:prstGeom>
+          <a:noFill/>
+        </p:spPr>
+        <p:txBody>
+          <a:bodyPr wrap="square">
+            <a:spAutoFit/>
+          </a:bodyPr>
+          <a:lstStyle/>
+          <a:p>
+            <a:pPr>
+              <a:spcAft>
+                <a:spcPts val="800"/>
+              </a:spcAft>
+              <a:defRPr sz="1300">
+                <a:solidFill>
+                  <a:srgbClr val="182228"/>
+                </a:solidFill>
+                <a:latin typeface="Aptos"/>
+              </a:defRPr>
+            </a:pPr>
+            <a:r>
+              <a:t>Salt-and-pepper noise is the clearest CNN failure mode. Restoration recovers some cases; fine-tuning is the stronger model-level improvement.</a:t>
+            </a:r>
           </a:p>
         </p:txBody>
       </p:sp>
       <p:pic>
         <p:nvPicPr>
-          <p:cNvPr id="8" name="Picture 7" descr="cnn_compare_snr_distortion_restoration_fine_tune_total_true_percent_graph.png"/>
+          <p:cNvPr id="13" name="Picture 12" descr="cnn_compare_distortion_restoration_fine_tune_total_true_percent_graph.png">
+            <a:extLst>
+              <a:ext uri="{FF2B5EF4-FFF2-40B4-BE49-F238E27FC236}">
+                <a16:creationId xmlns:a16="http://schemas.microsoft.com/office/drawing/2014/main" id="{6F80A51B-92A1-8241-610F-B2985B1F9CE1}"/>
+              </a:ext>
+            </a:extLst>
+          </p:cNvPr>
           <p:cNvPicPr>
             <a:picLocks noChangeAspect="1"/>
           </p:cNvPicPr>
@@ -5985,193 +6292,14 @@
         </p:blipFill>
         <p:spPr>
           <a:xfrm>
-            <a:off x="502920" y="1658619"/>
-            <a:ext cx="3657600" cy="2032000"/>
+            <a:off x="1500930" y="1612080"/>
+            <a:ext cx="7800003" cy="3600000"/>
           </a:xfrm>
           <a:prstGeom prst="rect">
             <a:avLst/>
           </a:prstGeom>
         </p:spPr>
       </p:pic>
-      <p:sp>
-        <p:nvSpPr>
-          <p:cNvPr id="9" name="Rounded Rectangle 8"/>
-          <p:cNvSpPr/>
-          <p:nvPr/>
-        </p:nvSpPr>
-        <p:spPr>
-          <a:xfrm>
-            <a:off x="4251960" y="1508760"/>
-            <a:ext cx="3657600" cy="2331720"/>
-          </a:xfrm>
-          <a:prstGeom prst="roundRect">
-            <a:avLst/>
-          </a:prstGeom>
-          <a:solidFill>
-            <a:srgbClr val="FFFFFF"/>
-          </a:solidFill>
-          <a:ln w="8890">
-            <a:solidFill>
-              <a:srgbClr val="D6DEDE"/>
-            </a:solidFill>
-          </a:ln>
-        </p:spPr>
-        <p:style>
-          <a:lnRef idx="1">
-            <a:schemeClr val="accent1"/>
-          </a:lnRef>
-          <a:fillRef idx="3">
-            <a:schemeClr val="accent1"/>
-          </a:fillRef>
-          <a:effectRef idx="2">
-            <a:schemeClr val="accent1"/>
-          </a:effectRef>
-          <a:fontRef idx="minor">
-            <a:schemeClr val="lt1"/>
-          </a:fontRef>
-        </p:style>
-        <p:txBody>
-          <a:bodyPr rtlCol="0" anchor="ctr"/>
-          <a:lstStyle/>
-          <a:p>
-            <a:pPr algn="ctr"/>
-            <a:endParaRPr/>
-          </a:p>
-        </p:txBody>
-      </p:sp>
-      <p:pic>
-        <p:nvPicPr>
-          <p:cNvPr id="10" name="Picture 9" descr="cnn_compare_salt_and_pepper_distortion_restoration_fine_tune_total_true_percent_graph.png"/>
-          <p:cNvPicPr>
-            <a:picLocks noChangeAspect="1"/>
-          </p:cNvPicPr>
-          <p:nvPr/>
-        </p:nvPicPr>
-        <p:blipFill>
-          <a:blip r:embed="rId3"/>
-          <a:stretch>
-            <a:fillRect/>
-          </a:stretch>
-        </p:blipFill>
-        <p:spPr>
-          <a:xfrm>
-            <a:off x="4251960" y="1658619"/>
-            <a:ext cx="3657600" cy="2032000"/>
-          </a:xfrm>
-          <a:prstGeom prst="rect">
-            <a:avLst/>
-          </a:prstGeom>
-        </p:spPr>
-      </p:pic>
-      <p:sp>
-        <p:nvSpPr>
-          <p:cNvPr id="11" name="Rounded Rectangle 10"/>
-          <p:cNvSpPr/>
-          <p:nvPr/>
-        </p:nvSpPr>
-        <p:spPr>
-          <a:xfrm>
-            <a:off x="8001000" y="1508760"/>
-            <a:ext cx="3657600" cy="2331720"/>
-          </a:xfrm>
-          <a:prstGeom prst="roundRect">
-            <a:avLst/>
-          </a:prstGeom>
-          <a:solidFill>
-            <a:srgbClr val="FFFFFF"/>
-          </a:solidFill>
-          <a:ln w="8890">
-            <a:solidFill>
-              <a:srgbClr val="D6DEDE"/>
-            </a:solidFill>
-          </a:ln>
-        </p:spPr>
-        <p:style>
-          <a:lnRef idx="1">
-            <a:schemeClr val="accent1"/>
-          </a:lnRef>
-          <a:fillRef idx="3">
-            <a:schemeClr val="accent1"/>
-          </a:fillRef>
-          <a:effectRef idx="2">
-            <a:schemeClr val="accent1"/>
-          </a:effectRef>
-          <a:fontRef idx="minor">
-            <a:schemeClr val="lt1"/>
-          </a:fontRef>
-        </p:style>
-        <p:txBody>
-          <a:bodyPr rtlCol="0" anchor="ctr"/>
-          <a:lstStyle/>
-          <a:p>
-            <a:pPr algn="ctr"/>
-            <a:endParaRPr/>
-          </a:p>
-        </p:txBody>
-      </p:sp>
-      <p:pic>
-        <p:nvPicPr>
-          <p:cNvPr id="12" name="Picture 11" descr="cnn_compare_gaussian_blur_distortion_restoration_fine_tune_total_true_percent_graph.png"/>
-          <p:cNvPicPr>
-            <a:picLocks noChangeAspect="1"/>
-          </p:cNvPicPr>
-          <p:nvPr/>
-        </p:nvPicPr>
-        <p:blipFill>
-          <a:blip r:embed="rId4"/>
-          <a:stretch>
-            <a:fillRect/>
-          </a:stretch>
-        </p:blipFill>
-        <p:spPr>
-          <a:xfrm>
-            <a:off x="8001000" y="1658619"/>
-            <a:ext cx="3657600" cy="2032000"/>
-          </a:xfrm>
-          <a:prstGeom prst="rect">
-            <a:avLst/>
-          </a:prstGeom>
-        </p:spPr>
-      </p:pic>
-      <p:sp>
-        <p:nvSpPr>
-          <p:cNvPr id="13" name="TextBox 12"/>
-          <p:cNvSpPr txBox="1"/>
-          <p:nvPr/>
-        </p:nvSpPr>
-        <p:spPr>
-          <a:xfrm>
-            <a:off x="914400" y="4434840"/>
-            <a:ext cx="10058400" cy="457200"/>
-          </a:xfrm>
-          <a:prstGeom prst="rect">
-            <a:avLst/>
-          </a:prstGeom>
-          <a:noFill/>
-        </p:spPr>
-        <p:txBody>
-          <a:bodyPr wrap="square">
-            <a:spAutoFit/>
-          </a:bodyPr>
-          <a:lstStyle/>
-          <a:p>
-            <a:pPr>
-              <a:spcAft>
-                <a:spcPts val="800"/>
-              </a:spcAft>
-              <a:defRPr sz="1300">
-                <a:solidFill>
-                  <a:srgbClr val="182228"/>
-                </a:solidFill>
-                <a:latin typeface="Aptos"/>
-              </a:defRPr>
-            </a:pPr>
-            <a:r>
-              <a:t>Reading the graphs together separates distortion strength from model strategy: basic, restored, and fine-tuned.</a:t>
-            </a:r>
-          </a:p>
-        </p:txBody>
-      </p:sp>
     </p:spTree>
   </p:cSld>
   <p:clrMapOvr>
@@ -6181,6 +6309,468 @@
 </file>
 
 <file path=ppt/slides/slide16.xml><?xml version="1.0" encoding="utf-8"?>
+<p:sld xmlns:a="http://schemas.openxmlformats.org/drawingml/2006/main" xmlns:r="http://schemas.openxmlformats.org/officeDocument/2006/relationships" xmlns:p="http://schemas.openxmlformats.org/presentationml/2006/main">
+  <p:cSld>
+    <p:bg>
+      <p:bgPr>
+        <a:solidFill>
+          <a:srgbClr val="F7F9F7"/>
+        </a:solidFill>
+        <a:effectLst/>
+      </p:bgPr>
+    </p:bg>
+    <p:spTree>
+      <p:nvGrpSpPr>
+        <p:cNvPr id="1" name=""/>
+        <p:cNvGrpSpPr/>
+        <p:nvPr/>
+      </p:nvGrpSpPr>
+      <p:grpSpPr>
+        <a:xfrm>
+          <a:off x="0" y="0"/>
+          <a:ext cx="0" cy="0"/>
+          <a:chOff x="0" y="0"/>
+          <a:chExt cx="0" cy="0"/>
+        </a:xfrm>
+      </p:grpSpPr>
+      <p:sp>
+        <p:nvSpPr>
+          <p:cNvPr id="2" name="TextBox 1"/>
+          <p:cNvSpPr txBox="1"/>
+          <p:nvPr/>
+        </p:nvSpPr>
+        <p:spPr>
+          <a:xfrm>
+            <a:off x="502920" y="320040"/>
+            <a:ext cx="4572000" cy="256032"/>
+          </a:xfrm>
+          <a:prstGeom prst="rect">
+            <a:avLst/>
+          </a:prstGeom>
+          <a:noFill/>
+        </p:spPr>
+        <p:txBody>
+          <a:bodyPr wrap="none" lIns="18288" tIns="9144" rIns="18288" bIns="9144">
+            <a:spAutoFit/>
+          </a:bodyPr>
+          <a:lstStyle/>
+          <a:p>
+            <a:pPr>
+              <a:defRPr sz="900" b="1">
+                <a:solidFill>
+                  <a:srgbClr val="008074"/>
+                </a:solidFill>
+                <a:latin typeface="Aptos"/>
+              </a:defRPr>
+            </a:pPr>
+            <a:r>
+              <a:t>TASK 2 | CNN SNR AND LEVEL ANALYSIS</a:t>
+            </a:r>
+          </a:p>
+        </p:txBody>
+      </p:sp>
+      <p:sp>
+        <p:nvSpPr>
+          <p:cNvPr id="3" name="TextBox 2"/>
+          <p:cNvSpPr txBox="1"/>
+          <p:nvPr/>
+        </p:nvSpPr>
+        <p:spPr>
+          <a:xfrm>
+            <a:off x="502920" y="640080"/>
+            <a:ext cx="8961120" cy="603504"/>
+          </a:xfrm>
+          <a:prstGeom prst="rect">
+            <a:avLst/>
+          </a:prstGeom>
+          <a:noFill/>
+        </p:spPr>
+        <p:txBody>
+          <a:bodyPr wrap="none" lIns="18288" tIns="9144" rIns="18288" bIns="9144">
+            <a:spAutoFit/>
+          </a:bodyPr>
+          <a:lstStyle/>
+          <a:p>
+            <a:pPr>
+              <a:defRPr sz="2400" b="1">
+                <a:solidFill>
+                  <a:srgbClr val="182228"/>
+                </a:solidFill>
+                <a:latin typeface="Aptos"/>
+              </a:defRPr>
+            </a:pPr>
+            <a:r>
+              <a:t>Separate distortion-level graphs show where classification begins to break.</a:t>
+            </a:r>
+          </a:p>
+        </p:txBody>
+      </p:sp>
+      <p:sp>
+        <p:nvSpPr>
+          <p:cNvPr id="4" name="TextBox 3"/>
+          <p:cNvSpPr txBox="1"/>
+          <p:nvPr/>
+        </p:nvSpPr>
+        <p:spPr>
+          <a:xfrm>
+            <a:off x="521207" y="1225296"/>
+            <a:ext cx="9052560" cy="292608"/>
+          </a:xfrm>
+          <a:prstGeom prst="rect">
+            <a:avLst/>
+          </a:prstGeom>
+          <a:noFill/>
+        </p:spPr>
+        <p:txBody>
+          <a:bodyPr wrap="none" lIns="18288" tIns="9144" rIns="18288" bIns="9144">
+            <a:spAutoFit/>
+          </a:bodyPr>
+          <a:lstStyle/>
+          <a:p>
+            <a:pPr>
+              <a:defRPr sz="1050" b="0">
+                <a:solidFill>
+                  <a:srgbClr val="56636B"/>
+                </a:solidFill>
+                <a:latin typeface="Aptos"/>
+              </a:defRPr>
+            </a:pPr>
+            <a:r>
+              <a:t>The dashed line is the basic CNN on clean, non-distorted images.</a:t>
+            </a:r>
+          </a:p>
+        </p:txBody>
+      </p:sp>
+      <p:sp>
+        <p:nvSpPr>
+          <p:cNvPr id="5" name="TextBox 4"/>
+          <p:cNvSpPr txBox="1"/>
+          <p:nvPr/>
+        </p:nvSpPr>
+        <p:spPr>
+          <a:xfrm>
+            <a:off x="9692640" y="347472"/>
+            <a:ext cx="1920240" cy="228600"/>
+          </a:xfrm>
+          <a:prstGeom prst="rect">
+            <a:avLst/>
+          </a:prstGeom>
+          <a:noFill/>
+        </p:spPr>
+        <p:txBody>
+          <a:bodyPr wrap="none" lIns="18288" tIns="9144" rIns="18288" bIns="9144">
+            <a:spAutoFit/>
+          </a:bodyPr>
+          <a:lstStyle/>
+          <a:p>
+            <a:pPr algn="r">
+              <a:defRPr sz="850" b="0">
+                <a:solidFill>
+                  <a:srgbClr val="56636B"/>
+                </a:solidFill>
+                <a:latin typeface="Aptos"/>
+              </a:defRPr>
+            </a:pPr>
+            <a:r>
+              <a:t>Brain MRI robustness</a:t>
+            </a:r>
+          </a:p>
+        </p:txBody>
+      </p:sp>
+      <p:sp>
+        <p:nvSpPr>
+          <p:cNvPr id="6" name="TextBox 5"/>
+          <p:cNvSpPr txBox="1"/>
+          <p:nvPr/>
+        </p:nvSpPr>
+        <p:spPr>
+          <a:xfrm>
+            <a:off x="11292840" y="6446520"/>
+            <a:ext cx="411480" cy="182880"/>
+          </a:xfrm>
+          <a:prstGeom prst="rect">
+            <a:avLst/>
+          </a:prstGeom>
+          <a:noFill/>
+        </p:spPr>
+        <p:txBody>
+          <a:bodyPr wrap="none" lIns="18288" tIns="9144" rIns="18288" bIns="9144">
+            <a:spAutoFit/>
+          </a:bodyPr>
+          <a:lstStyle/>
+          <a:p>
+            <a:pPr algn="r">
+              <a:defRPr sz="800" b="0">
+                <a:solidFill>
+                  <a:srgbClr val="56636B"/>
+                </a:solidFill>
+                <a:latin typeface="Aptos"/>
+              </a:defRPr>
+            </a:pPr>
+            <a:r>
+              <a:t>14</a:t>
+            </a:r>
+          </a:p>
+        </p:txBody>
+      </p:sp>
+      <p:sp>
+        <p:nvSpPr>
+          <p:cNvPr id="7" name="Rounded Rectangle 6"/>
+          <p:cNvSpPr/>
+          <p:nvPr/>
+        </p:nvSpPr>
+        <p:spPr>
+          <a:xfrm>
+            <a:off x="502920" y="1508760"/>
+            <a:ext cx="3657600" cy="2331720"/>
+          </a:xfrm>
+          <a:prstGeom prst="roundRect">
+            <a:avLst/>
+          </a:prstGeom>
+          <a:solidFill>
+            <a:srgbClr val="FFFFFF"/>
+          </a:solidFill>
+          <a:ln w="8890">
+            <a:solidFill>
+              <a:srgbClr val="D6DEDE"/>
+            </a:solidFill>
+          </a:ln>
+        </p:spPr>
+        <p:style>
+          <a:lnRef idx="1">
+            <a:schemeClr val="accent1"/>
+          </a:lnRef>
+          <a:fillRef idx="3">
+            <a:schemeClr val="accent1"/>
+          </a:fillRef>
+          <a:effectRef idx="2">
+            <a:schemeClr val="accent1"/>
+          </a:effectRef>
+          <a:fontRef idx="minor">
+            <a:schemeClr val="lt1"/>
+          </a:fontRef>
+        </p:style>
+        <p:txBody>
+          <a:bodyPr rtlCol="0" anchor="ctr"/>
+          <a:lstStyle/>
+          <a:p>
+            <a:pPr algn="ctr"/>
+            <a:endParaRPr/>
+          </a:p>
+        </p:txBody>
+      </p:sp>
+      <p:pic>
+        <p:nvPicPr>
+          <p:cNvPr id="8" name="Picture 7" descr="cnn_compare_snr_distortion_restoration_fine_tune_total_true_percent_graph.png"/>
+          <p:cNvPicPr>
+            <a:picLocks noChangeAspect="1"/>
+          </p:cNvPicPr>
+          <p:nvPr/>
+        </p:nvPicPr>
+        <p:blipFill>
+          <a:blip r:embed="rId2"/>
+          <a:stretch>
+            <a:fillRect/>
+          </a:stretch>
+        </p:blipFill>
+        <p:spPr>
+          <a:xfrm>
+            <a:off x="502920" y="1658619"/>
+            <a:ext cx="3657600" cy="2032000"/>
+          </a:xfrm>
+          <a:prstGeom prst="rect">
+            <a:avLst/>
+          </a:prstGeom>
+        </p:spPr>
+      </p:pic>
+      <p:sp>
+        <p:nvSpPr>
+          <p:cNvPr id="9" name="Rounded Rectangle 8"/>
+          <p:cNvSpPr/>
+          <p:nvPr/>
+        </p:nvSpPr>
+        <p:spPr>
+          <a:xfrm>
+            <a:off x="4251960" y="1508760"/>
+            <a:ext cx="3657600" cy="2331720"/>
+          </a:xfrm>
+          <a:prstGeom prst="roundRect">
+            <a:avLst/>
+          </a:prstGeom>
+          <a:solidFill>
+            <a:srgbClr val="FFFFFF"/>
+          </a:solidFill>
+          <a:ln w="8890">
+            <a:solidFill>
+              <a:srgbClr val="D6DEDE"/>
+            </a:solidFill>
+          </a:ln>
+        </p:spPr>
+        <p:style>
+          <a:lnRef idx="1">
+            <a:schemeClr val="accent1"/>
+          </a:lnRef>
+          <a:fillRef idx="3">
+            <a:schemeClr val="accent1"/>
+          </a:fillRef>
+          <a:effectRef idx="2">
+            <a:schemeClr val="accent1"/>
+          </a:effectRef>
+          <a:fontRef idx="minor">
+            <a:schemeClr val="lt1"/>
+          </a:fontRef>
+        </p:style>
+        <p:txBody>
+          <a:bodyPr rtlCol="0" anchor="ctr"/>
+          <a:lstStyle/>
+          <a:p>
+            <a:pPr algn="ctr"/>
+            <a:endParaRPr/>
+          </a:p>
+        </p:txBody>
+      </p:sp>
+      <p:pic>
+        <p:nvPicPr>
+          <p:cNvPr id="10" name="Picture 9" descr="cnn_compare_salt_and_pepper_distortion_restoration_fine_tune_total_true_percent_graph.png"/>
+          <p:cNvPicPr>
+            <a:picLocks noChangeAspect="1"/>
+          </p:cNvPicPr>
+          <p:nvPr/>
+        </p:nvPicPr>
+        <p:blipFill>
+          <a:blip r:embed="rId3"/>
+          <a:stretch>
+            <a:fillRect/>
+          </a:stretch>
+        </p:blipFill>
+        <p:spPr>
+          <a:xfrm>
+            <a:off x="4251960" y="1658619"/>
+            <a:ext cx="3657600" cy="2032000"/>
+          </a:xfrm>
+          <a:prstGeom prst="rect">
+            <a:avLst/>
+          </a:prstGeom>
+        </p:spPr>
+      </p:pic>
+      <p:sp>
+        <p:nvSpPr>
+          <p:cNvPr id="11" name="Rounded Rectangle 10"/>
+          <p:cNvSpPr/>
+          <p:nvPr/>
+        </p:nvSpPr>
+        <p:spPr>
+          <a:xfrm>
+            <a:off x="8001000" y="1508760"/>
+            <a:ext cx="3657600" cy="2331720"/>
+          </a:xfrm>
+          <a:prstGeom prst="roundRect">
+            <a:avLst/>
+          </a:prstGeom>
+          <a:solidFill>
+            <a:srgbClr val="FFFFFF"/>
+          </a:solidFill>
+          <a:ln w="8890">
+            <a:solidFill>
+              <a:srgbClr val="D6DEDE"/>
+            </a:solidFill>
+          </a:ln>
+        </p:spPr>
+        <p:style>
+          <a:lnRef idx="1">
+            <a:schemeClr val="accent1"/>
+          </a:lnRef>
+          <a:fillRef idx="3">
+            <a:schemeClr val="accent1"/>
+          </a:fillRef>
+          <a:effectRef idx="2">
+            <a:schemeClr val="accent1"/>
+          </a:effectRef>
+          <a:fontRef idx="minor">
+            <a:schemeClr val="lt1"/>
+          </a:fontRef>
+        </p:style>
+        <p:txBody>
+          <a:bodyPr rtlCol="0" anchor="ctr"/>
+          <a:lstStyle/>
+          <a:p>
+            <a:pPr algn="ctr"/>
+            <a:endParaRPr/>
+          </a:p>
+        </p:txBody>
+      </p:sp>
+      <p:pic>
+        <p:nvPicPr>
+          <p:cNvPr id="12" name="Picture 11" descr="cnn_compare_gaussian_blur_distortion_restoration_fine_tune_total_true_percent_graph.png"/>
+          <p:cNvPicPr>
+            <a:picLocks noChangeAspect="1"/>
+          </p:cNvPicPr>
+          <p:nvPr/>
+        </p:nvPicPr>
+        <p:blipFill>
+          <a:blip r:embed="rId4"/>
+          <a:stretch>
+            <a:fillRect/>
+          </a:stretch>
+        </p:blipFill>
+        <p:spPr>
+          <a:xfrm>
+            <a:off x="8001000" y="1658619"/>
+            <a:ext cx="3657600" cy="2032000"/>
+          </a:xfrm>
+          <a:prstGeom prst="rect">
+            <a:avLst/>
+          </a:prstGeom>
+        </p:spPr>
+      </p:pic>
+      <p:sp>
+        <p:nvSpPr>
+          <p:cNvPr id="13" name="TextBox 12"/>
+          <p:cNvSpPr txBox="1"/>
+          <p:nvPr/>
+        </p:nvSpPr>
+        <p:spPr>
+          <a:xfrm>
+            <a:off x="914400" y="4434840"/>
+            <a:ext cx="10058400" cy="457200"/>
+          </a:xfrm>
+          <a:prstGeom prst="rect">
+            <a:avLst/>
+          </a:prstGeom>
+          <a:noFill/>
+        </p:spPr>
+        <p:txBody>
+          <a:bodyPr wrap="square">
+            <a:spAutoFit/>
+          </a:bodyPr>
+          <a:lstStyle/>
+          <a:p>
+            <a:pPr>
+              <a:spcAft>
+                <a:spcPts val="800"/>
+              </a:spcAft>
+              <a:defRPr sz="1300">
+                <a:solidFill>
+                  <a:srgbClr val="182228"/>
+                </a:solidFill>
+                <a:latin typeface="Aptos"/>
+              </a:defRPr>
+            </a:pPr>
+            <a:r>
+              <a:t>Reading the graphs together separates distortion strength from model strategy: basic, restored, and fine-tuned.</a:t>
+            </a:r>
+          </a:p>
+        </p:txBody>
+      </p:sp>
+    </p:spTree>
+  </p:cSld>
+  <p:clrMapOvr>
+    <a:masterClrMapping/>
+  </p:clrMapOvr>
+</p:sld>
+</file>
+
+<file path=ppt/slides/slide17.xml><?xml version="1.0" encoding="utf-8"?>
 <p:sld xmlns:a="http://schemas.openxmlformats.org/drawingml/2006/main" xmlns:r="http://schemas.openxmlformats.org/officeDocument/2006/relationships" xmlns:p="http://schemas.openxmlformats.org/presentationml/2006/main">
   <p:cSld>
     <p:bg>
@@ -6344,643 +6934,6 @@
             </a:pPr>
             <a:r>
               <a:t>Use Data 2 masks so the model can mark tumor regions, not only classify the image.</a:t>
-            </a:r>
-          </a:p>
-        </p:txBody>
-      </p:sp>
-    </p:spTree>
-  </p:cSld>
-  <p:clrMapOvr>
-    <a:masterClrMapping/>
-  </p:clrMapOvr>
-</p:sld>
-</file>
-
-<file path=ppt/slides/slide17.xml><?xml version="1.0" encoding="utf-8"?>
-<p:sld xmlns:a="http://schemas.openxmlformats.org/drawingml/2006/main" xmlns:r="http://schemas.openxmlformats.org/officeDocument/2006/relationships" xmlns:p="http://schemas.openxmlformats.org/presentationml/2006/main">
-  <p:cSld>
-    <p:bg>
-      <p:bgPr>
-        <a:solidFill>
-          <a:srgbClr val="F7F9F7"/>
-        </a:solidFill>
-        <a:effectLst/>
-      </p:bgPr>
-    </p:bg>
-    <p:spTree>
-      <p:nvGrpSpPr>
-        <p:cNvPr id="1" name=""/>
-        <p:cNvGrpSpPr/>
-        <p:nvPr/>
-      </p:nvGrpSpPr>
-      <p:grpSpPr>
-        <a:xfrm>
-          <a:off x="0" y="0"/>
-          <a:ext cx="0" cy="0"/>
-          <a:chOff x="0" y="0"/>
-          <a:chExt cx="0" cy="0"/>
-        </a:xfrm>
-      </p:grpSpPr>
-      <p:sp>
-        <p:nvSpPr>
-          <p:cNvPr id="2" name="TextBox 1"/>
-          <p:cNvSpPr txBox="1"/>
-          <p:nvPr/>
-        </p:nvSpPr>
-        <p:spPr>
-          <a:xfrm>
-            <a:off x="502920" y="320040"/>
-            <a:ext cx="4572000" cy="256032"/>
-          </a:xfrm>
-          <a:prstGeom prst="rect">
-            <a:avLst/>
-          </a:prstGeom>
-          <a:noFill/>
-        </p:spPr>
-        <p:txBody>
-          <a:bodyPr wrap="none" lIns="18288" tIns="9144" rIns="18288" bIns="9144">
-            <a:spAutoFit/>
-          </a:bodyPr>
-          <a:lstStyle/>
-          <a:p>
-            <a:pPr>
-              <a:defRPr sz="900" b="1">
-                <a:solidFill>
-                  <a:srgbClr val="008074"/>
-                </a:solidFill>
-                <a:latin typeface="Aptos"/>
-              </a:defRPr>
-            </a:pPr>
-            <a:r>
-              <a:t>TASK 3 | SEGMENTATION EXAMPLES</a:t>
-            </a:r>
-          </a:p>
-        </p:txBody>
-      </p:sp>
-      <p:sp>
-        <p:nvSpPr>
-          <p:cNvPr id="3" name="TextBox 2"/>
-          <p:cNvSpPr txBox="1"/>
-          <p:nvPr/>
-        </p:nvSpPr>
-        <p:spPr>
-          <a:xfrm>
-            <a:off x="502920" y="640080"/>
-            <a:ext cx="8961120" cy="603504"/>
-          </a:xfrm>
-          <a:prstGeom prst="rect">
-            <a:avLst/>
-          </a:prstGeom>
-          <a:noFill/>
-        </p:spPr>
-        <p:txBody>
-          <a:bodyPr wrap="none" lIns="18288" tIns="9144" rIns="18288" bIns="9144">
-            <a:spAutoFit/>
-          </a:bodyPr>
-          <a:lstStyle/>
-          <a:p>
-            <a:pPr>
-              <a:defRPr sz="2400" b="1">
-                <a:solidFill>
-                  <a:srgbClr val="182228"/>
-                </a:solidFill>
-                <a:latin typeface="Aptos"/>
-              </a:defRPr>
-            </a:pPr>
-            <a:r>
-              <a:t>YOLO output is evaluated as a mask prediction problem.</a:t>
-            </a:r>
-          </a:p>
-        </p:txBody>
-      </p:sp>
-      <p:sp>
-        <p:nvSpPr>
-          <p:cNvPr id="4" name="TextBox 3"/>
-          <p:cNvSpPr txBox="1"/>
-          <p:nvPr/>
-        </p:nvSpPr>
-        <p:spPr>
-          <a:xfrm>
-            <a:off x="521207" y="1225296"/>
-            <a:ext cx="9052560" cy="292608"/>
-          </a:xfrm>
-          <a:prstGeom prst="rect">
-            <a:avLst/>
-          </a:prstGeom>
-          <a:noFill/>
-        </p:spPr>
-        <p:txBody>
-          <a:bodyPr wrap="none" lIns="18288" tIns="9144" rIns="18288" bIns="9144">
-            <a:spAutoFit/>
-          </a:bodyPr>
-          <a:lstStyle/>
-          <a:p>
-            <a:pPr>
-              <a:defRPr sz="1050" b="0">
-                <a:solidFill>
-                  <a:srgbClr val="56636B"/>
-                </a:solidFill>
-                <a:latin typeface="Aptos"/>
-              </a:defRPr>
-            </a:pPr>
-            <a:r>
-              <a:t>Clean, mask, distorted, and restored images show the full experiment path.</a:t>
-            </a:r>
-          </a:p>
-        </p:txBody>
-      </p:sp>
-      <p:sp>
-        <p:nvSpPr>
-          <p:cNvPr id="5" name="TextBox 4"/>
-          <p:cNvSpPr txBox="1"/>
-          <p:nvPr/>
-        </p:nvSpPr>
-        <p:spPr>
-          <a:xfrm>
-            <a:off x="9692640" y="347472"/>
-            <a:ext cx="1920240" cy="228600"/>
-          </a:xfrm>
-          <a:prstGeom prst="rect">
-            <a:avLst/>
-          </a:prstGeom>
-          <a:noFill/>
-        </p:spPr>
-        <p:txBody>
-          <a:bodyPr wrap="none" lIns="18288" tIns="9144" rIns="18288" bIns="9144">
-            <a:spAutoFit/>
-          </a:bodyPr>
-          <a:lstStyle/>
-          <a:p>
-            <a:pPr algn="r">
-              <a:defRPr sz="850" b="0">
-                <a:solidFill>
-                  <a:srgbClr val="56636B"/>
-                </a:solidFill>
-                <a:latin typeface="Aptos"/>
-              </a:defRPr>
-            </a:pPr>
-            <a:r>
-              <a:t>Brain MRI robustness</a:t>
-            </a:r>
-          </a:p>
-        </p:txBody>
-      </p:sp>
-      <p:sp>
-        <p:nvSpPr>
-          <p:cNvPr id="6" name="TextBox 5"/>
-          <p:cNvSpPr txBox="1"/>
-          <p:nvPr/>
-        </p:nvSpPr>
-        <p:spPr>
-          <a:xfrm>
-            <a:off x="11292840" y="6446520"/>
-            <a:ext cx="411480" cy="182880"/>
-          </a:xfrm>
-          <a:prstGeom prst="rect">
-            <a:avLst/>
-          </a:prstGeom>
-          <a:noFill/>
-        </p:spPr>
-        <p:txBody>
-          <a:bodyPr wrap="none" lIns="18288" tIns="9144" rIns="18288" bIns="9144">
-            <a:spAutoFit/>
-          </a:bodyPr>
-          <a:lstStyle/>
-          <a:p>
-            <a:pPr algn="r">
-              <a:defRPr sz="800" b="0">
-                <a:solidFill>
-                  <a:srgbClr val="56636B"/>
-                </a:solidFill>
-                <a:latin typeface="Aptos"/>
-              </a:defRPr>
-            </a:pPr>
-            <a:r>
-              <a:t>16</a:t>
-            </a:r>
-          </a:p>
-        </p:txBody>
-      </p:sp>
-      <p:sp>
-        <p:nvSpPr>
-          <p:cNvPr id="7" name="Rounded Rectangle 6"/>
-          <p:cNvSpPr/>
-          <p:nvPr/>
-        </p:nvSpPr>
-        <p:spPr>
-          <a:xfrm>
-            <a:off x="502920" y="1691640"/>
-            <a:ext cx="2606040" cy="3886200"/>
-          </a:xfrm>
-          <a:prstGeom prst="roundRect">
-            <a:avLst/>
-          </a:prstGeom>
-          <a:solidFill>
-            <a:srgbClr val="FFFFFF"/>
-          </a:solidFill>
-          <a:ln w="8890">
-            <a:solidFill>
-              <a:srgbClr val="D2DBDB"/>
-            </a:solidFill>
-          </a:ln>
-        </p:spPr>
-        <p:style>
-          <a:lnRef idx="1">
-            <a:schemeClr val="accent1"/>
-          </a:lnRef>
-          <a:fillRef idx="3">
-            <a:schemeClr val="accent1"/>
-          </a:fillRef>
-          <a:effectRef idx="2">
-            <a:schemeClr val="accent1"/>
-          </a:effectRef>
-          <a:fontRef idx="minor">
-            <a:schemeClr val="lt1"/>
-          </a:fontRef>
-        </p:style>
-        <p:txBody>
-          <a:bodyPr rtlCol="0" anchor="ctr"/>
-          <a:lstStyle/>
-          <a:p>
-            <a:pPr algn="ctr"/>
-            <a:endParaRPr/>
-          </a:p>
-        </p:txBody>
-      </p:sp>
-      <p:pic>
-        <p:nvPicPr>
-          <p:cNvPr id="8" name="Picture 7" descr="task3_yolo_basic_example.png"/>
-          <p:cNvPicPr>
-            <a:picLocks noChangeAspect="1"/>
-          </p:cNvPicPr>
-          <p:nvPr/>
-        </p:nvPicPr>
-        <p:blipFill>
-          <a:blip r:embed="rId2"/>
-          <a:stretch>
-            <a:fillRect/>
-          </a:stretch>
-        </p:blipFill>
-        <p:spPr>
-          <a:xfrm>
-            <a:off x="667512" y="2034540"/>
-            <a:ext cx="2286000" cy="2286000"/>
-          </a:xfrm>
-          <a:prstGeom prst="rect">
-            <a:avLst/>
-          </a:prstGeom>
-        </p:spPr>
-      </p:pic>
-      <p:sp>
-        <p:nvSpPr>
-          <p:cNvPr id="9" name="TextBox 8"/>
-          <p:cNvSpPr txBox="1"/>
-          <p:nvPr/>
-        </p:nvSpPr>
-        <p:spPr>
-          <a:xfrm>
-            <a:off x="731520" y="4956048"/>
-            <a:ext cx="2148840" cy="228600"/>
-          </a:xfrm>
-          <a:prstGeom prst="rect">
-            <a:avLst/>
-          </a:prstGeom>
-          <a:noFill/>
-        </p:spPr>
-        <p:txBody>
-          <a:bodyPr wrap="none" lIns="18288" tIns="9144" rIns="18288" bIns="9144">
-            <a:spAutoFit/>
-          </a:bodyPr>
-          <a:lstStyle/>
-          <a:p>
-            <a:pPr algn="ctr">
-              <a:defRPr sz="1300" b="1">
-                <a:solidFill>
-                  <a:srgbClr val="182228"/>
-                </a:solidFill>
-                <a:latin typeface="Aptos"/>
-              </a:defRPr>
-            </a:pPr>
-            <a:r>
-              <a:t>Clean</a:t>
-            </a:r>
-          </a:p>
-        </p:txBody>
-      </p:sp>
-      <p:sp>
-        <p:nvSpPr>
-          <p:cNvPr id="10" name="Rounded Rectangle 9"/>
-          <p:cNvSpPr/>
-          <p:nvPr/>
-        </p:nvSpPr>
-        <p:spPr>
-          <a:xfrm>
-            <a:off x="3410712" y="1691640"/>
-            <a:ext cx="2606040" cy="3886200"/>
-          </a:xfrm>
-          <a:prstGeom prst="roundRect">
-            <a:avLst/>
-          </a:prstGeom>
-          <a:solidFill>
-            <a:srgbClr val="FFFFFF"/>
-          </a:solidFill>
-          <a:ln w="8890">
-            <a:solidFill>
-              <a:srgbClr val="D2DBDB"/>
-            </a:solidFill>
-          </a:ln>
-        </p:spPr>
-        <p:style>
-          <a:lnRef idx="1">
-            <a:schemeClr val="accent1"/>
-          </a:lnRef>
-          <a:fillRef idx="3">
-            <a:schemeClr val="accent1"/>
-          </a:fillRef>
-          <a:effectRef idx="2">
-            <a:schemeClr val="accent1"/>
-          </a:effectRef>
-          <a:fontRef idx="minor">
-            <a:schemeClr val="lt1"/>
-          </a:fontRef>
-        </p:style>
-        <p:txBody>
-          <a:bodyPr rtlCol="0" anchor="ctr"/>
-          <a:lstStyle/>
-          <a:p>
-            <a:pPr algn="ctr"/>
-            <a:endParaRPr/>
-          </a:p>
-        </p:txBody>
-      </p:sp>
-      <p:pic>
-        <p:nvPicPr>
-          <p:cNvPr id="11" name="Picture 10" descr="task3_yolo_mask_example.png"/>
-          <p:cNvPicPr>
-            <a:picLocks noChangeAspect="1"/>
-          </p:cNvPicPr>
-          <p:nvPr/>
-        </p:nvPicPr>
-        <p:blipFill>
-          <a:blip r:embed="rId3"/>
-          <a:stretch>
-            <a:fillRect/>
-          </a:stretch>
-        </p:blipFill>
-        <p:spPr>
-          <a:xfrm>
-            <a:off x="3575304" y="2512094"/>
-            <a:ext cx="2286000" cy="1330890"/>
-          </a:xfrm>
-          <a:prstGeom prst="rect">
-            <a:avLst/>
-          </a:prstGeom>
-        </p:spPr>
-      </p:pic>
-      <p:sp>
-        <p:nvSpPr>
-          <p:cNvPr id="12" name="TextBox 11"/>
-          <p:cNvSpPr txBox="1"/>
-          <p:nvPr/>
-        </p:nvSpPr>
-        <p:spPr>
-          <a:xfrm>
-            <a:off x="3639312" y="4956048"/>
-            <a:ext cx="2148840" cy="228600"/>
-          </a:xfrm>
-          <a:prstGeom prst="rect">
-            <a:avLst/>
-          </a:prstGeom>
-          <a:noFill/>
-        </p:spPr>
-        <p:txBody>
-          <a:bodyPr wrap="none" lIns="18288" tIns="9144" rIns="18288" bIns="9144">
-            <a:spAutoFit/>
-          </a:bodyPr>
-          <a:lstStyle/>
-          <a:p>
-            <a:pPr algn="ctr">
-              <a:defRPr sz="1300" b="1">
-                <a:solidFill>
-                  <a:srgbClr val="182228"/>
-                </a:solidFill>
-                <a:latin typeface="Aptos"/>
-              </a:defRPr>
-            </a:pPr>
-            <a:r>
-              <a:t>Mask</a:t>
-            </a:r>
-          </a:p>
-        </p:txBody>
-      </p:sp>
-      <p:sp>
-        <p:nvSpPr>
-          <p:cNvPr id="13" name="Rounded Rectangle 12"/>
-          <p:cNvSpPr/>
-          <p:nvPr/>
-        </p:nvSpPr>
-        <p:spPr>
-          <a:xfrm>
-            <a:off x="6318504" y="1691640"/>
-            <a:ext cx="2606040" cy="3886200"/>
-          </a:xfrm>
-          <a:prstGeom prst="roundRect">
-            <a:avLst/>
-          </a:prstGeom>
-          <a:solidFill>
-            <a:srgbClr val="FFFFFF"/>
-          </a:solidFill>
-          <a:ln w="8890">
-            <a:solidFill>
-              <a:srgbClr val="D2DBDB"/>
-            </a:solidFill>
-          </a:ln>
-        </p:spPr>
-        <p:style>
-          <a:lnRef idx="1">
-            <a:schemeClr val="accent1"/>
-          </a:lnRef>
-          <a:fillRef idx="3">
-            <a:schemeClr val="accent1"/>
-          </a:fillRef>
-          <a:effectRef idx="2">
-            <a:schemeClr val="accent1"/>
-          </a:effectRef>
-          <a:fontRef idx="minor">
-            <a:schemeClr val="lt1"/>
-          </a:fontRef>
-        </p:style>
-        <p:txBody>
-          <a:bodyPr rtlCol="0" anchor="ctr"/>
-          <a:lstStyle/>
-          <a:p>
-            <a:pPr algn="ctr"/>
-            <a:endParaRPr/>
-          </a:p>
-        </p:txBody>
-      </p:sp>
-      <p:pic>
-        <p:nvPicPr>
-          <p:cNvPr id="14" name="Picture 13" descr="task3_yolo_distorted_gaussian_noise_15db_example.jpg"/>
-          <p:cNvPicPr>
-            <a:picLocks noChangeAspect="1"/>
-          </p:cNvPicPr>
-          <p:nvPr/>
-        </p:nvPicPr>
-        <p:blipFill>
-          <a:blip r:embed="rId4"/>
-          <a:stretch>
-            <a:fillRect/>
-          </a:stretch>
-        </p:blipFill>
-        <p:spPr>
-          <a:xfrm>
-            <a:off x="6483096" y="2034540"/>
-            <a:ext cx="2286000" cy="2286000"/>
-          </a:xfrm>
-          <a:prstGeom prst="rect">
-            <a:avLst/>
-          </a:prstGeom>
-        </p:spPr>
-      </p:pic>
-      <p:sp>
-        <p:nvSpPr>
-          <p:cNvPr id="15" name="TextBox 14"/>
-          <p:cNvSpPr txBox="1"/>
-          <p:nvPr/>
-        </p:nvSpPr>
-        <p:spPr>
-          <a:xfrm>
-            <a:off x="6547104" y="4956048"/>
-            <a:ext cx="2148840" cy="228600"/>
-          </a:xfrm>
-          <a:prstGeom prst="rect">
-            <a:avLst/>
-          </a:prstGeom>
-          <a:noFill/>
-        </p:spPr>
-        <p:txBody>
-          <a:bodyPr wrap="none" lIns="18288" tIns="9144" rIns="18288" bIns="9144">
-            <a:spAutoFit/>
-          </a:bodyPr>
-          <a:lstStyle/>
-          <a:p>
-            <a:pPr algn="ctr">
-              <a:defRPr sz="1300" b="1">
-                <a:solidFill>
-                  <a:srgbClr val="182228"/>
-                </a:solidFill>
-                <a:latin typeface="Aptos"/>
-              </a:defRPr>
-            </a:pPr>
-            <a:r>
-              <a:t>Distorted</a:t>
-            </a:r>
-          </a:p>
-        </p:txBody>
-      </p:sp>
-      <p:sp>
-        <p:nvSpPr>
-          <p:cNvPr id="16" name="Rounded Rectangle 15"/>
-          <p:cNvSpPr/>
-          <p:nvPr/>
-        </p:nvSpPr>
-        <p:spPr>
-          <a:xfrm>
-            <a:off x="9226296" y="1691640"/>
-            <a:ext cx="2606040" cy="3886200"/>
-          </a:xfrm>
-          <a:prstGeom prst="roundRect">
-            <a:avLst/>
-          </a:prstGeom>
-          <a:solidFill>
-            <a:srgbClr val="FFFFFF"/>
-          </a:solidFill>
-          <a:ln w="8890">
-            <a:solidFill>
-              <a:srgbClr val="D2DBDB"/>
-            </a:solidFill>
-          </a:ln>
-        </p:spPr>
-        <p:style>
-          <a:lnRef idx="1">
-            <a:schemeClr val="accent1"/>
-          </a:lnRef>
-          <a:fillRef idx="3">
-            <a:schemeClr val="accent1"/>
-          </a:fillRef>
-          <a:effectRef idx="2">
-            <a:schemeClr val="accent1"/>
-          </a:effectRef>
-          <a:fontRef idx="minor">
-            <a:schemeClr val="lt1"/>
-          </a:fontRef>
-        </p:style>
-        <p:txBody>
-          <a:bodyPr rtlCol="0" anchor="ctr"/>
-          <a:lstStyle/>
-          <a:p>
-            <a:pPr algn="ctr"/>
-            <a:endParaRPr/>
-          </a:p>
-        </p:txBody>
-      </p:sp>
-      <p:pic>
-        <p:nvPicPr>
-          <p:cNvPr id="17" name="Picture 16" descr="task3_yolo_restored_gaussian_noise_15db_example.jpg"/>
-          <p:cNvPicPr>
-            <a:picLocks noChangeAspect="1"/>
-          </p:cNvPicPr>
-          <p:nvPr/>
-        </p:nvPicPr>
-        <p:blipFill>
-          <a:blip r:embed="rId5"/>
-          <a:stretch>
-            <a:fillRect/>
-          </a:stretch>
-        </p:blipFill>
-        <p:spPr>
-          <a:xfrm>
-            <a:off x="9390888" y="2034540"/>
-            <a:ext cx="2286000" cy="2286000"/>
-          </a:xfrm>
-          <a:prstGeom prst="rect">
-            <a:avLst/>
-          </a:prstGeom>
-        </p:spPr>
-      </p:pic>
-      <p:sp>
-        <p:nvSpPr>
-          <p:cNvPr id="18" name="TextBox 17"/>
-          <p:cNvSpPr txBox="1"/>
-          <p:nvPr/>
-        </p:nvSpPr>
-        <p:spPr>
-          <a:xfrm>
-            <a:off x="9454896" y="4956048"/>
-            <a:ext cx="2148840" cy="228600"/>
-          </a:xfrm>
-          <a:prstGeom prst="rect">
-            <a:avLst/>
-          </a:prstGeom>
-          <a:noFill/>
-        </p:spPr>
-        <p:txBody>
-          <a:bodyPr wrap="none" lIns="18288" tIns="9144" rIns="18288" bIns="9144">
-            <a:spAutoFit/>
-          </a:bodyPr>
-          <a:lstStyle/>
-          <a:p>
-            <a:pPr algn="ctr">
-              <a:defRPr sz="1300" b="1">
-                <a:solidFill>
-                  <a:srgbClr val="182228"/>
-                </a:solidFill>
-                <a:latin typeface="Aptos"/>
-              </a:defRPr>
-            </a:pPr>
-            <a:r>
-              <a:t>Restored</a:t>
             </a:r>
           </a:p>
         </p:txBody>
@@ -7049,7 +7002,7 @@
               </a:defRPr>
             </a:pPr>
             <a:r>
-              <a:t>TASK 3 | YOLO MAP50</a:t>
+              <a:t>TASK 3 | SEGMENTATION EXAMPLES</a:t>
             </a:r>
           </a:p>
         </p:txBody>
@@ -7085,7 +7038,7 @@
               </a:defRPr>
             </a:pPr>
             <a:r>
-              <a:t>Clean YOLO is the reference line; distortion and fine-tuning reveal robustness.</a:t>
+              <a:t>YOLO output is evaluated as a mask prediction problem.</a:t>
             </a:r>
           </a:p>
         </p:txBody>
@@ -7121,7 +7074,7 @@
               </a:defRPr>
             </a:pPr>
             <a:r>
-              <a:t>mAP50 is shown separately for gaussian noise, blur, and brightness/contrast levels.</a:t>
+              <a:t>Clean, mask, distorted, and restored images show the full experiment path.</a:t>
             </a:r>
           </a:p>
         </p:txBody>
@@ -7193,7 +7146,7 @@
               </a:defRPr>
             </a:pPr>
             <a:r>
-              <a:t>17</a:t>
+              <a:t>16</a:t>
             </a:r>
           </a:p>
         </p:txBody>
@@ -7206,8 +7159,8 @@
         </p:nvSpPr>
         <p:spPr>
           <a:xfrm>
-            <a:off x="502920" y="1508760"/>
-            <a:ext cx="3657600" cy="2331720"/>
+            <a:off x="502920" y="1691640"/>
+            <a:ext cx="2606040" cy="3886200"/>
           </a:xfrm>
           <a:prstGeom prst="roundRect">
             <a:avLst/>
@@ -7217,7 +7170,7 @@
           </a:solidFill>
           <a:ln w="8890">
             <a:solidFill>
-              <a:srgbClr val="D6DEDE"/>
+              <a:srgbClr val="D2DBDB"/>
             </a:solidFill>
           </a:ln>
         </p:spPr>
@@ -7246,7 +7199,7 @@
       </p:sp>
       <p:pic>
         <p:nvPicPr>
-          <p:cNvPr id="8" name="Picture 7" descr="yolo_gaussian_noise_snr_map50_graph.png"/>
+          <p:cNvPr id="8" name="Picture 7" descr="task3_yolo_basic_example.png"/>
           <p:cNvPicPr>
             <a:picLocks noChangeAspect="1"/>
           </p:cNvPicPr>
@@ -7260,8 +7213,8 @@
         </p:blipFill>
         <p:spPr>
           <a:xfrm>
-            <a:off x="502920" y="1658619"/>
-            <a:ext cx="3657600" cy="2032000"/>
+            <a:off x="667512" y="2034540"/>
+            <a:ext cx="2286000" cy="2286000"/>
           </a:xfrm>
           <a:prstGeom prst="rect">
             <a:avLst/>
@@ -7270,14 +7223,50 @@
       </p:pic>
       <p:sp>
         <p:nvSpPr>
-          <p:cNvPr id="9" name="Rounded Rectangle 8"/>
+          <p:cNvPr id="9" name="TextBox 8"/>
+          <p:cNvSpPr txBox="1"/>
+          <p:nvPr/>
+        </p:nvSpPr>
+        <p:spPr>
+          <a:xfrm>
+            <a:off x="731520" y="4956048"/>
+            <a:ext cx="2148840" cy="228600"/>
+          </a:xfrm>
+          <a:prstGeom prst="rect">
+            <a:avLst/>
+          </a:prstGeom>
+          <a:noFill/>
+        </p:spPr>
+        <p:txBody>
+          <a:bodyPr wrap="none" lIns="18288" tIns="9144" rIns="18288" bIns="9144">
+            <a:spAutoFit/>
+          </a:bodyPr>
+          <a:lstStyle/>
+          <a:p>
+            <a:pPr algn="ctr">
+              <a:defRPr sz="1300" b="1">
+                <a:solidFill>
+                  <a:srgbClr val="182228"/>
+                </a:solidFill>
+                <a:latin typeface="Aptos"/>
+              </a:defRPr>
+            </a:pPr>
+            <a:r>
+              <a:t>Clean</a:t>
+            </a:r>
+          </a:p>
+        </p:txBody>
+      </p:sp>
+      <p:sp>
+        <p:nvSpPr>
+          <p:cNvPr id="10" name="Rounded Rectangle 9"/>
           <p:cNvSpPr/>
           <p:nvPr/>
         </p:nvSpPr>
         <p:spPr>
           <a:xfrm>
-            <a:off x="4251960" y="1508760"/>
-            <a:ext cx="3657600" cy="2331720"/>
+            <a:off x="3410712" y="1691640"/>
+            <a:ext cx="2606040" cy="3886200"/>
           </a:xfrm>
           <a:prstGeom prst="roundRect">
             <a:avLst/>
@@ -7287,7 +7276,7 @@
           </a:solidFill>
           <a:ln w="8890">
             <a:solidFill>
-              <a:srgbClr val="D6DEDE"/>
+              <a:srgbClr val="D2DBDB"/>
             </a:solidFill>
           </a:ln>
         </p:spPr>
@@ -7316,7 +7305,7 @@
       </p:sp>
       <p:pic>
         <p:nvPicPr>
-          <p:cNvPr id="10" name="Picture 9" descr="yolo_gaussian_blur_sigma_map50_graph.png"/>
+          <p:cNvPr id="11" name="Picture 10" descr="task3_yolo_mask_example.png"/>
           <p:cNvPicPr>
             <a:picLocks noChangeAspect="1"/>
           </p:cNvPicPr>
@@ -7330,8 +7319,8 @@
         </p:blipFill>
         <p:spPr>
           <a:xfrm>
-            <a:off x="4251960" y="1658619"/>
-            <a:ext cx="3657600" cy="2032000"/>
+            <a:off x="3575304" y="2512094"/>
+            <a:ext cx="2286000" cy="1330890"/>
           </a:xfrm>
           <a:prstGeom prst="rect">
             <a:avLst/>
@@ -7340,14 +7329,50 @@
       </p:pic>
       <p:sp>
         <p:nvSpPr>
-          <p:cNvPr id="11" name="Rounded Rectangle 10"/>
+          <p:cNvPr id="12" name="TextBox 11"/>
+          <p:cNvSpPr txBox="1"/>
+          <p:nvPr/>
+        </p:nvSpPr>
+        <p:spPr>
+          <a:xfrm>
+            <a:off x="3639312" y="4956048"/>
+            <a:ext cx="2148840" cy="228600"/>
+          </a:xfrm>
+          <a:prstGeom prst="rect">
+            <a:avLst/>
+          </a:prstGeom>
+          <a:noFill/>
+        </p:spPr>
+        <p:txBody>
+          <a:bodyPr wrap="none" lIns="18288" tIns="9144" rIns="18288" bIns="9144">
+            <a:spAutoFit/>
+          </a:bodyPr>
+          <a:lstStyle/>
+          <a:p>
+            <a:pPr algn="ctr">
+              <a:defRPr sz="1300" b="1">
+                <a:solidFill>
+                  <a:srgbClr val="182228"/>
+                </a:solidFill>
+                <a:latin typeface="Aptos"/>
+              </a:defRPr>
+            </a:pPr>
+            <a:r>
+              <a:t>Mask</a:t>
+            </a:r>
+          </a:p>
+        </p:txBody>
+      </p:sp>
+      <p:sp>
+        <p:nvSpPr>
+          <p:cNvPr id="13" name="Rounded Rectangle 12"/>
           <p:cNvSpPr/>
           <p:nvPr/>
         </p:nvSpPr>
         <p:spPr>
           <a:xfrm>
-            <a:off x="8001000" y="1508760"/>
-            <a:ext cx="3657600" cy="2331720"/>
+            <a:off x="6318504" y="1691640"/>
+            <a:ext cx="2606040" cy="3886200"/>
           </a:xfrm>
           <a:prstGeom prst="roundRect">
             <a:avLst/>
@@ -7357,7 +7382,7 @@
           </a:solidFill>
           <a:ln w="8890">
             <a:solidFill>
-              <a:srgbClr val="D6DEDE"/>
+              <a:srgbClr val="D2DBDB"/>
             </a:solidFill>
           </a:ln>
         </p:spPr>
@@ -7386,7 +7411,7 @@
       </p:sp>
       <p:pic>
         <p:nvPicPr>
-          <p:cNvPr id="12" name="Picture 11" descr="yolo_brightness_contrast_level_map50_graph.png"/>
+          <p:cNvPr id="14" name="Picture 13" descr="task3_yolo_distorted_gaussian_noise_15db_example.jpg"/>
           <p:cNvPicPr>
             <a:picLocks noChangeAspect="1"/>
           </p:cNvPicPr>
@@ -7400,8 +7425,8 @@
         </p:blipFill>
         <p:spPr>
           <a:xfrm>
-            <a:off x="8001000" y="1658619"/>
-            <a:ext cx="3657600" cy="2032000"/>
+            <a:off x="6483096" y="2034540"/>
+            <a:ext cx="2286000" cy="2286000"/>
           </a:xfrm>
           <a:prstGeom prst="rect">
             <a:avLst/>
@@ -7410,31 +7435,28 @@
       </p:pic>
       <p:sp>
         <p:nvSpPr>
-          <p:cNvPr id="13" name="TextBox 12"/>
-          <p:cNvSpPr txBox="1"/>
-          <p:nvPr/>
-        </p:nvSpPr>
-        <p:spPr>
-          <a:xfrm>
-            <a:off x="868680" y="4480560"/>
-            <a:ext cx="10241280" cy="594360"/>
-          </a:xfrm>
-          <a:prstGeom prst="rect">
-            <a:avLst/>
-          </a:prstGeom>
-          <a:noFill/>
-        </p:spPr>
-        <p:txBody>
-          <a:bodyPr wrap="square">
-            <a:spAutoFit/>
-          </a:bodyPr>
-          <a:lstStyle/>
-          <a:p>
-            <a:pPr>
-              <a:spcAft>
-                <a:spcPts val="800"/>
-              </a:spcAft>
-              <a:defRPr sz="1300">
+          <p:cNvPr id="15" name="TextBox 14"/>
+          <p:cNvSpPr txBox="1"/>
+          <p:nvPr/>
+        </p:nvSpPr>
+        <p:spPr>
+          <a:xfrm>
+            <a:off x="6547104" y="4956048"/>
+            <a:ext cx="2148840" cy="228600"/>
+          </a:xfrm>
+          <a:prstGeom prst="rect">
+            <a:avLst/>
+          </a:prstGeom>
+          <a:noFill/>
+        </p:spPr>
+        <p:txBody>
+          <a:bodyPr wrap="none" lIns="18288" tIns="9144" rIns="18288" bIns="9144">
+            <a:spAutoFit/>
+          </a:bodyPr>
+          <a:lstStyle/>
+          <a:p>
+            <a:pPr algn="ctr">
+              <a:defRPr sz="1300" b="1">
                 <a:solidFill>
                   <a:srgbClr val="182228"/>
                 </a:solidFill>
@@ -7442,7 +7464,113 @@
               </a:defRPr>
             </a:pPr>
             <a:r>
-              <a:t>Main metric: mask mAP50. Fine-tuned YOLO models are trained on matching distorted data; restored images test pre-processing recovery.</a:t>
+              <a:t>Distorted</a:t>
+            </a:r>
+          </a:p>
+        </p:txBody>
+      </p:sp>
+      <p:sp>
+        <p:nvSpPr>
+          <p:cNvPr id="16" name="Rounded Rectangle 15"/>
+          <p:cNvSpPr/>
+          <p:nvPr/>
+        </p:nvSpPr>
+        <p:spPr>
+          <a:xfrm>
+            <a:off x="9226296" y="1691640"/>
+            <a:ext cx="2606040" cy="3886200"/>
+          </a:xfrm>
+          <a:prstGeom prst="roundRect">
+            <a:avLst/>
+          </a:prstGeom>
+          <a:solidFill>
+            <a:srgbClr val="FFFFFF"/>
+          </a:solidFill>
+          <a:ln w="8890">
+            <a:solidFill>
+              <a:srgbClr val="D2DBDB"/>
+            </a:solidFill>
+          </a:ln>
+        </p:spPr>
+        <p:style>
+          <a:lnRef idx="1">
+            <a:schemeClr val="accent1"/>
+          </a:lnRef>
+          <a:fillRef idx="3">
+            <a:schemeClr val="accent1"/>
+          </a:fillRef>
+          <a:effectRef idx="2">
+            <a:schemeClr val="accent1"/>
+          </a:effectRef>
+          <a:fontRef idx="minor">
+            <a:schemeClr val="lt1"/>
+          </a:fontRef>
+        </p:style>
+        <p:txBody>
+          <a:bodyPr rtlCol="0" anchor="ctr"/>
+          <a:lstStyle/>
+          <a:p>
+            <a:pPr algn="ctr"/>
+            <a:endParaRPr/>
+          </a:p>
+        </p:txBody>
+      </p:sp>
+      <p:pic>
+        <p:nvPicPr>
+          <p:cNvPr id="17" name="Picture 16" descr="task3_yolo_restored_gaussian_noise_15db_example.jpg"/>
+          <p:cNvPicPr>
+            <a:picLocks noChangeAspect="1"/>
+          </p:cNvPicPr>
+          <p:nvPr/>
+        </p:nvPicPr>
+        <p:blipFill>
+          <a:blip r:embed="rId5"/>
+          <a:stretch>
+            <a:fillRect/>
+          </a:stretch>
+        </p:blipFill>
+        <p:spPr>
+          <a:xfrm>
+            <a:off x="9390888" y="2034540"/>
+            <a:ext cx="2286000" cy="2286000"/>
+          </a:xfrm>
+          <a:prstGeom prst="rect">
+            <a:avLst/>
+          </a:prstGeom>
+        </p:spPr>
+      </p:pic>
+      <p:sp>
+        <p:nvSpPr>
+          <p:cNvPr id="18" name="TextBox 17"/>
+          <p:cNvSpPr txBox="1"/>
+          <p:nvPr/>
+        </p:nvSpPr>
+        <p:spPr>
+          <a:xfrm>
+            <a:off x="9454896" y="4956048"/>
+            <a:ext cx="2148840" cy="228600"/>
+          </a:xfrm>
+          <a:prstGeom prst="rect">
+            <a:avLst/>
+          </a:prstGeom>
+          <a:noFill/>
+        </p:spPr>
+        <p:txBody>
+          <a:bodyPr wrap="none" lIns="18288" tIns="9144" rIns="18288" bIns="9144">
+            <a:spAutoFit/>
+          </a:bodyPr>
+          <a:lstStyle/>
+          <a:p>
+            <a:pPr algn="ctr">
+              <a:defRPr sz="1300" b="1">
+                <a:solidFill>
+                  <a:srgbClr val="182228"/>
+                </a:solidFill>
+                <a:latin typeface="Aptos"/>
+              </a:defRPr>
+            </a:pPr>
+            <a:r>
+              <a:t>Restored</a:t>
             </a:r>
           </a:p>
         </p:txBody>
@@ -7461,7 +7589,7 @@
     <p:bg>
       <p:bgPr>
         <a:solidFill>
-          <a:srgbClr val="1B262C"/>
+          <a:srgbClr val="F7F9F7"/>
         </a:solidFill>
         <a:effectLst/>
       </p:bgPr>
@@ -7488,8 +7616,8 @@
         </p:nvSpPr>
         <p:spPr>
           <a:xfrm>
-            <a:off x="685800" y="640080"/>
-            <a:ext cx="4754880" cy="502920"/>
+            <a:off x="502920" y="320040"/>
+            <a:ext cx="4572000" cy="256032"/>
           </a:xfrm>
           <a:prstGeom prst="rect">
             <a:avLst/>
@@ -7503,15 +7631,15 @@
           <a:lstStyle/>
           <a:p>
             <a:pPr>
-              <a:defRPr sz="3200" b="1">
-                <a:solidFill>
-                  <a:srgbClr val="FFFFFF"/>
-                </a:solidFill>
-                <a:latin typeface="Aptos"/>
-              </a:defRPr>
-            </a:pPr>
-            <a:r>
-              <a:t>Conclusion</a:t>
+              <a:defRPr sz="900" b="1">
+                <a:solidFill>
+                  <a:srgbClr val="008074"/>
+                </a:solidFill>
+                <a:latin typeface="Aptos"/>
+              </a:defRPr>
+            </a:pPr>
+            <a:r>
+              <a:t>TASK 3 | YOLO MAP50</a:t>
             </a:r>
           </a:p>
         </p:txBody>
@@ -7524,8 +7652,8 @@
         </p:nvSpPr>
         <p:spPr>
           <a:xfrm>
-            <a:off x="731520" y="1325880"/>
-            <a:ext cx="9875520" cy="384048"/>
+            <a:off x="502920" y="640080"/>
+            <a:ext cx="8961120" cy="603504"/>
           </a:xfrm>
           <a:prstGeom prst="rect">
             <a:avLst/>
@@ -7539,15 +7667,15 @@
           <a:lstStyle/>
           <a:p>
             <a:pPr>
-              <a:defRPr sz="1700" b="0">
-                <a:solidFill>
-                  <a:srgbClr val="E2EBE8"/>
-                </a:solidFill>
-                <a:latin typeface="Aptos"/>
-              </a:defRPr>
-            </a:pPr>
-            <a:r>
-              <a:t>Robustness should be measured across clean, distorted, restored, and fine-tuned settings.</a:t>
+              <a:defRPr sz="2400" b="1">
+                <a:solidFill>
+                  <a:srgbClr val="182228"/>
+                </a:solidFill>
+                <a:latin typeface="Aptos"/>
+              </a:defRPr>
+            </a:pPr>
+            <a:r>
+              <a:t>Clean YOLO is the reference line; distortion and fine-tuning reveal robustness.</a:t>
             </a:r>
           </a:p>
         </p:txBody>
@@ -7560,8 +7688,8 @@
         </p:nvSpPr>
         <p:spPr>
           <a:xfrm>
-            <a:off x="914400" y="2240280"/>
-            <a:ext cx="2743200" cy="274320"/>
+            <a:off x="521207" y="1225296"/>
+            <a:ext cx="9052560" cy="292608"/>
           </a:xfrm>
           <a:prstGeom prst="rect">
             <a:avLst/>
@@ -7575,15 +7703,15 @@
           <a:lstStyle/>
           <a:p>
             <a:pPr>
-              <a:defRPr sz="1500" b="1">
-                <a:solidFill>
-                  <a:srgbClr val="2666AC"/>
-                </a:solidFill>
-                <a:latin typeface="Aptos"/>
-              </a:defRPr>
-            </a:pPr>
-            <a:r>
-              <a:t>Task 1 | Super-resolution</a:t>
+              <a:defRPr sz="1050" b="0">
+                <a:solidFill>
+                  <a:srgbClr val="56636B"/>
+                </a:solidFill>
+                <a:latin typeface="Aptos"/>
+              </a:defRPr>
+            </a:pPr>
+            <a:r>
+              <a:t>mAP50 is shown separately for gaussian noise, blur, and brightness/contrast levels.</a:t>
             </a:r>
           </a:p>
         </p:txBody>
@@ -7596,8 +7724,8 @@
         </p:nvSpPr>
         <p:spPr>
           <a:xfrm>
-            <a:off x="3703320" y="2240280"/>
-            <a:ext cx="7223760" cy="320040"/>
+            <a:off x="9692640" y="347472"/>
+            <a:ext cx="1920240" cy="228600"/>
           </a:xfrm>
           <a:prstGeom prst="rect">
             <a:avLst/>
@@ -7610,196 +7738,301 @@
           </a:bodyPr>
           <a:lstStyle/>
           <a:p>
+            <a:pPr algn="r">
+              <a:defRPr sz="850" b="0">
+                <a:solidFill>
+                  <a:srgbClr val="56636B"/>
+                </a:solidFill>
+                <a:latin typeface="Aptos"/>
+              </a:defRPr>
+            </a:pPr>
+            <a:r>
+              <a:t>Brain MRI robustness</a:t>
+            </a:r>
+          </a:p>
+        </p:txBody>
+      </p:sp>
+      <p:sp>
+        <p:nvSpPr>
+          <p:cNvPr id="6" name="TextBox 5"/>
+          <p:cNvSpPr txBox="1"/>
+          <p:nvPr/>
+        </p:nvSpPr>
+        <p:spPr>
+          <a:xfrm>
+            <a:off x="11292840" y="6446520"/>
+            <a:ext cx="411480" cy="182880"/>
+          </a:xfrm>
+          <a:prstGeom prst="rect">
+            <a:avLst/>
+          </a:prstGeom>
+          <a:noFill/>
+        </p:spPr>
+        <p:txBody>
+          <a:bodyPr wrap="none" lIns="18288" tIns="9144" rIns="18288" bIns="9144">
+            <a:spAutoFit/>
+          </a:bodyPr>
+          <a:lstStyle/>
+          <a:p>
+            <a:pPr algn="r">
+              <a:defRPr sz="800" b="0">
+                <a:solidFill>
+                  <a:srgbClr val="56636B"/>
+                </a:solidFill>
+                <a:latin typeface="Aptos"/>
+              </a:defRPr>
+            </a:pPr>
+            <a:r>
+              <a:t>17</a:t>
+            </a:r>
+          </a:p>
+        </p:txBody>
+      </p:sp>
+      <p:sp>
+        <p:nvSpPr>
+          <p:cNvPr id="7" name="Rounded Rectangle 6"/>
+          <p:cNvSpPr/>
+          <p:nvPr/>
+        </p:nvSpPr>
+        <p:spPr>
+          <a:xfrm>
+            <a:off x="502920" y="1508760"/>
+            <a:ext cx="3657600" cy="2331720"/>
+          </a:xfrm>
+          <a:prstGeom prst="roundRect">
+            <a:avLst/>
+          </a:prstGeom>
+          <a:solidFill>
+            <a:srgbClr val="FFFFFF"/>
+          </a:solidFill>
+          <a:ln w="8890">
+            <a:solidFill>
+              <a:srgbClr val="D6DEDE"/>
+            </a:solidFill>
+          </a:ln>
+        </p:spPr>
+        <p:style>
+          <a:lnRef idx="1">
+            <a:schemeClr val="accent1"/>
+          </a:lnRef>
+          <a:fillRef idx="3">
+            <a:schemeClr val="accent1"/>
+          </a:fillRef>
+          <a:effectRef idx="2">
+            <a:schemeClr val="accent1"/>
+          </a:effectRef>
+          <a:fontRef idx="minor">
+            <a:schemeClr val="lt1"/>
+          </a:fontRef>
+        </p:style>
+        <p:txBody>
+          <a:bodyPr rtlCol="0" anchor="ctr"/>
+          <a:lstStyle/>
+          <a:p>
+            <a:pPr algn="ctr"/>
+            <a:endParaRPr/>
+          </a:p>
+        </p:txBody>
+      </p:sp>
+      <p:pic>
+        <p:nvPicPr>
+          <p:cNvPr id="8" name="Picture 7" descr="yolo_gaussian_noise_snr_map50_graph.png"/>
+          <p:cNvPicPr>
+            <a:picLocks noChangeAspect="1"/>
+          </p:cNvPicPr>
+          <p:nvPr/>
+        </p:nvPicPr>
+        <p:blipFill>
+          <a:blip r:embed="rId2"/>
+          <a:stretch>
+            <a:fillRect/>
+          </a:stretch>
+        </p:blipFill>
+        <p:spPr>
+          <a:xfrm>
+            <a:off x="502920" y="1658619"/>
+            <a:ext cx="3657600" cy="2032000"/>
+          </a:xfrm>
+          <a:prstGeom prst="rect">
+            <a:avLst/>
+          </a:prstGeom>
+        </p:spPr>
+      </p:pic>
+      <p:sp>
+        <p:nvSpPr>
+          <p:cNvPr id="9" name="Rounded Rectangle 8"/>
+          <p:cNvSpPr/>
+          <p:nvPr/>
+        </p:nvSpPr>
+        <p:spPr>
+          <a:xfrm>
+            <a:off x="4251960" y="1508760"/>
+            <a:ext cx="3657600" cy="2331720"/>
+          </a:xfrm>
+          <a:prstGeom prst="roundRect">
+            <a:avLst/>
+          </a:prstGeom>
+          <a:solidFill>
+            <a:srgbClr val="FFFFFF"/>
+          </a:solidFill>
+          <a:ln w="8890">
+            <a:solidFill>
+              <a:srgbClr val="D6DEDE"/>
+            </a:solidFill>
+          </a:ln>
+        </p:spPr>
+        <p:style>
+          <a:lnRef idx="1">
+            <a:schemeClr val="accent1"/>
+          </a:lnRef>
+          <a:fillRef idx="3">
+            <a:schemeClr val="accent1"/>
+          </a:fillRef>
+          <a:effectRef idx="2">
+            <a:schemeClr val="accent1"/>
+          </a:effectRef>
+          <a:fontRef idx="minor">
+            <a:schemeClr val="lt1"/>
+          </a:fontRef>
+        </p:style>
+        <p:txBody>
+          <a:bodyPr rtlCol="0" anchor="ctr"/>
+          <a:lstStyle/>
+          <a:p>
+            <a:pPr algn="ctr"/>
+            <a:endParaRPr/>
+          </a:p>
+        </p:txBody>
+      </p:sp>
+      <p:pic>
+        <p:nvPicPr>
+          <p:cNvPr id="10" name="Picture 9" descr="yolo_gaussian_blur_sigma_map50_graph.png"/>
+          <p:cNvPicPr>
+            <a:picLocks noChangeAspect="1"/>
+          </p:cNvPicPr>
+          <p:nvPr/>
+        </p:nvPicPr>
+        <p:blipFill>
+          <a:blip r:embed="rId3"/>
+          <a:stretch>
+            <a:fillRect/>
+          </a:stretch>
+        </p:blipFill>
+        <p:spPr>
+          <a:xfrm>
+            <a:off x="4251960" y="1658619"/>
+            <a:ext cx="3657600" cy="2032000"/>
+          </a:xfrm>
+          <a:prstGeom prst="rect">
+            <a:avLst/>
+          </a:prstGeom>
+        </p:spPr>
+      </p:pic>
+      <p:sp>
+        <p:nvSpPr>
+          <p:cNvPr id="11" name="Rounded Rectangle 10"/>
+          <p:cNvSpPr/>
+          <p:nvPr/>
+        </p:nvSpPr>
+        <p:spPr>
+          <a:xfrm>
+            <a:off x="8001000" y="1508760"/>
+            <a:ext cx="3657600" cy="2331720"/>
+          </a:xfrm>
+          <a:prstGeom prst="roundRect">
+            <a:avLst/>
+          </a:prstGeom>
+          <a:solidFill>
+            <a:srgbClr val="FFFFFF"/>
+          </a:solidFill>
+          <a:ln w="8890">
+            <a:solidFill>
+              <a:srgbClr val="D6DEDE"/>
+            </a:solidFill>
+          </a:ln>
+        </p:spPr>
+        <p:style>
+          <a:lnRef idx="1">
+            <a:schemeClr val="accent1"/>
+          </a:lnRef>
+          <a:fillRef idx="3">
+            <a:schemeClr val="accent1"/>
+          </a:fillRef>
+          <a:effectRef idx="2">
+            <a:schemeClr val="accent1"/>
+          </a:effectRef>
+          <a:fontRef idx="minor">
+            <a:schemeClr val="lt1"/>
+          </a:fontRef>
+        </p:style>
+        <p:txBody>
+          <a:bodyPr rtlCol="0" anchor="ctr"/>
+          <a:lstStyle/>
+          <a:p>
+            <a:pPr algn="ctr"/>
+            <a:endParaRPr/>
+          </a:p>
+        </p:txBody>
+      </p:sp>
+      <p:pic>
+        <p:nvPicPr>
+          <p:cNvPr id="12" name="Picture 11" descr="yolo_brightness_contrast_level_map50_graph.png"/>
+          <p:cNvPicPr>
+            <a:picLocks noChangeAspect="1"/>
+          </p:cNvPicPr>
+          <p:nvPr/>
+        </p:nvPicPr>
+        <p:blipFill>
+          <a:blip r:embed="rId4"/>
+          <a:stretch>
+            <a:fillRect/>
+          </a:stretch>
+        </p:blipFill>
+        <p:spPr>
+          <a:xfrm>
+            <a:off x="8001000" y="1658619"/>
+            <a:ext cx="3657600" cy="2032000"/>
+          </a:xfrm>
+          <a:prstGeom prst="rect">
+            <a:avLst/>
+          </a:prstGeom>
+        </p:spPr>
+      </p:pic>
+      <p:sp>
+        <p:nvSpPr>
+          <p:cNvPr id="13" name="TextBox 12"/>
+          <p:cNvSpPr txBox="1"/>
+          <p:nvPr/>
+        </p:nvSpPr>
+        <p:spPr>
+          <a:xfrm>
+            <a:off x="868680" y="4480560"/>
+            <a:ext cx="10241280" cy="594360"/>
+          </a:xfrm>
+          <a:prstGeom prst="rect">
+            <a:avLst/>
+          </a:prstGeom>
+          <a:noFill/>
+        </p:spPr>
+        <p:txBody>
+          <a:bodyPr wrap="square">
+            <a:spAutoFit/>
+          </a:bodyPr>
+          <a:lstStyle/>
+          <a:p>
             <a:pPr>
-              <a:defRPr sz="1350" b="0">
-                <a:solidFill>
-                  <a:srgbClr val="FFFFFF"/>
-                </a:solidFill>
-                <a:latin typeface="Aptos"/>
-              </a:defRPr>
-            </a:pPr>
-            <a:r>
-              <a:t>Best when image structure remains; restoration often raises PSNR before sharpened_lanczos.</a:t>
-            </a:r>
-          </a:p>
-        </p:txBody>
-      </p:sp>
-      <p:sp>
-        <p:nvSpPr>
-          <p:cNvPr id="6" name="TextBox 5"/>
-          <p:cNvSpPr txBox="1"/>
-          <p:nvPr/>
-        </p:nvSpPr>
-        <p:spPr>
-          <a:xfrm>
-            <a:off x="914400" y="3291840"/>
-            <a:ext cx="2743200" cy="274320"/>
-          </a:xfrm>
-          <a:prstGeom prst="rect">
-            <a:avLst/>
-          </a:prstGeom>
-          <a:noFill/>
-        </p:spPr>
-        <p:txBody>
-          <a:bodyPr wrap="none" lIns="18288" tIns="9144" rIns="18288" bIns="9144">
-            <a:spAutoFit/>
-          </a:bodyPr>
-          <a:lstStyle/>
-          <a:p>
-            <a:pPr>
-              <a:defRPr sz="1500" b="1">
-                <a:solidFill>
-                  <a:srgbClr val="008074"/>
-                </a:solidFill>
-                <a:latin typeface="Aptos"/>
-              </a:defRPr>
-            </a:pPr>
-            <a:r>
-              <a:t>Task 2 | CNN</a:t>
-            </a:r>
-          </a:p>
-        </p:txBody>
-      </p:sp>
-      <p:sp>
-        <p:nvSpPr>
-          <p:cNvPr id="7" name="TextBox 6"/>
-          <p:cNvSpPr txBox="1"/>
-          <p:nvPr/>
-        </p:nvSpPr>
-        <p:spPr>
-          <a:xfrm>
-            <a:off x="3703320" y="3291840"/>
-            <a:ext cx="7223760" cy="320040"/>
-          </a:xfrm>
-          <a:prstGeom prst="rect">
-            <a:avLst/>
-          </a:prstGeom>
-          <a:noFill/>
-        </p:spPr>
-        <p:txBody>
-          <a:bodyPr wrap="none" lIns="18288" tIns="9144" rIns="18288" bIns="9144">
-            <a:spAutoFit/>
-          </a:bodyPr>
-          <a:lstStyle/>
-          <a:p>
-            <a:pPr>
-              <a:defRPr sz="1350" b="0">
-                <a:solidFill>
-                  <a:srgbClr val="FFFFFF"/>
-                </a:solidFill>
-                <a:latin typeface="Aptos"/>
-              </a:defRPr>
-            </a:pPr>
-            <a:r>
-              <a:t>Augmentation improved clean accuracy slightly; salt-and-pepper remains the hardest distortion.</a:t>
-            </a:r>
-          </a:p>
-        </p:txBody>
-      </p:sp>
-      <p:sp>
-        <p:nvSpPr>
-          <p:cNvPr id="8" name="TextBox 7"/>
-          <p:cNvSpPr txBox="1"/>
-          <p:nvPr/>
-        </p:nvSpPr>
-        <p:spPr>
-          <a:xfrm>
-            <a:off x="914400" y="4343400"/>
-            <a:ext cx="2743200" cy="274320"/>
-          </a:xfrm>
-          <a:prstGeom prst="rect">
-            <a:avLst/>
-          </a:prstGeom>
-          <a:noFill/>
-        </p:spPr>
-        <p:txBody>
-          <a:bodyPr wrap="none" lIns="18288" tIns="9144" rIns="18288" bIns="9144">
-            <a:spAutoFit/>
-          </a:bodyPr>
-          <a:lstStyle/>
-          <a:p>
-            <a:pPr>
-              <a:defRPr sz="1500" b="1">
-                <a:solidFill>
-                  <a:srgbClr val="B2483E"/>
-                </a:solidFill>
-                <a:latin typeface="Aptos"/>
-              </a:defRPr>
-            </a:pPr>
-            <a:r>
-              <a:t>Task 3 | YOLO</a:t>
-            </a:r>
-          </a:p>
-        </p:txBody>
-      </p:sp>
-      <p:sp>
-        <p:nvSpPr>
-          <p:cNvPr id="9" name="TextBox 8"/>
-          <p:cNvSpPr txBox="1"/>
-          <p:nvPr/>
-        </p:nvSpPr>
-        <p:spPr>
-          <a:xfrm>
-            <a:off x="3703320" y="4343400"/>
-            <a:ext cx="7223760" cy="320040"/>
-          </a:xfrm>
-          <a:prstGeom prst="rect">
-            <a:avLst/>
-          </a:prstGeom>
-          <a:noFill/>
-        </p:spPr>
-        <p:txBody>
-          <a:bodyPr wrap="none" lIns="18288" tIns="9144" rIns="18288" bIns="9144">
-            <a:spAutoFit/>
-          </a:bodyPr>
-          <a:lstStyle/>
-          <a:p>
-            <a:pPr>
-              <a:defRPr sz="1350" b="0">
-                <a:solidFill>
-                  <a:srgbClr val="FFFFFF"/>
-                </a:solidFill>
-                <a:latin typeface="Aptos"/>
-              </a:defRPr>
-            </a:pPr>
-            <a:r>
-              <a:t>Mask training enables tumor marking; fine-tuning improves robustness on distorted data.</a:t>
-            </a:r>
-          </a:p>
-        </p:txBody>
-      </p:sp>
-      <p:sp>
-        <p:nvSpPr>
-          <p:cNvPr id="10" name="TextBox 9"/>
-          <p:cNvSpPr txBox="1"/>
-          <p:nvPr/>
-        </p:nvSpPr>
-        <p:spPr>
-          <a:xfrm>
-            <a:off x="914400" y="5852160"/>
-            <a:ext cx="10332720" cy="320040"/>
-          </a:xfrm>
-          <a:prstGeom prst="rect">
-            <a:avLst/>
-          </a:prstGeom>
-          <a:noFill/>
-        </p:spPr>
-        <p:txBody>
-          <a:bodyPr wrap="none" lIns="18288" tIns="9144" rIns="18288" bIns="9144">
-            <a:spAutoFit/>
-          </a:bodyPr>
-          <a:lstStyle/>
-          <a:p>
-            <a:pPr>
-              <a:defRPr sz="1300" b="0">
-                <a:solidFill>
-                  <a:srgbClr val="D2DCDA"/>
-                </a:solidFill>
-                <a:latin typeface="Aptos"/>
-              </a:defRPr>
-            </a:pPr>
-            <a:r>
-              <a:t>Main takeaway: restoration is useful, but for deep-learning tasks, distortion-aware fine-tuning is usually the stronger improvement.</a:t>
+              <a:spcAft>
+                <a:spcPts val="800"/>
+              </a:spcAft>
+              <a:defRPr sz="1300">
+                <a:solidFill>
+                  <a:srgbClr val="182228"/>
+                </a:solidFill>
+                <a:latin typeface="Aptos"/>
+              </a:defRPr>
+            </a:pPr>
+            <a:r>
+              <a:t>Main metric: mask mAP50. Fine-tuned YOLO models are trained on matching distorted data; restored images test pre-processing recovery.</a:t>
             </a:r>
           </a:p>
         </p:txBody>
@@ -8179,6 +8412,363 @@
 </file>
 
 <file path=ppt/slides/slide20.xml><?xml version="1.0" encoding="utf-8"?>
+<p:sld xmlns:a="http://schemas.openxmlformats.org/drawingml/2006/main" xmlns:r="http://schemas.openxmlformats.org/officeDocument/2006/relationships" xmlns:p="http://schemas.openxmlformats.org/presentationml/2006/main">
+  <p:cSld>
+    <p:bg>
+      <p:bgPr>
+        <a:solidFill>
+          <a:srgbClr val="1B262C"/>
+        </a:solidFill>
+        <a:effectLst/>
+      </p:bgPr>
+    </p:bg>
+    <p:spTree>
+      <p:nvGrpSpPr>
+        <p:cNvPr id="1" name=""/>
+        <p:cNvGrpSpPr/>
+        <p:nvPr/>
+      </p:nvGrpSpPr>
+      <p:grpSpPr>
+        <a:xfrm>
+          <a:off x="0" y="0"/>
+          <a:ext cx="0" cy="0"/>
+          <a:chOff x="0" y="0"/>
+          <a:chExt cx="0" cy="0"/>
+        </a:xfrm>
+      </p:grpSpPr>
+      <p:sp>
+        <p:nvSpPr>
+          <p:cNvPr id="2" name="TextBox 1"/>
+          <p:cNvSpPr txBox="1"/>
+          <p:nvPr/>
+        </p:nvSpPr>
+        <p:spPr>
+          <a:xfrm>
+            <a:off x="685800" y="640080"/>
+            <a:ext cx="4754880" cy="502920"/>
+          </a:xfrm>
+          <a:prstGeom prst="rect">
+            <a:avLst/>
+          </a:prstGeom>
+          <a:noFill/>
+        </p:spPr>
+        <p:txBody>
+          <a:bodyPr wrap="none" lIns="18288" tIns="9144" rIns="18288" bIns="9144">
+            <a:spAutoFit/>
+          </a:bodyPr>
+          <a:lstStyle/>
+          <a:p>
+            <a:pPr>
+              <a:defRPr sz="3200" b="1">
+                <a:solidFill>
+                  <a:srgbClr val="FFFFFF"/>
+                </a:solidFill>
+                <a:latin typeface="Aptos"/>
+              </a:defRPr>
+            </a:pPr>
+            <a:r>
+              <a:t>Conclusion</a:t>
+            </a:r>
+          </a:p>
+        </p:txBody>
+      </p:sp>
+      <p:sp>
+        <p:nvSpPr>
+          <p:cNvPr id="3" name="TextBox 2"/>
+          <p:cNvSpPr txBox="1"/>
+          <p:nvPr/>
+        </p:nvSpPr>
+        <p:spPr>
+          <a:xfrm>
+            <a:off x="731520" y="1325880"/>
+            <a:ext cx="9875520" cy="384048"/>
+          </a:xfrm>
+          <a:prstGeom prst="rect">
+            <a:avLst/>
+          </a:prstGeom>
+          <a:noFill/>
+        </p:spPr>
+        <p:txBody>
+          <a:bodyPr wrap="none" lIns="18288" tIns="9144" rIns="18288" bIns="9144">
+            <a:spAutoFit/>
+          </a:bodyPr>
+          <a:lstStyle/>
+          <a:p>
+            <a:pPr>
+              <a:defRPr sz="1700" b="0">
+                <a:solidFill>
+                  <a:srgbClr val="E2EBE8"/>
+                </a:solidFill>
+                <a:latin typeface="Aptos"/>
+              </a:defRPr>
+            </a:pPr>
+            <a:r>
+              <a:t>Robustness should be measured across clean, distorted, restored, and fine-tuned settings.</a:t>
+            </a:r>
+          </a:p>
+        </p:txBody>
+      </p:sp>
+      <p:sp>
+        <p:nvSpPr>
+          <p:cNvPr id="4" name="TextBox 3"/>
+          <p:cNvSpPr txBox="1"/>
+          <p:nvPr/>
+        </p:nvSpPr>
+        <p:spPr>
+          <a:xfrm>
+            <a:off x="914400" y="2240280"/>
+            <a:ext cx="2743200" cy="274320"/>
+          </a:xfrm>
+          <a:prstGeom prst="rect">
+            <a:avLst/>
+          </a:prstGeom>
+          <a:noFill/>
+        </p:spPr>
+        <p:txBody>
+          <a:bodyPr wrap="none" lIns="18288" tIns="9144" rIns="18288" bIns="9144">
+            <a:spAutoFit/>
+          </a:bodyPr>
+          <a:lstStyle/>
+          <a:p>
+            <a:pPr>
+              <a:defRPr sz="1500" b="1">
+                <a:solidFill>
+                  <a:srgbClr val="2666AC"/>
+                </a:solidFill>
+                <a:latin typeface="Aptos"/>
+              </a:defRPr>
+            </a:pPr>
+            <a:r>
+              <a:t>Task 1 | Super-resolution</a:t>
+            </a:r>
+          </a:p>
+        </p:txBody>
+      </p:sp>
+      <p:sp>
+        <p:nvSpPr>
+          <p:cNvPr id="5" name="TextBox 4"/>
+          <p:cNvSpPr txBox="1"/>
+          <p:nvPr/>
+        </p:nvSpPr>
+        <p:spPr>
+          <a:xfrm>
+            <a:off x="3703320" y="2240280"/>
+            <a:ext cx="7223760" cy="320040"/>
+          </a:xfrm>
+          <a:prstGeom prst="rect">
+            <a:avLst/>
+          </a:prstGeom>
+          <a:noFill/>
+        </p:spPr>
+        <p:txBody>
+          <a:bodyPr wrap="none" lIns="18288" tIns="9144" rIns="18288" bIns="9144">
+            <a:spAutoFit/>
+          </a:bodyPr>
+          <a:lstStyle/>
+          <a:p>
+            <a:pPr>
+              <a:defRPr sz="1350" b="0">
+                <a:solidFill>
+                  <a:srgbClr val="FFFFFF"/>
+                </a:solidFill>
+                <a:latin typeface="Aptos"/>
+              </a:defRPr>
+            </a:pPr>
+            <a:r>
+              <a:t>Best when image structure remains; restoration often raises PSNR before sharpened_lanczos.</a:t>
+            </a:r>
+          </a:p>
+        </p:txBody>
+      </p:sp>
+      <p:sp>
+        <p:nvSpPr>
+          <p:cNvPr id="6" name="TextBox 5"/>
+          <p:cNvSpPr txBox="1"/>
+          <p:nvPr/>
+        </p:nvSpPr>
+        <p:spPr>
+          <a:xfrm>
+            <a:off x="914400" y="3291840"/>
+            <a:ext cx="2743200" cy="274320"/>
+          </a:xfrm>
+          <a:prstGeom prst="rect">
+            <a:avLst/>
+          </a:prstGeom>
+          <a:noFill/>
+        </p:spPr>
+        <p:txBody>
+          <a:bodyPr wrap="none" lIns="18288" tIns="9144" rIns="18288" bIns="9144">
+            <a:spAutoFit/>
+          </a:bodyPr>
+          <a:lstStyle/>
+          <a:p>
+            <a:pPr>
+              <a:defRPr sz="1500" b="1">
+                <a:solidFill>
+                  <a:srgbClr val="008074"/>
+                </a:solidFill>
+                <a:latin typeface="Aptos"/>
+              </a:defRPr>
+            </a:pPr>
+            <a:r>
+              <a:t>Task 2 | CNN</a:t>
+            </a:r>
+          </a:p>
+        </p:txBody>
+      </p:sp>
+      <p:sp>
+        <p:nvSpPr>
+          <p:cNvPr id="7" name="TextBox 6"/>
+          <p:cNvSpPr txBox="1"/>
+          <p:nvPr/>
+        </p:nvSpPr>
+        <p:spPr>
+          <a:xfrm>
+            <a:off x="3703320" y="3291840"/>
+            <a:ext cx="7223760" cy="320040"/>
+          </a:xfrm>
+          <a:prstGeom prst="rect">
+            <a:avLst/>
+          </a:prstGeom>
+          <a:noFill/>
+        </p:spPr>
+        <p:txBody>
+          <a:bodyPr wrap="none" lIns="18288" tIns="9144" rIns="18288" bIns="9144">
+            <a:spAutoFit/>
+          </a:bodyPr>
+          <a:lstStyle/>
+          <a:p>
+            <a:pPr>
+              <a:defRPr sz="1350" b="0">
+                <a:solidFill>
+                  <a:srgbClr val="FFFFFF"/>
+                </a:solidFill>
+                <a:latin typeface="Aptos"/>
+              </a:defRPr>
+            </a:pPr>
+            <a:r>
+              <a:t>Augmentation improved clean accuracy slightly; salt-and-pepper remains the hardest distortion.</a:t>
+            </a:r>
+          </a:p>
+        </p:txBody>
+      </p:sp>
+      <p:sp>
+        <p:nvSpPr>
+          <p:cNvPr id="8" name="TextBox 7"/>
+          <p:cNvSpPr txBox="1"/>
+          <p:nvPr/>
+        </p:nvSpPr>
+        <p:spPr>
+          <a:xfrm>
+            <a:off x="914400" y="4343400"/>
+            <a:ext cx="2743200" cy="274320"/>
+          </a:xfrm>
+          <a:prstGeom prst="rect">
+            <a:avLst/>
+          </a:prstGeom>
+          <a:noFill/>
+        </p:spPr>
+        <p:txBody>
+          <a:bodyPr wrap="none" lIns="18288" tIns="9144" rIns="18288" bIns="9144">
+            <a:spAutoFit/>
+          </a:bodyPr>
+          <a:lstStyle/>
+          <a:p>
+            <a:pPr>
+              <a:defRPr sz="1500" b="1">
+                <a:solidFill>
+                  <a:srgbClr val="B2483E"/>
+                </a:solidFill>
+                <a:latin typeface="Aptos"/>
+              </a:defRPr>
+            </a:pPr>
+            <a:r>
+              <a:t>Task 3 | YOLO</a:t>
+            </a:r>
+          </a:p>
+        </p:txBody>
+      </p:sp>
+      <p:sp>
+        <p:nvSpPr>
+          <p:cNvPr id="9" name="TextBox 8"/>
+          <p:cNvSpPr txBox="1"/>
+          <p:nvPr/>
+        </p:nvSpPr>
+        <p:spPr>
+          <a:xfrm>
+            <a:off x="3703320" y="4343400"/>
+            <a:ext cx="7223760" cy="320040"/>
+          </a:xfrm>
+          <a:prstGeom prst="rect">
+            <a:avLst/>
+          </a:prstGeom>
+          <a:noFill/>
+        </p:spPr>
+        <p:txBody>
+          <a:bodyPr wrap="none" lIns="18288" tIns="9144" rIns="18288" bIns="9144">
+            <a:spAutoFit/>
+          </a:bodyPr>
+          <a:lstStyle/>
+          <a:p>
+            <a:pPr>
+              <a:defRPr sz="1350" b="0">
+                <a:solidFill>
+                  <a:srgbClr val="FFFFFF"/>
+                </a:solidFill>
+                <a:latin typeface="Aptos"/>
+              </a:defRPr>
+            </a:pPr>
+            <a:r>
+              <a:t>Mask training enables tumor marking; fine-tuning improves robustness on distorted data.</a:t>
+            </a:r>
+          </a:p>
+        </p:txBody>
+      </p:sp>
+      <p:sp>
+        <p:nvSpPr>
+          <p:cNvPr id="10" name="TextBox 9"/>
+          <p:cNvSpPr txBox="1"/>
+          <p:nvPr/>
+        </p:nvSpPr>
+        <p:spPr>
+          <a:xfrm>
+            <a:off x="914400" y="5852160"/>
+            <a:ext cx="10332720" cy="320040"/>
+          </a:xfrm>
+          <a:prstGeom prst="rect">
+            <a:avLst/>
+          </a:prstGeom>
+          <a:noFill/>
+        </p:spPr>
+        <p:txBody>
+          <a:bodyPr wrap="none" lIns="18288" tIns="9144" rIns="18288" bIns="9144">
+            <a:spAutoFit/>
+          </a:bodyPr>
+          <a:lstStyle/>
+          <a:p>
+            <a:pPr>
+              <a:defRPr sz="1300" b="0">
+                <a:solidFill>
+                  <a:srgbClr val="D2DCDA"/>
+                </a:solidFill>
+                <a:latin typeface="Aptos"/>
+              </a:defRPr>
+            </a:pPr>
+            <a:r>
+              <a:t>Main takeaway: restoration is useful, but for deep-learning tasks, distortion-aware fine-tuning is usually the stronger improvement.</a:t>
+            </a:r>
+          </a:p>
+        </p:txBody>
+      </p:sp>
+    </p:spTree>
+  </p:cSld>
+  <p:clrMapOvr>
+    <a:masterClrMapping/>
+  </p:clrMapOvr>
+</p:sld>
+</file>
+
+<file path=ppt/slides/slide21.xml><?xml version="1.0" encoding="utf-8"?>
 <p:sld xmlns:a="http://schemas.openxmlformats.org/drawingml/2006/main" xmlns:p="http://schemas.openxmlformats.org/presentationml/2006/main" xmlns:r="http://schemas.openxmlformats.org/officeDocument/2006/relationships">
   <p:cSld>
     <p:bg>
@@ -8227,7 +8817,7 @@
               </a:defRPr>
             </a:pPr>
             <a:r>
-              <a:t>RESTORATION METHODS</a:t>
+              <a:t>ADDITIONAL DISTORTIONS</a:t>
             </a:r>
           </a:p>
         </p:txBody>
@@ -8241,7 +8831,7 @@
         <p:spPr>
           <a:xfrm>
             <a:off x="502920" y="640080"/>
-            <a:ext cx="8961120" cy="566928"/>
+            <a:ext cx="9784080" cy="566928"/>
           </a:xfrm>
           <a:prstGeom prst="rect">
             <a:avLst/>
@@ -8255,7 +8845,7 @@
           <a:lstStyle/>
           <a:p>
             <a:pPr>
-              <a:defRPr sz="2400" b="1">
+              <a:defRPr sz="2300" b="1">
                 <a:solidFill>
                   <a:srgbClr val="182228"/>
                 </a:solidFill>
@@ -8263,7 +8853,7 @@
               </a:defRPr>
             </a:pPr>
             <a:r>
-              <a:t>How the restorations work after distortion.</a:t>
+              <a:t>Original, distorted, and restored images for the other distortions.</a:t>
             </a:r>
           </a:p>
         </p:txBody>
@@ -8277,7 +8867,7 @@
         <p:spPr>
           <a:xfrm>
             <a:off x="521207" y="1225296"/>
-            <a:ext cx="9875520" cy="292608"/>
+            <a:ext cx="10058400" cy="292608"/>
           </a:xfrm>
           <a:prstGeom prst="rect">
             <a:avLst/>
@@ -8299,7 +8889,7 @@
               </a:defRPr>
             </a:pPr>
             <a:r>
-              <a:t>Each restoration is a simple image-processing step that tries to recover useful MRI structure before measuring the task.</a:t>
+              <a:t>These methods were also implemented in the distortion/restoration pipeline and are shown with the same before/after structure as slide 6.</a:t>
             </a:r>
           </a:p>
         </p:txBody>
@@ -8348,8 +8938,8 @@
         </p:nvSpPr>
         <p:spPr>
           <a:xfrm>
-            <a:off x="685800" y="1783080"/>
-            <a:ext cx="5166360" cy="1965960"/>
+            <a:off x="502920" y="1719072"/>
+            <a:ext cx="2148840" cy="4526280"/>
           </a:xfrm>
           <a:prstGeom prst="roundRect">
             <a:avLst/>
@@ -8385,16 +8975,40 @@
           </a:p>
         </p:txBody>
       </p:sp>
-      <p:sp>
-        <p:nvSpPr>
-          <p:cNvPr id="7" name="TextBox 6"/>
-          <p:cNvSpPr txBox="1"/>
-          <p:nvPr/>
-        </p:nvSpPr>
-        <p:spPr>
-          <a:xfrm>
-            <a:off x="886968" y="1947672"/>
-            <a:ext cx="3108960" cy="256032"/>
+      <p:pic>
+        <p:nvPicPr>
+          <p:cNvPr id="7" name="Picture 6" descr="image.png"/>
+          <p:cNvPicPr>
+            <a:picLocks noChangeAspect="1"/>
+          </p:cNvPicPr>
+          <p:nvPr/>
+        </p:nvPicPr>
+        <p:blipFill>
+          <a:blip r:embed="rId2"/>
+          <a:stretch>
+            <a:fillRect/>
+          </a:stretch>
+        </p:blipFill>
+        <p:spPr>
+          <a:xfrm>
+            <a:off x="713232" y="2331720"/>
+            <a:ext cx="1737360" cy="1737360"/>
+          </a:xfrm>
+          <a:prstGeom prst="rect">
+            <a:avLst/>
+          </a:prstGeom>
+        </p:spPr>
+      </p:pic>
+      <p:sp>
+        <p:nvSpPr>
+          <p:cNvPr id="8" name="TextBox 7"/>
+          <p:cNvSpPr txBox="1"/>
+          <p:nvPr/>
+        </p:nvSpPr>
+        <p:spPr>
+          <a:xfrm>
+            <a:off x="749808" y="4617720"/>
+            <a:ext cx="1645920" cy="256032"/>
           </a:xfrm>
           <a:prstGeom prst="rect">
             <a:avLst/>
@@ -8407,8 +9021,161 @@
           </a:bodyPr>
           <a:lstStyle/>
           <a:p>
+            <a:pPr algn="ctr">
+              <a:defRPr sz="1500" b="1">
+                <a:solidFill>
+                  <a:srgbClr val="182228"/>
+                </a:solidFill>
+                <a:latin typeface="Aptos"/>
+              </a:defRPr>
+            </a:pPr>
+            <a:r>
+              <a:t>Original</a:t>
+            </a:r>
+          </a:p>
+        </p:txBody>
+      </p:sp>
+      <p:sp>
+        <p:nvSpPr>
+          <p:cNvPr id="9" name="TextBox 8"/>
+          <p:cNvSpPr txBox="1"/>
+          <p:nvPr/>
+        </p:nvSpPr>
+        <p:spPr>
+          <a:xfrm>
+            <a:off x="749808" y="4956048"/>
+            <a:ext cx="1645920" cy="228600"/>
+          </a:xfrm>
+          <a:prstGeom prst="rect">
+            <a:avLst/>
+          </a:prstGeom>
+          <a:noFill/>
+        </p:spPr>
+        <p:txBody>
+          <a:bodyPr wrap="square">
+            <a:spAutoFit/>
+          </a:bodyPr>
+          <a:lstStyle/>
+          <a:p>
+            <a:pPr algn="ctr">
+              <a:defRPr sz="950" b="0">
+                <a:solidFill>
+                  <a:srgbClr val="56636B"/>
+                </a:solidFill>
+                <a:latin typeface="Aptos"/>
+              </a:defRPr>
+            </a:pPr>
+            <a:r>
+              <a:t>clean baseline</a:t>
+            </a:r>
+          </a:p>
+        </p:txBody>
+      </p:sp>
+      <p:sp>
+        <p:nvSpPr>
+          <p:cNvPr id="10" name="TextBox 9"/>
+          <p:cNvSpPr txBox="1"/>
+          <p:nvPr/>
+        </p:nvSpPr>
+        <p:spPr>
+          <a:xfrm>
+            <a:off x="713232" y="5358384"/>
+            <a:ext cx="1737360" cy="384048"/>
+          </a:xfrm>
+          <a:prstGeom prst="rect">
+            <a:avLst/>
+          </a:prstGeom>
+          <a:noFill/>
+        </p:spPr>
+        <p:txBody>
+          <a:bodyPr wrap="square">
+            <a:spAutoFit/>
+          </a:bodyPr>
+          <a:lstStyle/>
+          <a:p>
+            <a:pPr algn="ctr">
+              <a:defRPr sz="900" b="0">
+                <a:solidFill>
+                  <a:srgbClr val="56636B"/>
+                </a:solidFill>
+                <a:latin typeface="Aptos"/>
+              </a:defRPr>
+            </a:pPr>
+            <a:r>
+              <a:t>used before all distortions</a:t>
+            </a:r>
+          </a:p>
+        </p:txBody>
+      </p:sp>
+      <p:sp>
+        <p:nvSpPr>
+          <p:cNvPr id="11" name="Rounded Rectangle 10"/>
+          <p:cNvSpPr/>
+          <p:nvPr/>
+        </p:nvSpPr>
+        <p:spPr>
+          <a:xfrm>
+            <a:off x="2880360" y="1719072"/>
+            <a:ext cx="4343400" cy="2148840"/>
+          </a:xfrm>
+          <a:prstGeom prst="roundRect">
+            <a:avLst/>
+          </a:prstGeom>
+          <a:solidFill>
+            <a:srgbClr val="FFFFFF"/>
+          </a:solidFill>
+          <a:ln w="8890">
+            <a:solidFill>
+              <a:srgbClr val="D2DBDB"/>
+            </a:solidFill>
+          </a:ln>
+        </p:spPr>
+        <p:style>
+          <a:lnRef idx="1">
+            <a:schemeClr val="accent1"/>
+          </a:lnRef>
+          <a:fillRef idx="3">
+            <a:schemeClr val="accent1"/>
+          </a:fillRef>
+          <a:effectRef idx="2">
+            <a:schemeClr val="accent1"/>
+          </a:effectRef>
+          <a:fontRef idx="minor">
+            <a:schemeClr val="lt1"/>
+          </a:fontRef>
+        </p:style>
+        <p:txBody>
+          <a:bodyPr rtlCol="0" anchor="ctr"/>
+          <a:lstStyle/>
+          <a:p>
+            <a:pPr algn="ctr"/>
+          </a:p>
+        </p:txBody>
+      </p:sp>
+      <p:sp>
+        <p:nvSpPr>
+          <p:cNvPr id="12" name="TextBox 11"/>
+          <p:cNvSpPr txBox="1"/>
+          <p:nvPr/>
+        </p:nvSpPr>
+        <p:spPr>
+          <a:xfrm>
+            <a:off x="3044952" y="1856231"/>
+            <a:ext cx="3977639" cy="219456"/>
+          </a:xfrm>
+          <a:prstGeom prst="rect">
+            <a:avLst/>
+          </a:prstGeom>
+          <a:noFill/>
+        </p:spPr>
+        <p:txBody>
+          <a:bodyPr wrap="square">
+            <a:spAutoFit/>
+          </a:bodyPr>
+          <a:lstStyle/>
+          <a:p>
             <a:pPr>
-              <a:defRPr sz="1500" b="1">
+              <a:defRPr sz="1250" b="1">
                 <a:solidFill>
                   <a:srgbClr val="2666AC"/>
                 </a:solidFill>
@@ -8416,57 +9183,21 @@
               </a:defRPr>
             </a:pPr>
             <a:r>
-              <a:t>Gaussian noise</a:t>
-            </a:r>
-          </a:p>
-        </p:txBody>
-      </p:sp>
-      <p:sp>
-        <p:nvSpPr>
-          <p:cNvPr id="8" name="TextBox 7"/>
-          <p:cNvSpPr txBox="1"/>
-          <p:nvPr/>
-        </p:nvSpPr>
-        <p:spPr>
-          <a:xfrm>
-            <a:off x="886968" y="2313432"/>
-            <a:ext cx="4617720" cy="502920"/>
-          </a:xfrm>
-          <a:prstGeom prst="rect">
-            <a:avLst/>
-          </a:prstGeom>
-          <a:noFill/>
-        </p:spPr>
-        <p:txBody>
-          <a:bodyPr wrap="square">
-            <a:spAutoFit/>
-          </a:bodyPr>
-          <a:lstStyle/>
-          <a:p>
-            <a:pPr>
-              <a:defRPr sz="1050" b="0">
-                <a:solidFill>
-                  <a:srgbClr val="182228"/>
-                </a:solidFill>
-                <a:latin typeface="Aptos"/>
-              </a:defRPr>
-            </a:pPr>
-            <a:r>
-              <a:t>Light Gaussian smoothing reduces random pixel noise, then unsharp masking brings edges back.</a:t>
-            </a:r>
-          </a:p>
-        </p:txBody>
-      </p:sp>
-      <p:sp>
-        <p:nvSpPr>
-          <p:cNvPr id="9" name="Rounded Rectangle 8"/>
+              <a:t>Rotation</a:t>
+            </a:r>
+          </a:p>
+        </p:txBody>
+      </p:sp>
+      <p:sp>
+        <p:nvSpPr>
+          <p:cNvPr id="13" name="Rounded Rectangle 12"/>
           <p:cNvSpPr/>
           <p:nvPr/>
         </p:nvSpPr>
         <p:spPr>
           <a:xfrm>
-            <a:off x="1005840" y="3026664"/>
-            <a:ext cx="1554480" cy="384048"/>
+            <a:off x="3063240" y="2176272"/>
+            <a:ext cx="1828800" cy="1325880"/>
           </a:xfrm>
           <a:prstGeom prst="roundRect">
             <a:avLst/>
@@ -8504,14 +9235,14 @@
       </p:sp>
       <p:sp>
         <p:nvSpPr>
-          <p:cNvPr id="10" name="Rounded Rectangle 9"/>
+          <p:cNvPr id="14" name="Rounded Rectangle 13"/>
           <p:cNvSpPr/>
           <p:nvPr/>
         </p:nvSpPr>
         <p:spPr>
           <a:xfrm>
-            <a:off x="3227832" y="3026664"/>
-            <a:ext cx="1554480" cy="384048"/>
+            <a:off x="5166360" y="2176272"/>
+            <a:ext cx="1828800" cy="1325880"/>
           </a:xfrm>
           <a:prstGeom prst="roundRect">
             <a:avLst/>
@@ -8547,16 +9278,64 @@
           </a:p>
         </p:txBody>
       </p:sp>
-      <p:sp>
-        <p:nvSpPr>
-          <p:cNvPr id="11" name="TextBox 10"/>
-          <p:cNvSpPr txBox="1"/>
-          <p:nvPr/>
-        </p:nvSpPr>
-        <p:spPr>
-          <a:xfrm>
-            <a:off x="1097280" y="3118104"/>
-            <a:ext cx="1371600" cy="146304"/>
+      <p:pic>
+        <p:nvPicPr>
+          <p:cNvPr id="15" name="Picture 14" descr="rotation.png"/>
+          <p:cNvPicPr>
+            <a:picLocks noChangeAspect="1"/>
+          </p:cNvPicPr>
+          <p:nvPr/>
+        </p:nvPicPr>
+        <p:blipFill>
+          <a:blip r:embed="rId3"/>
+          <a:stretch>
+            <a:fillRect/>
+          </a:stretch>
+        </p:blipFill>
+        <p:spPr>
+          <a:xfrm>
+            <a:off x="3447287" y="2249424"/>
+            <a:ext cx="1060704" cy="1060704"/>
+          </a:xfrm>
+          <a:prstGeom prst="rect">
+            <a:avLst/>
+          </a:prstGeom>
+        </p:spPr>
+      </p:pic>
+      <p:pic>
+        <p:nvPicPr>
+          <p:cNvPr id="16" name="Picture 15" descr="rotation_restored.png"/>
+          <p:cNvPicPr>
+            <a:picLocks noChangeAspect="1"/>
+          </p:cNvPicPr>
+          <p:nvPr/>
+        </p:nvPicPr>
+        <p:blipFill>
+          <a:blip r:embed="rId4"/>
+          <a:stretch>
+            <a:fillRect/>
+          </a:stretch>
+        </p:blipFill>
+        <p:spPr>
+          <a:xfrm>
+            <a:off x="5550407" y="2249424"/>
+            <a:ext cx="1060704" cy="1060704"/>
+          </a:xfrm>
+          <a:prstGeom prst="rect">
+            <a:avLst/>
+          </a:prstGeom>
+        </p:spPr>
+      </p:pic>
+      <p:sp>
+        <p:nvSpPr>
+          <p:cNvPr id="17" name="TextBox 16"/>
+          <p:cNvSpPr txBox="1"/>
+          <p:nvPr/>
+        </p:nvSpPr>
+        <p:spPr>
+          <a:xfrm>
+            <a:off x="3291840" y="3438144"/>
+            <a:ext cx="1417320" cy="164592"/>
           </a:xfrm>
           <a:prstGeom prst="rect">
             <a:avLst/>
@@ -8570,29 +9349,29 @@
           <a:lstStyle/>
           <a:p>
             <a:pPr algn="ctr">
-              <a:defRPr sz="850" b="1">
-                <a:solidFill>
-                  <a:srgbClr val="182228"/>
-                </a:solidFill>
-                <a:latin typeface="Aptos"/>
-              </a:defRPr>
-            </a:pPr>
-            <a:r>
-              <a:t>smooth</a:t>
-            </a:r>
-          </a:p>
-        </p:txBody>
-      </p:sp>
-      <p:sp>
-        <p:nvSpPr>
-          <p:cNvPr id="12" name="TextBox 11"/>
-          <p:cNvSpPr txBox="1"/>
-          <p:nvPr/>
-        </p:nvSpPr>
-        <p:spPr>
-          <a:xfrm>
-            <a:off x="3319272" y="3118104"/>
-            <a:ext cx="1371600" cy="146304"/>
+              <a:defRPr sz="850" b="0">
+                <a:solidFill>
+                  <a:srgbClr val="56636B"/>
+                </a:solidFill>
+                <a:latin typeface="Aptos"/>
+              </a:defRPr>
+            </a:pPr>
+            <a:r>
+              <a:t>distorted</a:t>
+            </a:r>
+          </a:p>
+        </p:txBody>
+      </p:sp>
+      <p:sp>
+        <p:nvSpPr>
+          <p:cNvPr id="18" name="TextBox 17"/>
+          <p:cNvSpPr txBox="1"/>
+          <p:nvPr/>
+        </p:nvSpPr>
+        <p:spPr>
+          <a:xfrm>
+            <a:off x="5394960" y="3438144"/>
+            <a:ext cx="1417320" cy="164592"/>
           </a:xfrm>
           <a:prstGeom prst="rect">
             <a:avLst/>
@@ -8606,34 +9385,34 @@
           <a:lstStyle/>
           <a:p>
             <a:pPr algn="ctr">
-              <a:defRPr sz="850" b="1">
-                <a:solidFill>
-                  <a:srgbClr val="182228"/>
-                </a:solidFill>
-                <a:latin typeface="Aptos"/>
-              </a:defRPr>
-            </a:pPr>
-            <a:r>
-              <a:t>sharpen</a:t>
+              <a:defRPr sz="850" b="0">
+                <a:solidFill>
+                  <a:srgbClr val="56636B"/>
+                </a:solidFill>
+                <a:latin typeface="Aptos"/>
+              </a:defRPr>
+            </a:pPr>
+            <a:r>
+              <a:t>restored</a:t>
             </a:r>
           </a:p>
         </p:txBody>
       </p:sp>
       <p:cxnSp>
         <p:nvCxnSpPr>
-          <p:cNvPr id="13" name="Connector 12"/>
+          <p:cNvPr id="19" name="Connector 18"/>
           <p:cNvCxnSpPr/>
           <p:nvPr/>
         </p:nvCxnSpPr>
         <p:spPr>
           <a:xfrm>
-            <a:off x="2606040" y="3218688"/>
-            <a:ext cx="548640" cy="0"/>
+            <a:off x="4919472" y="2834639"/>
+            <a:ext cx="201168" cy="0"/>
           </a:xfrm>
           <a:prstGeom prst="line">
             <a:avLst/>
           </a:prstGeom>
-          <a:ln w="20320">
+          <a:ln w="17780">
             <a:solidFill>
               <a:srgbClr val="2666AC"/>
             </a:solidFill>
@@ -8656,14 +9435,14 @@
       </p:cxnSp>
       <p:sp>
         <p:nvSpPr>
-          <p:cNvPr id="14" name="Rounded Rectangle 13"/>
+          <p:cNvPr id="20" name="Rounded Rectangle 19"/>
           <p:cNvSpPr/>
           <p:nvPr/>
         </p:nvSpPr>
         <p:spPr>
           <a:xfrm>
-            <a:off x="6263640" y="1783080"/>
-            <a:ext cx="5166360" cy="1965960"/>
+            <a:off x="7498079" y="1719072"/>
+            <a:ext cx="4343400" cy="2148840"/>
           </a:xfrm>
           <a:prstGeom prst="roundRect">
             <a:avLst/>
@@ -8701,14 +9480,14 @@
       </p:sp>
       <p:sp>
         <p:nvSpPr>
-          <p:cNvPr id="15" name="TextBox 14"/>
-          <p:cNvSpPr txBox="1"/>
-          <p:nvPr/>
-        </p:nvSpPr>
-        <p:spPr>
-          <a:xfrm>
-            <a:off x="6464807" y="1947672"/>
-            <a:ext cx="3108960" cy="256032"/>
+          <p:cNvPr id="21" name="TextBox 20"/>
+          <p:cNvSpPr txBox="1"/>
+          <p:nvPr/>
+        </p:nvSpPr>
+        <p:spPr>
+          <a:xfrm>
+            <a:off x="7662671" y="1856231"/>
+            <a:ext cx="3977639" cy="219456"/>
           </a:xfrm>
           <a:prstGeom prst="rect">
             <a:avLst/>
@@ -8722,65 +9501,29 @@
           <a:lstStyle/>
           <a:p>
             <a:pPr>
-              <a:defRPr sz="1500" b="1">
-                <a:solidFill>
-                  <a:srgbClr val="B2483E"/>
-                </a:solidFill>
-                <a:latin typeface="Aptos"/>
-              </a:defRPr>
-            </a:pPr>
-            <a:r>
-              <a:t>Salt-and-pepper</a:t>
-            </a:r>
-          </a:p>
-        </p:txBody>
-      </p:sp>
-      <p:sp>
-        <p:nvSpPr>
-          <p:cNvPr id="16" name="TextBox 15"/>
-          <p:cNvSpPr txBox="1"/>
-          <p:nvPr/>
-        </p:nvSpPr>
-        <p:spPr>
-          <a:xfrm>
-            <a:off x="6464807" y="2313432"/>
-            <a:ext cx="4617720" cy="502920"/>
-          </a:xfrm>
-          <a:prstGeom prst="rect">
-            <a:avLst/>
-          </a:prstGeom>
-          <a:noFill/>
-        </p:spPr>
-        <p:txBody>
-          <a:bodyPr wrap="square">
-            <a:spAutoFit/>
-          </a:bodyPr>
-          <a:lstStyle/>
-          <a:p>
-            <a:pPr>
-              <a:defRPr sz="1050" b="0">
-                <a:solidFill>
-                  <a:srgbClr val="182228"/>
-                </a:solidFill>
-                <a:latin typeface="Aptos"/>
-              </a:defRPr>
-            </a:pPr>
-            <a:r>
-              <a:t>A median filter replaces isolated black/white pixels using nearby values while preserving edges.</a:t>
-            </a:r>
-          </a:p>
-        </p:txBody>
-      </p:sp>
-      <p:sp>
-        <p:nvSpPr>
-          <p:cNvPr id="17" name="Rounded Rectangle 16"/>
+              <a:defRPr sz="1250" b="1">
+                <a:solidFill>
+                  <a:srgbClr val="69559E"/>
+                </a:solidFill>
+                <a:latin typeface="Aptos"/>
+              </a:defRPr>
+            </a:pPr>
+            <a:r>
+              <a:t>Perspective warp</a:t>
+            </a:r>
+          </a:p>
+        </p:txBody>
+      </p:sp>
+      <p:sp>
+        <p:nvSpPr>
+          <p:cNvPr id="22" name="Rounded Rectangle 21"/>
           <p:cNvSpPr/>
           <p:nvPr/>
         </p:nvSpPr>
         <p:spPr>
           <a:xfrm>
-            <a:off x="6583679" y="3026664"/>
-            <a:ext cx="1554480" cy="384048"/>
+            <a:off x="7680959" y="2176272"/>
+            <a:ext cx="1828800" cy="1325880"/>
           </a:xfrm>
           <a:prstGeom prst="roundRect">
             <a:avLst/>
@@ -8818,14 +9561,14 @@
       </p:sp>
       <p:sp>
         <p:nvSpPr>
-          <p:cNvPr id="18" name="Rounded Rectangle 17"/>
+          <p:cNvPr id="23" name="Rounded Rectangle 22"/>
           <p:cNvSpPr/>
           <p:nvPr/>
         </p:nvSpPr>
         <p:spPr>
           <a:xfrm>
-            <a:off x="8805672" y="3026664"/>
-            <a:ext cx="1554480" cy="384048"/>
+            <a:off x="9784080" y="2176272"/>
+            <a:ext cx="1828800" cy="1325880"/>
           </a:xfrm>
           <a:prstGeom prst="roundRect">
             <a:avLst/>
@@ -8861,16 +9604,64 @@
           </a:p>
         </p:txBody>
       </p:sp>
-      <p:sp>
-        <p:nvSpPr>
-          <p:cNvPr id="19" name="TextBox 18"/>
-          <p:cNvSpPr txBox="1"/>
-          <p:nvPr/>
-        </p:nvSpPr>
-        <p:spPr>
-          <a:xfrm>
-            <a:off x="6675120" y="3118104"/>
-            <a:ext cx="1371600" cy="146304"/>
+      <p:pic>
+        <p:nvPicPr>
+          <p:cNvPr id="24" name="Picture 23" descr="perspective_warp.png"/>
+          <p:cNvPicPr>
+            <a:picLocks noChangeAspect="1"/>
+          </p:cNvPicPr>
+          <p:nvPr/>
+        </p:nvPicPr>
+        <p:blipFill>
+          <a:blip r:embed="rId5"/>
+          <a:stretch>
+            <a:fillRect/>
+          </a:stretch>
+        </p:blipFill>
+        <p:spPr>
+          <a:xfrm>
+            <a:off x="8065008" y="2249424"/>
+            <a:ext cx="1060704" cy="1060704"/>
+          </a:xfrm>
+          <a:prstGeom prst="rect">
+            <a:avLst/>
+          </a:prstGeom>
+        </p:spPr>
+      </p:pic>
+      <p:pic>
+        <p:nvPicPr>
+          <p:cNvPr id="25" name="Picture 24" descr="perspective_warp_restored.png"/>
+          <p:cNvPicPr>
+            <a:picLocks noChangeAspect="1"/>
+          </p:cNvPicPr>
+          <p:nvPr/>
+        </p:nvPicPr>
+        <p:blipFill>
+          <a:blip r:embed="rId6"/>
+          <a:stretch>
+            <a:fillRect/>
+          </a:stretch>
+        </p:blipFill>
+        <p:spPr>
+          <a:xfrm>
+            <a:off x="10168128" y="2249424"/>
+            <a:ext cx="1060704" cy="1060704"/>
+          </a:xfrm>
+          <a:prstGeom prst="rect">
+            <a:avLst/>
+          </a:prstGeom>
+        </p:spPr>
+      </p:pic>
+      <p:sp>
+        <p:nvSpPr>
+          <p:cNvPr id="26" name="TextBox 25"/>
+          <p:cNvSpPr txBox="1"/>
+          <p:nvPr/>
+        </p:nvSpPr>
+        <p:spPr>
+          <a:xfrm>
+            <a:off x="7909559" y="3438144"/>
+            <a:ext cx="1417320" cy="164592"/>
           </a:xfrm>
           <a:prstGeom prst="rect">
             <a:avLst/>
@@ -8884,29 +9675,29 @@
           <a:lstStyle/>
           <a:p>
             <a:pPr algn="ctr">
-              <a:defRPr sz="850" b="1">
-                <a:solidFill>
-                  <a:srgbClr val="182228"/>
-                </a:solidFill>
-                <a:latin typeface="Aptos"/>
-              </a:defRPr>
-            </a:pPr>
-            <a:r>
-              <a:t>median</a:t>
-            </a:r>
-          </a:p>
-        </p:txBody>
-      </p:sp>
-      <p:sp>
-        <p:nvSpPr>
-          <p:cNvPr id="20" name="TextBox 19"/>
-          <p:cNvSpPr txBox="1"/>
-          <p:nvPr/>
-        </p:nvSpPr>
-        <p:spPr>
-          <a:xfrm>
-            <a:off x="8897112" y="3118104"/>
-            <a:ext cx="1371600" cy="146304"/>
+              <a:defRPr sz="850" b="0">
+                <a:solidFill>
+                  <a:srgbClr val="56636B"/>
+                </a:solidFill>
+                <a:latin typeface="Aptos"/>
+              </a:defRPr>
+            </a:pPr>
+            <a:r>
+              <a:t>distorted</a:t>
+            </a:r>
+          </a:p>
+        </p:txBody>
+      </p:sp>
+      <p:sp>
+        <p:nvSpPr>
+          <p:cNvPr id="27" name="TextBox 26"/>
+          <p:cNvSpPr txBox="1"/>
+          <p:nvPr/>
+        </p:nvSpPr>
+        <p:spPr>
+          <a:xfrm>
+            <a:off x="10012680" y="3438144"/>
+            <a:ext cx="1417320" cy="164592"/>
           </a:xfrm>
           <a:prstGeom prst="rect">
             <a:avLst/>
@@ -8920,36 +9711,36 @@
           <a:lstStyle/>
           <a:p>
             <a:pPr algn="ctr">
-              <a:defRPr sz="850" b="1">
-                <a:solidFill>
-                  <a:srgbClr val="182228"/>
-                </a:solidFill>
-                <a:latin typeface="Aptos"/>
-              </a:defRPr>
-            </a:pPr>
-            <a:r>
-              <a:t>remove specks</a:t>
+              <a:defRPr sz="850" b="0">
+                <a:solidFill>
+                  <a:srgbClr val="56636B"/>
+                </a:solidFill>
+                <a:latin typeface="Aptos"/>
+              </a:defRPr>
+            </a:pPr>
+            <a:r>
+              <a:t>restored</a:t>
             </a:r>
           </a:p>
         </p:txBody>
       </p:sp>
       <p:cxnSp>
         <p:nvCxnSpPr>
-          <p:cNvPr id="21" name="Connector 20"/>
+          <p:cNvPr id="28" name="Connector 27"/>
           <p:cNvCxnSpPr/>
           <p:nvPr/>
         </p:nvCxnSpPr>
         <p:spPr>
           <a:xfrm>
-            <a:off x="8183879" y="3218688"/>
-            <a:ext cx="548641" cy="0"/>
+            <a:off x="9537192" y="2834639"/>
+            <a:ext cx="201167" cy="0"/>
           </a:xfrm>
           <a:prstGeom prst="line">
             <a:avLst/>
           </a:prstGeom>
-          <a:ln w="20320">
+          <a:ln w="17780">
             <a:solidFill>
-              <a:srgbClr val="B2483E"/>
+              <a:srgbClr val="69559E"/>
             </a:solidFill>
           </a:ln>
         </p:spPr>
@@ -8970,14 +9761,14 @@
       </p:cxnSp>
       <p:sp>
         <p:nvSpPr>
-          <p:cNvPr id="22" name="Rounded Rectangle 21"/>
+          <p:cNvPr id="29" name="Rounded Rectangle 28"/>
           <p:cNvSpPr/>
           <p:nvPr/>
         </p:nvSpPr>
         <p:spPr>
           <a:xfrm>
-            <a:off x="685800" y="4096512"/>
-            <a:ext cx="5166360" cy="1965960"/>
+            <a:off x="2880360" y="4096512"/>
+            <a:ext cx="4343400" cy="2148840"/>
           </a:xfrm>
           <a:prstGeom prst="roundRect">
             <a:avLst/>
@@ -9015,14 +9806,14 @@
       </p:sp>
       <p:sp>
         <p:nvSpPr>
-          <p:cNvPr id="23" name="TextBox 22"/>
-          <p:cNvSpPr txBox="1"/>
-          <p:nvPr/>
-        </p:nvSpPr>
-        <p:spPr>
-          <a:xfrm>
-            <a:off x="886968" y="4261104"/>
-            <a:ext cx="3108960" cy="256032"/>
+          <p:cNvPr id="30" name="TextBox 29"/>
+          <p:cNvSpPr txBox="1"/>
+          <p:nvPr/>
+        </p:nvSpPr>
+        <p:spPr>
+          <a:xfrm>
+            <a:off x="3044952" y="4233672"/>
+            <a:ext cx="3977639" cy="219456"/>
           </a:xfrm>
           <a:prstGeom prst="rect">
             <a:avLst/>
@@ -9036,65 +9827,29 @@
           <a:lstStyle/>
           <a:p>
             <a:pPr>
-              <a:defRPr sz="1500" b="1">
-                <a:solidFill>
-                  <a:srgbClr val="008074"/>
-                </a:solidFill>
-                <a:latin typeface="Aptos"/>
-              </a:defRPr>
-            </a:pPr>
-            <a:r>
-              <a:t>Gaussian blur</a:t>
-            </a:r>
-          </a:p>
-        </p:txBody>
-      </p:sp>
-      <p:sp>
-        <p:nvSpPr>
-          <p:cNvPr id="24" name="TextBox 23"/>
-          <p:cNvSpPr txBox="1"/>
-          <p:nvPr/>
-        </p:nvSpPr>
-        <p:spPr>
-          <a:xfrm>
-            <a:off x="886968" y="4626864"/>
-            <a:ext cx="4617720" cy="502920"/>
-          </a:xfrm>
-          <a:prstGeom prst="rect">
-            <a:avLst/>
-          </a:prstGeom>
-          <a:noFill/>
-        </p:spPr>
-        <p:txBody>
-          <a:bodyPr wrap="square">
-            <a:spAutoFit/>
-          </a:bodyPr>
-          <a:lstStyle/>
-          <a:p>
-            <a:pPr>
-              <a:defRPr sz="1050" b="0">
-                <a:solidFill>
-                  <a:srgbClr val="182228"/>
-                </a:solidFill>
-                <a:latin typeface="Aptos"/>
-              </a:defRPr>
-            </a:pPr>
-            <a:r>
-              <a:t>Unsharp masking boosts local contrast so softened edges become clearer again.</a:t>
-            </a:r>
-          </a:p>
-        </p:txBody>
-      </p:sp>
-      <p:sp>
-        <p:nvSpPr>
-          <p:cNvPr id="25" name="Rounded Rectangle 24"/>
+              <a:defRPr sz="1250" b="1">
+                <a:solidFill>
+                  <a:srgbClr val="B2483E"/>
+                </a:solidFill>
+                <a:latin typeface="Aptos"/>
+              </a:defRPr>
+            </a:pPr>
+            <a:r>
+              <a:t>Barrel distortion</a:t>
+            </a:r>
+          </a:p>
+        </p:txBody>
+      </p:sp>
+      <p:sp>
+        <p:nvSpPr>
+          <p:cNvPr id="31" name="Rounded Rectangle 30"/>
           <p:cNvSpPr/>
           <p:nvPr/>
         </p:nvSpPr>
         <p:spPr>
           <a:xfrm>
-            <a:off x="1005840" y="5340096"/>
-            <a:ext cx="1554480" cy="384048"/>
+            <a:off x="3063240" y="4553712"/>
+            <a:ext cx="1828800" cy="1325880"/>
           </a:xfrm>
           <a:prstGeom prst="roundRect">
             <a:avLst/>
@@ -9132,14 +9887,14 @@
       </p:sp>
       <p:sp>
         <p:nvSpPr>
-          <p:cNvPr id="26" name="Rounded Rectangle 25"/>
+          <p:cNvPr id="32" name="Rounded Rectangle 31"/>
           <p:cNvSpPr/>
           <p:nvPr/>
         </p:nvSpPr>
         <p:spPr>
           <a:xfrm>
-            <a:off x="3227832" y="5340096"/>
-            <a:ext cx="1554480" cy="384048"/>
+            <a:off x="5166360" y="4553712"/>
+            <a:ext cx="1828800" cy="1325880"/>
           </a:xfrm>
           <a:prstGeom prst="roundRect">
             <a:avLst/>
@@ -9175,16 +9930,64 @@
           </a:p>
         </p:txBody>
       </p:sp>
-      <p:sp>
-        <p:nvSpPr>
-          <p:cNvPr id="27" name="TextBox 26"/>
-          <p:cNvSpPr txBox="1"/>
-          <p:nvPr/>
-        </p:nvSpPr>
-        <p:spPr>
-          <a:xfrm>
-            <a:off x="1097280" y="5431536"/>
-            <a:ext cx="1371600" cy="146304"/>
+      <p:pic>
+        <p:nvPicPr>
+          <p:cNvPr id="33" name="Picture 32" descr="barrel_distortion.png"/>
+          <p:cNvPicPr>
+            <a:picLocks noChangeAspect="1"/>
+          </p:cNvPicPr>
+          <p:nvPr/>
+        </p:nvPicPr>
+        <p:blipFill>
+          <a:blip r:embed="rId7"/>
+          <a:stretch>
+            <a:fillRect/>
+          </a:stretch>
+        </p:blipFill>
+        <p:spPr>
+          <a:xfrm>
+            <a:off x="3447287" y="4626864"/>
+            <a:ext cx="1060704" cy="1060704"/>
+          </a:xfrm>
+          <a:prstGeom prst="rect">
+            <a:avLst/>
+          </a:prstGeom>
+        </p:spPr>
+      </p:pic>
+      <p:pic>
+        <p:nvPicPr>
+          <p:cNvPr id="34" name="Picture 33" descr="barrel_distortion_restored.png"/>
+          <p:cNvPicPr>
+            <a:picLocks noChangeAspect="1"/>
+          </p:cNvPicPr>
+          <p:nvPr/>
+        </p:nvPicPr>
+        <p:blipFill>
+          <a:blip r:embed="rId8"/>
+          <a:stretch>
+            <a:fillRect/>
+          </a:stretch>
+        </p:blipFill>
+        <p:spPr>
+          <a:xfrm>
+            <a:off x="5550407" y="4626864"/>
+            <a:ext cx="1060704" cy="1060704"/>
+          </a:xfrm>
+          <a:prstGeom prst="rect">
+            <a:avLst/>
+          </a:prstGeom>
+        </p:spPr>
+      </p:pic>
+      <p:sp>
+        <p:nvSpPr>
+          <p:cNvPr id="35" name="TextBox 34"/>
+          <p:cNvSpPr txBox="1"/>
+          <p:nvPr/>
+        </p:nvSpPr>
+        <p:spPr>
+          <a:xfrm>
+            <a:off x="3291840" y="5815584"/>
+            <a:ext cx="1417320" cy="164592"/>
           </a:xfrm>
           <a:prstGeom prst="rect">
             <a:avLst/>
@@ -9198,29 +10001,29 @@
           <a:lstStyle/>
           <a:p>
             <a:pPr algn="ctr">
-              <a:defRPr sz="850" b="1">
-                <a:solidFill>
-                  <a:srgbClr val="182228"/>
-                </a:solidFill>
-                <a:latin typeface="Aptos"/>
-              </a:defRPr>
-            </a:pPr>
-            <a:r>
-              <a:t>edge boost</a:t>
-            </a:r>
-          </a:p>
-        </p:txBody>
-      </p:sp>
-      <p:sp>
-        <p:nvSpPr>
-          <p:cNvPr id="28" name="TextBox 27"/>
-          <p:cNvSpPr txBox="1"/>
-          <p:nvPr/>
-        </p:nvSpPr>
-        <p:spPr>
-          <a:xfrm>
-            <a:off x="3319272" y="5431536"/>
-            <a:ext cx="1371600" cy="146304"/>
+              <a:defRPr sz="850" b="0">
+                <a:solidFill>
+                  <a:srgbClr val="56636B"/>
+                </a:solidFill>
+                <a:latin typeface="Aptos"/>
+              </a:defRPr>
+            </a:pPr>
+            <a:r>
+              <a:t>distorted</a:t>
+            </a:r>
+          </a:p>
+        </p:txBody>
+      </p:sp>
+      <p:sp>
+        <p:nvSpPr>
+          <p:cNvPr id="36" name="TextBox 35"/>
+          <p:cNvSpPr txBox="1"/>
+          <p:nvPr/>
+        </p:nvSpPr>
+        <p:spPr>
+          <a:xfrm>
+            <a:off x="5394960" y="5815584"/>
+            <a:ext cx="1417320" cy="164592"/>
           </a:xfrm>
           <a:prstGeom prst="rect">
             <a:avLst/>
@@ -9234,36 +10037,36 @@
           <a:lstStyle/>
           <a:p>
             <a:pPr algn="ctr">
-              <a:defRPr sz="850" b="1">
-                <a:solidFill>
-                  <a:srgbClr val="182228"/>
-                </a:solidFill>
-                <a:latin typeface="Aptos"/>
-              </a:defRPr>
-            </a:pPr>
-            <a:r>
-              <a:t>sharpen</a:t>
+              <a:defRPr sz="850" b="0">
+                <a:solidFill>
+                  <a:srgbClr val="56636B"/>
+                </a:solidFill>
+                <a:latin typeface="Aptos"/>
+              </a:defRPr>
+            </a:pPr>
+            <a:r>
+              <a:t>restored</a:t>
             </a:r>
           </a:p>
         </p:txBody>
       </p:sp>
       <p:cxnSp>
         <p:nvCxnSpPr>
-          <p:cNvPr id="29" name="Connector 28"/>
+          <p:cNvPr id="37" name="Connector 36"/>
           <p:cNvCxnSpPr/>
           <p:nvPr/>
         </p:nvCxnSpPr>
         <p:spPr>
           <a:xfrm>
-            <a:off x="2606040" y="5532120"/>
-            <a:ext cx="548640" cy="0"/>
+            <a:off x="4919472" y="5212080"/>
+            <a:ext cx="201168" cy="0"/>
           </a:xfrm>
           <a:prstGeom prst="line">
             <a:avLst/>
           </a:prstGeom>
-          <a:ln w="20320">
+          <a:ln w="17780">
             <a:solidFill>
-              <a:srgbClr val="008074"/>
+              <a:srgbClr val="B2483E"/>
             </a:solidFill>
           </a:ln>
         </p:spPr>
@@ -9284,14 +10087,14 @@
       </p:cxnSp>
       <p:sp>
         <p:nvSpPr>
-          <p:cNvPr id="30" name="Rounded Rectangle 29"/>
+          <p:cNvPr id="38" name="Rounded Rectangle 37"/>
           <p:cNvSpPr/>
           <p:nvPr/>
         </p:nvSpPr>
         <p:spPr>
           <a:xfrm>
-            <a:off x="6263640" y="4096512"/>
-            <a:ext cx="5166360" cy="1965960"/>
+            <a:off x="7498079" y="4096512"/>
+            <a:ext cx="4343400" cy="2148840"/>
           </a:xfrm>
           <a:prstGeom prst="roundRect">
             <a:avLst/>
@@ -9329,14 +10132,14 @@
       </p:sp>
       <p:sp>
         <p:nvSpPr>
-          <p:cNvPr id="31" name="TextBox 30"/>
-          <p:cNvSpPr txBox="1"/>
-          <p:nvPr/>
-        </p:nvSpPr>
-        <p:spPr>
-          <a:xfrm>
-            <a:off x="6464807" y="4261104"/>
-            <a:ext cx="3108960" cy="256032"/>
+          <p:cNvPr id="39" name="TextBox 38"/>
+          <p:cNvSpPr txBox="1"/>
+          <p:nvPr/>
+        </p:nvSpPr>
+        <p:spPr>
+          <a:xfrm>
+            <a:off x="7662671" y="4233672"/>
+            <a:ext cx="3977639" cy="219456"/>
           </a:xfrm>
           <a:prstGeom prst="rect">
             <a:avLst/>
@@ -9350,7 +10153,7 @@
           <a:lstStyle/>
           <a:p>
             <a:pPr>
-              <a:defRPr sz="1500" b="1">
+              <a:defRPr sz="1250" b="1">
                 <a:solidFill>
                   <a:srgbClr val="B88630"/>
                 </a:solidFill>
@@ -9358,57 +10161,21 @@
               </a:defRPr>
             </a:pPr>
             <a:r>
-              <a:t>Brightness / contrast</a:t>
-            </a:r>
-          </a:p>
-        </p:txBody>
-      </p:sp>
-      <p:sp>
-        <p:nvSpPr>
-          <p:cNvPr id="32" name="TextBox 31"/>
-          <p:cNvSpPr txBox="1"/>
-          <p:nvPr/>
-        </p:nvSpPr>
-        <p:spPr>
-          <a:xfrm>
-            <a:off x="6464807" y="4626864"/>
-            <a:ext cx="4617720" cy="502920"/>
-          </a:xfrm>
-          <a:prstGeom prst="rect">
-            <a:avLst/>
-          </a:prstGeom>
-          <a:noFill/>
-        </p:spPr>
-        <p:txBody>
-          <a:bodyPr wrap="square">
-            <a:spAutoFit/>
-          </a:bodyPr>
-          <a:lstStyle/>
-          <a:p>
-            <a:pPr>
-              <a:defRPr sz="1050" b="0">
-                <a:solidFill>
-                  <a:srgbClr val="182228"/>
-                </a:solidFill>
-                <a:latin typeface="Aptos"/>
-              </a:defRPr>
-            </a:pPr>
-            <a:r>
-              <a:t>Autocontrast spreads useful intensities, then contrast normalization brings the image back to a stable range.</a:t>
-            </a:r>
-          </a:p>
-        </p:txBody>
-      </p:sp>
-      <p:sp>
-        <p:nvSpPr>
-          <p:cNvPr id="33" name="Rounded Rectangle 32"/>
+              <a:t>Pixelation</a:t>
+            </a:r>
+          </a:p>
+        </p:txBody>
+      </p:sp>
+      <p:sp>
+        <p:nvSpPr>
+          <p:cNvPr id="40" name="Rounded Rectangle 39"/>
           <p:cNvSpPr/>
           <p:nvPr/>
         </p:nvSpPr>
         <p:spPr>
           <a:xfrm>
-            <a:off x="6583679" y="5340096"/>
-            <a:ext cx="1554480" cy="384048"/>
+            <a:off x="7680959" y="4553712"/>
+            <a:ext cx="1828800" cy="1325880"/>
           </a:xfrm>
           <a:prstGeom prst="roundRect">
             <a:avLst/>
@@ -9446,14 +10213,14 @@
       </p:sp>
       <p:sp>
         <p:nvSpPr>
-          <p:cNvPr id="34" name="Rounded Rectangle 33"/>
+          <p:cNvPr id="41" name="Rounded Rectangle 40"/>
           <p:cNvSpPr/>
           <p:nvPr/>
         </p:nvSpPr>
         <p:spPr>
           <a:xfrm>
-            <a:off x="8805672" y="5340096"/>
-            <a:ext cx="1554480" cy="384048"/>
+            <a:off x="9784080" y="4553712"/>
+            <a:ext cx="1828800" cy="1325880"/>
           </a:xfrm>
           <a:prstGeom prst="roundRect">
             <a:avLst/>
@@ -9489,16 +10256,64 @@
           </a:p>
         </p:txBody>
       </p:sp>
-      <p:sp>
-        <p:nvSpPr>
-          <p:cNvPr id="35" name="TextBox 34"/>
-          <p:cNvSpPr txBox="1"/>
-          <p:nvPr/>
-        </p:nvSpPr>
-        <p:spPr>
-          <a:xfrm>
-            <a:off x="6675120" y="5431536"/>
-            <a:ext cx="1371600" cy="146304"/>
+      <p:pic>
+        <p:nvPicPr>
+          <p:cNvPr id="42" name="Picture 41" descr="pixelation.png"/>
+          <p:cNvPicPr>
+            <a:picLocks noChangeAspect="1"/>
+          </p:cNvPicPr>
+          <p:nvPr/>
+        </p:nvPicPr>
+        <p:blipFill>
+          <a:blip r:embed="rId9"/>
+          <a:stretch>
+            <a:fillRect/>
+          </a:stretch>
+        </p:blipFill>
+        <p:spPr>
+          <a:xfrm>
+            <a:off x="8065008" y="4626864"/>
+            <a:ext cx="1060704" cy="1060704"/>
+          </a:xfrm>
+          <a:prstGeom prst="rect">
+            <a:avLst/>
+          </a:prstGeom>
+        </p:spPr>
+      </p:pic>
+      <p:pic>
+        <p:nvPicPr>
+          <p:cNvPr id="43" name="Picture 42" descr="pixelation_restored.png"/>
+          <p:cNvPicPr>
+            <a:picLocks noChangeAspect="1"/>
+          </p:cNvPicPr>
+          <p:nvPr/>
+        </p:nvPicPr>
+        <p:blipFill>
+          <a:blip r:embed="rId10"/>
+          <a:stretch>
+            <a:fillRect/>
+          </a:stretch>
+        </p:blipFill>
+        <p:spPr>
+          <a:xfrm>
+            <a:off x="10168128" y="4626864"/>
+            <a:ext cx="1060704" cy="1060704"/>
+          </a:xfrm>
+          <a:prstGeom prst="rect">
+            <a:avLst/>
+          </a:prstGeom>
+        </p:spPr>
+      </p:pic>
+      <p:sp>
+        <p:nvSpPr>
+          <p:cNvPr id="44" name="TextBox 43"/>
+          <p:cNvSpPr txBox="1"/>
+          <p:nvPr/>
+        </p:nvSpPr>
+        <p:spPr>
+          <a:xfrm>
+            <a:off x="7909559" y="5815584"/>
+            <a:ext cx="1417320" cy="164592"/>
           </a:xfrm>
           <a:prstGeom prst="rect">
             <a:avLst/>
@@ -9512,29 +10327,29 @@
           <a:lstStyle/>
           <a:p>
             <a:pPr algn="ctr">
-              <a:defRPr sz="850" b="1">
-                <a:solidFill>
-                  <a:srgbClr val="182228"/>
-                </a:solidFill>
-                <a:latin typeface="Aptos"/>
-              </a:defRPr>
-            </a:pPr>
-            <a:r>
-              <a:t>normalize</a:t>
-            </a:r>
-          </a:p>
-        </p:txBody>
-      </p:sp>
-      <p:sp>
-        <p:nvSpPr>
-          <p:cNvPr id="36" name="TextBox 35"/>
-          <p:cNvSpPr txBox="1"/>
-          <p:nvPr/>
-        </p:nvSpPr>
-        <p:spPr>
-          <a:xfrm>
-            <a:off x="8897112" y="5431536"/>
-            <a:ext cx="1371600" cy="146304"/>
+              <a:defRPr sz="850" b="0">
+                <a:solidFill>
+                  <a:srgbClr val="56636B"/>
+                </a:solidFill>
+                <a:latin typeface="Aptos"/>
+              </a:defRPr>
+            </a:pPr>
+            <a:r>
+              <a:t>distorted</a:t>
+            </a:r>
+          </a:p>
+        </p:txBody>
+      </p:sp>
+      <p:sp>
+        <p:nvSpPr>
+          <p:cNvPr id="45" name="TextBox 44"/>
+          <p:cNvSpPr txBox="1"/>
+          <p:nvPr/>
+        </p:nvSpPr>
+        <p:spPr>
+          <a:xfrm>
+            <a:off x="10012680" y="5815584"/>
+            <a:ext cx="1417320" cy="164592"/>
           </a:xfrm>
           <a:prstGeom prst="rect">
             <a:avLst/>
@@ -9548,34 +10363,34 @@
           <a:lstStyle/>
           <a:p>
             <a:pPr algn="ctr">
-              <a:defRPr sz="850" b="1">
-                <a:solidFill>
-                  <a:srgbClr val="182228"/>
-                </a:solidFill>
-                <a:latin typeface="Aptos"/>
-              </a:defRPr>
-            </a:pPr>
-            <a:r>
-              <a:t>rebalance</a:t>
+              <a:defRPr sz="850" b="0">
+                <a:solidFill>
+                  <a:srgbClr val="56636B"/>
+                </a:solidFill>
+                <a:latin typeface="Aptos"/>
+              </a:defRPr>
+            </a:pPr>
+            <a:r>
+              <a:t>restored</a:t>
             </a:r>
           </a:p>
         </p:txBody>
       </p:sp>
       <p:cxnSp>
         <p:nvCxnSpPr>
-          <p:cNvPr id="37" name="Connector 36"/>
+          <p:cNvPr id="46" name="Connector 45"/>
           <p:cNvCxnSpPr/>
           <p:nvPr/>
         </p:nvCxnSpPr>
         <p:spPr>
           <a:xfrm>
-            <a:off x="8183879" y="5532120"/>
-            <a:ext cx="548641" cy="0"/>
+            <a:off x="9537192" y="5212080"/>
+            <a:ext cx="201167" cy="0"/>
           </a:xfrm>
           <a:prstGeom prst="line">
             <a:avLst/>
           </a:prstGeom>
-          <a:ln w="20320">
+          <a:ln w="17780">
             <a:solidFill>
               <a:srgbClr val="B88630"/>
             </a:solidFill>
@@ -9598,7 +10413,7 @@
       </p:cxnSp>
       <p:sp>
         <p:nvSpPr>
-          <p:cNvPr id="38" name="TextBox 37"/>
+          <p:cNvPr id="47" name="TextBox 46"/>
           <p:cNvSpPr txBox="1"/>
           <p:nvPr/>
         </p:nvSpPr>
@@ -13119,6 +13934,1468 @@
 </file>
 
 <file path=ppt/slides/slide7.xml><?xml version="1.0" encoding="utf-8"?>
+<p:sld xmlns:a="http://schemas.openxmlformats.org/drawingml/2006/main" xmlns:p="http://schemas.openxmlformats.org/presentationml/2006/main" xmlns:r="http://schemas.openxmlformats.org/officeDocument/2006/relationships">
+  <p:cSld>
+    <p:bg>
+      <p:bgPr>
+        <a:solidFill>
+          <a:srgbClr val="F7F9F7"/>
+        </a:solidFill>
+        <a:effectLst/>
+      </p:bgPr>
+    </p:bg>
+    <p:spTree>
+      <p:nvGrpSpPr>
+        <p:cNvPr id="1" name=""/>
+        <p:cNvGrpSpPr/>
+        <p:nvPr/>
+      </p:nvGrpSpPr>
+      <p:grpSpPr/>
+      <p:sp>
+        <p:nvSpPr>
+          <p:cNvPr id="2" name="TextBox 1"/>
+          <p:cNvSpPr txBox="1"/>
+          <p:nvPr/>
+        </p:nvSpPr>
+        <p:spPr>
+          <a:xfrm>
+            <a:off x="502920" y="320040"/>
+            <a:ext cx="4937760" cy="256032"/>
+          </a:xfrm>
+          <a:prstGeom prst="rect">
+            <a:avLst/>
+          </a:prstGeom>
+          <a:noFill/>
+        </p:spPr>
+        <p:txBody>
+          <a:bodyPr wrap="square">
+            <a:spAutoFit/>
+          </a:bodyPr>
+          <a:lstStyle/>
+          <a:p>
+            <a:pPr>
+              <a:defRPr sz="900" b="1">
+                <a:solidFill>
+                  <a:srgbClr val="008074"/>
+                </a:solidFill>
+                <a:latin typeface="Aptos"/>
+              </a:defRPr>
+            </a:pPr>
+            <a:r>
+              <a:t>RESTORATION METHODS</a:t>
+            </a:r>
+          </a:p>
+        </p:txBody>
+      </p:sp>
+      <p:sp>
+        <p:nvSpPr>
+          <p:cNvPr id="3" name="TextBox 2"/>
+          <p:cNvSpPr txBox="1"/>
+          <p:nvPr/>
+        </p:nvSpPr>
+        <p:spPr>
+          <a:xfrm>
+            <a:off x="502920" y="640080"/>
+            <a:ext cx="8961120" cy="566928"/>
+          </a:xfrm>
+          <a:prstGeom prst="rect">
+            <a:avLst/>
+          </a:prstGeom>
+          <a:noFill/>
+        </p:spPr>
+        <p:txBody>
+          <a:bodyPr wrap="square">
+            <a:spAutoFit/>
+          </a:bodyPr>
+          <a:lstStyle/>
+          <a:p>
+            <a:pPr>
+              <a:defRPr sz="2400" b="1">
+                <a:solidFill>
+                  <a:srgbClr val="182228"/>
+                </a:solidFill>
+                <a:latin typeface="Aptos"/>
+              </a:defRPr>
+            </a:pPr>
+            <a:r>
+              <a:t>How the restorations work after distortion.</a:t>
+            </a:r>
+          </a:p>
+        </p:txBody>
+      </p:sp>
+      <p:sp>
+        <p:nvSpPr>
+          <p:cNvPr id="4" name="TextBox 3"/>
+          <p:cNvSpPr txBox="1"/>
+          <p:nvPr/>
+        </p:nvSpPr>
+        <p:spPr>
+          <a:xfrm>
+            <a:off x="521207" y="1225296"/>
+            <a:ext cx="9875520" cy="292608"/>
+          </a:xfrm>
+          <a:prstGeom prst="rect">
+            <a:avLst/>
+          </a:prstGeom>
+          <a:noFill/>
+        </p:spPr>
+        <p:txBody>
+          <a:bodyPr wrap="square">
+            <a:spAutoFit/>
+          </a:bodyPr>
+          <a:lstStyle/>
+          <a:p>
+            <a:pPr>
+              <a:defRPr sz="1050" b="0">
+                <a:solidFill>
+                  <a:srgbClr val="56636B"/>
+                </a:solidFill>
+                <a:latin typeface="Aptos"/>
+              </a:defRPr>
+            </a:pPr>
+            <a:r>
+              <a:t>Each restoration is a simple image-processing step that tries to recover useful MRI structure before measuring the task.</a:t>
+            </a:r>
+          </a:p>
+        </p:txBody>
+      </p:sp>
+      <p:sp>
+        <p:nvSpPr>
+          <p:cNvPr id="5" name="TextBox 4"/>
+          <p:cNvSpPr txBox="1"/>
+          <p:nvPr/>
+        </p:nvSpPr>
+        <p:spPr>
+          <a:xfrm>
+            <a:off x="9692640" y="347472"/>
+            <a:ext cx="1920240" cy="228600"/>
+          </a:xfrm>
+          <a:prstGeom prst="rect">
+            <a:avLst/>
+          </a:prstGeom>
+          <a:noFill/>
+        </p:spPr>
+        <p:txBody>
+          <a:bodyPr wrap="square">
+            <a:spAutoFit/>
+          </a:bodyPr>
+          <a:lstStyle/>
+          <a:p>
+            <a:pPr algn="r">
+              <a:defRPr sz="850" b="0">
+                <a:solidFill>
+                  <a:srgbClr val="56636B"/>
+                </a:solidFill>
+                <a:latin typeface="Aptos"/>
+              </a:defRPr>
+            </a:pPr>
+            <a:r>
+              <a:t>Brain MRI robustness</a:t>
+            </a:r>
+          </a:p>
+        </p:txBody>
+      </p:sp>
+      <p:sp>
+        <p:nvSpPr>
+          <p:cNvPr id="6" name="Rounded Rectangle 5"/>
+          <p:cNvSpPr/>
+          <p:nvPr/>
+        </p:nvSpPr>
+        <p:spPr>
+          <a:xfrm>
+            <a:off x="685800" y="1783080"/>
+            <a:ext cx="5166360" cy="1965960"/>
+          </a:xfrm>
+          <a:prstGeom prst="roundRect">
+            <a:avLst/>
+          </a:prstGeom>
+          <a:solidFill>
+            <a:srgbClr val="FFFFFF"/>
+          </a:solidFill>
+          <a:ln w="8890">
+            <a:solidFill>
+              <a:srgbClr val="D2DBDB"/>
+            </a:solidFill>
+          </a:ln>
+        </p:spPr>
+        <p:style>
+          <a:lnRef idx="1">
+            <a:schemeClr val="accent1"/>
+          </a:lnRef>
+          <a:fillRef idx="3">
+            <a:schemeClr val="accent1"/>
+          </a:fillRef>
+          <a:effectRef idx="2">
+            <a:schemeClr val="accent1"/>
+          </a:effectRef>
+          <a:fontRef idx="minor">
+            <a:schemeClr val="lt1"/>
+          </a:fontRef>
+        </p:style>
+        <p:txBody>
+          <a:bodyPr rtlCol="0" anchor="ctr"/>
+          <a:lstStyle/>
+          <a:p>
+            <a:pPr algn="ctr"/>
+          </a:p>
+        </p:txBody>
+      </p:sp>
+      <p:sp>
+        <p:nvSpPr>
+          <p:cNvPr id="7" name="TextBox 6"/>
+          <p:cNvSpPr txBox="1"/>
+          <p:nvPr/>
+        </p:nvSpPr>
+        <p:spPr>
+          <a:xfrm>
+            <a:off x="886968" y="1947672"/>
+            <a:ext cx="3108960" cy="256032"/>
+          </a:xfrm>
+          <a:prstGeom prst="rect">
+            <a:avLst/>
+          </a:prstGeom>
+          <a:noFill/>
+        </p:spPr>
+        <p:txBody>
+          <a:bodyPr wrap="square">
+            <a:spAutoFit/>
+          </a:bodyPr>
+          <a:lstStyle/>
+          <a:p>
+            <a:pPr>
+              <a:defRPr sz="1500" b="1">
+                <a:solidFill>
+                  <a:srgbClr val="2666AC"/>
+                </a:solidFill>
+                <a:latin typeface="Aptos"/>
+              </a:defRPr>
+            </a:pPr>
+            <a:r>
+              <a:t>Gaussian noise</a:t>
+            </a:r>
+          </a:p>
+        </p:txBody>
+      </p:sp>
+      <p:sp>
+        <p:nvSpPr>
+          <p:cNvPr id="8" name="TextBox 7"/>
+          <p:cNvSpPr txBox="1"/>
+          <p:nvPr/>
+        </p:nvSpPr>
+        <p:spPr>
+          <a:xfrm>
+            <a:off x="886968" y="2313432"/>
+            <a:ext cx="4617720" cy="502920"/>
+          </a:xfrm>
+          <a:prstGeom prst="rect">
+            <a:avLst/>
+          </a:prstGeom>
+          <a:noFill/>
+        </p:spPr>
+        <p:txBody>
+          <a:bodyPr wrap="square">
+            <a:spAutoFit/>
+          </a:bodyPr>
+          <a:lstStyle/>
+          <a:p>
+            <a:pPr>
+              <a:defRPr sz="1050" b="0">
+                <a:solidFill>
+                  <a:srgbClr val="182228"/>
+                </a:solidFill>
+                <a:latin typeface="Aptos"/>
+              </a:defRPr>
+            </a:pPr>
+            <a:r>
+              <a:t>Light Gaussian smoothing reduces random pixel noise, then unsharp masking brings edges back.</a:t>
+            </a:r>
+          </a:p>
+        </p:txBody>
+      </p:sp>
+      <p:sp>
+        <p:nvSpPr>
+          <p:cNvPr id="9" name="Rounded Rectangle 8"/>
+          <p:cNvSpPr/>
+          <p:nvPr/>
+        </p:nvSpPr>
+        <p:spPr>
+          <a:xfrm>
+            <a:off x="1005840" y="3026664"/>
+            <a:ext cx="1554480" cy="384048"/>
+          </a:xfrm>
+          <a:prstGeom prst="roundRect">
+            <a:avLst/>
+          </a:prstGeom>
+          <a:solidFill>
+            <a:srgbClr val="F1F5F5"/>
+          </a:solidFill>
+          <a:ln w="8890">
+            <a:solidFill>
+              <a:srgbClr val="D2DBDB"/>
+            </a:solidFill>
+          </a:ln>
+        </p:spPr>
+        <p:style>
+          <a:lnRef idx="1">
+            <a:schemeClr val="accent1"/>
+          </a:lnRef>
+          <a:fillRef idx="3">
+            <a:schemeClr val="accent1"/>
+          </a:fillRef>
+          <a:effectRef idx="2">
+            <a:schemeClr val="accent1"/>
+          </a:effectRef>
+          <a:fontRef idx="minor">
+            <a:schemeClr val="lt1"/>
+          </a:fontRef>
+        </p:style>
+        <p:txBody>
+          <a:bodyPr rtlCol="0" anchor="ctr"/>
+          <a:lstStyle/>
+          <a:p>
+            <a:pPr algn="ctr"/>
+          </a:p>
+        </p:txBody>
+      </p:sp>
+      <p:sp>
+        <p:nvSpPr>
+          <p:cNvPr id="10" name="Rounded Rectangle 9"/>
+          <p:cNvSpPr/>
+          <p:nvPr/>
+        </p:nvSpPr>
+        <p:spPr>
+          <a:xfrm>
+            <a:off x="3227832" y="3026664"/>
+            <a:ext cx="1554480" cy="384048"/>
+          </a:xfrm>
+          <a:prstGeom prst="roundRect">
+            <a:avLst/>
+          </a:prstGeom>
+          <a:solidFill>
+            <a:srgbClr val="F1F5F5"/>
+          </a:solidFill>
+          <a:ln w="8890">
+            <a:solidFill>
+              <a:srgbClr val="D2DBDB"/>
+            </a:solidFill>
+          </a:ln>
+        </p:spPr>
+        <p:style>
+          <a:lnRef idx="1">
+            <a:schemeClr val="accent1"/>
+          </a:lnRef>
+          <a:fillRef idx="3">
+            <a:schemeClr val="accent1"/>
+          </a:fillRef>
+          <a:effectRef idx="2">
+            <a:schemeClr val="accent1"/>
+          </a:effectRef>
+          <a:fontRef idx="minor">
+            <a:schemeClr val="lt1"/>
+          </a:fontRef>
+        </p:style>
+        <p:txBody>
+          <a:bodyPr rtlCol="0" anchor="ctr"/>
+          <a:lstStyle/>
+          <a:p>
+            <a:pPr algn="ctr"/>
+          </a:p>
+        </p:txBody>
+      </p:sp>
+      <p:sp>
+        <p:nvSpPr>
+          <p:cNvPr id="11" name="TextBox 10"/>
+          <p:cNvSpPr txBox="1"/>
+          <p:nvPr/>
+        </p:nvSpPr>
+        <p:spPr>
+          <a:xfrm>
+            <a:off x="1097280" y="3118104"/>
+            <a:ext cx="1371600" cy="146304"/>
+          </a:xfrm>
+          <a:prstGeom prst="rect">
+            <a:avLst/>
+          </a:prstGeom>
+          <a:noFill/>
+        </p:spPr>
+        <p:txBody>
+          <a:bodyPr wrap="square">
+            <a:spAutoFit/>
+          </a:bodyPr>
+          <a:lstStyle/>
+          <a:p>
+            <a:pPr algn="ctr">
+              <a:defRPr sz="850" b="1">
+                <a:solidFill>
+                  <a:srgbClr val="182228"/>
+                </a:solidFill>
+                <a:latin typeface="Aptos"/>
+              </a:defRPr>
+            </a:pPr>
+            <a:r>
+              <a:t>smooth</a:t>
+            </a:r>
+          </a:p>
+        </p:txBody>
+      </p:sp>
+      <p:sp>
+        <p:nvSpPr>
+          <p:cNvPr id="12" name="TextBox 11"/>
+          <p:cNvSpPr txBox="1"/>
+          <p:nvPr/>
+        </p:nvSpPr>
+        <p:spPr>
+          <a:xfrm>
+            <a:off x="3319272" y="3118104"/>
+            <a:ext cx="1371600" cy="146304"/>
+          </a:xfrm>
+          <a:prstGeom prst="rect">
+            <a:avLst/>
+          </a:prstGeom>
+          <a:noFill/>
+        </p:spPr>
+        <p:txBody>
+          <a:bodyPr wrap="square">
+            <a:spAutoFit/>
+          </a:bodyPr>
+          <a:lstStyle/>
+          <a:p>
+            <a:pPr algn="ctr">
+              <a:defRPr sz="850" b="1">
+                <a:solidFill>
+                  <a:srgbClr val="182228"/>
+                </a:solidFill>
+                <a:latin typeface="Aptos"/>
+              </a:defRPr>
+            </a:pPr>
+            <a:r>
+              <a:t>sharpen</a:t>
+            </a:r>
+          </a:p>
+        </p:txBody>
+      </p:sp>
+      <p:cxnSp>
+        <p:nvCxnSpPr>
+          <p:cNvPr id="13" name="Connector 12"/>
+          <p:cNvCxnSpPr/>
+          <p:nvPr/>
+        </p:nvCxnSpPr>
+        <p:spPr>
+          <a:xfrm>
+            <a:off x="2606040" y="3218688"/>
+            <a:ext cx="548640" cy="0"/>
+          </a:xfrm>
+          <a:prstGeom prst="line">
+            <a:avLst/>
+          </a:prstGeom>
+          <a:ln w="20320">
+            <a:solidFill>
+              <a:srgbClr val="2666AC"/>
+            </a:solidFill>
+          </a:ln>
+        </p:spPr>
+        <p:style>
+          <a:lnRef idx="2">
+            <a:schemeClr val="accent1"/>
+          </a:lnRef>
+          <a:fillRef idx="0">
+            <a:schemeClr val="accent1"/>
+          </a:fillRef>
+          <a:effectRef idx="1">
+            <a:schemeClr val="accent1"/>
+          </a:effectRef>
+          <a:fontRef idx="minor">
+            <a:schemeClr val="tx1"/>
+          </a:fontRef>
+        </p:style>
+      </p:cxnSp>
+      <p:sp>
+        <p:nvSpPr>
+          <p:cNvPr id="14" name="Rounded Rectangle 13"/>
+          <p:cNvSpPr/>
+          <p:nvPr/>
+        </p:nvSpPr>
+        <p:spPr>
+          <a:xfrm>
+            <a:off x="6263640" y="1783080"/>
+            <a:ext cx="5166360" cy="1965960"/>
+          </a:xfrm>
+          <a:prstGeom prst="roundRect">
+            <a:avLst/>
+          </a:prstGeom>
+          <a:solidFill>
+            <a:srgbClr val="FFFFFF"/>
+          </a:solidFill>
+          <a:ln w="8890">
+            <a:solidFill>
+              <a:srgbClr val="D2DBDB"/>
+            </a:solidFill>
+          </a:ln>
+        </p:spPr>
+        <p:style>
+          <a:lnRef idx="1">
+            <a:schemeClr val="accent1"/>
+          </a:lnRef>
+          <a:fillRef idx="3">
+            <a:schemeClr val="accent1"/>
+          </a:fillRef>
+          <a:effectRef idx="2">
+            <a:schemeClr val="accent1"/>
+          </a:effectRef>
+          <a:fontRef idx="minor">
+            <a:schemeClr val="lt1"/>
+          </a:fontRef>
+        </p:style>
+        <p:txBody>
+          <a:bodyPr rtlCol="0" anchor="ctr"/>
+          <a:lstStyle/>
+          <a:p>
+            <a:pPr algn="ctr"/>
+          </a:p>
+        </p:txBody>
+      </p:sp>
+      <p:sp>
+        <p:nvSpPr>
+          <p:cNvPr id="15" name="TextBox 14"/>
+          <p:cNvSpPr txBox="1"/>
+          <p:nvPr/>
+        </p:nvSpPr>
+        <p:spPr>
+          <a:xfrm>
+            <a:off x="6464807" y="1947672"/>
+            <a:ext cx="3108960" cy="256032"/>
+          </a:xfrm>
+          <a:prstGeom prst="rect">
+            <a:avLst/>
+          </a:prstGeom>
+          <a:noFill/>
+        </p:spPr>
+        <p:txBody>
+          <a:bodyPr wrap="square">
+            <a:spAutoFit/>
+          </a:bodyPr>
+          <a:lstStyle/>
+          <a:p>
+            <a:pPr>
+              <a:defRPr sz="1500" b="1">
+                <a:solidFill>
+                  <a:srgbClr val="B2483E"/>
+                </a:solidFill>
+                <a:latin typeface="Aptos"/>
+              </a:defRPr>
+            </a:pPr>
+            <a:r>
+              <a:t>Salt-and-pepper</a:t>
+            </a:r>
+          </a:p>
+        </p:txBody>
+      </p:sp>
+      <p:sp>
+        <p:nvSpPr>
+          <p:cNvPr id="16" name="TextBox 15"/>
+          <p:cNvSpPr txBox="1"/>
+          <p:nvPr/>
+        </p:nvSpPr>
+        <p:spPr>
+          <a:xfrm>
+            <a:off x="6464807" y="2313432"/>
+            <a:ext cx="4617720" cy="502920"/>
+          </a:xfrm>
+          <a:prstGeom prst="rect">
+            <a:avLst/>
+          </a:prstGeom>
+          <a:noFill/>
+        </p:spPr>
+        <p:txBody>
+          <a:bodyPr wrap="square">
+            <a:spAutoFit/>
+          </a:bodyPr>
+          <a:lstStyle/>
+          <a:p>
+            <a:pPr>
+              <a:defRPr sz="1050" b="0">
+                <a:solidFill>
+                  <a:srgbClr val="182228"/>
+                </a:solidFill>
+                <a:latin typeface="Aptos"/>
+              </a:defRPr>
+            </a:pPr>
+            <a:r>
+              <a:t>A median filter replaces isolated black/white pixels using nearby values while preserving edges.</a:t>
+            </a:r>
+          </a:p>
+        </p:txBody>
+      </p:sp>
+      <p:sp>
+        <p:nvSpPr>
+          <p:cNvPr id="17" name="Rounded Rectangle 16"/>
+          <p:cNvSpPr/>
+          <p:nvPr/>
+        </p:nvSpPr>
+        <p:spPr>
+          <a:xfrm>
+            <a:off x="6583679" y="3026664"/>
+            <a:ext cx="1554480" cy="384048"/>
+          </a:xfrm>
+          <a:prstGeom prst="roundRect">
+            <a:avLst/>
+          </a:prstGeom>
+          <a:solidFill>
+            <a:srgbClr val="F1F5F5"/>
+          </a:solidFill>
+          <a:ln w="8890">
+            <a:solidFill>
+              <a:srgbClr val="D2DBDB"/>
+            </a:solidFill>
+          </a:ln>
+        </p:spPr>
+        <p:style>
+          <a:lnRef idx="1">
+            <a:schemeClr val="accent1"/>
+          </a:lnRef>
+          <a:fillRef idx="3">
+            <a:schemeClr val="accent1"/>
+          </a:fillRef>
+          <a:effectRef idx="2">
+            <a:schemeClr val="accent1"/>
+          </a:effectRef>
+          <a:fontRef idx="minor">
+            <a:schemeClr val="lt1"/>
+          </a:fontRef>
+        </p:style>
+        <p:txBody>
+          <a:bodyPr rtlCol="0" anchor="ctr"/>
+          <a:lstStyle/>
+          <a:p>
+            <a:pPr algn="ctr"/>
+          </a:p>
+        </p:txBody>
+      </p:sp>
+      <p:sp>
+        <p:nvSpPr>
+          <p:cNvPr id="18" name="Rounded Rectangle 17"/>
+          <p:cNvSpPr/>
+          <p:nvPr/>
+        </p:nvSpPr>
+        <p:spPr>
+          <a:xfrm>
+            <a:off x="8805672" y="3026664"/>
+            <a:ext cx="1554480" cy="384048"/>
+          </a:xfrm>
+          <a:prstGeom prst="roundRect">
+            <a:avLst/>
+          </a:prstGeom>
+          <a:solidFill>
+            <a:srgbClr val="F1F5F5"/>
+          </a:solidFill>
+          <a:ln w="8890">
+            <a:solidFill>
+              <a:srgbClr val="D2DBDB"/>
+            </a:solidFill>
+          </a:ln>
+        </p:spPr>
+        <p:style>
+          <a:lnRef idx="1">
+            <a:schemeClr val="accent1"/>
+          </a:lnRef>
+          <a:fillRef idx="3">
+            <a:schemeClr val="accent1"/>
+          </a:fillRef>
+          <a:effectRef idx="2">
+            <a:schemeClr val="accent1"/>
+          </a:effectRef>
+          <a:fontRef idx="minor">
+            <a:schemeClr val="lt1"/>
+          </a:fontRef>
+        </p:style>
+        <p:txBody>
+          <a:bodyPr rtlCol="0" anchor="ctr"/>
+          <a:lstStyle/>
+          <a:p>
+            <a:pPr algn="ctr"/>
+          </a:p>
+        </p:txBody>
+      </p:sp>
+      <p:sp>
+        <p:nvSpPr>
+          <p:cNvPr id="19" name="TextBox 18"/>
+          <p:cNvSpPr txBox="1"/>
+          <p:nvPr/>
+        </p:nvSpPr>
+        <p:spPr>
+          <a:xfrm>
+            <a:off x="6675120" y="3118104"/>
+            <a:ext cx="1371600" cy="146304"/>
+          </a:xfrm>
+          <a:prstGeom prst="rect">
+            <a:avLst/>
+          </a:prstGeom>
+          <a:noFill/>
+        </p:spPr>
+        <p:txBody>
+          <a:bodyPr wrap="square">
+            <a:spAutoFit/>
+          </a:bodyPr>
+          <a:lstStyle/>
+          <a:p>
+            <a:pPr algn="ctr">
+              <a:defRPr sz="850" b="1">
+                <a:solidFill>
+                  <a:srgbClr val="182228"/>
+                </a:solidFill>
+                <a:latin typeface="Aptos"/>
+              </a:defRPr>
+            </a:pPr>
+            <a:r>
+              <a:t>median</a:t>
+            </a:r>
+          </a:p>
+        </p:txBody>
+      </p:sp>
+      <p:sp>
+        <p:nvSpPr>
+          <p:cNvPr id="20" name="TextBox 19"/>
+          <p:cNvSpPr txBox="1"/>
+          <p:nvPr/>
+        </p:nvSpPr>
+        <p:spPr>
+          <a:xfrm>
+            <a:off x="8897112" y="3118104"/>
+            <a:ext cx="1371600" cy="146304"/>
+          </a:xfrm>
+          <a:prstGeom prst="rect">
+            <a:avLst/>
+          </a:prstGeom>
+          <a:noFill/>
+        </p:spPr>
+        <p:txBody>
+          <a:bodyPr wrap="square">
+            <a:spAutoFit/>
+          </a:bodyPr>
+          <a:lstStyle/>
+          <a:p>
+            <a:pPr algn="ctr">
+              <a:defRPr sz="850" b="1">
+                <a:solidFill>
+                  <a:srgbClr val="182228"/>
+                </a:solidFill>
+                <a:latin typeface="Aptos"/>
+              </a:defRPr>
+            </a:pPr>
+            <a:r>
+              <a:t>remove specks</a:t>
+            </a:r>
+          </a:p>
+        </p:txBody>
+      </p:sp>
+      <p:cxnSp>
+        <p:nvCxnSpPr>
+          <p:cNvPr id="21" name="Connector 20"/>
+          <p:cNvCxnSpPr/>
+          <p:nvPr/>
+        </p:nvCxnSpPr>
+        <p:spPr>
+          <a:xfrm>
+            <a:off x="8183879" y="3218688"/>
+            <a:ext cx="548641" cy="0"/>
+          </a:xfrm>
+          <a:prstGeom prst="line">
+            <a:avLst/>
+          </a:prstGeom>
+          <a:ln w="20320">
+            <a:solidFill>
+              <a:srgbClr val="B2483E"/>
+            </a:solidFill>
+          </a:ln>
+        </p:spPr>
+        <p:style>
+          <a:lnRef idx="2">
+            <a:schemeClr val="accent1"/>
+          </a:lnRef>
+          <a:fillRef idx="0">
+            <a:schemeClr val="accent1"/>
+          </a:fillRef>
+          <a:effectRef idx="1">
+            <a:schemeClr val="accent1"/>
+          </a:effectRef>
+          <a:fontRef idx="minor">
+            <a:schemeClr val="tx1"/>
+          </a:fontRef>
+        </p:style>
+      </p:cxnSp>
+      <p:sp>
+        <p:nvSpPr>
+          <p:cNvPr id="22" name="Rounded Rectangle 21"/>
+          <p:cNvSpPr/>
+          <p:nvPr/>
+        </p:nvSpPr>
+        <p:spPr>
+          <a:xfrm>
+            <a:off x="685800" y="4096512"/>
+            <a:ext cx="5166360" cy="1965960"/>
+          </a:xfrm>
+          <a:prstGeom prst="roundRect">
+            <a:avLst/>
+          </a:prstGeom>
+          <a:solidFill>
+            <a:srgbClr val="FFFFFF"/>
+          </a:solidFill>
+          <a:ln w="8890">
+            <a:solidFill>
+              <a:srgbClr val="D2DBDB"/>
+            </a:solidFill>
+          </a:ln>
+        </p:spPr>
+        <p:style>
+          <a:lnRef idx="1">
+            <a:schemeClr val="accent1"/>
+          </a:lnRef>
+          <a:fillRef idx="3">
+            <a:schemeClr val="accent1"/>
+          </a:fillRef>
+          <a:effectRef idx="2">
+            <a:schemeClr val="accent1"/>
+          </a:effectRef>
+          <a:fontRef idx="minor">
+            <a:schemeClr val="lt1"/>
+          </a:fontRef>
+        </p:style>
+        <p:txBody>
+          <a:bodyPr rtlCol="0" anchor="ctr"/>
+          <a:lstStyle/>
+          <a:p>
+            <a:pPr algn="ctr"/>
+          </a:p>
+        </p:txBody>
+      </p:sp>
+      <p:sp>
+        <p:nvSpPr>
+          <p:cNvPr id="23" name="TextBox 22"/>
+          <p:cNvSpPr txBox="1"/>
+          <p:nvPr/>
+        </p:nvSpPr>
+        <p:spPr>
+          <a:xfrm>
+            <a:off x="886968" y="4261104"/>
+            <a:ext cx="3108960" cy="256032"/>
+          </a:xfrm>
+          <a:prstGeom prst="rect">
+            <a:avLst/>
+          </a:prstGeom>
+          <a:noFill/>
+        </p:spPr>
+        <p:txBody>
+          <a:bodyPr wrap="square">
+            <a:spAutoFit/>
+          </a:bodyPr>
+          <a:lstStyle/>
+          <a:p>
+            <a:pPr>
+              <a:defRPr sz="1500" b="1">
+                <a:solidFill>
+                  <a:srgbClr val="008074"/>
+                </a:solidFill>
+                <a:latin typeface="Aptos"/>
+              </a:defRPr>
+            </a:pPr>
+            <a:r>
+              <a:t>Gaussian blur</a:t>
+            </a:r>
+          </a:p>
+        </p:txBody>
+      </p:sp>
+      <p:sp>
+        <p:nvSpPr>
+          <p:cNvPr id="24" name="TextBox 23"/>
+          <p:cNvSpPr txBox="1"/>
+          <p:nvPr/>
+        </p:nvSpPr>
+        <p:spPr>
+          <a:xfrm>
+            <a:off x="886968" y="4626864"/>
+            <a:ext cx="4617720" cy="502920"/>
+          </a:xfrm>
+          <a:prstGeom prst="rect">
+            <a:avLst/>
+          </a:prstGeom>
+          <a:noFill/>
+        </p:spPr>
+        <p:txBody>
+          <a:bodyPr wrap="square">
+            <a:spAutoFit/>
+          </a:bodyPr>
+          <a:lstStyle/>
+          <a:p>
+            <a:pPr>
+              <a:defRPr sz="1050" b="0">
+                <a:solidFill>
+                  <a:srgbClr val="182228"/>
+                </a:solidFill>
+                <a:latin typeface="Aptos"/>
+              </a:defRPr>
+            </a:pPr>
+            <a:r>
+              <a:t>Unsharp masking boosts local contrast so softened edges become clearer again.</a:t>
+            </a:r>
+          </a:p>
+        </p:txBody>
+      </p:sp>
+      <p:sp>
+        <p:nvSpPr>
+          <p:cNvPr id="25" name="Rounded Rectangle 24"/>
+          <p:cNvSpPr/>
+          <p:nvPr/>
+        </p:nvSpPr>
+        <p:spPr>
+          <a:xfrm>
+            <a:off x="1005840" y="5340096"/>
+            <a:ext cx="1554480" cy="384048"/>
+          </a:xfrm>
+          <a:prstGeom prst="roundRect">
+            <a:avLst/>
+          </a:prstGeom>
+          <a:solidFill>
+            <a:srgbClr val="F1F5F5"/>
+          </a:solidFill>
+          <a:ln w="8890">
+            <a:solidFill>
+              <a:srgbClr val="D2DBDB"/>
+            </a:solidFill>
+          </a:ln>
+        </p:spPr>
+        <p:style>
+          <a:lnRef idx="1">
+            <a:schemeClr val="accent1"/>
+          </a:lnRef>
+          <a:fillRef idx="3">
+            <a:schemeClr val="accent1"/>
+          </a:fillRef>
+          <a:effectRef idx="2">
+            <a:schemeClr val="accent1"/>
+          </a:effectRef>
+          <a:fontRef idx="minor">
+            <a:schemeClr val="lt1"/>
+          </a:fontRef>
+        </p:style>
+        <p:txBody>
+          <a:bodyPr rtlCol="0" anchor="ctr"/>
+          <a:lstStyle/>
+          <a:p>
+            <a:pPr algn="ctr"/>
+          </a:p>
+        </p:txBody>
+      </p:sp>
+      <p:sp>
+        <p:nvSpPr>
+          <p:cNvPr id="26" name="Rounded Rectangle 25"/>
+          <p:cNvSpPr/>
+          <p:nvPr/>
+        </p:nvSpPr>
+        <p:spPr>
+          <a:xfrm>
+            <a:off x="3227832" y="5340096"/>
+            <a:ext cx="1554480" cy="384048"/>
+          </a:xfrm>
+          <a:prstGeom prst="roundRect">
+            <a:avLst/>
+          </a:prstGeom>
+          <a:solidFill>
+            <a:srgbClr val="F1F5F5"/>
+          </a:solidFill>
+          <a:ln w="8890">
+            <a:solidFill>
+              <a:srgbClr val="D2DBDB"/>
+            </a:solidFill>
+          </a:ln>
+        </p:spPr>
+        <p:style>
+          <a:lnRef idx="1">
+            <a:schemeClr val="accent1"/>
+          </a:lnRef>
+          <a:fillRef idx="3">
+            <a:schemeClr val="accent1"/>
+          </a:fillRef>
+          <a:effectRef idx="2">
+            <a:schemeClr val="accent1"/>
+          </a:effectRef>
+          <a:fontRef idx="minor">
+            <a:schemeClr val="lt1"/>
+          </a:fontRef>
+        </p:style>
+        <p:txBody>
+          <a:bodyPr rtlCol="0" anchor="ctr"/>
+          <a:lstStyle/>
+          <a:p>
+            <a:pPr algn="ctr"/>
+          </a:p>
+        </p:txBody>
+      </p:sp>
+      <p:sp>
+        <p:nvSpPr>
+          <p:cNvPr id="27" name="TextBox 26"/>
+          <p:cNvSpPr txBox="1"/>
+          <p:nvPr/>
+        </p:nvSpPr>
+        <p:spPr>
+          <a:xfrm>
+            <a:off x="1097280" y="5431536"/>
+            <a:ext cx="1371600" cy="146304"/>
+          </a:xfrm>
+          <a:prstGeom prst="rect">
+            <a:avLst/>
+          </a:prstGeom>
+          <a:noFill/>
+        </p:spPr>
+        <p:txBody>
+          <a:bodyPr wrap="square">
+            <a:spAutoFit/>
+          </a:bodyPr>
+          <a:lstStyle/>
+          <a:p>
+            <a:pPr algn="ctr">
+              <a:defRPr sz="850" b="1">
+                <a:solidFill>
+                  <a:srgbClr val="182228"/>
+                </a:solidFill>
+                <a:latin typeface="Aptos"/>
+              </a:defRPr>
+            </a:pPr>
+            <a:r>
+              <a:t>edge boost</a:t>
+            </a:r>
+          </a:p>
+        </p:txBody>
+      </p:sp>
+      <p:sp>
+        <p:nvSpPr>
+          <p:cNvPr id="28" name="TextBox 27"/>
+          <p:cNvSpPr txBox="1"/>
+          <p:nvPr/>
+        </p:nvSpPr>
+        <p:spPr>
+          <a:xfrm>
+            <a:off x="3319272" y="5431536"/>
+            <a:ext cx="1371600" cy="146304"/>
+          </a:xfrm>
+          <a:prstGeom prst="rect">
+            <a:avLst/>
+          </a:prstGeom>
+          <a:noFill/>
+        </p:spPr>
+        <p:txBody>
+          <a:bodyPr wrap="square">
+            <a:spAutoFit/>
+          </a:bodyPr>
+          <a:lstStyle/>
+          <a:p>
+            <a:pPr algn="ctr">
+              <a:defRPr sz="850" b="1">
+                <a:solidFill>
+                  <a:srgbClr val="182228"/>
+                </a:solidFill>
+                <a:latin typeface="Aptos"/>
+              </a:defRPr>
+            </a:pPr>
+            <a:r>
+              <a:t>sharpen</a:t>
+            </a:r>
+          </a:p>
+        </p:txBody>
+      </p:sp>
+      <p:cxnSp>
+        <p:nvCxnSpPr>
+          <p:cNvPr id="29" name="Connector 28"/>
+          <p:cNvCxnSpPr/>
+          <p:nvPr/>
+        </p:nvCxnSpPr>
+        <p:spPr>
+          <a:xfrm>
+            <a:off x="2606040" y="5532120"/>
+            <a:ext cx="548640" cy="0"/>
+          </a:xfrm>
+          <a:prstGeom prst="line">
+            <a:avLst/>
+          </a:prstGeom>
+          <a:ln w="20320">
+            <a:solidFill>
+              <a:srgbClr val="008074"/>
+            </a:solidFill>
+          </a:ln>
+        </p:spPr>
+        <p:style>
+          <a:lnRef idx="2">
+            <a:schemeClr val="accent1"/>
+          </a:lnRef>
+          <a:fillRef idx="0">
+            <a:schemeClr val="accent1"/>
+          </a:fillRef>
+          <a:effectRef idx="1">
+            <a:schemeClr val="accent1"/>
+          </a:effectRef>
+          <a:fontRef idx="minor">
+            <a:schemeClr val="tx1"/>
+          </a:fontRef>
+        </p:style>
+      </p:cxnSp>
+      <p:sp>
+        <p:nvSpPr>
+          <p:cNvPr id="30" name="Rounded Rectangle 29"/>
+          <p:cNvSpPr/>
+          <p:nvPr/>
+        </p:nvSpPr>
+        <p:spPr>
+          <a:xfrm>
+            <a:off x="6263640" y="4096512"/>
+            <a:ext cx="5166360" cy="1965960"/>
+          </a:xfrm>
+          <a:prstGeom prst="roundRect">
+            <a:avLst/>
+          </a:prstGeom>
+          <a:solidFill>
+            <a:srgbClr val="FFFFFF"/>
+          </a:solidFill>
+          <a:ln w="8890">
+            <a:solidFill>
+              <a:srgbClr val="D2DBDB"/>
+            </a:solidFill>
+          </a:ln>
+        </p:spPr>
+        <p:style>
+          <a:lnRef idx="1">
+            <a:schemeClr val="accent1"/>
+          </a:lnRef>
+          <a:fillRef idx="3">
+            <a:schemeClr val="accent1"/>
+          </a:fillRef>
+          <a:effectRef idx="2">
+            <a:schemeClr val="accent1"/>
+          </a:effectRef>
+          <a:fontRef idx="minor">
+            <a:schemeClr val="lt1"/>
+          </a:fontRef>
+        </p:style>
+        <p:txBody>
+          <a:bodyPr rtlCol="0" anchor="ctr"/>
+          <a:lstStyle/>
+          <a:p>
+            <a:pPr algn="ctr"/>
+          </a:p>
+        </p:txBody>
+      </p:sp>
+      <p:sp>
+        <p:nvSpPr>
+          <p:cNvPr id="31" name="TextBox 30"/>
+          <p:cNvSpPr txBox="1"/>
+          <p:nvPr/>
+        </p:nvSpPr>
+        <p:spPr>
+          <a:xfrm>
+            <a:off x="6464807" y="4261104"/>
+            <a:ext cx="3108960" cy="256032"/>
+          </a:xfrm>
+          <a:prstGeom prst="rect">
+            <a:avLst/>
+          </a:prstGeom>
+          <a:noFill/>
+        </p:spPr>
+        <p:txBody>
+          <a:bodyPr wrap="square">
+            <a:spAutoFit/>
+          </a:bodyPr>
+          <a:lstStyle/>
+          <a:p>
+            <a:pPr>
+              <a:defRPr sz="1500" b="1">
+                <a:solidFill>
+                  <a:srgbClr val="B88630"/>
+                </a:solidFill>
+                <a:latin typeface="Aptos"/>
+              </a:defRPr>
+            </a:pPr>
+            <a:r>
+              <a:t>Brightness / contrast</a:t>
+            </a:r>
+          </a:p>
+        </p:txBody>
+      </p:sp>
+      <p:sp>
+        <p:nvSpPr>
+          <p:cNvPr id="32" name="TextBox 31"/>
+          <p:cNvSpPr txBox="1"/>
+          <p:nvPr/>
+        </p:nvSpPr>
+        <p:spPr>
+          <a:xfrm>
+            <a:off x="6464807" y="4626864"/>
+            <a:ext cx="4617720" cy="502920"/>
+          </a:xfrm>
+          <a:prstGeom prst="rect">
+            <a:avLst/>
+          </a:prstGeom>
+          <a:noFill/>
+        </p:spPr>
+        <p:txBody>
+          <a:bodyPr wrap="square">
+            <a:spAutoFit/>
+          </a:bodyPr>
+          <a:lstStyle/>
+          <a:p>
+            <a:pPr>
+              <a:defRPr sz="1050" b="0">
+                <a:solidFill>
+                  <a:srgbClr val="182228"/>
+                </a:solidFill>
+                <a:latin typeface="Aptos"/>
+              </a:defRPr>
+            </a:pPr>
+            <a:r>
+              <a:t>Autocontrast spreads useful intensities, then contrast normalization brings the image back to a stable range.</a:t>
+            </a:r>
+          </a:p>
+        </p:txBody>
+      </p:sp>
+      <p:sp>
+        <p:nvSpPr>
+          <p:cNvPr id="33" name="Rounded Rectangle 32"/>
+          <p:cNvSpPr/>
+          <p:nvPr/>
+        </p:nvSpPr>
+        <p:spPr>
+          <a:xfrm>
+            <a:off x="6583679" y="5340096"/>
+            <a:ext cx="1554480" cy="384048"/>
+          </a:xfrm>
+          <a:prstGeom prst="roundRect">
+            <a:avLst/>
+          </a:prstGeom>
+          <a:solidFill>
+            <a:srgbClr val="F1F5F5"/>
+          </a:solidFill>
+          <a:ln w="8890">
+            <a:solidFill>
+              <a:srgbClr val="D2DBDB"/>
+            </a:solidFill>
+          </a:ln>
+        </p:spPr>
+        <p:style>
+          <a:lnRef idx="1">
+            <a:schemeClr val="accent1"/>
+          </a:lnRef>
+          <a:fillRef idx="3">
+            <a:schemeClr val="accent1"/>
+          </a:fillRef>
+          <a:effectRef idx="2">
+            <a:schemeClr val="accent1"/>
+          </a:effectRef>
+          <a:fontRef idx="minor">
+            <a:schemeClr val="lt1"/>
+          </a:fontRef>
+        </p:style>
+        <p:txBody>
+          <a:bodyPr rtlCol="0" anchor="ctr"/>
+          <a:lstStyle/>
+          <a:p>
+            <a:pPr algn="ctr"/>
+          </a:p>
+        </p:txBody>
+      </p:sp>
+      <p:sp>
+        <p:nvSpPr>
+          <p:cNvPr id="34" name="Rounded Rectangle 33"/>
+          <p:cNvSpPr/>
+          <p:nvPr/>
+        </p:nvSpPr>
+        <p:spPr>
+          <a:xfrm>
+            <a:off x="8805672" y="5340096"/>
+            <a:ext cx="1554480" cy="384048"/>
+          </a:xfrm>
+          <a:prstGeom prst="roundRect">
+            <a:avLst/>
+          </a:prstGeom>
+          <a:solidFill>
+            <a:srgbClr val="F1F5F5"/>
+          </a:solidFill>
+          <a:ln w="8890">
+            <a:solidFill>
+              <a:srgbClr val="D2DBDB"/>
+            </a:solidFill>
+          </a:ln>
+        </p:spPr>
+        <p:style>
+          <a:lnRef idx="1">
+            <a:schemeClr val="accent1"/>
+          </a:lnRef>
+          <a:fillRef idx="3">
+            <a:schemeClr val="accent1"/>
+          </a:fillRef>
+          <a:effectRef idx="2">
+            <a:schemeClr val="accent1"/>
+          </a:effectRef>
+          <a:fontRef idx="minor">
+            <a:schemeClr val="lt1"/>
+          </a:fontRef>
+        </p:style>
+        <p:txBody>
+          <a:bodyPr rtlCol="0" anchor="ctr"/>
+          <a:lstStyle/>
+          <a:p>
+            <a:pPr algn="ctr"/>
+          </a:p>
+        </p:txBody>
+      </p:sp>
+      <p:sp>
+        <p:nvSpPr>
+          <p:cNvPr id="35" name="TextBox 34"/>
+          <p:cNvSpPr txBox="1"/>
+          <p:nvPr/>
+        </p:nvSpPr>
+        <p:spPr>
+          <a:xfrm>
+            <a:off x="6675120" y="5431536"/>
+            <a:ext cx="1371600" cy="146304"/>
+          </a:xfrm>
+          <a:prstGeom prst="rect">
+            <a:avLst/>
+          </a:prstGeom>
+          <a:noFill/>
+        </p:spPr>
+        <p:txBody>
+          <a:bodyPr wrap="square">
+            <a:spAutoFit/>
+          </a:bodyPr>
+          <a:lstStyle/>
+          <a:p>
+            <a:pPr algn="ctr">
+              <a:defRPr sz="850" b="1">
+                <a:solidFill>
+                  <a:srgbClr val="182228"/>
+                </a:solidFill>
+                <a:latin typeface="Aptos"/>
+              </a:defRPr>
+            </a:pPr>
+            <a:r>
+              <a:t>normalize</a:t>
+            </a:r>
+          </a:p>
+        </p:txBody>
+      </p:sp>
+      <p:sp>
+        <p:nvSpPr>
+          <p:cNvPr id="36" name="TextBox 35"/>
+          <p:cNvSpPr txBox="1"/>
+          <p:nvPr/>
+        </p:nvSpPr>
+        <p:spPr>
+          <a:xfrm>
+            <a:off x="8897112" y="5431536"/>
+            <a:ext cx="1371600" cy="146304"/>
+          </a:xfrm>
+          <a:prstGeom prst="rect">
+            <a:avLst/>
+          </a:prstGeom>
+          <a:noFill/>
+        </p:spPr>
+        <p:txBody>
+          <a:bodyPr wrap="square">
+            <a:spAutoFit/>
+          </a:bodyPr>
+          <a:lstStyle/>
+          <a:p>
+            <a:pPr algn="ctr">
+              <a:defRPr sz="850" b="1">
+                <a:solidFill>
+                  <a:srgbClr val="182228"/>
+                </a:solidFill>
+                <a:latin typeface="Aptos"/>
+              </a:defRPr>
+            </a:pPr>
+            <a:r>
+              <a:t>rebalance</a:t>
+            </a:r>
+          </a:p>
+        </p:txBody>
+      </p:sp>
+      <p:cxnSp>
+        <p:nvCxnSpPr>
+          <p:cNvPr id="37" name="Connector 36"/>
+          <p:cNvCxnSpPr/>
+          <p:nvPr/>
+        </p:nvCxnSpPr>
+        <p:spPr>
+          <a:xfrm>
+            <a:off x="8183879" y="5532120"/>
+            <a:ext cx="548641" cy="0"/>
+          </a:xfrm>
+          <a:prstGeom prst="line">
+            <a:avLst/>
+          </a:prstGeom>
+          <a:ln w="20320">
+            <a:solidFill>
+              <a:srgbClr val="B88630"/>
+            </a:solidFill>
+          </a:ln>
+        </p:spPr>
+        <p:style>
+          <a:lnRef idx="2">
+            <a:schemeClr val="accent1"/>
+          </a:lnRef>
+          <a:fillRef idx="0">
+            <a:schemeClr val="accent1"/>
+          </a:fillRef>
+          <a:effectRef idx="1">
+            <a:schemeClr val="accent1"/>
+          </a:effectRef>
+          <a:fontRef idx="minor">
+            <a:schemeClr val="tx1"/>
+          </a:fontRef>
+        </p:style>
+      </p:cxnSp>
+      <p:sp>
+        <p:nvSpPr>
+          <p:cNvPr id="38" name="TextBox 37"/>
+          <p:cNvSpPr txBox="1"/>
+          <p:nvPr/>
+        </p:nvSpPr>
+        <p:spPr>
+          <a:xfrm>
+            <a:off x="11292840" y="6446520"/>
+            <a:ext cx="411480" cy="182880"/>
+          </a:xfrm>
+          <a:prstGeom prst="rect">
+            <a:avLst/>
+          </a:prstGeom>
+          <a:noFill/>
+        </p:spPr>
+        <p:txBody>
+          <a:bodyPr wrap="square">
+            <a:spAutoFit/>
+          </a:bodyPr>
+          <a:lstStyle/>
+          <a:p>
+            <a:pPr algn="r">
+              <a:defRPr sz="800" b="0">
+                <a:solidFill>
+                  <a:srgbClr val="56636B"/>
+                </a:solidFill>
+                <a:latin typeface="Aptos"/>
+              </a:defRPr>
+            </a:pPr>
+            <a:r>
+              <a:t>07</a:t>
+            </a:r>
+          </a:p>
+        </p:txBody>
+      </p:sp>
+    </p:spTree>
+  </p:cSld>
+  <p:clrMapOvr>
+    <a:masterClrMapping/>
+  </p:clrMapOvr>
+</p:sld>
+</file>
+
+<file path=ppt/slides/slide8.xml><?xml version="1.0" encoding="utf-8"?>
 <p:sld xmlns:a="http://schemas.openxmlformats.org/drawingml/2006/main" xmlns:r="http://schemas.openxmlformats.org/officeDocument/2006/relationships" xmlns:p="http://schemas.openxmlformats.org/presentationml/2006/main">
   <p:cSld>
     <p:bg>
@@ -13282,643 +15559,6 @@
             </a:pPr>
             <a:r>
               <a:t>Downsample x2, reconstruct, and measure image fidelity with PSNR.</a:t>
-            </a:r>
-          </a:p>
-        </p:txBody>
-      </p:sp>
-    </p:spTree>
-  </p:cSld>
-  <p:clrMapOvr>
-    <a:masterClrMapping/>
-  </p:clrMapOvr>
-</p:sld>
-</file>
-
-<file path=ppt/slides/slide8.xml><?xml version="1.0" encoding="utf-8"?>
-<p:sld xmlns:a="http://schemas.openxmlformats.org/drawingml/2006/main" xmlns:r="http://schemas.openxmlformats.org/officeDocument/2006/relationships" xmlns:p="http://schemas.openxmlformats.org/presentationml/2006/main">
-  <p:cSld>
-    <p:bg>
-      <p:bgPr>
-        <a:solidFill>
-          <a:srgbClr val="F7F9F7"/>
-        </a:solidFill>
-        <a:effectLst/>
-      </p:bgPr>
-    </p:bg>
-    <p:spTree>
-      <p:nvGrpSpPr>
-        <p:cNvPr id="1" name=""/>
-        <p:cNvGrpSpPr/>
-        <p:nvPr/>
-      </p:nvGrpSpPr>
-      <p:grpSpPr>
-        <a:xfrm>
-          <a:off x="0" y="0"/>
-          <a:ext cx="0" cy="0"/>
-          <a:chOff x="0" y="0"/>
-          <a:chExt cx="0" cy="0"/>
-        </a:xfrm>
-      </p:grpSpPr>
-      <p:sp>
-        <p:nvSpPr>
-          <p:cNvPr id="2" name="TextBox 1"/>
-          <p:cNvSpPr txBox="1"/>
-          <p:nvPr/>
-        </p:nvSpPr>
-        <p:spPr>
-          <a:xfrm>
-            <a:off x="502920" y="320040"/>
-            <a:ext cx="4572000" cy="256032"/>
-          </a:xfrm>
-          <a:prstGeom prst="rect">
-            <a:avLst/>
-          </a:prstGeom>
-          <a:noFill/>
-        </p:spPr>
-        <p:txBody>
-          <a:bodyPr wrap="none" lIns="18288" tIns="9144" rIns="18288" bIns="9144">
-            <a:spAutoFit/>
-          </a:bodyPr>
-          <a:lstStyle/>
-          <a:p>
-            <a:pPr>
-              <a:defRPr sz="900" b="1">
-                <a:solidFill>
-                  <a:srgbClr val="008074"/>
-                </a:solidFill>
-                <a:latin typeface="Aptos"/>
-              </a:defRPr>
-            </a:pPr>
-            <a:r>
-              <a:t>TASK 1 | CLEAN SUPER-RESOLUTION</a:t>
-            </a:r>
-          </a:p>
-        </p:txBody>
-      </p:sp>
-      <p:sp>
-        <p:nvSpPr>
-          <p:cNvPr id="3" name="TextBox 2"/>
-          <p:cNvSpPr txBox="1"/>
-          <p:nvPr/>
-        </p:nvSpPr>
-        <p:spPr>
-          <a:xfrm>
-            <a:off x="502920" y="640080"/>
-            <a:ext cx="8961120" cy="603504"/>
-          </a:xfrm>
-          <a:prstGeom prst="rect">
-            <a:avLst/>
-          </a:prstGeom>
-          <a:noFill/>
-        </p:spPr>
-        <p:txBody>
-          <a:bodyPr wrap="none" lIns="18288" tIns="9144" rIns="18288" bIns="9144">
-            <a:spAutoFit/>
-          </a:bodyPr>
-          <a:lstStyle/>
-          <a:p>
-            <a:pPr>
-              <a:defRPr sz="2400" b="1">
-                <a:solidFill>
-                  <a:srgbClr val="182228"/>
-                </a:solidFill>
-                <a:latin typeface="Aptos"/>
-              </a:defRPr>
-            </a:pPr>
-            <a:r>
-              <a:t>Lanczos gives the strongest clean PSNR on the selected MRI image.</a:t>
-            </a:r>
-          </a:p>
-        </p:txBody>
-      </p:sp>
-      <p:sp>
-        <p:nvSpPr>
-          <p:cNvPr id="4" name="TextBox 3"/>
-          <p:cNvSpPr txBox="1"/>
-          <p:nvPr/>
-        </p:nvSpPr>
-        <p:spPr>
-          <a:xfrm>
-            <a:off x="521207" y="1225296"/>
-            <a:ext cx="9052560" cy="292608"/>
-          </a:xfrm>
-          <a:prstGeom prst="rect">
-            <a:avLst/>
-          </a:prstGeom>
-          <a:noFill/>
-        </p:spPr>
-        <p:txBody>
-          <a:bodyPr wrap="none" lIns="18288" tIns="9144" rIns="18288" bIns="9144">
-            <a:spAutoFit/>
-          </a:bodyPr>
-          <a:lstStyle/>
-          <a:p>
-            <a:pPr>
-              <a:defRPr sz="1050" b="0">
-                <a:solidFill>
-                  <a:srgbClr val="56636B"/>
-                </a:solidFill>
-                <a:latin typeface="Aptos"/>
-              </a:defRPr>
-            </a:pPr>
-            <a:r>
-              <a:t>Sharpened_lanczos is used in the SNR/level experiments to compare distorted and restored images.</a:t>
-            </a:r>
-          </a:p>
-        </p:txBody>
-      </p:sp>
-      <p:sp>
-        <p:nvSpPr>
-          <p:cNvPr id="5" name="TextBox 4"/>
-          <p:cNvSpPr txBox="1"/>
-          <p:nvPr/>
-        </p:nvSpPr>
-        <p:spPr>
-          <a:xfrm>
-            <a:off x="9692640" y="347472"/>
-            <a:ext cx="1920240" cy="228600"/>
-          </a:xfrm>
-          <a:prstGeom prst="rect">
-            <a:avLst/>
-          </a:prstGeom>
-          <a:noFill/>
-        </p:spPr>
-        <p:txBody>
-          <a:bodyPr wrap="none" lIns="18288" tIns="9144" rIns="18288" bIns="9144">
-            <a:spAutoFit/>
-          </a:bodyPr>
-          <a:lstStyle/>
-          <a:p>
-            <a:pPr algn="r">
-              <a:defRPr sz="850" b="0">
-                <a:solidFill>
-                  <a:srgbClr val="56636B"/>
-                </a:solidFill>
-                <a:latin typeface="Aptos"/>
-              </a:defRPr>
-            </a:pPr>
-            <a:r>
-              <a:t>Brain MRI robustness</a:t>
-            </a:r>
-          </a:p>
-        </p:txBody>
-      </p:sp>
-      <p:sp>
-        <p:nvSpPr>
-          <p:cNvPr id="6" name="TextBox 5"/>
-          <p:cNvSpPr txBox="1"/>
-          <p:nvPr/>
-        </p:nvSpPr>
-        <p:spPr>
-          <a:xfrm>
-            <a:off x="11292840" y="6446520"/>
-            <a:ext cx="411480" cy="182880"/>
-          </a:xfrm>
-          <a:prstGeom prst="rect">
-            <a:avLst/>
-          </a:prstGeom>
-          <a:noFill/>
-        </p:spPr>
-        <p:txBody>
-          <a:bodyPr wrap="none" lIns="18288" tIns="9144" rIns="18288" bIns="9144">
-            <a:spAutoFit/>
-          </a:bodyPr>
-          <a:lstStyle/>
-          <a:p>
-            <a:pPr algn="r">
-              <a:defRPr sz="800" b="0">
-                <a:solidFill>
-                  <a:srgbClr val="56636B"/>
-                </a:solidFill>
-                <a:latin typeface="Aptos"/>
-              </a:defRPr>
-            </a:pPr>
-            <a:r>
-              <a:t>08</a:t>
-            </a:r>
-          </a:p>
-        </p:txBody>
-      </p:sp>
-      <p:sp>
-        <p:nvSpPr>
-          <p:cNvPr id="7" name="Rounded Rectangle 6"/>
-          <p:cNvSpPr/>
-          <p:nvPr/>
-        </p:nvSpPr>
-        <p:spPr>
-          <a:xfrm>
-            <a:off x="594360" y="1645920"/>
-            <a:ext cx="6629400" cy="4434840"/>
-          </a:xfrm>
-          <a:prstGeom prst="roundRect">
-            <a:avLst/>
-          </a:prstGeom>
-          <a:solidFill>
-            <a:srgbClr val="FFFFFF"/>
-          </a:solidFill>
-          <a:ln w="8890">
-            <a:solidFill>
-              <a:srgbClr val="D6DEDE"/>
-            </a:solidFill>
-          </a:ln>
-        </p:spPr>
-        <p:style>
-          <a:lnRef idx="1">
-            <a:schemeClr val="accent1"/>
-          </a:lnRef>
-          <a:fillRef idx="3">
-            <a:schemeClr val="accent1"/>
-          </a:fillRef>
-          <a:effectRef idx="2">
-            <a:schemeClr val="accent1"/>
-          </a:effectRef>
-          <a:fontRef idx="minor">
-            <a:schemeClr val="lt1"/>
-          </a:fontRef>
-        </p:style>
-        <p:txBody>
-          <a:bodyPr rtlCol="0" anchor="ctr"/>
-          <a:lstStyle/>
-          <a:p>
-            <a:pPr algn="ctr"/>
-            <a:endParaRPr/>
-          </a:p>
-        </p:txBody>
-      </p:sp>
-      <p:pic>
-        <p:nvPicPr>
-          <p:cNvPr id="8" name="Picture 7" descr="super_resolution_grid.png"/>
-          <p:cNvPicPr>
-            <a:picLocks noChangeAspect="1"/>
-          </p:cNvPicPr>
-          <p:nvPr/>
-        </p:nvPicPr>
-        <p:blipFill>
-          <a:blip r:embed="rId2"/>
-          <a:stretch>
-            <a:fillRect/>
-          </a:stretch>
-        </p:blipFill>
-        <p:spPr>
-          <a:xfrm>
-            <a:off x="1797231" y="1645920"/>
-            <a:ext cx="4223657" cy="4434840"/>
-          </a:xfrm>
-          <a:prstGeom prst="rect">
-            <a:avLst/>
-          </a:prstGeom>
-        </p:spPr>
-      </p:pic>
-      <p:sp>
-        <p:nvSpPr>
-          <p:cNvPr id="9" name="Rounded Rectangle 8"/>
-          <p:cNvSpPr/>
-          <p:nvPr/>
-        </p:nvSpPr>
-        <p:spPr>
-          <a:xfrm>
-            <a:off x="7635240" y="1874519"/>
-            <a:ext cx="2240280" cy="914400"/>
-          </a:xfrm>
-          <a:prstGeom prst="roundRect">
-            <a:avLst/>
-          </a:prstGeom>
-          <a:solidFill>
-            <a:srgbClr val="FAFCFC"/>
-          </a:solidFill>
-          <a:ln w="8890">
-            <a:solidFill>
-              <a:srgbClr val="D2DBDB"/>
-            </a:solidFill>
-          </a:ln>
-        </p:spPr>
-        <p:style>
-          <a:lnRef idx="1">
-            <a:schemeClr val="accent1"/>
-          </a:lnRef>
-          <a:fillRef idx="3">
-            <a:schemeClr val="accent1"/>
-          </a:fillRef>
-          <a:effectRef idx="2">
-            <a:schemeClr val="accent1"/>
-          </a:effectRef>
-          <a:fontRef idx="minor">
-            <a:schemeClr val="lt1"/>
-          </a:fontRef>
-        </p:style>
-        <p:txBody>
-          <a:bodyPr rtlCol="0" anchor="ctr"/>
-          <a:lstStyle/>
-          <a:p>
-            <a:pPr algn="ctr"/>
-            <a:endParaRPr/>
-          </a:p>
-        </p:txBody>
-      </p:sp>
-      <p:sp>
-        <p:nvSpPr>
-          <p:cNvPr id="10" name="TextBox 9"/>
-          <p:cNvSpPr txBox="1"/>
-          <p:nvPr/>
-        </p:nvSpPr>
-        <p:spPr>
-          <a:xfrm>
-            <a:off x="7799831" y="1984248"/>
-            <a:ext cx="1874519" cy="320040"/>
-          </a:xfrm>
-          <a:prstGeom prst="rect">
-            <a:avLst/>
-          </a:prstGeom>
-          <a:noFill/>
-        </p:spPr>
-        <p:txBody>
-          <a:bodyPr wrap="none" lIns="18288" tIns="9144" rIns="18288" bIns="9144">
-            <a:spAutoFit/>
-          </a:bodyPr>
-          <a:lstStyle/>
-          <a:p>
-            <a:pPr>
-              <a:defRPr sz="2100" b="1">
-                <a:solidFill>
-                  <a:srgbClr val="2666AC"/>
-                </a:solidFill>
-                <a:latin typeface="Aptos"/>
-              </a:defRPr>
-            </a:pPr>
-            <a:r>
-              <a:t>29.62</a:t>
-            </a:r>
-          </a:p>
-        </p:txBody>
-      </p:sp>
-      <p:sp>
-        <p:nvSpPr>
-          <p:cNvPr id="11" name="TextBox 10"/>
-          <p:cNvSpPr txBox="1"/>
-          <p:nvPr/>
-        </p:nvSpPr>
-        <p:spPr>
-          <a:xfrm>
-            <a:off x="7799831" y="2404872"/>
-            <a:ext cx="1901952" cy="228600"/>
-          </a:xfrm>
-          <a:prstGeom prst="rect">
-            <a:avLst/>
-          </a:prstGeom>
-          <a:noFill/>
-        </p:spPr>
-        <p:txBody>
-          <a:bodyPr wrap="none" lIns="18288" tIns="9144" rIns="18288" bIns="9144">
-            <a:spAutoFit/>
-          </a:bodyPr>
-          <a:lstStyle/>
-          <a:p>
-            <a:pPr>
-              <a:defRPr sz="850" b="0">
-                <a:solidFill>
-                  <a:srgbClr val="56636B"/>
-                </a:solidFill>
-                <a:latin typeface="Aptos"/>
-              </a:defRPr>
-            </a:pPr>
-            <a:r>
-              <a:t>Best clean PSNR: Lanczos</a:t>
-            </a:r>
-          </a:p>
-        </p:txBody>
-      </p:sp>
-      <p:sp>
-        <p:nvSpPr>
-          <p:cNvPr id="12" name="Rounded Rectangle 11"/>
-          <p:cNvSpPr/>
-          <p:nvPr/>
-        </p:nvSpPr>
-        <p:spPr>
-          <a:xfrm>
-            <a:off x="7635240" y="2971800"/>
-            <a:ext cx="2240280" cy="914400"/>
-          </a:xfrm>
-          <a:prstGeom prst="roundRect">
-            <a:avLst/>
-          </a:prstGeom>
-          <a:solidFill>
-            <a:srgbClr val="FAFCFC"/>
-          </a:solidFill>
-          <a:ln w="8890">
-            <a:solidFill>
-              <a:srgbClr val="D2DBDB"/>
-            </a:solidFill>
-          </a:ln>
-        </p:spPr>
-        <p:style>
-          <a:lnRef idx="1">
-            <a:schemeClr val="accent1"/>
-          </a:lnRef>
-          <a:fillRef idx="3">
-            <a:schemeClr val="accent1"/>
-          </a:fillRef>
-          <a:effectRef idx="2">
-            <a:schemeClr val="accent1"/>
-          </a:effectRef>
-          <a:fontRef idx="minor">
-            <a:schemeClr val="lt1"/>
-          </a:fontRef>
-        </p:style>
-        <p:txBody>
-          <a:bodyPr rtlCol="0" anchor="ctr"/>
-          <a:lstStyle/>
-          <a:p>
-            <a:pPr algn="ctr"/>
-            <a:endParaRPr/>
-          </a:p>
-        </p:txBody>
-      </p:sp>
-      <p:sp>
-        <p:nvSpPr>
-          <p:cNvPr id="13" name="TextBox 12"/>
-          <p:cNvSpPr txBox="1"/>
-          <p:nvPr/>
-        </p:nvSpPr>
-        <p:spPr>
-          <a:xfrm>
-            <a:off x="7799831" y="3081528"/>
-            <a:ext cx="1874519" cy="320040"/>
-          </a:xfrm>
-          <a:prstGeom prst="rect">
-            <a:avLst/>
-          </a:prstGeom>
-          <a:noFill/>
-        </p:spPr>
-        <p:txBody>
-          <a:bodyPr wrap="none" lIns="18288" tIns="9144" rIns="18288" bIns="9144">
-            <a:spAutoFit/>
-          </a:bodyPr>
-          <a:lstStyle/>
-          <a:p>
-            <a:pPr>
-              <a:defRPr sz="2100" b="1">
-                <a:solidFill>
-                  <a:srgbClr val="008074"/>
-                </a:solidFill>
-                <a:latin typeface="Aptos"/>
-              </a:defRPr>
-            </a:pPr>
-            <a:r>
-              <a:t>26.87</a:t>
-            </a:r>
-          </a:p>
-        </p:txBody>
-      </p:sp>
-      <p:sp>
-        <p:nvSpPr>
-          <p:cNvPr id="14" name="TextBox 13"/>
-          <p:cNvSpPr txBox="1"/>
-          <p:nvPr/>
-        </p:nvSpPr>
-        <p:spPr>
-          <a:xfrm>
-            <a:off x="7799831" y="3502152"/>
-            <a:ext cx="1901952" cy="228600"/>
-          </a:xfrm>
-          <a:prstGeom prst="rect">
-            <a:avLst/>
-          </a:prstGeom>
-          <a:noFill/>
-        </p:spPr>
-        <p:txBody>
-          <a:bodyPr wrap="none" lIns="18288" tIns="9144" rIns="18288" bIns="9144">
-            <a:spAutoFit/>
-          </a:bodyPr>
-          <a:lstStyle/>
-          <a:p>
-            <a:pPr>
-              <a:defRPr sz="850" b="0">
-                <a:solidFill>
-                  <a:srgbClr val="56636B"/>
-                </a:solidFill>
-                <a:latin typeface="Aptos"/>
-              </a:defRPr>
-            </a:pPr>
-            <a:r>
-              <a:t>Sharpened_lanczos PSNR</a:t>
-            </a:r>
-          </a:p>
-        </p:txBody>
-      </p:sp>
-      <p:sp>
-        <p:nvSpPr>
-          <p:cNvPr id="15" name="Rounded Rectangle 14"/>
-          <p:cNvSpPr/>
-          <p:nvPr/>
-        </p:nvSpPr>
-        <p:spPr>
-          <a:xfrm>
-            <a:off x="7635240" y="4069080"/>
-            <a:ext cx="2240280" cy="914400"/>
-          </a:xfrm>
-          <a:prstGeom prst="roundRect">
-            <a:avLst/>
-          </a:prstGeom>
-          <a:solidFill>
-            <a:srgbClr val="FAFCFC"/>
-          </a:solidFill>
-          <a:ln w="8890">
-            <a:solidFill>
-              <a:srgbClr val="D2DBDB"/>
-            </a:solidFill>
-          </a:ln>
-        </p:spPr>
-        <p:style>
-          <a:lnRef idx="1">
-            <a:schemeClr val="accent1"/>
-          </a:lnRef>
-          <a:fillRef idx="3">
-            <a:schemeClr val="accent1"/>
-          </a:fillRef>
-          <a:effectRef idx="2">
-            <a:schemeClr val="accent1"/>
-          </a:effectRef>
-          <a:fontRef idx="minor">
-            <a:schemeClr val="lt1"/>
-          </a:fontRef>
-        </p:style>
-        <p:txBody>
-          <a:bodyPr rtlCol="0" anchor="ctr"/>
-          <a:lstStyle/>
-          <a:p>
-            <a:pPr algn="ctr"/>
-            <a:endParaRPr/>
-          </a:p>
-        </p:txBody>
-      </p:sp>
-      <p:sp>
-        <p:nvSpPr>
-          <p:cNvPr id="16" name="TextBox 15"/>
-          <p:cNvSpPr txBox="1"/>
-          <p:nvPr/>
-        </p:nvSpPr>
-        <p:spPr>
-          <a:xfrm>
-            <a:off x="7799831" y="4178808"/>
-            <a:ext cx="1874519" cy="320040"/>
-          </a:xfrm>
-          <a:prstGeom prst="rect">
-            <a:avLst/>
-          </a:prstGeom>
-          <a:noFill/>
-        </p:spPr>
-        <p:txBody>
-          <a:bodyPr wrap="none" lIns="18288" tIns="9144" rIns="18288" bIns="9144">
-            <a:spAutoFit/>
-          </a:bodyPr>
-          <a:lstStyle/>
-          <a:p>
-            <a:pPr>
-              <a:defRPr sz="2100" b="1">
-                <a:solidFill>
-                  <a:srgbClr val="B88630"/>
-                </a:solidFill>
-                <a:latin typeface="Aptos"/>
-              </a:defRPr>
-            </a:pPr>
-            <a:r>
-              <a:t>98.38</a:t>
-            </a:r>
-          </a:p>
-        </p:txBody>
-      </p:sp>
-      <p:sp>
-        <p:nvSpPr>
-          <p:cNvPr id="17" name="TextBox 16"/>
-          <p:cNvSpPr txBox="1"/>
-          <p:nvPr/>
-        </p:nvSpPr>
-        <p:spPr>
-          <a:xfrm>
-            <a:off x="7799831" y="4599432"/>
-            <a:ext cx="1901952" cy="228600"/>
-          </a:xfrm>
-          <a:prstGeom prst="rect">
-            <a:avLst/>
-          </a:prstGeom>
-          <a:noFill/>
-        </p:spPr>
-        <p:txBody>
-          <a:bodyPr wrap="none" lIns="18288" tIns="9144" rIns="18288" bIns="9144">
-            <a:spAutoFit/>
-          </a:bodyPr>
-          <a:lstStyle/>
-          <a:p>
-            <a:pPr>
-              <a:defRPr sz="850" b="0">
-                <a:solidFill>
-                  <a:srgbClr val="56636B"/>
-                </a:solidFill>
-                <a:latin typeface="Aptos"/>
-              </a:defRPr>
-            </a:pPr>
-            <a:r>
-              <a:t>Best reconstruction score</a:t>
             </a:r>
           </a:p>
         </p:txBody>
@@ -13987,7 +15627,7 @@
               </a:defRPr>
             </a:pPr>
             <a:r>
-              <a:t>TASK 1 | DISTORTED SUPER-RESOLUTION</a:t>
+              <a:t>TASK 1 | CLEAN SUPER-RESOLUTION</a:t>
             </a:r>
           </a:p>
         </p:txBody>
@@ -14023,7 +15663,7 @@
               </a:defRPr>
             </a:pPr>
             <a:r>
-              <a:t>Restored inputs usually recover PSNR before sharpened_lanczos reconstruction.</a:t>
+              <a:t>Lanczos gives the strongest clean PSNR on the selected MRI image.</a:t>
             </a:r>
           </a:p>
         </p:txBody>
@@ -14059,7 +15699,7 @@
               </a:defRPr>
             </a:pPr>
             <a:r>
-              <a:t>Each graph includes a dashed clean baseline.</a:t>
+              <a:t>Sharpened_lanczos is used in the SNR/level experiments to compare distorted and restored images.</a:t>
             </a:r>
           </a:p>
         </p:txBody>
@@ -14131,7 +15771,7 @@
               </a:defRPr>
             </a:pPr>
             <a:r>
-              <a:t>09</a:t>
+              <a:t>08</a:t>
             </a:r>
           </a:p>
         </p:txBody>
@@ -14144,8 +15784,8 @@
         </p:nvSpPr>
         <p:spPr>
           <a:xfrm>
-            <a:off x="502920" y="1508760"/>
-            <a:ext cx="3657600" cy="2240280"/>
+            <a:off x="594360" y="1645920"/>
+            <a:ext cx="6629400" cy="4434840"/>
           </a:xfrm>
           <a:prstGeom prst="roundRect">
             <a:avLst/>
@@ -14184,7 +15824,7 @@
       </p:sp>
       <p:pic>
         <p:nvPicPr>
-          <p:cNvPr id="8" name="Picture 7" descr="gaussian_noise_snr_psnr_graph.png"/>
+          <p:cNvPr id="8" name="Picture 7" descr="super_resolution_grid.png"/>
           <p:cNvPicPr>
             <a:picLocks noChangeAspect="1"/>
           </p:cNvPicPr>
@@ -14198,8 +15838,8 @@
         </p:blipFill>
         <p:spPr>
           <a:xfrm>
-            <a:off x="502920" y="1612900"/>
-            <a:ext cx="3657600" cy="2032000"/>
+            <a:off x="1797231" y="1645920"/>
+            <a:ext cx="4223657" cy="4434840"/>
           </a:xfrm>
           <a:prstGeom prst="rect">
             <a:avLst/>
@@ -14214,18 +15854,18 @@
         </p:nvSpPr>
         <p:spPr>
           <a:xfrm>
-            <a:off x="4251960" y="1508760"/>
-            <a:ext cx="3657600" cy="2240280"/>
+            <a:off x="7635240" y="1874519"/>
+            <a:ext cx="2240280" cy="914400"/>
           </a:xfrm>
           <a:prstGeom prst="roundRect">
             <a:avLst/>
           </a:prstGeom>
           <a:solidFill>
-            <a:srgbClr val="FFFFFF"/>
+            <a:srgbClr val="FAFCFC"/>
           </a:solidFill>
           <a:ln w="8890">
             <a:solidFill>
-              <a:srgbClr val="D6DEDE"/>
+              <a:srgbClr val="D2DBDB"/>
             </a:solidFill>
           </a:ln>
         </p:spPr>
@@ -14252,50 +15892,98 @@
           </a:p>
         </p:txBody>
       </p:sp>
-      <p:pic>
-        <p:nvPicPr>
-          <p:cNvPr id="10" name="Picture 9" descr="salt_and_pepper_density_psnr_graph.png"/>
-          <p:cNvPicPr>
-            <a:picLocks noChangeAspect="1"/>
-          </p:cNvPicPr>
-          <p:nvPr/>
-        </p:nvPicPr>
-        <p:blipFill>
-          <a:blip r:embed="rId3"/>
-          <a:stretch>
-            <a:fillRect/>
-          </a:stretch>
-        </p:blipFill>
-        <p:spPr>
-          <a:xfrm>
-            <a:off x="4251960" y="1612900"/>
-            <a:ext cx="3657600" cy="2032000"/>
-          </a:xfrm>
-          <a:prstGeom prst="rect">
-            <a:avLst/>
-          </a:prstGeom>
-        </p:spPr>
-      </p:pic>
-      <p:sp>
-        <p:nvSpPr>
-          <p:cNvPr id="11" name="Rounded Rectangle 10"/>
+      <p:sp>
+        <p:nvSpPr>
+          <p:cNvPr id="10" name="TextBox 9"/>
+          <p:cNvSpPr txBox="1"/>
+          <p:nvPr/>
+        </p:nvSpPr>
+        <p:spPr>
+          <a:xfrm>
+            <a:off x="7799831" y="1984248"/>
+            <a:ext cx="1874519" cy="320040"/>
+          </a:xfrm>
+          <a:prstGeom prst="rect">
+            <a:avLst/>
+          </a:prstGeom>
+          <a:noFill/>
+        </p:spPr>
+        <p:txBody>
+          <a:bodyPr wrap="none" lIns="18288" tIns="9144" rIns="18288" bIns="9144">
+            <a:spAutoFit/>
+          </a:bodyPr>
+          <a:lstStyle/>
+          <a:p>
+            <a:pPr>
+              <a:defRPr sz="2100" b="1">
+                <a:solidFill>
+                  <a:srgbClr val="2666AC"/>
+                </a:solidFill>
+                <a:latin typeface="Aptos"/>
+              </a:defRPr>
+            </a:pPr>
+            <a:r>
+              <a:t>29.62</a:t>
+            </a:r>
+          </a:p>
+        </p:txBody>
+      </p:sp>
+      <p:sp>
+        <p:nvSpPr>
+          <p:cNvPr id="11" name="TextBox 10"/>
+          <p:cNvSpPr txBox="1"/>
+          <p:nvPr/>
+        </p:nvSpPr>
+        <p:spPr>
+          <a:xfrm>
+            <a:off x="7799831" y="2404872"/>
+            <a:ext cx="1901952" cy="228600"/>
+          </a:xfrm>
+          <a:prstGeom prst="rect">
+            <a:avLst/>
+          </a:prstGeom>
+          <a:noFill/>
+        </p:spPr>
+        <p:txBody>
+          <a:bodyPr wrap="none" lIns="18288" tIns="9144" rIns="18288" bIns="9144">
+            <a:spAutoFit/>
+          </a:bodyPr>
+          <a:lstStyle/>
+          <a:p>
+            <a:pPr>
+              <a:defRPr sz="850" b="0">
+                <a:solidFill>
+                  <a:srgbClr val="56636B"/>
+                </a:solidFill>
+                <a:latin typeface="Aptos"/>
+              </a:defRPr>
+            </a:pPr>
+            <a:r>
+              <a:t>Best clean PSNR: Lanczos</a:t>
+            </a:r>
+          </a:p>
+        </p:txBody>
+      </p:sp>
+      <p:sp>
+        <p:nvSpPr>
+          <p:cNvPr id="12" name="Rounded Rectangle 11"/>
           <p:cNvSpPr/>
           <p:nvPr/>
         </p:nvSpPr>
         <p:spPr>
           <a:xfrm>
-            <a:off x="8001000" y="1508760"/>
-            <a:ext cx="3657600" cy="2240280"/>
+            <a:off x="7635240" y="2971800"/>
+            <a:ext cx="2240280" cy="914400"/>
           </a:xfrm>
           <a:prstGeom prst="roundRect">
             <a:avLst/>
           </a:prstGeom>
           <a:solidFill>
-            <a:srgbClr val="FFFFFF"/>
+            <a:srgbClr val="FAFCFC"/>
           </a:solidFill>
           <a:ln w="8890">
             <a:solidFill>
-              <a:srgbClr val="D6DEDE"/>
+              <a:srgbClr val="D2DBDB"/>
             </a:solidFill>
           </a:ln>
         </p:spPr>
@@ -14322,30 +16010,6 @@
           </a:p>
         </p:txBody>
       </p:sp>
-      <p:pic>
-        <p:nvPicPr>
-          <p:cNvPr id="12" name="Picture 11" descr="gaussian_blur_sigma_psnr_graph.png"/>
-          <p:cNvPicPr>
-            <a:picLocks noChangeAspect="1"/>
-          </p:cNvPicPr>
-          <p:nvPr/>
-        </p:nvPicPr>
-        <p:blipFill>
-          <a:blip r:embed="rId4"/>
-          <a:stretch>
-            <a:fillRect/>
-          </a:stretch>
-        </p:blipFill>
-        <p:spPr>
-          <a:xfrm>
-            <a:off x="8001000" y="1612900"/>
-            <a:ext cx="3657600" cy="2032000"/>
-          </a:xfrm>
-          <a:prstGeom prst="rect">
-            <a:avLst/>
-          </a:prstGeom>
-        </p:spPr>
-      </p:pic>
       <p:sp>
         <p:nvSpPr>
           <p:cNvPr id="13" name="TextBox 12"/>
@@ -14354,161 +16018,185 @@
         </p:nvSpPr>
         <p:spPr>
           <a:xfrm>
-            <a:off x="868680" y="4136658"/>
-            <a:ext cx="10424160" cy="731520"/>
-          </a:xfrm>
-          <a:prstGeom prst="rect">
-            <a:avLst/>
-          </a:prstGeom>
-          <a:noFill/>
-        </p:spPr>
-        <p:txBody>
-          <a:bodyPr wrap="square">
+            <a:off x="7799831" y="3081528"/>
+            <a:ext cx="1874519" cy="320040"/>
+          </a:xfrm>
+          <a:prstGeom prst="rect">
+            <a:avLst/>
+          </a:prstGeom>
+          <a:noFill/>
+        </p:spPr>
+        <p:txBody>
+          <a:bodyPr wrap="none" lIns="18288" tIns="9144" rIns="18288" bIns="9144">
             <a:spAutoFit/>
           </a:bodyPr>
           <a:lstStyle/>
           <a:p>
             <a:pPr>
-              <a:spcAft>
-                <a:spcPts val="800"/>
-              </a:spcAft>
-              <a:defRPr sz="1400">
-                <a:solidFill>
-                  <a:srgbClr val="182228"/>
-                </a:solidFill>
-                <a:latin typeface="Aptos"/>
-              </a:defRPr>
-            </a:pPr>
-            <a:r>
-              <a:rPr dirty="0"/>
-              <a:t>Main metric: PSNR. Restoration helps most when noise can be reduced without destroying structure. Severe salt-and-pepper is the hardest setting.</a:t>
-            </a:r>
-          </a:p>
-        </p:txBody>
-      </p:sp>
-      <p:sp>
-        <p:nvSpPr>
-          <p:cNvPr id="14" name="TextBox 13">
-            <a:extLst>
-              <a:ext uri="{FF2B5EF4-FFF2-40B4-BE49-F238E27FC236}">
-                <a16:creationId xmlns:a16="http://schemas.microsoft.com/office/drawing/2014/main" id="{D83512F5-C7CB-89E4-B85E-1DC52C38B301}"/>
-              </a:ext>
-            </a:extLst>
-          </p:cNvPr>
-          <p:cNvSpPr txBox="1"/>
-          <p:nvPr/>
-        </p:nvSpPr>
-        <p:spPr>
-          <a:xfrm>
-            <a:off x="1376885" y="4606558"/>
-            <a:ext cx="9201633" cy="2308324"/>
-          </a:xfrm>
-          <a:prstGeom prst="rect">
-            <a:avLst/>
-          </a:prstGeom>
-          <a:noFill/>
-        </p:spPr>
-        <p:txBody>
-          <a:bodyPr wrap="square" rtlCol="0">
-            <a:spAutoFit/>
-          </a:bodyPr>
-          <a:lstStyle/>
-          <a:p>
-            <a:r>
-              <a:rPr lang="he-IL" dirty="0"/>
-              <a:t>האהרה : בגלל טיב המשימה של הסופר </a:t>
-            </a:r>
-            <a:r>
-              <a:rPr lang="he-IL" dirty="0" err="1"/>
-              <a:t>רזלוציה</a:t>
-            </a:r>
-            <a:r>
-              <a:rPr lang="he-IL" dirty="0"/>
-              <a:t> אין היגיון בהשוואת התוצר הסופי לעומת התמונה המקורית כי הרעש משפיע באופן שונה על כל </a:t>
-            </a:r>
-            <a:r>
-              <a:rPr lang="he-IL" dirty="0" err="1"/>
-              <a:t>ץמונה</a:t>
-            </a:r>
-            <a:r>
-              <a:rPr lang="he-IL" dirty="0"/>
-              <a:t>, לכן בכל ניסוי התוצר הסופי מושווה לתמונה עם הרעש\עם </a:t>
-            </a:r>
-            <a:r>
-              <a:rPr lang="he-IL" dirty="0" err="1"/>
-              <a:t>הרסטורשין</a:t>
-            </a:r>
-            <a:r>
-              <a:rPr lang="he-IL" dirty="0"/>
-              <a:t>.</a:t>
-            </a:r>
-          </a:p>
-          <a:p>
-            <a:r>
-              <a:rPr lang="he-IL" dirty="0"/>
-              <a:t>בעקבות שינויים אלו קוראת תופעה מעניינת שבגלל רעש </a:t>
-            </a:r>
-            <a:r>
-              <a:rPr lang="he-IL" dirty="0" err="1"/>
-              <a:t>מסויים</a:t>
-            </a:r>
-            <a:r>
-              <a:rPr lang="he-IL" dirty="0"/>
-              <a:t>, ההקטנה פי 2 מאבדת פחות מידע.</a:t>
-            </a:r>
-          </a:p>
-          <a:p>
-            <a:r>
-              <a:rPr lang="he-IL" dirty="0"/>
-              <a:t>אתן </a:t>
-            </a:r>
-            <a:r>
-              <a:rPr lang="he-IL" dirty="0" err="1"/>
-              <a:t>דוכמה</a:t>
-            </a:r>
-            <a:r>
-              <a:rPr lang="he-IL" dirty="0"/>
-              <a:t>: אם אקח תמונה ואקח רעש קיצוני שהופך אותה ללבנה – ואז אחרי שאני מחלק ל2 ואז מחזיר אותה לתמונה המקורית , אני אקבל תמונה לבנה , כך שקיבלנו אותה תמונה ולא איבדנו מידע.</a:t>
-            </a:r>
-          </a:p>
-          <a:p>
-            <a:r>
-              <a:rPr lang="he-IL" dirty="0"/>
-              <a:t>אני יודע שזו לא </a:t>
-            </a:r>
-            <a:r>
-              <a:rPr lang="he-IL" dirty="0" err="1"/>
-              <a:t>היתה</a:t>
-            </a:r>
-            <a:r>
-              <a:rPr lang="he-IL" dirty="0"/>
-              <a:t> המטרה של העבודה אך לצערי סופר </a:t>
-            </a:r>
-            <a:r>
-              <a:rPr lang="he-IL" dirty="0" err="1"/>
-              <a:t>רזלושין</a:t>
-            </a:r>
-            <a:r>
-              <a:rPr lang="he-IL" dirty="0"/>
-              <a:t> היא </a:t>
-            </a:r>
-            <a:r>
-              <a:rPr lang="he-IL" dirty="0" err="1"/>
-              <a:t>לוא</a:t>
-            </a:r>
-            <a:r>
-              <a:rPr lang="he-IL" dirty="0"/>
-              <a:t> לבלב </a:t>
-            </a:r>
-            <a:r>
-              <a:rPr lang="he-IL" dirty="0" err="1"/>
-              <a:t>טסק</a:t>
-            </a:r>
-            <a:r>
-              <a:rPr lang="he-IL" dirty="0"/>
-              <a:t> היחיד שמתאים לדאטה</a:t>
-            </a:r>
-            <a:endParaRPr lang="en-IL" dirty="0"/>
+              <a:defRPr sz="2100" b="1">
+                <a:solidFill>
+                  <a:srgbClr val="008074"/>
+                </a:solidFill>
+                <a:latin typeface="Aptos"/>
+              </a:defRPr>
+            </a:pPr>
+            <a:r>
+              <a:t>26.87</a:t>
+            </a:r>
+          </a:p>
+        </p:txBody>
+      </p:sp>
+      <p:sp>
+        <p:nvSpPr>
+          <p:cNvPr id="14" name="TextBox 13"/>
+          <p:cNvSpPr txBox="1"/>
+          <p:nvPr/>
+        </p:nvSpPr>
+        <p:spPr>
+          <a:xfrm>
+            <a:off x="7799831" y="3502152"/>
+            <a:ext cx="1901952" cy="228600"/>
+          </a:xfrm>
+          <a:prstGeom prst="rect">
+            <a:avLst/>
+          </a:prstGeom>
+          <a:noFill/>
+        </p:spPr>
+        <p:txBody>
+          <a:bodyPr wrap="none" lIns="18288" tIns="9144" rIns="18288" bIns="9144">
+            <a:spAutoFit/>
+          </a:bodyPr>
+          <a:lstStyle/>
+          <a:p>
+            <a:pPr>
+              <a:defRPr sz="850" b="0">
+                <a:solidFill>
+                  <a:srgbClr val="56636B"/>
+                </a:solidFill>
+                <a:latin typeface="Aptos"/>
+              </a:defRPr>
+            </a:pPr>
+            <a:r>
+              <a:t>Sharpened_lanczos PSNR</a:t>
+            </a:r>
+          </a:p>
+        </p:txBody>
+      </p:sp>
+      <p:sp>
+        <p:nvSpPr>
+          <p:cNvPr id="15" name="Rounded Rectangle 14"/>
+          <p:cNvSpPr/>
+          <p:nvPr/>
+        </p:nvSpPr>
+        <p:spPr>
+          <a:xfrm>
+            <a:off x="7635240" y="4069080"/>
+            <a:ext cx="2240280" cy="914400"/>
+          </a:xfrm>
+          <a:prstGeom prst="roundRect">
+            <a:avLst/>
+          </a:prstGeom>
+          <a:solidFill>
+            <a:srgbClr val="FAFCFC"/>
+          </a:solidFill>
+          <a:ln w="8890">
+            <a:solidFill>
+              <a:srgbClr val="D2DBDB"/>
+            </a:solidFill>
+          </a:ln>
+        </p:spPr>
+        <p:style>
+          <a:lnRef idx="1">
+            <a:schemeClr val="accent1"/>
+          </a:lnRef>
+          <a:fillRef idx="3">
+            <a:schemeClr val="accent1"/>
+          </a:fillRef>
+          <a:effectRef idx="2">
+            <a:schemeClr val="accent1"/>
+          </a:effectRef>
+          <a:fontRef idx="minor">
+            <a:schemeClr val="lt1"/>
+          </a:fontRef>
+        </p:style>
+        <p:txBody>
+          <a:bodyPr rtlCol="0" anchor="ctr"/>
+          <a:lstStyle/>
+          <a:p>
+            <a:pPr algn="ctr"/>
+            <a:endParaRPr/>
+          </a:p>
+        </p:txBody>
+      </p:sp>
+      <p:sp>
+        <p:nvSpPr>
+          <p:cNvPr id="16" name="TextBox 15"/>
+          <p:cNvSpPr txBox="1"/>
+          <p:nvPr/>
+        </p:nvSpPr>
+        <p:spPr>
+          <a:xfrm>
+            <a:off x="7799831" y="4178808"/>
+            <a:ext cx="1874519" cy="320040"/>
+          </a:xfrm>
+          <a:prstGeom prst="rect">
+            <a:avLst/>
+          </a:prstGeom>
+          <a:noFill/>
+        </p:spPr>
+        <p:txBody>
+          <a:bodyPr wrap="none" lIns="18288" tIns="9144" rIns="18288" bIns="9144">
+            <a:spAutoFit/>
+          </a:bodyPr>
+          <a:lstStyle/>
+          <a:p>
+            <a:pPr>
+              <a:defRPr sz="2100" b="1">
+                <a:solidFill>
+                  <a:srgbClr val="B88630"/>
+                </a:solidFill>
+                <a:latin typeface="Aptos"/>
+              </a:defRPr>
+            </a:pPr>
+            <a:r>
+              <a:t>98.38</a:t>
+            </a:r>
+          </a:p>
+        </p:txBody>
+      </p:sp>
+      <p:sp>
+        <p:nvSpPr>
+          <p:cNvPr id="17" name="TextBox 16"/>
+          <p:cNvSpPr txBox="1"/>
+          <p:nvPr/>
+        </p:nvSpPr>
+        <p:spPr>
+          <a:xfrm>
+            <a:off x="7799831" y="4599432"/>
+            <a:ext cx="1901952" cy="228600"/>
+          </a:xfrm>
+          <a:prstGeom prst="rect">
+            <a:avLst/>
+          </a:prstGeom>
+          <a:noFill/>
+        </p:spPr>
+        <p:txBody>
+          <a:bodyPr wrap="none" lIns="18288" tIns="9144" rIns="18288" bIns="9144">
+            <a:spAutoFit/>
+          </a:bodyPr>
+          <a:lstStyle/>
+          <a:p>
+            <a:pPr>
+              <a:defRPr sz="850" b="0">
+                <a:solidFill>
+                  <a:srgbClr val="56636B"/>
+                </a:solidFill>
+                <a:latin typeface="Aptos"/>
+              </a:defRPr>
+            </a:pPr>
+            <a:r>
+              <a:t>Best reconstruction score</a:t>
+            </a:r>
           </a:p>
         </p:txBody>
       </p:sp>

--- a/Brain_MRI_Project_Presentation_Improved_v2.pptx
+++ b/Brain_MRI_Project_Presentation_Improved_v2.pptx
@@ -6,27 +6,26 @@
   </p:sldMasterIdLst>
   <p:sldIdLst>
     <p:sldId id="256" r:id="rId2"/>
-    <p:sldId id="257" r:id="rId3"/>
-    <p:sldId id="258" r:id="rId4"/>
-    <p:sldId id="259" r:id="rId5"/>
-    <p:sldId id="260" r:id="rId6"/>
-    <p:sldId id="261" r:id="rId7"/>
-    <p:sldId id="276" r:id="rId26"/>
-    <p:sldId id="275" r:id="rId25"/>
-    <p:sldId id="262" r:id="rId8"/>
-    <p:sldId id="263" r:id="rId9"/>
-    <p:sldId id="264" r:id="rId10"/>
-    <p:sldId id="277" r:id="rId27"/>
-    <p:sldId id="265" r:id="rId11"/>
-    <p:sldId id="266" r:id="rId12"/>
-    <p:sldId id="267" r:id="rId13"/>
-    <p:sldId id="274" r:id="rId14"/>
-    <p:sldId id="268" r:id="rId15"/>
-    <p:sldId id="269" r:id="rId16"/>
-    <p:sldId id="270" r:id="rId17"/>
-    <p:sldId id="271" r:id="rId18"/>
-    <p:sldId id="272" r:id="rId19"/>
-    <p:sldId id="273" r:id="rId20"/>
+    <p:sldId id="258" r:id="rId3"/>
+    <p:sldId id="259" r:id="rId4"/>
+    <p:sldId id="260" r:id="rId5"/>
+    <p:sldId id="261" r:id="rId6"/>
+    <p:sldId id="276" r:id="rId7"/>
+    <p:sldId id="275" r:id="rId8"/>
+    <p:sldId id="262" r:id="rId9"/>
+    <p:sldId id="263" r:id="rId10"/>
+    <p:sldId id="264" r:id="rId11"/>
+    <p:sldId id="277" r:id="rId12"/>
+    <p:sldId id="265" r:id="rId13"/>
+    <p:sldId id="266" r:id="rId14"/>
+    <p:sldId id="267" r:id="rId15"/>
+    <p:sldId id="274" r:id="rId16"/>
+    <p:sldId id="268" r:id="rId17"/>
+    <p:sldId id="269" r:id="rId18"/>
+    <p:sldId id="270" r:id="rId19"/>
+    <p:sldId id="271" r:id="rId20"/>
+    <p:sldId id="272" r:id="rId21"/>
+    <p:sldId id="273" r:id="rId22"/>
   </p:sldIdLst>
   <p:sldSz cx="12192000" cy="6858000"/>
   <p:notesSz cx="6858000" cy="9144000"/>
@@ -3200,7 +3199,7 @@
         <p:spPr>
           <a:xfrm>
             <a:off x="713232" y="1828800"/>
-            <a:ext cx="5852160" cy="292608"/>
+            <a:ext cx="1967142" cy="233910"/>
           </a:xfrm>
           <a:prstGeom prst="rect">
             <a:avLst/>
@@ -3222,7 +3221,8 @@
               </a:defRPr>
             </a:pPr>
             <a:r>
-              <a:t>By Michael Khadarkevich and Ranana Khava</a:t>
+              <a:rPr dirty="0"/>
+              <a:t>By Michael Khadarkevich</a:t>
             </a:r>
           </a:p>
         </p:txBody>
@@ -3729,7 +3729,7 @@
               </a:defRPr>
             </a:pPr>
             <a:r>
-              <a:t>TASK 1 | CLEAN SUPER-RESOLUTION</a:t>
+              <a:t>TASK 1 | DISTORTED SUPER-RESOLUTION</a:t>
             </a:r>
           </a:p>
         </p:txBody>
@@ -3765,7 +3765,7 @@
               </a:defRPr>
             </a:pPr>
             <a:r>
-              <a:t>Lanczos gives the strongest clean PSNR on the selected MRI image.</a:t>
+              <a:t>Restored inputs usually recover PSNR before sharpened_lanczos reconstruction.</a:t>
             </a:r>
           </a:p>
         </p:txBody>
@@ -3801,7 +3801,8 @@
               </a:defRPr>
             </a:pPr>
             <a:r>
-              <a:t>Sharpened_lanczos is used in the SNR/level experiments to compare distorted and restored images.</a:t>
+              <a:rPr dirty="0"/>
+              <a:t>Each graph includes a dashed clean baseline.</a:t>
             </a:r>
           </a:p>
         </p:txBody>
@@ -3873,7 +3874,7 @@
               </a:defRPr>
             </a:pPr>
             <a:r>
-              <a:t>08</a:t>
+              <a:t>09</a:t>
             </a:r>
           </a:p>
         </p:txBody>
@@ -3886,8 +3887,8 @@
         </p:nvSpPr>
         <p:spPr>
           <a:xfrm>
-            <a:off x="594360" y="1645920"/>
-            <a:ext cx="6629400" cy="4434840"/>
+            <a:off x="502920" y="1508760"/>
+            <a:ext cx="3657600" cy="2240280"/>
           </a:xfrm>
           <a:prstGeom prst="roundRect">
             <a:avLst/>
@@ -3926,7 +3927,7 @@
       </p:sp>
       <p:pic>
         <p:nvPicPr>
-          <p:cNvPr id="8" name="Picture 7" descr="super_resolution_grid.png"/>
+          <p:cNvPr id="8" name="Picture 7" descr="gaussian_noise_snr_psnr_graph.png"/>
           <p:cNvPicPr>
             <a:picLocks noChangeAspect="1"/>
           </p:cNvPicPr>
@@ -3940,8 +3941,8 @@
         </p:blipFill>
         <p:spPr>
           <a:xfrm>
-            <a:off x="1797231" y="1645920"/>
-            <a:ext cx="4223657" cy="4434840"/>
+            <a:off x="502920" y="1612900"/>
+            <a:ext cx="3657600" cy="2032000"/>
           </a:xfrm>
           <a:prstGeom prst="rect">
             <a:avLst/>
@@ -3956,18 +3957,18 @@
         </p:nvSpPr>
         <p:spPr>
           <a:xfrm>
-            <a:off x="7635240" y="1874519"/>
-            <a:ext cx="2240280" cy="914400"/>
+            <a:off x="4251960" y="1508760"/>
+            <a:ext cx="3657600" cy="2240280"/>
           </a:xfrm>
           <a:prstGeom prst="roundRect">
             <a:avLst/>
           </a:prstGeom>
           <a:solidFill>
-            <a:srgbClr val="FAFCFC"/>
+            <a:srgbClr val="FFFFFF"/>
           </a:solidFill>
           <a:ln w="8890">
             <a:solidFill>
-              <a:srgbClr val="D2DBDB"/>
+              <a:srgbClr val="D6DEDE"/>
             </a:solidFill>
           </a:ln>
         </p:spPr>
@@ -3994,98 +3995,50 @@
           </a:p>
         </p:txBody>
       </p:sp>
-      <p:sp>
-        <p:nvSpPr>
-          <p:cNvPr id="10" name="TextBox 9"/>
-          <p:cNvSpPr txBox="1"/>
-          <p:nvPr/>
-        </p:nvSpPr>
-        <p:spPr>
-          <a:xfrm>
-            <a:off x="7799831" y="1984248"/>
-            <a:ext cx="1874519" cy="320040"/>
-          </a:xfrm>
-          <a:prstGeom prst="rect">
-            <a:avLst/>
-          </a:prstGeom>
-          <a:noFill/>
-        </p:spPr>
-        <p:txBody>
-          <a:bodyPr wrap="none" lIns="18288" tIns="9144" rIns="18288" bIns="9144">
-            <a:spAutoFit/>
-          </a:bodyPr>
-          <a:lstStyle/>
-          <a:p>
-            <a:pPr>
-              <a:defRPr sz="2100" b="1">
-                <a:solidFill>
-                  <a:srgbClr val="2666AC"/>
-                </a:solidFill>
-                <a:latin typeface="Aptos"/>
-              </a:defRPr>
-            </a:pPr>
-            <a:r>
-              <a:t>29.62</a:t>
-            </a:r>
-          </a:p>
-        </p:txBody>
-      </p:sp>
-      <p:sp>
-        <p:nvSpPr>
-          <p:cNvPr id="11" name="TextBox 10"/>
-          <p:cNvSpPr txBox="1"/>
-          <p:nvPr/>
-        </p:nvSpPr>
-        <p:spPr>
-          <a:xfrm>
-            <a:off x="7799831" y="2404872"/>
-            <a:ext cx="1901952" cy="228600"/>
-          </a:xfrm>
-          <a:prstGeom prst="rect">
-            <a:avLst/>
-          </a:prstGeom>
-          <a:noFill/>
-        </p:spPr>
-        <p:txBody>
-          <a:bodyPr wrap="none" lIns="18288" tIns="9144" rIns="18288" bIns="9144">
-            <a:spAutoFit/>
-          </a:bodyPr>
-          <a:lstStyle/>
-          <a:p>
-            <a:pPr>
-              <a:defRPr sz="850" b="0">
-                <a:solidFill>
-                  <a:srgbClr val="56636B"/>
-                </a:solidFill>
-                <a:latin typeface="Aptos"/>
-              </a:defRPr>
-            </a:pPr>
-            <a:r>
-              <a:t>Best clean PSNR: Lanczos</a:t>
-            </a:r>
-          </a:p>
-        </p:txBody>
-      </p:sp>
-      <p:sp>
-        <p:nvSpPr>
-          <p:cNvPr id="12" name="Rounded Rectangle 11"/>
+      <p:pic>
+        <p:nvPicPr>
+          <p:cNvPr id="10" name="Picture 9" descr="salt_and_pepper_density_psnr_graph.png"/>
+          <p:cNvPicPr>
+            <a:picLocks noChangeAspect="1"/>
+          </p:cNvPicPr>
+          <p:nvPr/>
+        </p:nvPicPr>
+        <p:blipFill>
+          <a:blip r:embed="rId3"/>
+          <a:stretch>
+            <a:fillRect/>
+          </a:stretch>
+        </p:blipFill>
+        <p:spPr>
+          <a:xfrm>
+            <a:off x="4251960" y="1612900"/>
+            <a:ext cx="3657600" cy="2032000"/>
+          </a:xfrm>
+          <a:prstGeom prst="rect">
+            <a:avLst/>
+          </a:prstGeom>
+        </p:spPr>
+      </p:pic>
+      <p:sp>
+        <p:nvSpPr>
+          <p:cNvPr id="11" name="Rounded Rectangle 10"/>
           <p:cNvSpPr/>
           <p:nvPr/>
         </p:nvSpPr>
         <p:spPr>
           <a:xfrm>
-            <a:off x="7635240" y="2971800"/>
-            <a:ext cx="2240280" cy="914400"/>
+            <a:off x="8001000" y="1508760"/>
+            <a:ext cx="3657600" cy="2240280"/>
           </a:xfrm>
           <a:prstGeom prst="roundRect">
             <a:avLst/>
           </a:prstGeom>
           <a:solidFill>
-            <a:srgbClr val="FAFCFC"/>
+            <a:srgbClr val="FFFFFF"/>
           </a:solidFill>
           <a:ln w="8890">
             <a:solidFill>
-              <a:srgbClr val="D2DBDB"/>
+              <a:srgbClr val="D6DEDE"/>
             </a:solidFill>
           </a:ln>
         </p:spPr>
@@ -4112,6 +4065,30 @@
           </a:p>
         </p:txBody>
       </p:sp>
+      <p:pic>
+        <p:nvPicPr>
+          <p:cNvPr id="12" name="Picture 11" descr="gaussian_blur_sigma_psnr_graph.png"/>
+          <p:cNvPicPr>
+            <a:picLocks noChangeAspect="1"/>
+          </p:cNvPicPr>
+          <p:nvPr/>
+        </p:nvPicPr>
+        <p:blipFill>
+          <a:blip r:embed="rId4"/>
+          <a:stretch>
+            <a:fillRect/>
+          </a:stretch>
+        </p:blipFill>
+        <p:spPr>
+          <a:xfrm>
+            <a:off x="8001000" y="1612900"/>
+            <a:ext cx="3657600" cy="2032000"/>
+          </a:xfrm>
+          <a:prstGeom prst="rect">
+            <a:avLst/>
+          </a:prstGeom>
+        </p:spPr>
+      </p:pic>
       <p:sp>
         <p:nvSpPr>
           <p:cNvPr id="13" name="TextBox 12"/>
@@ -4120,184 +4097,87 @@
         </p:nvSpPr>
         <p:spPr>
           <a:xfrm>
-            <a:off x="7799831" y="3081528"/>
-            <a:ext cx="1874519" cy="320040"/>
-          </a:xfrm>
-          <a:prstGeom prst="rect">
-            <a:avLst/>
-          </a:prstGeom>
-          <a:noFill/>
-        </p:spPr>
-        <p:txBody>
-          <a:bodyPr wrap="none" lIns="18288" tIns="9144" rIns="18288" bIns="9144">
+            <a:off x="868680" y="4136658"/>
+            <a:ext cx="10424160" cy="731520"/>
+          </a:xfrm>
+          <a:prstGeom prst="rect">
+            <a:avLst/>
+          </a:prstGeom>
+          <a:noFill/>
+        </p:spPr>
+        <p:txBody>
+          <a:bodyPr wrap="square">
             <a:spAutoFit/>
           </a:bodyPr>
           <a:lstStyle/>
           <a:p>
             <a:pPr>
-              <a:defRPr sz="2100" b="1">
-                <a:solidFill>
-                  <a:srgbClr val="008074"/>
-                </a:solidFill>
-                <a:latin typeface="Aptos"/>
-              </a:defRPr>
-            </a:pPr>
-            <a:r>
-              <a:t>26.87</a:t>
-            </a:r>
-          </a:p>
-        </p:txBody>
-      </p:sp>
-      <p:sp>
-        <p:nvSpPr>
-          <p:cNvPr id="14" name="TextBox 13"/>
-          <p:cNvSpPr txBox="1"/>
-          <p:nvPr/>
-        </p:nvSpPr>
-        <p:spPr>
-          <a:xfrm>
-            <a:off x="7799831" y="3502152"/>
-            <a:ext cx="1901952" cy="228600"/>
-          </a:xfrm>
-          <a:prstGeom prst="rect">
-            <a:avLst/>
-          </a:prstGeom>
-          <a:noFill/>
-        </p:spPr>
-        <p:txBody>
-          <a:bodyPr wrap="none" lIns="18288" tIns="9144" rIns="18288" bIns="9144">
-            <a:spAutoFit/>
-          </a:bodyPr>
-          <a:lstStyle/>
-          <a:p>
-            <a:pPr>
-              <a:defRPr sz="850" b="0">
-                <a:solidFill>
-                  <a:srgbClr val="56636B"/>
-                </a:solidFill>
-                <a:latin typeface="Aptos"/>
-              </a:defRPr>
-            </a:pPr>
-            <a:r>
-              <a:t>Sharpened_lanczos PSNR</a:t>
-            </a:r>
-          </a:p>
-        </p:txBody>
-      </p:sp>
-      <p:sp>
-        <p:nvSpPr>
-          <p:cNvPr id="15" name="Rounded Rectangle 14"/>
-          <p:cNvSpPr/>
-          <p:nvPr/>
-        </p:nvSpPr>
-        <p:spPr>
-          <a:xfrm>
-            <a:off x="7635240" y="4069080"/>
-            <a:ext cx="2240280" cy="914400"/>
-          </a:xfrm>
-          <a:prstGeom prst="roundRect">
-            <a:avLst/>
-          </a:prstGeom>
-          <a:solidFill>
-            <a:srgbClr val="FAFCFC"/>
-          </a:solidFill>
-          <a:ln w="8890">
-            <a:solidFill>
-              <a:srgbClr val="D2DBDB"/>
-            </a:solidFill>
-          </a:ln>
-        </p:spPr>
-        <p:style>
-          <a:lnRef idx="1">
-            <a:schemeClr val="accent1"/>
-          </a:lnRef>
-          <a:fillRef idx="3">
-            <a:schemeClr val="accent1"/>
-          </a:fillRef>
-          <a:effectRef idx="2">
-            <a:schemeClr val="accent1"/>
-          </a:effectRef>
-          <a:fontRef idx="minor">
-            <a:schemeClr val="lt1"/>
-          </a:fontRef>
-        </p:style>
-        <p:txBody>
-          <a:bodyPr rtlCol="0" anchor="ctr"/>
-          <a:lstStyle/>
-          <a:p>
-            <a:pPr algn="ctr"/>
-            <a:endParaRPr/>
-          </a:p>
-        </p:txBody>
-      </p:sp>
-      <p:sp>
-        <p:nvSpPr>
-          <p:cNvPr id="16" name="TextBox 15"/>
-          <p:cNvSpPr txBox="1"/>
-          <p:nvPr/>
-        </p:nvSpPr>
-        <p:spPr>
-          <a:xfrm>
-            <a:off x="7799831" y="4178808"/>
-            <a:ext cx="1874519" cy="320040"/>
-          </a:xfrm>
-          <a:prstGeom prst="rect">
-            <a:avLst/>
-          </a:prstGeom>
-          <a:noFill/>
-        </p:spPr>
-        <p:txBody>
-          <a:bodyPr wrap="none" lIns="18288" tIns="9144" rIns="18288" bIns="9144">
-            <a:spAutoFit/>
-          </a:bodyPr>
-          <a:lstStyle/>
-          <a:p>
-            <a:pPr>
-              <a:defRPr sz="2100" b="1">
-                <a:solidFill>
-                  <a:srgbClr val="B88630"/>
-                </a:solidFill>
-                <a:latin typeface="Aptos"/>
-              </a:defRPr>
-            </a:pPr>
-            <a:r>
-              <a:t>98.38</a:t>
-            </a:r>
-          </a:p>
-        </p:txBody>
-      </p:sp>
-      <p:sp>
-        <p:nvSpPr>
-          <p:cNvPr id="17" name="TextBox 16"/>
-          <p:cNvSpPr txBox="1"/>
-          <p:nvPr/>
-        </p:nvSpPr>
-        <p:spPr>
-          <a:xfrm>
-            <a:off x="7799831" y="4599432"/>
-            <a:ext cx="1901952" cy="228600"/>
-          </a:xfrm>
-          <a:prstGeom prst="rect">
-            <a:avLst/>
-          </a:prstGeom>
-          <a:noFill/>
-        </p:spPr>
-        <p:txBody>
-          <a:bodyPr wrap="none" lIns="18288" tIns="9144" rIns="18288" bIns="9144">
-            <a:spAutoFit/>
-          </a:bodyPr>
-          <a:lstStyle/>
-          <a:p>
-            <a:pPr>
-              <a:defRPr sz="850" b="0">
-                <a:solidFill>
-                  <a:srgbClr val="56636B"/>
-                </a:solidFill>
-                <a:latin typeface="Aptos"/>
-              </a:defRPr>
-            </a:pPr>
-            <a:r>
-              <a:t>Best reconstruction score</a:t>
+              <a:spcAft>
+                <a:spcPts val="800"/>
+              </a:spcAft>
+              <a:defRPr sz="1400">
+                <a:solidFill>
+                  <a:srgbClr val="182228"/>
+                </a:solidFill>
+                <a:latin typeface="Aptos"/>
+              </a:defRPr>
+            </a:pPr>
+            <a:r>
+              <a:rPr dirty="0"/>
+              <a:t>Main metric: PSNR. Restoration helps most when noise can be reduced without destroying structure. Severe salt-and-pepper is the hardest setting.</a:t>
+            </a:r>
+          </a:p>
+        </p:txBody>
+      </p:sp>
+      <p:sp>
+        <p:nvSpPr>
+          <p:cNvPr id="16" name="TextBox 15">
+            <a:extLst>
+              <a:ext uri="{FF2B5EF4-FFF2-40B4-BE49-F238E27FC236}">
+                <a16:creationId xmlns:a16="http://schemas.microsoft.com/office/drawing/2014/main" id="{746CAD84-42C9-FD1E-23CA-55D2AC98F67E}"/>
+              </a:ext>
+            </a:extLst>
+          </p:cNvPr>
+          <p:cNvSpPr txBox="1"/>
+          <p:nvPr/>
+        </p:nvSpPr>
+        <p:spPr>
+          <a:xfrm>
+            <a:off x="521207" y="4827379"/>
+            <a:ext cx="11452650" cy="1384995"/>
+          </a:xfrm>
+          <a:prstGeom prst="rect">
+            <a:avLst/>
+          </a:prstGeom>
+          <a:noFill/>
+        </p:spPr>
+        <p:txBody>
+          <a:bodyPr wrap="square">
+            <a:spAutoFit/>
+          </a:bodyPr>
+          <a:lstStyle/>
+          <a:p>
+            <a:r>
+              <a:rPr lang="en-IL" sz="1400" dirty="0"/>
+              <a:t>Disclaimer: Due to the nature of the super resolution task, it makes no sense to compare the final product to the original image because the noise affects each image differently, so in each experiment the final product is compared to the image with the noise/with the restoration.</a:t>
+            </a:r>
+          </a:p>
+          <a:p>
+            <a:r>
+              <a:rPr lang="en-IL" sz="1400" dirty="0"/>
+              <a:t>Following these changes, an interesting phenomenon occurs that due to a certain amount of noise, reducing it by 2 loses less information.</a:t>
+            </a:r>
+          </a:p>
+          <a:p>
+            <a:r>
+              <a:rPr lang="en-IL" sz="1400" dirty="0"/>
+              <a:t>I will give you an example: If I take an image and take extreme noise that turns it white – and then after I divide it by 2 and return it to the original image, I will get a white image, so we got the same image and did not lose information.</a:t>
+            </a:r>
+          </a:p>
+          <a:p>
+            <a:r>
+              <a:rPr lang="en-IL" sz="1400" dirty="0"/>
+              <a:t>I know that this was not the goal of the work, but unfortunately super resolution is the only task that fits the data.</a:t>
             </a:r>
           </a:p>
         </p:txBody>
@@ -4344,15 +4224,15 @@
         <p:spPr>
           <a:xfrm>
             <a:off x="502920" y="320040"/>
-            <a:ext cx="4572000" cy="256032"/>
-          </a:xfrm>
-          <a:prstGeom prst="rect">
-            <a:avLst/>
-          </a:prstGeom>
-          <a:noFill/>
-        </p:spPr>
-        <p:txBody>
-          <a:bodyPr wrap="none" lIns="18288" tIns="9144" rIns="18288" bIns="9144">
+            <a:ext cx="4937760" cy="256032"/>
+          </a:xfrm>
+          <a:prstGeom prst="rect">
+            <a:avLst/>
+          </a:prstGeom>
+          <a:noFill/>
+        </p:spPr>
+        <p:txBody>
+          <a:bodyPr wrap="square">
             <a:spAutoFit/>
           </a:bodyPr>
           <a:lstStyle/>
@@ -4366,7 +4246,7 @@
               </a:defRPr>
             </a:pPr>
             <a:r>
-              <a:t>TASK 1 | DISTORTED SUPER-RESOLUTION</a:t>
+              <a:t>TASK 1 EXTRA</a:t>
             </a:r>
           </a:p>
         </p:txBody>
@@ -4380,21 +4260,21 @@
         <p:spPr>
           <a:xfrm>
             <a:off x="502920" y="640080"/>
-            <a:ext cx="8961120" cy="603504"/>
-          </a:xfrm>
-          <a:prstGeom prst="rect">
-            <a:avLst/>
-          </a:prstGeom>
-          <a:noFill/>
-        </p:spPr>
-        <p:txBody>
-          <a:bodyPr wrap="none" lIns="18288" tIns="9144" rIns="18288" bIns="9144">
+            <a:ext cx="9966960" cy="566928"/>
+          </a:xfrm>
+          <a:prstGeom prst="rect">
+            <a:avLst/>
+          </a:prstGeom>
+          <a:noFill/>
+        </p:spPr>
+        <p:txBody>
+          <a:bodyPr wrap="square">
             <a:spAutoFit/>
           </a:bodyPr>
           <a:lstStyle/>
           <a:p>
             <a:pPr>
-              <a:defRPr sz="2400" b="1">
+              <a:defRPr sz="2300" b="1">
                 <a:solidFill>
                   <a:srgbClr val="182228"/>
                 </a:solidFill>
@@ -4402,7 +4282,7 @@
               </a:defRPr>
             </a:pPr>
             <a:r>
-              <a:t>Restored inputs usually recover PSNR before sharpened_lanczos reconstruction.</a:t>
+              <a:t>Dividing the clean image by more than x2 quickly lowers Lanczos quality.</a:t>
             </a:r>
           </a:p>
         </p:txBody>
@@ -4416,15 +4296,15 @@
         <p:spPr>
           <a:xfrm>
             <a:off x="521207" y="1225296"/>
-            <a:ext cx="9052560" cy="292608"/>
-          </a:xfrm>
-          <a:prstGeom prst="rect">
-            <a:avLst/>
-          </a:prstGeom>
-          <a:noFill/>
-        </p:spPr>
-        <p:txBody>
-          <a:bodyPr wrap="none" lIns="18288" tIns="9144" rIns="18288" bIns="9144">
+            <a:ext cx="9875520" cy="292608"/>
+          </a:xfrm>
+          <a:prstGeom prst="rect">
+            <a:avLst/>
+          </a:prstGeom>
+          <a:noFill/>
+        </p:spPr>
+        <p:txBody>
+          <a:bodyPr wrap="square">
             <a:spAutoFit/>
           </a:bodyPr>
           <a:lstStyle/>
@@ -4438,7 +4318,7 @@
               </a:defRPr>
             </a:pPr>
             <a:r>
-              <a:t>Each graph includes a dashed clean baseline.</a:t>
+              <a:t>The clean MRI image was downsampled by stronger factors and reconstructed back to 224x224 using Lanczos.</a:t>
             </a:r>
           </a:p>
         </p:txBody>
@@ -4460,7 +4340,7 @@
           <a:noFill/>
         </p:spPr>
         <p:txBody>
-          <a:bodyPr wrap="none" lIns="18288" tIns="9144" rIns="18288" bIns="9144">
+          <a:bodyPr wrap="square">
             <a:spAutoFit/>
           </a:bodyPr>
           <a:lstStyle/>
@@ -4481,50 +4361,14 @@
       </p:sp>
       <p:sp>
         <p:nvSpPr>
-          <p:cNvPr id="6" name="TextBox 5"/>
-          <p:cNvSpPr txBox="1"/>
-          <p:nvPr/>
-        </p:nvSpPr>
-        <p:spPr>
-          <a:xfrm>
-            <a:off x="11292840" y="6446520"/>
-            <a:ext cx="411480" cy="182880"/>
-          </a:xfrm>
-          <a:prstGeom prst="rect">
-            <a:avLst/>
-          </a:prstGeom>
-          <a:noFill/>
-        </p:spPr>
-        <p:txBody>
-          <a:bodyPr wrap="none" lIns="18288" tIns="9144" rIns="18288" bIns="9144">
-            <a:spAutoFit/>
-          </a:bodyPr>
-          <a:lstStyle/>
-          <a:p>
-            <a:pPr algn="r">
-              <a:defRPr sz="800" b="0">
-                <a:solidFill>
-                  <a:srgbClr val="56636B"/>
-                </a:solidFill>
-                <a:latin typeface="Aptos"/>
-              </a:defRPr>
-            </a:pPr>
-            <a:r>
-              <a:t>09</a:t>
-            </a:r>
-          </a:p>
-        </p:txBody>
-      </p:sp>
-      <p:sp>
-        <p:nvSpPr>
-          <p:cNvPr id="7" name="Rounded Rectangle 6"/>
+          <p:cNvPr id="6" name="Rounded Rectangle 5"/>
           <p:cNvSpPr/>
           <p:nvPr/>
         </p:nvSpPr>
         <p:spPr>
           <a:xfrm>
-            <a:off x="502920" y="1508760"/>
-            <a:ext cx="3657600" cy="2240280"/>
+            <a:off x="594360" y="1691640"/>
+            <a:ext cx="5715000" cy="4389120"/>
           </a:xfrm>
           <a:prstGeom prst="roundRect">
             <a:avLst/>
@@ -4534,7 +4378,7 @@
           </a:solidFill>
           <a:ln w="8890">
             <a:solidFill>
-              <a:srgbClr val="D6DEDE"/>
+              <a:srgbClr val="D2DBDB"/>
             </a:solidFill>
           </a:ln>
         </p:spPr>
@@ -4563,7 +4407,7 @@
       </p:sp>
       <p:pic>
         <p:nvPicPr>
-          <p:cNvPr id="8" name="Picture 7" descr="gaussian_noise_snr_psnr_graph.png"/>
+          <p:cNvPr id="7" name="Picture 6" descr="lanczos_psnr_by_downscale_factor.png"/>
           <p:cNvPicPr>
             <a:picLocks noChangeAspect="1"/>
           </p:cNvPicPr>
@@ -4577,8 +4421,8 @@
         </p:blipFill>
         <p:spPr>
           <a:xfrm>
-            <a:off x="502920" y="1612900"/>
-            <a:ext cx="3657600" cy="2032000"/>
+            <a:off x="822960" y="2326132"/>
+            <a:ext cx="5257800" cy="3037840"/>
           </a:xfrm>
           <a:prstGeom prst="rect">
             <a:avLst/>
@@ -4587,14 +4431,14 @@
       </p:pic>
       <p:sp>
         <p:nvSpPr>
-          <p:cNvPr id="9" name="Rounded Rectangle 8"/>
+          <p:cNvPr id="8" name="Rounded Rectangle 7"/>
           <p:cNvSpPr/>
           <p:nvPr/>
         </p:nvSpPr>
         <p:spPr>
           <a:xfrm>
-            <a:off x="4251960" y="1508760"/>
-            <a:ext cx="3657600" cy="2240280"/>
+            <a:off x="6629400" y="1691640"/>
+            <a:ext cx="4892040" cy="2331720"/>
           </a:xfrm>
           <a:prstGeom prst="roundRect">
             <a:avLst/>
@@ -4604,7 +4448,7 @@
           </a:solidFill>
           <a:ln w="8890">
             <a:solidFill>
-              <a:srgbClr val="D6DEDE"/>
+              <a:srgbClr val="D2DBDB"/>
             </a:solidFill>
           </a:ln>
         </p:spPr>
@@ -4633,7 +4477,7 @@
       </p:sp>
       <p:pic>
         <p:nvPicPr>
-          <p:cNvPr id="10" name="Picture 9" descr="salt_and_pepper_density_psnr_graph.png"/>
+          <p:cNvPr id="9" name="Picture 8" descr="lanczos_extra_downscale_grid.png"/>
           <p:cNvPicPr>
             <a:picLocks noChangeAspect="1"/>
           </p:cNvPicPr>
@@ -4647,8 +4491,8 @@
         </p:blipFill>
         <p:spPr>
           <a:xfrm>
-            <a:off x="4251960" y="1612900"/>
-            <a:ext cx="3657600" cy="2032000"/>
+            <a:off x="7533513" y="1874519"/>
+            <a:ext cx="3092958" cy="1874519"/>
           </a:xfrm>
           <a:prstGeom prst="rect">
             <a:avLst/>
@@ -4657,24 +4501,24 @@
       </p:pic>
       <p:sp>
         <p:nvSpPr>
-          <p:cNvPr id="11" name="Rounded Rectangle 10"/>
+          <p:cNvPr id="10" name="Rounded Rectangle 9"/>
           <p:cNvSpPr/>
           <p:nvPr/>
         </p:nvSpPr>
         <p:spPr>
           <a:xfrm>
-            <a:off x="8001000" y="1508760"/>
-            <a:ext cx="3657600" cy="2240280"/>
+            <a:off x="6629400" y="4251960"/>
+            <a:ext cx="4892040" cy="1417320"/>
           </a:xfrm>
           <a:prstGeom prst="roundRect">
             <a:avLst/>
           </a:prstGeom>
           <a:solidFill>
-            <a:srgbClr val="FFFFFF"/>
+            <a:srgbClr val="F1F5F5"/>
           </a:solidFill>
           <a:ln w="8890">
             <a:solidFill>
-              <a:srgbClr val="D6DEDE"/>
+              <a:srgbClr val="D2DBDB"/>
             </a:solidFill>
           </a:ln>
         </p:spPr>
@@ -4701,30 +4545,78 @@
           </a:p>
         </p:txBody>
       </p:sp>
-      <p:pic>
-        <p:nvPicPr>
-          <p:cNvPr id="12" name="Picture 11" descr="gaussian_blur_sigma_psnr_graph.png"/>
-          <p:cNvPicPr>
-            <a:picLocks noChangeAspect="1"/>
-          </p:cNvPicPr>
-          <p:nvPr/>
-        </p:nvPicPr>
-        <p:blipFill>
-          <a:blip r:embed="rId4"/>
-          <a:stretch>
-            <a:fillRect/>
-          </a:stretch>
-        </p:blipFill>
-        <p:spPr>
-          <a:xfrm>
-            <a:off x="8001000" y="1612900"/>
-            <a:ext cx="3657600" cy="2032000"/>
-          </a:xfrm>
-          <a:prstGeom prst="rect">
-            <a:avLst/>
-          </a:prstGeom>
-        </p:spPr>
-      </p:pic>
+      <p:sp>
+        <p:nvSpPr>
+          <p:cNvPr id="11" name="TextBox 10"/>
+          <p:cNvSpPr txBox="1"/>
+          <p:nvPr/>
+        </p:nvSpPr>
+        <p:spPr>
+          <a:xfrm>
+            <a:off x="6876288" y="4462272"/>
+            <a:ext cx="2011680" cy="228600"/>
+          </a:xfrm>
+          <a:prstGeom prst="rect">
+            <a:avLst/>
+          </a:prstGeom>
+          <a:noFill/>
+        </p:spPr>
+        <p:txBody>
+          <a:bodyPr wrap="square">
+            <a:spAutoFit/>
+          </a:bodyPr>
+          <a:lstStyle/>
+          <a:p>
+            <a:pPr>
+              <a:defRPr sz="1400" b="1">
+                <a:solidFill>
+                  <a:srgbClr val="2666AC"/>
+                </a:solidFill>
+                <a:latin typeface="Aptos"/>
+              </a:defRPr>
+            </a:pPr>
+            <a:r>
+              <a:t>What the graph shows</a:t>
+            </a:r>
+          </a:p>
+        </p:txBody>
+      </p:sp>
+      <p:sp>
+        <p:nvSpPr>
+          <p:cNvPr id="12" name="TextBox 11"/>
+          <p:cNvSpPr txBox="1"/>
+          <p:nvPr/>
+        </p:nvSpPr>
+        <p:spPr>
+          <a:xfrm>
+            <a:off x="6876288" y="4828032"/>
+            <a:ext cx="4160520" cy="475488"/>
+          </a:xfrm>
+          <a:prstGeom prst="rect">
+            <a:avLst/>
+          </a:prstGeom>
+          <a:noFill/>
+        </p:spPr>
+        <p:txBody>
+          <a:bodyPr wrap="square">
+            <a:spAutoFit/>
+          </a:bodyPr>
+          <a:lstStyle/>
+          <a:p>
+            <a:pPr>
+              <a:defRPr sz="1100" b="0">
+                <a:solidFill>
+                  <a:srgbClr val="182228"/>
+                </a:solidFill>
+                <a:latin typeface="Aptos"/>
+              </a:defRPr>
+            </a:pPr>
+            <a:r>
+              <a:t>PSNR drops from 29.62 at x2 to 16.72 at x10. Stronger downsampling removes detail that Lanczos cannot fully reconstruct.</a:t>
+            </a:r>
+          </a:p>
+        </p:txBody>
+      </p:sp>
       <p:sp>
         <p:nvSpPr>
           <p:cNvPr id="13" name="TextBox 12"/>
@@ -4733,8 +4625,8 @@
         </p:nvSpPr>
         <p:spPr>
           <a:xfrm>
-            <a:off x="868680" y="4136658"/>
-            <a:ext cx="10424160" cy="731520"/>
+            <a:off x="6876288" y="5376672"/>
+            <a:ext cx="3749039" cy="182880"/>
           </a:xfrm>
           <a:prstGeom prst="rect">
             <a:avLst/>
@@ -4748,29 +4640,61 @@
           <a:lstStyle/>
           <a:p>
             <a:pPr>
-              <a:spcAft>
-                <a:spcPts val="800"/>
-              </a:spcAft>
-              <a:defRPr sz="1400">
-                <a:solidFill>
-                  <a:srgbClr val="182228"/>
-                </a:solidFill>
-                <a:latin typeface="Aptos"/>
-              </a:defRPr>
-            </a:pPr>
-            <a:r>
-              <a:rPr dirty="0"/>
-              <a:t>Main metric: PSNR. Restoration helps most when noise can be reduced without destroying structure. Severe salt-and-pepper is the hardest setting.</a:t>
-            </a:r>
-          </a:p>
-        </p:txBody>
-      </p:sp>
-      <p:sp>
-        <p:nvSpPr>
-          <p:cNvPr id="14" name="TextBox 13">
+              <a:defRPr sz="950" b="0">
+                <a:solidFill>
+                  <a:srgbClr val="56636B"/>
+                </a:solidFill>
+                <a:latin typeface="Aptos"/>
+              </a:defRPr>
+            </a:pPr>
+            <a:r>
+              <a:t>Main metric: PSNR, higher is better.</a:t>
+            </a:r>
+          </a:p>
+        </p:txBody>
+      </p:sp>
+      <p:sp>
+        <p:nvSpPr>
+          <p:cNvPr id="14" name="TextBox 13"/>
+          <p:cNvSpPr txBox="1"/>
+          <p:nvPr/>
+        </p:nvSpPr>
+        <p:spPr>
+          <a:xfrm>
+            <a:off x="11292840" y="6446520"/>
+            <a:ext cx="411480" cy="182880"/>
+          </a:xfrm>
+          <a:prstGeom prst="rect">
+            <a:avLst/>
+          </a:prstGeom>
+          <a:noFill/>
+        </p:spPr>
+        <p:txBody>
+          <a:bodyPr wrap="square">
+            <a:spAutoFit/>
+          </a:bodyPr>
+          <a:lstStyle/>
+          <a:p>
+            <a:pPr algn="r">
+              <a:defRPr sz="800" b="0">
+                <a:solidFill>
+                  <a:srgbClr val="56636B"/>
+                </a:solidFill>
+                <a:latin typeface="Aptos"/>
+              </a:defRPr>
+            </a:pPr>
+            <a:r>
+              <a:t>12</a:t>
+            </a:r>
+          </a:p>
+        </p:txBody>
+      </p:sp>
+      <p:sp>
+        <p:nvSpPr>
+          <p:cNvPr id="15" name="TextBox 14">
             <a:extLst>
               <a:ext uri="{FF2B5EF4-FFF2-40B4-BE49-F238E27FC236}">
-                <a16:creationId xmlns:a16="http://schemas.microsoft.com/office/drawing/2014/main" id="{D83512F5-C7CB-89E4-B85E-1DC52C38B301}"/>
+                <a16:creationId xmlns:a16="http://schemas.microsoft.com/office/drawing/2014/main" id="{19A53906-AC5B-0580-F884-9B775C9FA211}"/>
               </a:ext>
             </a:extLst>
           </p:cNvPr>
@@ -4779,113 +4703,23 @@
         </p:nvSpPr>
         <p:spPr>
           <a:xfrm>
-            <a:off x="1376885" y="4606558"/>
-            <a:ext cx="9201633" cy="2308324"/>
-          </a:xfrm>
-          <a:prstGeom prst="rect">
-            <a:avLst/>
-          </a:prstGeom>
-          <a:noFill/>
-        </p:spPr>
-        <p:txBody>
-          <a:bodyPr wrap="square" rtlCol="0">
-            <a:spAutoFit/>
-          </a:bodyPr>
-          <a:lstStyle/>
-          <a:p>
-            <a:r>
-              <a:rPr lang="he-IL" dirty="0"/>
-              <a:t>האהרה : בגלל טיב המשימה של הסופר </a:t>
-            </a:r>
-            <a:r>
-              <a:rPr lang="he-IL" dirty="0" err="1"/>
-              <a:t>רזלוציה</a:t>
-            </a:r>
-            <a:r>
-              <a:rPr lang="he-IL" dirty="0"/>
-              <a:t> אין היגיון בהשוואת התוצר הסופי לעומת התמונה המקורית כי הרעש משפיע באופן שונה על כל </a:t>
-            </a:r>
-            <a:r>
-              <a:rPr lang="he-IL" dirty="0" err="1"/>
-              <a:t>ץמונה</a:t>
-            </a:r>
-            <a:r>
-              <a:rPr lang="he-IL" dirty="0"/>
-              <a:t>, לכן בכל ניסוי התוצר הסופי מושווה לתמונה עם הרעש\עם </a:t>
-            </a:r>
-            <a:r>
-              <a:rPr lang="he-IL" dirty="0" err="1"/>
-              <a:t>הרסטורשין</a:t>
-            </a:r>
-            <a:r>
-              <a:rPr lang="he-IL" dirty="0"/>
-              <a:t>.</a:t>
-            </a:r>
-          </a:p>
-          <a:p>
-            <a:r>
-              <a:rPr lang="he-IL" dirty="0"/>
-              <a:t>בעקבות שינויים אלו קוראת תופעה מעניינת שבגלל רעש </a:t>
-            </a:r>
-            <a:r>
-              <a:rPr lang="he-IL" dirty="0" err="1"/>
-              <a:t>מסויים</a:t>
-            </a:r>
-            <a:r>
-              <a:rPr lang="he-IL" dirty="0"/>
-              <a:t>, ההקטנה פי 2 מאבדת פחות מידע.</a:t>
-            </a:r>
-          </a:p>
-          <a:p>
-            <a:r>
-              <a:rPr lang="he-IL" dirty="0"/>
-              <a:t>אתן </a:t>
-            </a:r>
-            <a:r>
-              <a:rPr lang="he-IL" dirty="0" err="1"/>
-              <a:t>דוכמה</a:t>
-            </a:r>
-            <a:r>
-              <a:rPr lang="he-IL" dirty="0"/>
-              <a:t>: אם אקח תמונה ואקח רעש קיצוני שהופך אותה ללבנה – ואז אחרי שאני מחלק ל2 ואז מחזיר אותה לתמונה המקורית , אני אקבל תמונה לבנה , כך שקיבלנו אותה תמונה ולא איבדנו מידע.</a:t>
-            </a:r>
-          </a:p>
-          <a:p>
-            <a:r>
-              <a:rPr lang="he-IL" dirty="0"/>
-              <a:t>אני יודע שזו לא </a:t>
-            </a:r>
-            <a:r>
-              <a:rPr lang="he-IL" dirty="0" err="1"/>
-              <a:t>היתה</a:t>
-            </a:r>
-            <a:r>
-              <a:rPr lang="he-IL" dirty="0"/>
-              <a:t> המטרה של העבודה אך לצערי סופר </a:t>
-            </a:r>
-            <a:r>
-              <a:rPr lang="he-IL" dirty="0" err="1"/>
-              <a:t>רזלושין</a:t>
-            </a:r>
-            <a:r>
-              <a:rPr lang="he-IL" dirty="0"/>
-              <a:t> היא </a:t>
-            </a:r>
-            <a:r>
-              <a:rPr lang="he-IL" dirty="0" err="1"/>
-              <a:t>לוא</a:t>
-            </a:r>
-            <a:r>
-              <a:rPr lang="he-IL" dirty="0"/>
-              <a:t> לבלב </a:t>
-            </a:r>
-            <a:r>
-              <a:rPr lang="he-IL" dirty="0" err="1"/>
-              <a:t>טסק</a:t>
-            </a:r>
-            <a:r>
-              <a:rPr lang="he-IL" dirty="0"/>
-              <a:t> היחיד שמתאים לדאטה</a:t>
+            <a:off x="3951214" y="252460"/>
+            <a:ext cx="3260188" cy="369332"/>
+          </a:xfrm>
+          <a:prstGeom prst="rect">
+            <a:avLst/>
+          </a:prstGeom>
+          <a:noFill/>
+        </p:spPr>
+        <p:txBody>
+          <a:bodyPr wrap="none" rtlCol="0">
+            <a:spAutoFit/>
+          </a:bodyPr>
+          <a:lstStyle/>
+          <a:p>
+            <a:r>
+              <a:rPr lang="en-US" dirty="0"/>
+              <a:t>I decided to do some extra work.</a:t>
             </a:r>
             <a:endParaRPr lang="en-IL" dirty="0"/>
           </a:p>
@@ -6393,6 +6227,78 @@
           </a:p>
         </p:txBody>
       </p:sp>
+      <p:sp>
+        <p:nvSpPr>
+          <p:cNvPr id="22" name="TextBox 21">
+            <a:extLst>
+              <a:ext uri="{FF2B5EF4-FFF2-40B4-BE49-F238E27FC236}">
+                <a16:creationId xmlns:a16="http://schemas.microsoft.com/office/drawing/2014/main" id="{E30C2D00-1276-F0B3-F742-0547190A8D8D}"/>
+              </a:ext>
+            </a:extLst>
+          </p:cNvPr>
+          <p:cNvSpPr txBox="1"/>
+          <p:nvPr/>
+        </p:nvSpPr>
+        <p:spPr>
+          <a:xfrm>
+            <a:off x="3951214" y="252460"/>
+            <a:ext cx="3260188" cy="369332"/>
+          </a:xfrm>
+          <a:prstGeom prst="rect">
+            <a:avLst/>
+          </a:prstGeom>
+          <a:noFill/>
+        </p:spPr>
+        <p:txBody>
+          <a:bodyPr wrap="none" rtlCol="0">
+            <a:spAutoFit/>
+          </a:bodyPr>
+          <a:lstStyle/>
+          <a:p>
+            <a:r>
+              <a:rPr lang="en-US" dirty="0"/>
+              <a:t>I decided to do some extra work.</a:t>
+            </a:r>
+            <a:endParaRPr lang="en-IL" dirty="0"/>
+          </a:p>
+        </p:txBody>
+      </p:sp>
+      <p:sp>
+        <p:nvSpPr>
+          <p:cNvPr id="24" name="TextBox 23">
+            <a:extLst>
+              <a:ext uri="{FF2B5EF4-FFF2-40B4-BE49-F238E27FC236}">
+                <a16:creationId xmlns:a16="http://schemas.microsoft.com/office/drawing/2014/main" id="{3C6E6C9E-7DF5-805C-B0A5-7DE4D6D113EB}"/>
+              </a:ext>
+            </a:extLst>
+          </p:cNvPr>
+          <p:cNvSpPr txBox="1"/>
+          <p:nvPr/>
+        </p:nvSpPr>
+        <p:spPr>
+          <a:xfrm>
+            <a:off x="2283903" y="4974401"/>
+            <a:ext cx="6094602" cy="923330"/>
+          </a:xfrm>
+          <a:prstGeom prst="rect">
+            <a:avLst/>
+          </a:prstGeom>
+          <a:noFill/>
+        </p:spPr>
+        <p:txBody>
+          <a:bodyPr wrap="square">
+            <a:spAutoFit/>
+          </a:bodyPr>
+          <a:lstStyle/>
+          <a:p>
+            <a:r>
+              <a:rPr lang="en-US" dirty="0"/>
+              <a:t>I wanted to improve the results, because the data was small, I thought about using Augmentation, unfortunately it didn't help much with the results.</a:t>
+            </a:r>
+            <a:endParaRPr lang="en-IL" dirty="0"/>
+          </a:p>
+        </p:txBody>
+      </p:sp>
     </p:spTree>
   </p:cSld>
   <p:clrMapOvr>
@@ -6542,29 +6448,7 @@
                 <a:ea typeface="+mj-ea"/>
                 <a:cs typeface="+mj-cs"/>
               </a:rPr>
-              <a:t> on different </a:t>
-            </a:r>
-            <a:r>
-              <a:rPr lang="en-US" sz="3200" kern="1200" dirty="0" err="1">
-                <a:solidFill>
-                  <a:schemeClr val="bg1"/>
-                </a:solidFill>
-                <a:latin typeface="+mj-lt"/>
-                <a:ea typeface="+mj-ea"/>
-                <a:cs typeface="+mj-cs"/>
-              </a:rPr>
-              <a:t>dostortions</a:t>
-            </a:r>
-            <a:r>
-              <a:rPr lang="en-US" sz="3200" kern="1200" dirty="0">
-                <a:solidFill>
-                  <a:schemeClr val="bg1"/>
-                </a:solidFill>
-                <a:latin typeface="+mj-lt"/>
-                <a:ea typeface="+mj-ea"/>
-                <a:cs typeface="+mj-cs"/>
-              </a:rPr>
-              <a:t> with</a:t>
+              <a:t> on different distortions with</a:t>
             </a:r>
             <a:r>
               <a:rPr lang="he-IL" sz="3200" kern="1200" dirty="0">
@@ -6597,7 +6481,7 @@
                 <a:ea typeface="+mj-ea"/>
                 <a:cs typeface="+mj-cs"/>
               </a:rPr>
-              <a:t> </a:t>
+              <a:t> ,</a:t>
             </a:r>
             <a:r>
               <a:rPr lang="en-US" sz="3200" dirty="0">
@@ -7400,6 +7284,41 @@
           </a:p>
         </p:txBody>
       </p:sp>
+      <p:sp>
+        <p:nvSpPr>
+          <p:cNvPr id="15" name="TextBox 14">
+            <a:extLst>
+              <a:ext uri="{FF2B5EF4-FFF2-40B4-BE49-F238E27FC236}">
+                <a16:creationId xmlns:a16="http://schemas.microsoft.com/office/drawing/2014/main" id="{52532892-14F8-12CF-BE42-EC86E4AC7916}"/>
+              </a:ext>
+            </a:extLst>
+          </p:cNvPr>
+          <p:cNvSpPr txBox="1"/>
+          <p:nvPr/>
+        </p:nvSpPr>
+        <p:spPr>
+          <a:xfrm>
+            <a:off x="2027619" y="5005183"/>
+            <a:ext cx="6094602" cy="369332"/>
+          </a:xfrm>
+          <a:prstGeom prst="rect">
+            <a:avLst/>
+          </a:prstGeom>
+          <a:noFill/>
+        </p:spPr>
+        <p:txBody>
+          <a:bodyPr wrap="square">
+            <a:spAutoFit/>
+          </a:bodyPr>
+          <a:lstStyle/>
+          <a:p>
+            <a:r>
+              <a:rPr lang="en-IL" dirty="0"/>
+              <a:t>Each fine tuning was performed on a different SNR</a:t>
+            </a:r>
+          </a:p>
+        </p:txBody>
+      </p:sp>
     </p:spTree>
   </p:cSld>
   <p:clrMapOvr>
@@ -8277,7 +8196,7 @@
               </a:defRPr>
             </a:pPr>
             <a:r>
-              <a:t>PROJECT NOTE</a:t>
+              <a:t>OVERVIEW</a:t>
             </a:r>
           </a:p>
         </p:txBody>
@@ -8313,7 +8232,7 @@
               </a:defRPr>
             </a:pPr>
             <a:r>
-              <a:t>Why this project uses brain MRI images</a:t>
+              <a:t>Distortions reduce reliability, so the project measures degradation and recovery.</a:t>
             </a:r>
           </a:p>
         </p:txBody>
@@ -8349,7 +8268,7 @@
               </a:defRPr>
             </a:pPr>
             <a:r>
-              <a:t>The selected data supports medical image-processing tasks better than some generic vision tasks.</a:t>
+              <a:t>The same experiment logic is repeated across super-resolution, CNN classification, and YOLO segmentation.</a:t>
             </a:r>
           </a:p>
         </p:txBody>
@@ -8421,7 +8340,7 @@
               </a:defRPr>
             </a:pPr>
             <a:r>
-              <a:t>02</a:t>
+              <a:t>03</a:t>
             </a:r>
           </a:p>
         </p:txBody>
@@ -8434,8 +8353,8 @@
         </p:nvSpPr>
         <p:spPr>
           <a:xfrm>
-            <a:off x="777240" y="1783080"/>
-            <a:ext cx="10607040" cy="3383280"/>
+            <a:off x="731520" y="1828800"/>
+            <a:ext cx="3246120" cy="2148840"/>
           </a:xfrm>
           <a:prstGeom prst="roundRect">
             <a:avLst/>
@@ -8480,8 +8399,8 @@
         </p:nvSpPr>
         <p:spPr>
           <a:xfrm>
-            <a:off x="1051560" y="2057400"/>
-            <a:ext cx="1828800" cy="365760"/>
+            <a:off x="960120" y="2084831"/>
+            <a:ext cx="2743200" cy="274320"/>
           </a:xfrm>
           <a:prstGeom prst="rect">
             <a:avLst/>
@@ -8495,7 +8414,125 @@
           <a:lstStyle/>
           <a:p>
             <a:pPr>
-              <a:defRPr sz="2200" b="1">
+              <a:defRPr sz="1700" b="1">
+                <a:solidFill>
+                  <a:srgbClr val="2666AC"/>
+                </a:solidFill>
+                <a:latin typeface="Aptos"/>
+              </a:defRPr>
+            </a:pPr>
+            <a:r>
+              <a:t>Super-resolution</a:t>
+            </a:r>
+          </a:p>
+        </p:txBody>
+      </p:sp>
+      <p:sp>
+        <p:nvSpPr>
+          <p:cNvPr id="9" name="TextBox 8"/>
+          <p:cNvSpPr txBox="1"/>
+          <p:nvPr/>
+        </p:nvSpPr>
+        <p:spPr>
+          <a:xfrm>
+            <a:off x="960120" y="2606040"/>
+            <a:ext cx="2606040" cy="502920"/>
+          </a:xfrm>
+          <a:prstGeom prst="rect">
+            <a:avLst/>
+          </a:prstGeom>
+          <a:noFill/>
+        </p:spPr>
+        <p:txBody>
+          <a:bodyPr wrap="none" lIns="18288" tIns="9144" rIns="18288" bIns="9144">
+            <a:spAutoFit/>
+          </a:bodyPr>
+          <a:lstStyle/>
+          <a:p>
+            <a:pPr>
+              <a:defRPr sz="1300" b="0">
+                <a:solidFill>
+                  <a:srgbClr val="182228"/>
+                </a:solidFill>
+                <a:latin typeface="Aptos"/>
+              </a:defRPr>
+            </a:pPr>
+            <a:r>
+              <a:t>PSNR after x2 downsampling</a:t>
+            </a:r>
+          </a:p>
+        </p:txBody>
+      </p:sp>
+      <p:sp>
+        <p:nvSpPr>
+          <p:cNvPr id="10" name="Rounded Rectangle 9"/>
+          <p:cNvSpPr/>
+          <p:nvPr/>
+        </p:nvSpPr>
+        <p:spPr>
+          <a:xfrm>
+            <a:off x="4526280" y="1828800"/>
+            <a:ext cx="3246120" cy="2148840"/>
+          </a:xfrm>
+          <a:prstGeom prst="roundRect">
+            <a:avLst/>
+          </a:prstGeom>
+          <a:solidFill>
+            <a:srgbClr val="FFFFFF"/>
+          </a:solidFill>
+          <a:ln w="8890">
+            <a:solidFill>
+              <a:srgbClr val="D2DBDB"/>
+            </a:solidFill>
+          </a:ln>
+        </p:spPr>
+        <p:style>
+          <a:lnRef idx="1">
+            <a:schemeClr val="accent1"/>
+          </a:lnRef>
+          <a:fillRef idx="3">
+            <a:schemeClr val="accent1"/>
+          </a:fillRef>
+          <a:effectRef idx="2">
+            <a:schemeClr val="accent1"/>
+          </a:effectRef>
+          <a:fontRef idx="minor">
+            <a:schemeClr val="lt1"/>
+          </a:fontRef>
+        </p:style>
+        <p:txBody>
+          <a:bodyPr rtlCol="0" anchor="ctr"/>
+          <a:lstStyle/>
+          <a:p>
+            <a:pPr algn="ctr"/>
+            <a:endParaRPr/>
+          </a:p>
+        </p:txBody>
+      </p:sp>
+      <p:sp>
+        <p:nvSpPr>
+          <p:cNvPr id="11" name="TextBox 10"/>
+          <p:cNvSpPr txBox="1"/>
+          <p:nvPr/>
+        </p:nvSpPr>
+        <p:spPr>
+          <a:xfrm>
+            <a:off x="4754880" y="2084831"/>
+            <a:ext cx="2743200" cy="274320"/>
+          </a:xfrm>
+          <a:prstGeom prst="rect">
+            <a:avLst/>
+          </a:prstGeom>
+          <a:noFill/>
+        </p:spPr>
+        <p:txBody>
+          <a:bodyPr wrap="none" lIns="18288" tIns="9144" rIns="18288" bIns="9144">
+            <a:spAutoFit/>
+          </a:bodyPr>
+          <a:lstStyle/>
+          <a:p>
+            <a:pPr>
+              <a:defRPr sz="1700" b="1">
                 <a:solidFill>
                   <a:srgbClr val="008074"/>
                 </a:solidFill>
@@ -8503,21 +8540,175 @@
               </a:defRPr>
             </a:pPr>
             <a:r>
-              <a:t>הערה</a:t>
-            </a:r>
-          </a:p>
-        </p:txBody>
-      </p:sp>
-      <p:sp>
-        <p:nvSpPr>
-          <p:cNvPr id="9" name="TextBox 8"/>
-          <p:cNvSpPr txBox="1"/>
-          <p:nvPr/>
-        </p:nvSpPr>
-        <p:spPr>
-          <a:xfrm>
-            <a:off x="1051560" y="2606040"/>
-            <a:ext cx="9692640" cy="1737360"/>
+              <a:t>CNN</a:t>
+            </a:r>
+          </a:p>
+        </p:txBody>
+      </p:sp>
+      <p:sp>
+        <p:nvSpPr>
+          <p:cNvPr id="12" name="TextBox 11"/>
+          <p:cNvSpPr txBox="1"/>
+          <p:nvPr/>
+        </p:nvSpPr>
+        <p:spPr>
+          <a:xfrm>
+            <a:off x="4754880" y="2606040"/>
+            <a:ext cx="2606040" cy="502920"/>
+          </a:xfrm>
+          <a:prstGeom prst="rect">
+            <a:avLst/>
+          </a:prstGeom>
+          <a:noFill/>
+        </p:spPr>
+        <p:txBody>
+          <a:bodyPr wrap="none" lIns="18288" tIns="9144" rIns="18288" bIns="9144">
+            <a:spAutoFit/>
+          </a:bodyPr>
+          <a:lstStyle/>
+          <a:p>
+            <a:pPr>
+              <a:defRPr sz="1300" b="0">
+                <a:solidFill>
+                  <a:srgbClr val="182228"/>
+                </a:solidFill>
+                <a:latin typeface="Aptos"/>
+              </a:defRPr>
+            </a:pPr>
+            <a:r>
+              <a:t>total true percent on tumor/no-tumor</a:t>
+            </a:r>
+          </a:p>
+        </p:txBody>
+      </p:sp>
+      <p:sp>
+        <p:nvSpPr>
+          <p:cNvPr id="13" name="Rounded Rectangle 12"/>
+          <p:cNvSpPr/>
+          <p:nvPr/>
+        </p:nvSpPr>
+        <p:spPr>
+          <a:xfrm>
+            <a:off x="8321040" y="1828800"/>
+            <a:ext cx="3246120" cy="2148840"/>
+          </a:xfrm>
+          <a:prstGeom prst="roundRect">
+            <a:avLst/>
+          </a:prstGeom>
+          <a:solidFill>
+            <a:srgbClr val="FFFFFF"/>
+          </a:solidFill>
+          <a:ln w="8890">
+            <a:solidFill>
+              <a:srgbClr val="D2DBDB"/>
+            </a:solidFill>
+          </a:ln>
+        </p:spPr>
+        <p:style>
+          <a:lnRef idx="1">
+            <a:schemeClr val="accent1"/>
+          </a:lnRef>
+          <a:fillRef idx="3">
+            <a:schemeClr val="accent1"/>
+          </a:fillRef>
+          <a:effectRef idx="2">
+            <a:schemeClr val="accent1"/>
+          </a:effectRef>
+          <a:fontRef idx="minor">
+            <a:schemeClr val="lt1"/>
+          </a:fontRef>
+        </p:style>
+        <p:txBody>
+          <a:bodyPr rtlCol="0" anchor="ctr"/>
+          <a:lstStyle/>
+          <a:p>
+            <a:pPr algn="ctr"/>
+            <a:endParaRPr/>
+          </a:p>
+        </p:txBody>
+      </p:sp>
+      <p:sp>
+        <p:nvSpPr>
+          <p:cNvPr id="14" name="TextBox 13"/>
+          <p:cNvSpPr txBox="1"/>
+          <p:nvPr/>
+        </p:nvSpPr>
+        <p:spPr>
+          <a:xfrm>
+            <a:off x="8549640" y="2084831"/>
+            <a:ext cx="2743200" cy="274320"/>
+          </a:xfrm>
+          <a:prstGeom prst="rect">
+            <a:avLst/>
+          </a:prstGeom>
+          <a:noFill/>
+        </p:spPr>
+        <p:txBody>
+          <a:bodyPr wrap="none" lIns="18288" tIns="9144" rIns="18288" bIns="9144">
+            <a:spAutoFit/>
+          </a:bodyPr>
+          <a:lstStyle/>
+          <a:p>
+            <a:pPr>
+              <a:defRPr sz="1700" b="1">
+                <a:solidFill>
+                  <a:srgbClr val="B2483E"/>
+                </a:solidFill>
+                <a:latin typeface="Aptos"/>
+              </a:defRPr>
+            </a:pPr>
+            <a:r>
+              <a:t>YOLO</a:t>
+            </a:r>
+          </a:p>
+        </p:txBody>
+      </p:sp>
+      <p:sp>
+        <p:nvSpPr>
+          <p:cNvPr id="15" name="TextBox 14"/>
+          <p:cNvSpPr txBox="1"/>
+          <p:nvPr/>
+        </p:nvSpPr>
+        <p:spPr>
+          <a:xfrm>
+            <a:off x="8549640" y="2606040"/>
+            <a:ext cx="2606040" cy="502920"/>
+          </a:xfrm>
+          <a:prstGeom prst="rect">
+            <a:avLst/>
+          </a:prstGeom>
+          <a:noFill/>
+        </p:spPr>
+        <p:txBody>
+          <a:bodyPr wrap="none" lIns="18288" tIns="9144" rIns="18288" bIns="9144">
+            <a:spAutoFit/>
+          </a:bodyPr>
+          <a:lstStyle/>
+          <a:p>
+            <a:pPr>
+              <a:defRPr sz="1300" b="0">
+                <a:solidFill>
+                  <a:srgbClr val="182228"/>
+                </a:solidFill>
+                <a:latin typeface="Aptos"/>
+              </a:defRPr>
+            </a:pPr>
+            <a:r>
+              <a:t>mask mAP50 on tumor segmentation</a:t>
+            </a:r>
+          </a:p>
+        </p:txBody>
+      </p:sp>
+      <p:sp>
+        <p:nvSpPr>
+          <p:cNvPr id="16" name="TextBox 15"/>
+          <p:cNvSpPr txBox="1"/>
+          <p:nvPr/>
+        </p:nvSpPr>
+        <p:spPr>
+          <a:xfrm>
+            <a:off x="914400" y="4800600"/>
+            <a:ext cx="10332720" cy="411480"/>
           </a:xfrm>
           <a:prstGeom prst="rect">
             <a:avLst/>
@@ -8534,7 +8725,7 @@
               <a:spcAft>
                 <a:spcPts val="800"/>
               </a:spcAft>
-              <a:defRPr sz="1600">
+              <a:defRPr sz="1500">
                 <a:solidFill>
                   <a:srgbClr val="182228"/>
                 </a:solidFill>
@@ -8542,39 +8733,50 @@
               </a:defRPr>
             </a:pPr>
             <a:r>
-              <a:t>בחרנו לעסוק בסרטן מוח משום שהדאטה מתאים למשימות של עיבוד תמונה וראייה ממוחשבת.</a:t>
-            </a:r>
-          </a:p>
-          <a:p>
-            <a:pPr>
-              <a:spcAft>
-                <a:spcPts val="800"/>
-              </a:spcAft>
-              <a:defRPr sz="1600">
-                <a:solidFill>
-                  <a:srgbClr val="182228"/>
-                </a:solidFill>
-                <a:latin typeface="Aptos"/>
-              </a:defRPr>
-            </a:pPr>
-            <a:r>
-              <a:t>בפרויקט נבדק איך עיוותים פוגעים בתמונה ובמודלים, ואיך שחזור או אימון נוסף יכולים לשפר את התוצאות.</a:t>
-            </a:r>
-          </a:p>
-          <a:p>
-            <a:pPr>
-              <a:spcAft>
-                <a:spcPts val="800"/>
-              </a:spcAft>
-              <a:defRPr sz="1600">
-                <a:solidFill>
-                  <a:srgbClr val="182228"/>
-                </a:solidFill>
-                <a:latin typeface="Aptos"/>
-              </a:defRPr>
-            </a:pPr>
-            <a:r>
-              <a:t>המטרה היא לא אבחון רפואי, אלא בדיקת עמידות של אלגוריתמים על תמונות MRI.</a:t>
+              <a:t>Experiment path: clean baseline → distorted input → restored input → fine-tuned model when relevant.</a:t>
+            </a:r>
+          </a:p>
+        </p:txBody>
+      </p:sp>
+      <p:sp>
+        <p:nvSpPr>
+          <p:cNvPr id="18" name="TextBox 17">
+            <a:extLst>
+              <a:ext uri="{FF2B5EF4-FFF2-40B4-BE49-F238E27FC236}">
+                <a16:creationId xmlns:a16="http://schemas.microsoft.com/office/drawing/2014/main" id="{31F738C3-C3D8-A9EB-6B87-6C3EAE485333}"/>
+              </a:ext>
+            </a:extLst>
+          </p:cNvPr>
+          <p:cNvSpPr txBox="1"/>
+          <p:nvPr/>
+        </p:nvSpPr>
+        <p:spPr>
+          <a:xfrm>
+            <a:off x="914400" y="5191327"/>
+            <a:ext cx="6094602" cy="1200329"/>
+          </a:xfrm>
+          <a:prstGeom prst="rect">
+            <a:avLst/>
+          </a:prstGeom>
+          <a:noFill/>
+        </p:spPr>
+        <p:txBody>
+          <a:bodyPr wrap="square">
+            <a:spAutoFit/>
+          </a:bodyPr>
+          <a:lstStyle/>
+          <a:p>
+            <a:r>
+              <a:rPr lang="en-IL" dirty="0"/>
+              <a:t>Note: </a:t>
+            </a:r>
+            <a:r>
+              <a:rPr lang="en-US" dirty="0"/>
+              <a:t>I</a:t>
+            </a:r>
+            <a:r>
+              <a:rPr lang="en-IL" dirty="0"/>
+              <a:t> chose the super-resolution task because it is one of the few low-level tasks that can be adapted to MRI data. Although it is not the most suitable for the task in the context of noise performance.</a:t>
             </a:r>
           </a:p>
         </p:txBody>
@@ -9406,503 +9608,6 @@
 </p:sld>
 </file>
 
-<file path=ppt/slides/slide22.xml><?xml version="1.0" encoding="utf-8"?>
-<p:sld xmlns:a="http://schemas.openxmlformats.org/drawingml/2006/main" xmlns:p="http://schemas.openxmlformats.org/presentationml/2006/main" xmlns:r="http://schemas.openxmlformats.org/officeDocument/2006/relationships">
-  <p:cSld>
-    <p:bg>
-      <p:bgPr>
-        <a:solidFill>
-          <a:srgbClr val="F7F9F7"/>
-        </a:solidFill>
-        <a:effectLst/>
-      </p:bgPr>
-    </p:bg>
-    <p:spTree>
-      <p:nvGrpSpPr>
-        <p:cNvPr id="1" name=""/>
-        <p:cNvGrpSpPr/>
-        <p:nvPr/>
-      </p:nvGrpSpPr>
-      <p:grpSpPr/>
-      <p:sp>
-        <p:nvSpPr>
-          <p:cNvPr id="2" name="TextBox 1"/>
-          <p:cNvSpPr txBox="1"/>
-          <p:nvPr/>
-        </p:nvSpPr>
-        <p:spPr>
-          <a:xfrm>
-            <a:off x="502920" y="320040"/>
-            <a:ext cx="4937760" cy="256032"/>
-          </a:xfrm>
-          <a:prstGeom prst="rect">
-            <a:avLst/>
-          </a:prstGeom>
-          <a:noFill/>
-        </p:spPr>
-        <p:txBody>
-          <a:bodyPr wrap="square">
-            <a:spAutoFit/>
-          </a:bodyPr>
-          <a:lstStyle/>
-          <a:p>
-            <a:pPr>
-              <a:defRPr sz="900" b="1">
-                <a:solidFill>
-                  <a:srgbClr val="008074"/>
-                </a:solidFill>
-                <a:latin typeface="Aptos"/>
-              </a:defRPr>
-            </a:pPr>
-            <a:r>
-              <a:t>TASK 1 EXTRA</a:t>
-            </a:r>
-          </a:p>
-        </p:txBody>
-      </p:sp>
-      <p:sp>
-        <p:nvSpPr>
-          <p:cNvPr id="3" name="TextBox 2"/>
-          <p:cNvSpPr txBox="1"/>
-          <p:nvPr/>
-        </p:nvSpPr>
-        <p:spPr>
-          <a:xfrm>
-            <a:off x="502920" y="640080"/>
-            <a:ext cx="9966960" cy="566928"/>
-          </a:xfrm>
-          <a:prstGeom prst="rect">
-            <a:avLst/>
-          </a:prstGeom>
-          <a:noFill/>
-        </p:spPr>
-        <p:txBody>
-          <a:bodyPr wrap="square">
-            <a:spAutoFit/>
-          </a:bodyPr>
-          <a:lstStyle/>
-          <a:p>
-            <a:pPr>
-              <a:defRPr sz="2300" b="1">
-                <a:solidFill>
-                  <a:srgbClr val="182228"/>
-                </a:solidFill>
-                <a:latin typeface="Aptos"/>
-              </a:defRPr>
-            </a:pPr>
-            <a:r>
-              <a:t>Dividing the clean image by more than x2 quickly lowers Lanczos quality.</a:t>
-            </a:r>
-          </a:p>
-        </p:txBody>
-      </p:sp>
-      <p:sp>
-        <p:nvSpPr>
-          <p:cNvPr id="4" name="TextBox 3"/>
-          <p:cNvSpPr txBox="1"/>
-          <p:nvPr/>
-        </p:nvSpPr>
-        <p:spPr>
-          <a:xfrm>
-            <a:off x="521207" y="1225296"/>
-            <a:ext cx="9875520" cy="292608"/>
-          </a:xfrm>
-          <a:prstGeom prst="rect">
-            <a:avLst/>
-          </a:prstGeom>
-          <a:noFill/>
-        </p:spPr>
-        <p:txBody>
-          <a:bodyPr wrap="square">
-            <a:spAutoFit/>
-          </a:bodyPr>
-          <a:lstStyle/>
-          <a:p>
-            <a:pPr>
-              <a:defRPr sz="1050" b="0">
-                <a:solidFill>
-                  <a:srgbClr val="56636B"/>
-                </a:solidFill>
-                <a:latin typeface="Aptos"/>
-              </a:defRPr>
-            </a:pPr>
-            <a:r>
-              <a:t>The clean MRI image was downsampled by stronger factors and reconstructed back to 224x224 using Lanczos.</a:t>
-            </a:r>
-          </a:p>
-        </p:txBody>
-      </p:sp>
-      <p:sp>
-        <p:nvSpPr>
-          <p:cNvPr id="5" name="TextBox 4"/>
-          <p:cNvSpPr txBox="1"/>
-          <p:nvPr/>
-        </p:nvSpPr>
-        <p:spPr>
-          <a:xfrm>
-            <a:off x="9692640" y="347472"/>
-            <a:ext cx="1920240" cy="228600"/>
-          </a:xfrm>
-          <a:prstGeom prst="rect">
-            <a:avLst/>
-          </a:prstGeom>
-          <a:noFill/>
-        </p:spPr>
-        <p:txBody>
-          <a:bodyPr wrap="square">
-            <a:spAutoFit/>
-          </a:bodyPr>
-          <a:lstStyle/>
-          <a:p>
-            <a:pPr algn="r">
-              <a:defRPr sz="850" b="0">
-                <a:solidFill>
-                  <a:srgbClr val="56636B"/>
-                </a:solidFill>
-                <a:latin typeface="Aptos"/>
-              </a:defRPr>
-            </a:pPr>
-            <a:r>
-              <a:t>Brain MRI robustness</a:t>
-            </a:r>
-          </a:p>
-        </p:txBody>
-      </p:sp>
-      <p:sp>
-        <p:nvSpPr>
-          <p:cNvPr id="6" name="Rounded Rectangle 5"/>
-          <p:cNvSpPr/>
-          <p:nvPr/>
-        </p:nvSpPr>
-        <p:spPr>
-          <a:xfrm>
-            <a:off x="594360" y="1691640"/>
-            <a:ext cx="5715000" cy="4389120"/>
-          </a:xfrm>
-          <a:prstGeom prst="roundRect">
-            <a:avLst/>
-          </a:prstGeom>
-          <a:solidFill>
-            <a:srgbClr val="FFFFFF"/>
-          </a:solidFill>
-          <a:ln w="8890">
-            <a:solidFill>
-              <a:srgbClr val="D2DBDB"/>
-            </a:solidFill>
-          </a:ln>
-        </p:spPr>
-        <p:style>
-          <a:lnRef idx="1">
-            <a:schemeClr val="accent1"/>
-          </a:lnRef>
-          <a:fillRef idx="3">
-            <a:schemeClr val="accent1"/>
-          </a:fillRef>
-          <a:effectRef idx="2">
-            <a:schemeClr val="accent1"/>
-          </a:effectRef>
-          <a:fontRef idx="minor">
-            <a:schemeClr val="lt1"/>
-          </a:fontRef>
-        </p:style>
-        <p:txBody>
-          <a:bodyPr rtlCol="0" anchor="ctr"/>
-          <a:lstStyle/>
-          <a:p>
-            <a:pPr algn="ctr"/>
-          </a:p>
-        </p:txBody>
-      </p:sp>
-      <p:pic>
-        <p:nvPicPr>
-          <p:cNvPr id="7" name="Picture 6" descr="lanczos_psnr_by_downscale_factor.png"/>
-          <p:cNvPicPr>
-            <a:picLocks noChangeAspect="1"/>
-          </p:cNvPicPr>
-          <p:nvPr/>
-        </p:nvPicPr>
-        <p:blipFill>
-          <a:blip r:embed="rId2"/>
-          <a:stretch>
-            <a:fillRect/>
-          </a:stretch>
-        </p:blipFill>
-        <p:spPr>
-          <a:xfrm>
-            <a:off x="822960" y="2326132"/>
-            <a:ext cx="5257800" cy="3037840"/>
-          </a:xfrm>
-          <a:prstGeom prst="rect">
-            <a:avLst/>
-          </a:prstGeom>
-        </p:spPr>
-      </p:pic>
-      <p:sp>
-        <p:nvSpPr>
-          <p:cNvPr id="8" name="Rounded Rectangle 7"/>
-          <p:cNvSpPr/>
-          <p:nvPr/>
-        </p:nvSpPr>
-        <p:spPr>
-          <a:xfrm>
-            <a:off x="6629400" y="1691640"/>
-            <a:ext cx="4892040" cy="2331720"/>
-          </a:xfrm>
-          <a:prstGeom prst="roundRect">
-            <a:avLst/>
-          </a:prstGeom>
-          <a:solidFill>
-            <a:srgbClr val="FFFFFF"/>
-          </a:solidFill>
-          <a:ln w="8890">
-            <a:solidFill>
-              <a:srgbClr val="D2DBDB"/>
-            </a:solidFill>
-          </a:ln>
-        </p:spPr>
-        <p:style>
-          <a:lnRef idx="1">
-            <a:schemeClr val="accent1"/>
-          </a:lnRef>
-          <a:fillRef idx="3">
-            <a:schemeClr val="accent1"/>
-          </a:fillRef>
-          <a:effectRef idx="2">
-            <a:schemeClr val="accent1"/>
-          </a:effectRef>
-          <a:fontRef idx="minor">
-            <a:schemeClr val="lt1"/>
-          </a:fontRef>
-        </p:style>
-        <p:txBody>
-          <a:bodyPr rtlCol="0" anchor="ctr"/>
-          <a:lstStyle/>
-          <a:p>
-            <a:pPr algn="ctr"/>
-          </a:p>
-        </p:txBody>
-      </p:sp>
-      <p:pic>
-        <p:nvPicPr>
-          <p:cNvPr id="9" name="Picture 8" descr="lanczos_extra_downscale_grid.png"/>
-          <p:cNvPicPr>
-            <a:picLocks noChangeAspect="1"/>
-          </p:cNvPicPr>
-          <p:nvPr/>
-        </p:nvPicPr>
-        <p:blipFill>
-          <a:blip r:embed="rId3"/>
-          <a:stretch>
-            <a:fillRect/>
-          </a:stretch>
-        </p:blipFill>
-        <p:spPr>
-          <a:xfrm>
-            <a:off x="7533513" y="1874519"/>
-            <a:ext cx="3092958" cy="1874519"/>
-          </a:xfrm>
-          <a:prstGeom prst="rect">
-            <a:avLst/>
-          </a:prstGeom>
-        </p:spPr>
-      </p:pic>
-      <p:sp>
-        <p:nvSpPr>
-          <p:cNvPr id="10" name="Rounded Rectangle 9"/>
-          <p:cNvSpPr/>
-          <p:nvPr/>
-        </p:nvSpPr>
-        <p:spPr>
-          <a:xfrm>
-            <a:off x="6629400" y="4251960"/>
-            <a:ext cx="4892040" cy="1417320"/>
-          </a:xfrm>
-          <a:prstGeom prst="roundRect">
-            <a:avLst/>
-          </a:prstGeom>
-          <a:solidFill>
-            <a:srgbClr val="F1F5F5"/>
-          </a:solidFill>
-          <a:ln w="8890">
-            <a:solidFill>
-              <a:srgbClr val="D2DBDB"/>
-            </a:solidFill>
-          </a:ln>
-        </p:spPr>
-        <p:style>
-          <a:lnRef idx="1">
-            <a:schemeClr val="accent1"/>
-          </a:lnRef>
-          <a:fillRef idx="3">
-            <a:schemeClr val="accent1"/>
-          </a:fillRef>
-          <a:effectRef idx="2">
-            <a:schemeClr val="accent1"/>
-          </a:effectRef>
-          <a:fontRef idx="minor">
-            <a:schemeClr val="lt1"/>
-          </a:fontRef>
-        </p:style>
-        <p:txBody>
-          <a:bodyPr rtlCol="0" anchor="ctr"/>
-          <a:lstStyle/>
-          <a:p>
-            <a:pPr algn="ctr"/>
-          </a:p>
-        </p:txBody>
-      </p:sp>
-      <p:sp>
-        <p:nvSpPr>
-          <p:cNvPr id="11" name="TextBox 10"/>
-          <p:cNvSpPr txBox="1"/>
-          <p:nvPr/>
-        </p:nvSpPr>
-        <p:spPr>
-          <a:xfrm>
-            <a:off x="6876288" y="4462272"/>
-            <a:ext cx="2011680" cy="228600"/>
-          </a:xfrm>
-          <a:prstGeom prst="rect">
-            <a:avLst/>
-          </a:prstGeom>
-          <a:noFill/>
-        </p:spPr>
-        <p:txBody>
-          <a:bodyPr wrap="square">
-            <a:spAutoFit/>
-          </a:bodyPr>
-          <a:lstStyle/>
-          <a:p>
-            <a:pPr>
-              <a:defRPr sz="1400" b="1">
-                <a:solidFill>
-                  <a:srgbClr val="2666AC"/>
-                </a:solidFill>
-                <a:latin typeface="Aptos"/>
-              </a:defRPr>
-            </a:pPr>
-            <a:r>
-              <a:t>What the graph shows</a:t>
-            </a:r>
-          </a:p>
-        </p:txBody>
-      </p:sp>
-      <p:sp>
-        <p:nvSpPr>
-          <p:cNvPr id="12" name="TextBox 11"/>
-          <p:cNvSpPr txBox="1"/>
-          <p:nvPr/>
-        </p:nvSpPr>
-        <p:spPr>
-          <a:xfrm>
-            <a:off x="6876288" y="4828032"/>
-            <a:ext cx="4160520" cy="475488"/>
-          </a:xfrm>
-          <a:prstGeom prst="rect">
-            <a:avLst/>
-          </a:prstGeom>
-          <a:noFill/>
-        </p:spPr>
-        <p:txBody>
-          <a:bodyPr wrap="square">
-            <a:spAutoFit/>
-          </a:bodyPr>
-          <a:lstStyle/>
-          <a:p>
-            <a:pPr>
-              <a:defRPr sz="1100" b="0">
-                <a:solidFill>
-                  <a:srgbClr val="182228"/>
-                </a:solidFill>
-                <a:latin typeface="Aptos"/>
-              </a:defRPr>
-            </a:pPr>
-            <a:r>
-              <a:t>PSNR drops from 29.62 at x2 to 16.72 at x10. Stronger downsampling removes detail that Lanczos cannot fully reconstruct.</a:t>
-            </a:r>
-          </a:p>
-        </p:txBody>
-      </p:sp>
-      <p:sp>
-        <p:nvSpPr>
-          <p:cNvPr id="13" name="TextBox 12"/>
-          <p:cNvSpPr txBox="1"/>
-          <p:nvPr/>
-        </p:nvSpPr>
-        <p:spPr>
-          <a:xfrm>
-            <a:off x="6876288" y="5376672"/>
-            <a:ext cx="3749039" cy="182880"/>
-          </a:xfrm>
-          <a:prstGeom prst="rect">
-            <a:avLst/>
-          </a:prstGeom>
-          <a:noFill/>
-        </p:spPr>
-        <p:txBody>
-          <a:bodyPr wrap="square">
-            <a:spAutoFit/>
-          </a:bodyPr>
-          <a:lstStyle/>
-          <a:p>
-            <a:pPr>
-              <a:defRPr sz="950" b="0">
-                <a:solidFill>
-                  <a:srgbClr val="56636B"/>
-                </a:solidFill>
-                <a:latin typeface="Aptos"/>
-              </a:defRPr>
-            </a:pPr>
-            <a:r>
-              <a:t>Main metric: PSNR, higher is better.</a:t>
-            </a:r>
-          </a:p>
-        </p:txBody>
-      </p:sp>
-      <p:sp>
-        <p:nvSpPr>
-          <p:cNvPr id="14" name="TextBox 13"/>
-          <p:cNvSpPr txBox="1"/>
-          <p:nvPr/>
-        </p:nvSpPr>
-        <p:spPr>
-          <a:xfrm>
-            <a:off x="11292840" y="6446520"/>
-            <a:ext cx="411480" cy="182880"/>
-          </a:xfrm>
-          <a:prstGeom prst="rect">
-            <a:avLst/>
-          </a:prstGeom>
-          <a:noFill/>
-        </p:spPr>
-        <p:txBody>
-          <a:bodyPr wrap="square">
-            <a:spAutoFit/>
-          </a:bodyPr>
-          <a:lstStyle/>
-          <a:p>
-            <a:pPr algn="r">
-              <a:defRPr sz="800" b="0">
-                <a:solidFill>
-                  <a:srgbClr val="56636B"/>
-                </a:solidFill>
-                <a:latin typeface="Aptos"/>
-              </a:defRPr>
-            </a:pPr>
-            <a:r>
-              <a:t>12</a:t>
-            </a:r>
-          </a:p>
-        </p:txBody>
-      </p:sp>
-    </p:spTree>
-  </p:cSld>
-  <p:clrMapOvr>
-    <a:masterClrMapping/>
-  </p:clrMapOvr>
-</p:sld>
-</file>
-
 <file path=ppt/slides/slide3.xml><?xml version="1.0" encoding="utf-8"?>
 <p:sld xmlns:a="http://schemas.openxmlformats.org/drawingml/2006/main" xmlns:r="http://schemas.openxmlformats.org/officeDocument/2006/relationships" xmlns:p="http://schemas.openxmlformats.org/presentationml/2006/main">
   <p:cSld>
@@ -9959,7 +9664,7 @@
               </a:defRPr>
             </a:pPr>
             <a:r>
-              <a:t>OVERVIEW</a:t>
+              <a:t>EXPERIMENT DESIGN</a:t>
             </a:r>
           </a:p>
         </p:txBody>
@@ -9995,7 +9700,7 @@
               </a:defRPr>
             </a:pPr>
             <a:r>
-              <a:t>Distortions reduce reliability, so the project measures degradation and recovery.</a:t>
+              <a:t>Every task uses the same robustness question.</a:t>
             </a:r>
           </a:p>
         </p:txBody>
@@ -10031,7 +9736,7 @@
               </a:defRPr>
             </a:pPr>
             <a:r>
-              <a:t>The same experiment logic is repeated across super-resolution, CNN classification, and YOLO segmentation.</a:t>
+              <a:t>How much does distortion hurt, and which improvement helps recover performance?</a:t>
             </a:r>
           </a:p>
         </p:txBody>
@@ -10103,27 +9808,114 @@
               </a:defRPr>
             </a:pPr>
             <a:r>
-              <a:t>03</a:t>
-            </a:r>
-          </a:p>
-        </p:txBody>
-      </p:sp>
-      <p:sp>
-        <p:nvSpPr>
-          <p:cNvPr id="7" name="Rounded Rectangle 6"/>
+              <a:t>04</a:t>
+            </a:r>
+          </a:p>
+        </p:txBody>
+      </p:sp>
+      <p:sp>
+        <p:nvSpPr>
+          <p:cNvPr id="7" name="TextBox 6"/>
+          <p:cNvSpPr txBox="1"/>
+          <p:nvPr/>
+        </p:nvSpPr>
+        <p:spPr>
+          <a:xfrm>
+            <a:off x="777240" y="1828800"/>
+            <a:ext cx="4754880" cy="3200400"/>
+          </a:xfrm>
+          <a:prstGeom prst="rect">
+            <a:avLst/>
+          </a:prstGeom>
+          <a:noFill/>
+        </p:spPr>
+        <p:txBody>
+          <a:bodyPr wrap="square">
+            <a:spAutoFit/>
+          </a:bodyPr>
+          <a:lstStyle/>
+          <a:p>
+            <a:pPr>
+              <a:spcAft>
+                <a:spcPts val="800"/>
+              </a:spcAft>
+              <a:defRPr sz="1500">
+                <a:solidFill>
+                  <a:srgbClr val="182228"/>
+                </a:solidFill>
+                <a:latin typeface="Aptos"/>
+              </a:defRPr>
+            </a:pPr>
+            <a:r>
+              <a:t>Data 1: Kaggle tumor/no-tumor classification images.</a:t>
+            </a:r>
+          </a:p>
+          <a:p>
+            <a:pPr>
+              <a:spcAft>
+                <a:spcPts val="800"/>
+              </a:spcAft>
+              <a:defRPr sz="1500">
+                <a:solidFill>
+                  <a:srgbClr val="182228"/>
+                </a:solidFill>
+                <a:latin typeface="Aptos"/>
+              </a:defRPr>
+            </a:pPr>
+            <a:r>
+              <a:t>Data 2: MRI tumor segmentation masks converted to YOLO format.</a:t>
+            </a:r>
+          </a:p>
+          <a:p>
+            <a:pPr>
+              <a:spcAft>
+                <a:spcPts val="800"/>
+              </a:spcAft>
+              <a:defRPr sz="1500">
+                <a:solidFill>
+                  <a:srgbClr val="182228"/>
+                </a:solidFill>
+                <a:latin typeface="Aptos"/>
+              </a:defRPr>
+            </a:pPr>
+            <a:r>
+              <a:t>Distortions: gaussian noise, salt-and-pepper, gaussian blur, and YOLO brightness/contrast.</a:t>
+            </a:r>
+          </a:p>
+          <a:p>
+            <a:pPr>
+              <a:spcAft>
+                <a:spcPts val="800"/>
+              </a:spcAft>
+              <a:defRPr sz="1500">
+                <a:solidFill>
+                  <a:srgbClr val="182228"/>
+                </a:solidFill>
+                <a:latin typeface="Aptos"/>
+              </a:defRPr>
+            </a:pPr>
+            <a:r>
+              <a:t>Improvement: restoration pre-processing and fine-tuning for learning-based models.</a:t>
+            </a:r>
+          </a:p>
+        </p:txBody>
+      </p:sp>
+      <p:sp>
+        <p:nvSpPr>
+          <p:cNvPr id="8" name="Rounded Rectangle 7"/>
           <p:cNvSpPr/>
           <p:nvPr/>
         </p:nvSpPr>
         <p:spPr>
           <a:xfrm>
-            <a:off x="731520" y="1828800"/>
-            <a:ext cx="3246120" cy="2148840"/>
+            <a:off x="6080760" y="1828800"/>
+            <a:ext cx="4937760" cy="3108960"/>
           </a:xfrm>
           <a:prstGeom prst="roundRect">
             <a:avLst/>
           </a:prstGeom>
           <a:solidFill>
-            <a:srgbClr val="FFFFFF"/>
+            <a:srgbClr val="F5F8F8"/>
           </a:solidFill>
           <a:ln w="8890">
             <a:solidFill>
@@ -10156,14 +9948,14 @@
       </p:sp>
       <p:sp>
         <p:nvSpPr>
-          <p:cNvPr id="8" name="TextBox 7"/>
-          <p:cNvSpPr txBox="1"/>
-          <p:nvPr/>
-        </p:nvSpPr>
-        <p:spPr>
-          <a:xfrm>
-            <a:off x="960120" y="2084831"/>
-            <a:ext cx="2743200" cy="274320"/>
+          <p:cNvPr id="9" name="TextBox 8"/>
+          <p:cNvSpPr txBox="1"/>
+          <p:nvPr/>
+        </p:nvSpPr>
+        <p:spPr>
+          <a:xfrm>
+            <a:off x="6400800" y="2148840"/>
+            <a:ext cx="1554480" cy="228600"/>
           </a:xfrm>
           <a:prstGeom prst="rect">
             <a:avLst/>
@@ -10177,7 +9969,7 @@
           <a:lstStyle/>
           <a:p>
             <a:pPr>
-              <a:defRPr sz="1700" b="1">
+              <a:defRPr sz="1400" b="1">
                 <a:solidFill>
                   <a:srgbClr val="2666AC"/>
                 </a:solidFill>
@@ -10185,21 +9977,21 @@
               </a:defRPr>
             </a:pPr>
             <a:r>
-              <a:t>Super-resolution</a:t>
-            </a:r>
-          </a:p>
-        </p:txBody>
-      </p:sp>
-      <p:sp>
-        <p:nvSpPr>
-          <p:cNvPr id="9" name="TextBox 8"/>
-          <p:cNvSpPr txBox="1"/>
-          <p:nvPr/>
-        </p:nvSpPr>
-        <p:spPr>
-          <a:xfrm>
-            <a:off x="960120" y="2606040"/>
-            <a:ext cx="2606040" cy="502920"/>
+              <a:t>Clean</a:t>
+            </a:r>
+          </a:p>
+        </p:txBody>
+      </p:sp>
+      <p:sp>
+        <p:nvSpPr>
+          <p:cNvPr id="10" name="TextBox 9"/>
+          <p:cNvSpPr txBox="1"/>
+          <p:nvPr/>
+        </p:nvSpPr>
+        <p:spPr>
+          <a:xfrm>
+            <a:off x="8046720" y="2148840"/>
+            <a:ext cx="2560320" cy="228600"/>
           </a:xfrm>
           <a:prstGeom prst="rect">
             <a:avLst/>
@@ -10221,54 +10013,8 @@
               </a:defRPr>
             </a:pPr>
             <a:r>
-              <a:t>PSNR after x2 downsampling</a:t>
-            </a:r>
-          </a:p>
-        </p:txBody>
-      </p:sp>
-      <p:sp>
-        <p:nvSpPr>
-          <p:cNvPr id="10" name="Rounded Rectangle 9"/>
-          <p:cNvSpPr/>
-          <p:nvPr/>
-        </p:nvSpPr>
-        <p:spPr>
-          <a:xfrm>
-            <a:off x="4526280" y="1828800"/>
-            <a:ext cx="3246120" cy="2148840"/>
-          </a:xfrm>
-          <a:prstGeom prst="roundRect">
-            <a:avLst/>
-          </a:prstGeom>
-          <a:solidFill>
-            <a:srgbClr val="FFFFFF"/>
-          </a:solidFill>
-          <a:ln w="8890">
-            <a:solidFill>
-              <a:srgbClr val="D2DBDB"/>
-            </a:solidFill>
-          </a:ln>
-        </p:spPr>
-        <p:style>
-          <a:lnRef idx="1">
-            <a:schemeClr val="accent1"/>
-          </a:lnRef>
-          <a:fillRef idx="3">
-            <a:schemeClr val="accent1"/>
-          </a:fillRef>
-          <a:effectRef idx="2">
-            <a:schemeClr val="accent1"/>
-          </a:effectRef>
-          <a:fontRef idx="minor">
-            <a:schemeClr val="lt1"/>
-          </a:fontRef>
-        </p:style>
-        <p:txBody>
-          <a:bodyPr rtlCol="0" anchor="ctr"/>
-          <a:lstStyle/>
-          <a:p>
-            <a:pPr algn="ctr"/>
-            <a:endParaRPr/>
+              <a:t>baseline</a:t>
+            </a:r>
           </a:p>
         </p:txBody>
       </p:sp>
@@ -10280,8 +10026,8 @@
         </p:nvSpPr>
         <p:spPr>
           <a:xfrm>
-            <a:off x="4754880" y="2084831"/>
-            <a:ext cx="2743200" cy="274320"/>
+            <a:off x="6400800" y="2807208"/>
+            <a:ext cx="1554480" cy="228600"/>
           </a:xfrm>
           <a:prstGeom prst="rect">
             <a:avLst/>
@@ -10295,15 +10041,15 @@
           <a:lstStyle/>
           <a:p>
             <a:pPr>
-              <a:defRPr sz="1700" b="1">
-                <a:solidFill>
-                  <a:srgbClr val="008074"/>
-                </a:solidFill>
-                <a:latin typeface="Aptos"/>
-              </a:defRPr>
-            </a:pPr>
-            <a:r>
-              <a:t>CNN</a:t>
+              <a:defRPr sz="1400" b="1">
+                <a:solidFill>
+                  <a:srgbClr val="B2483E"/>
+                </a:solidFill>
+                <a:latin typeface="Aptos"/>
+              </a:defRPr>
+            </a:pPr>
+            <a:r>
+              <a:t>Distorted</a:t>
             </a:r>
           </a:p>
         </p:txBody>
@@ -10316,8 +10062,8 @@
         </p:nvSpPr>
         <p:spPr>
           <a:xfrm>
-            <a:off x="4754880" y="2606040"/>
-            <a:ext cx="2606040" cy="502920"/>
+            <a:off x="8046720" y="2807208"/>
+            <a:ext cx="2560320" cy="228600"/>
           </a:xfrm>
           <a:prstGeom prst="rect">
             <a:avLst/>
@@ -10339,54 +10085,44 @@
               </a:defRPr>
             </a:pPr>
             <a:r>
-              <a:t>total true percent on tumor/no-tumor</a:t>
-            </a:r>
-          </a:p>
-        </p:txBody>
-      </p:sp>
-      <p:sp>
-        <p:nvSpPr>
-          <p:cNvPr id="13" name="Rounded Rectangle 12"/>
-          <p:cNvSpPr/>
-          <p:nvPr/>
-        </p:nvSpPr>
-        <p:spPr>
-          <a:xfrm>
-            <a:off x="8321040" y="1828800"/>
-            <a:ext cx="3246120" cy="2148840"/>
-          </a:xfrm>
-          <a:prstGeom prst="roundRect">
-            <a:avLst/>
-          </a:prstGeom>
-          <a:solidFill>
-            <a:srgbClr val="FFFFFF"/>
-          </a:solidFill>
-          <a:ln w="8890">
-            <a:solidFill>
-              <a:srgbClr val="D2DBDB"/>
-            </a:solidFill>
-          </a:ln>
-        </p:spPr>
-        <p:style>
-          <a:lnRef idx="1">
-            <a:schemeClr val="accent1"/>
-          </a:lnRef>
-          <a:fillRef idx="3">
-            <a:schemeClr val="accent1"/>
-          </a:fillRef>
-          <a:effectRef idx="2">
-            <a:schemeClr val="accent1"/>
-          </a:effectRef>
-          <a:fontRef idx="minor">
-            <a:schemeClr val="lt1"/>
-          </a:fontRef>
-        </p:style>
-        <p:txBody>
-          <a:bodyPr rtlCol="0" anchor="ctr"/>
-          <a:lstStyle/>
-          <a:p>
-            <a:pPr algn="ctr"/>
-            <a:endParaRPr/>
+              <a:t>degradation</a:t>
+            </a:r>
+          </a:p>
+        </p:txBody>
+      </p:sp>
+      <p:sp>
+        <p:nvSpPr>
+          <p:cNvPr id="13" name="TextBox 12"/>
+          <p:cNvSpPr txBox="1"/>
+          <p:nvPr/>
+        </p:nvSpPr>
+        <p:spPr>
+          <a:xfrm>
+            <a:off x="6400800" y="3465576"/>
+            <a:ext cx="1554480" cy="228600"/>
+          </a:xfrm>
+          <a:prstGeom prst="rect">
+            <a:avLst/>
+          </a:prstGeom>
+          <a:noFill/>
+        </p:spPr>
+        <p:txBody>
+          <a:bodyPr wrap="none" lIns="18288" tIns="9144" rIns="18288" bIns="9144">
+            <a:spAutoFit/>
+          </a:bodyPr>
+          <a:lstStyle/>
+          <a:p>
+            <a:pPr>
+              <a:defRPr sz="1400" b="1">
+                <a:solidFill>
+                  <a:srgbClr val="008074"/>
+                </a:solidFill>
+                <a:latin typeface="Aptos"/>
+              </a:defRPr>
+            </a:pPr>
+            <a:r>
+              <a:t>Restored</a:t>
+            </a:r>
           </a:p>
         </p:txBody>
       </p:sp>
@@ -10398,44 +10134,8 @@
         </p:nvSpPr>
         <p:spPr>
           <a:xfrm>
-            <a:off x="8549640" y="2084831"/>
-            <a:ext cx="2743200" cy="274320"/>
-          </a:xfrm>
-          <a:prstGeom prst="rect">
-            <a:avLst/>
-          </a:prstGeom>
-          <a:noFill/>
-        </p:spPr>
-        <p:txBody>
-          <a:bodyPr wrap="none" lIns="18288" tIns="9144" rIns="18288" bIns="9144">
-            <a:spAutoFit/>
-          </a:bodyPr>
-          <a:lstStyle/>
-          <a:p>
-            <a:pPr>
-              <a:defRPr sz="1700" b="1">
-                <a:solidFill>
-                  <a:srgbClr val="B2483E"/>
-                </a:solidFill>
-                <a:latin typeface="Aptos"/>
-              </a:defRPr>
-            </a:pPr>
-            <a:r>
-              <a:t>YOLO</a:t>
-            </a:r>
-          </a:p>
-        </p:txBody>
-      </p:sp>
-      <p:sp>
-        <p:nvSpPr>
-          <p:cNvPr id="15" name="TextBox 14"/>
-          <p:cNvSpPr txBox="1"/>
-          <p:nvPr/>
-        </p:nvSpPr>
-        <p:spPr>
-          <a:xfrm>
-            <a:off x="8549640" y="2606040"/>
-            <a:ext cx="2606040" cy="502920"/>
+            <a:off x="8046720" y="3465576"/>
+            <a:ext cx="2560320" cy="228600"/>
           </a:xfrm>
           <a:prstGeom prst="rect">
             <a:avLst/>
@@ -10457,7 +10157,43 @@
               </a:defRPr>
             </a:pPr>
             <a:r>
-              <a:t>mask mAP50 on tumor segmentation</a:t>
+              <a:t>pre-processing recovery</a:t>
+            </a:r>
+          </a:p>
+        </p:txBody>
+      </p:sp>
+      <p:sp>
+        <p:nvSpPr>
+          <p:cNvPr id="15" name="TextBox 14"/>
+          <p:cNvSpPr txBox="1"/>
+          <p:nvPr/>
+        </p:nvSpPr>
+        <p:spPr>
+          <a:xfrm>
+            <a:off x="6400800" y="4123944"/>
+            <a:ext cx="1554480" cy="228600"/>
+          </a:xfrm>
+          <a:prstGeom prst="rect">
+            <a:avLst/>
+          </a:prstGeom>
+          <a:noFill/>
+        </p:spPr>
+        <p:txBody>
+          <a:bodyPr wrap="none" lIns="18288" tIns="9144" rIns="18288" bIns="9144">
+            <a:spAutoFit/>
+          </a:bodyPr>
+          <a:lstStyle/>
+          <a:p>
+            <a:pPr>
+              <a:defRPr sz="1400" b="1">
+                <a:solidFill>
+                  <a:srgbClr val="B88630"/>
+                </a:solidFill>
+                <a:latin typeface="Aptos"/>
+              </a:defRPr>
+            </a:pPr>
+            <a:r>
+              <a:t>Fine-tuned</a:t>
             </a:r>
           </a:p>
         </p:txBody>
@@ -10470,25 +10206,22 @@
         </p:nvSpPr>
         <p:spPr>
           <a:xfrm>
-            <a:off x="914400" y="4800600"/>
-            <a:ext cx="10332720" cy="411480"/>
-          </a:xfrm>
-          <a:prstGeom prst="rect">
-            <a:avLst/>
-          </a:prstGeom>
-          <a:noFill/>
-        </p:spPr>
-        <p:txBody>
-          <a:bodyPr wrap="square">
+            <a:off x="8046720" y="4123944"/>
+            <a:ext cx="2560320" cy="228600"/>
+          </a:xfrm>
+          <a:prstGeom prst="rect">
+            <a:avLst/>
+          </a:prstGeom>
+          <a:noFill/>
+        </p:spPr>
+        <p:txBody>
+          <a:bodyPr wrap="none" lIns="18288" tIns="9144" rIns="18288" bIns="9144">
             <a:spAutoFit/>
           </a:bodyPr>
           <a:lstStyle/>
           <a:p>
             <a:pPr>
-              <a:spcAft>
-                <a:spcPts val="800"/>
-              </a:spcAft>
-              <a:defRPr sz="1500">
+              <a:defRPr sz="1300" b="0">
                 <a:solidFill>
                   <a:srgbClr val="182228"/>
                 </a:solidFill>
@@ -10496,7 +10229,7 @@
               </a:defRPr>
             </a:pPr>
             <a:r>
-              <a:t>Experiment path: clean baseline → distorted input → restored input → fine-tuned model when relevant.</a:t>
+              <a:t>model adaptation</a:t>
             </a:r>
           </a:p>
         </p:txBody>
@@ -10565,7 +10298,7 @@
               </a:defRPr>
             </a:pPr>
             <a:r>
-              <a:t>EXPERIMENT DESIGN</a:t>
+              <a:t>DATA PREPARATION</a:t>
             </a:r>
           </a:p>
         </p:txBody>
@@ -10601,7 +10334,7 @@
               </a:defRPr>
             </a:pPr>
             <a:r>
-              <a:t>Every task uses the same robustness question.</a:t>
+              <a:t>Two datasets support two different outputs: class labels and masks.</a:t>
             </a:r>
           </a:p>
         </p:txBody>
@@ -10637,7 +10370,7 @@
               </a:defRPr>
             </a:pPr>
             <a:r>
-              <a:t>How much does distortion hurt, and which improvement helps recover performance?</a:t>
+              <a:t>Data 1 labels are folder names; Data 2 labels are segmentation polygons for YOLO.</a:t>
             </a:r>
           </a:p>
         </p:txBody>
@@ -10709,114 +10442,27 @@
               </a:defRPr>
             </a:pPr>
             <a:r>
-              <a:t>04</a:t>
-            </a:r>
-          </a:p>
-        </p:txBody>
-      </p:sp>
-      <p:sp>
-        <p:nvSpPr>
-          <p:cNvPr id="7" name="TextBox 6"/>
-          <p:cNvSpPr txBox="1"/>
-          <p:nvPr/>
-        </p:nvSpPr>
-        <p:spPr>
-          <a:xfrm>
-            <a:off x="777240" y="1828800"/>
-            <a:ext cx="4754880" cy="3200400"/>
-          </a:xfrm>
-          <a:prstGeom prst="rect">
-            <a:avLst/>
-          </a:prstGeom>
-          <a:noFill/>
-        </p:spPr>
-        <p:txBody>
-          <a:bodyPr wrap="square">
-            <a:spAutoFit/>
-          </a:bodyPr>
-          <a:lstStyle/>
-          <a:p>
-            <a:pPr>
-              <a:spcAft>
-                <a:spcPts val="800"/>
-              </a:spcAft>
-              <a:defRPr sz="1500">
-                <a:solidFill>
-                  <a:srgbClr val="182228"/>
-                </a:solidFill>
-                <a:latin typeface="Aptos"/>
-              </a:defRPr>
-            </a:pPr>
-            <a:r>
-              <a:t>Data 1: Kaggle tumor/no-tumor classification images.</a:t>
-            </a:r>
-          </a:p>
-          <a:p>
-            <a:pPr>
-              <a:spcAft>
-                <a:spcPts val="800"/>
-              </a:spcAft>
-              <a:defRPr sz="1500">
-                <a:solidFill>
-                  <a:srgbClr val="182228"/>
-                </a:solidFill>
-                <a:latin typeface="Aptos"/>
-              </a:defRPr>
-            </a:pPr>
-            <a:r>
-              <a:t>Data 2: MRI tumor segmentation masks converted to YOLO format.</a:t>
-            </a:r>
-          </a:p>
-          <a:p>
-            <a:pPr>
-              <a:spcAft>
-                <a:spcPts val="800"/>
-              </a:spcAft>
-              <a:defRPr sz="1500">
-                <a:solidFill>
-                  <a:srgbClr val="182228"/>
-                </a:solidFill>
-                <a:latin typeface="Aptos"/>
-              </a:defRPr>
-            </a:pPr>
-            <a:r>
-              <a:t>Distortions: gaussian noise, salt-and-pepper, gaussian blur, and YOLO brightness/contrast.</a:t>
-            </a:r>
-          </a:p>
-          <a:p>
-            <a:pPr>
-              <a:spcAft>
-                <a:spcPts val="800"/>
-              </a:spcAft>
-              <a:defRPr sz="1500">
-                <a:solidFill>
-                  <a:srgbClr val="182228"/>
-                </a:solidFill>
-                <a:latin typeface="Aptos"/>
-              </a:defRPr>
-            </a:pPr>
-            <a:r>
-              <a:t>Improvement: restoration pre-processing and fine-tuning for learning-based models.</a:t>
-            </a:r>
-          </a:p>
-        </p:txBody>
-      </p:sp>
-      <p:sp>
-        <p:nvSpPr>
-          <p:cNvPr id="8" name="Rounded Rectangle 7"/>
+              <a:t>05</a:t>
+            </a:r>
+          </a:p>
+        </p:txBody>
+      </p:sp>
+      <p:sp>
+        <p:nvSpPr>
+          <p:cNvPr id="7" name="Rounded Rectangle 6"/>
           <p:cNvSpPr/>
           <p:nvPr/>
         </p:nvSpPr>
         <p:spPr>
           <a:xfrm>
-            <a:off x="6080760" y="1828800"/>
-            <a:ext cx="4937760" cy="3108960"/>
+            <a:off x="685800" y="1783080"/>
+            <a:ext cx="3246120" cy="4114800"/>
           </a:xfrm>
           <a:prstGeom prst="roundRect">
             <a:avLst/>
           </a:prstGeom>
           <a:solidFill>
-            <a:srgbClr val="F5F8F8"/>
+            <a:srgbClr val="FFFFFF"/>
           </a:solidFill>
           <a:ln w="8890">
             <a:solidFill>
@@ -10847,6 +10493,30 @@
           </a:p>
         </p:txBody>
       </p:sp>
+      <p:pic>
+        <p:nvPicPr>
+          <p:cNvPr id="8" name="Picture 7" descr="data1_no_tumor_example.jpg"/>
+          <p:cNvPicPr>
+            <a:picLocks noChangeAspect="1"/>
+          </p:cNvPicPr>
+          <p:nvPr/>
+        </p:nvPicPr>
+        <p:blipFill>
+          <a:blip r:embed="rId2"/>
+          <a:stretch>
+            <a:fillRect/>
+          </a:stretch>
+        </p:blipFill>
+        <p:spPr>
+          <a:xfrm>
+            <a:off x="1033272" y="2057400"/>
+            <a:ext cx="2560320" cy="2560320"/>
+          </a:xfrm>
+          <a:prstGeom prst="rect">
+            <a:avLst/>
+          </a:prstGeom>
+        </p:spPr>
+      </p:pic>
       <p:sp>
         <p:nvSpPr>
           <p:cNvPr id="9" name="TextBox 8"/>
@@ -10855,8 +10525,8 @@
         </p:nvSpPr>
         <p:spPr>
           <a:xfrm>
-            <a:off x="6400800" y="2148840"/>
-            <a:ext cx="1554480" cy="228600"/>
+            <a:off x="1005840" y="4983480"/>
+            <a:ext cx="2560320" cy="228600"/>
           </a:xfrm>
           <a:prstGeom prst="rect">
             <a:avLst/>
@@ -10869,29 +10539,99 @@
           </a:bodyPr>
           <a:lstStyle/>
           <a:p>
-            <a:pPr>
+            <a:pPr algn="ctr">
               <a:defRPr sz="1400" b="1">
                 <a:solidFill>
-                  <a:srgbClr val="2666AC"/>
-                </a:solidFill>
-                <a:latin typeface="Aptos"/>
-              </a:defRPr>
-            </a:pPr>
-            <a:r>
-              <a:t>Clean</a:t>
-            </a:r>
-          </a:p>
-        </p:txBody>
-      </p:sp>
-      <p:sp>
-        <p:nvSpPr>
-          <p:cNvPr id="10" name="TextBox 9"/>
-          <p:cNvSpPr txBox="1"/>
-          <p:nvPr/>
-        </p:nvSpPr>
-        <p:spPr>
-          <a:xfrm>
-            <a:off x="8046720" y="2148840"/>
+                  <a:srgbClr val="182228"/>
+                </a:solidFill>
+                <a:latin typeface="Aptos"/>
+              </a:defRPr>
+            </a:pPr>
+            <a:r>
+              <a:t>Data 1: no tumor</a:t>
+            </a:r>
+          </a:p>
+        </p:txBody>
+      </p:sp>
+      <p:sp>
+        <p:nvSpPr>
+          <p:cNvPr id="10" name="Rounded Rectangle 9"/>
+          <p:cNvSpPr/>
+          <p:nvPr/>
+        </p:nvSpPr>
+        <p:spPr>
+          <a:xfrm>
+            <a:off x="4480560" y="1783080"/>
+            <a:ext cx="3246120" cy="4114800"/>
+          </a:xfrm>
+          <a:prstGeom prst="roundRect">
+            <a:avLst/>
+          </a:prstGeom>
+          <a:solidFill>
+            <a:srgbClr val="FFFFFF"/>
+          </a:solidFill>
+          <a:ln w="8890">
+            <a:solidFill>
+              <a:srgbClr val="D2DBDB"/>
+            </a:solidFill>
+          </a:ln>
+        </p:spPr>
+        <p:style>
+          <a:lnRef idx="1">
+            <a:schemeClr val="accent1"/>
+          </a:lnRef>
+          <a:fillRef idx="3">
+            <a:schemeClr val="accent1"/>
+          </a:fillRef>
+          <a:effectRef idx="2">
+            <a:schemeClr val="accent1"/>
+          </a:effectRef>
+          <a:fontRef idx="minor">
+            <a:schemeClr val="lt1"/>
+          </a:fontRef>
+        </p:style>
+        <p:txBody>
+          <a:bodyPr rtlCol="0" anchor="ctr"/>
+          <a:lstStyle/>
+          <a:p>
+            <a:pPr algn="ctr"/>
+            <a:endParaRPr/>
+          </a:p>
+        </p:txBody>
+      </p:sp>
+      <p:pic>
+        <p:nvPicPr>
+          <p:cNvPr id="11" name="Picture 10" descr="data1_tumor_example.jpg"/>
+          <p:cNvPicPr>
+            <a:picLocks noChangeAspect="1"/>
+          </p:cNvPicPr>
+          <p:nvPr/>
+        </p:nvPicPr>
+        <p:blipFill>
+          <a:blip r:embed="rId3"/>
+          <a:stretch>
+            <a:fillRect/>
+          </a:stretch>
+        </p:blipFill>
+        <p:spPr>
+          <a:xfrm>
+            <a:off x="4828032" y="2057400"/>
+            <a:ext cx="2560320" cy="2560320"/>
+          </a:xfrm>
+          <a:prstGeom prst="rect">
+            <a:avLst/>
+          </a:prstGeom>
+        </p:spPr>
+      </p:pic>
+      <p:sp>
+        <p:nvSpPr>
+          <p:cNvPr id="12" name="TextBox 11"/>
+          <p:cNvSpPr txBox="1"/>
+          <p:nvPr/>
+        </p:nvSpPr>
+        <p:spPr>
+          <a:xfrm>
+            <a:off x="4800600" y="4983480"/>
             <a:ext cx="2560320" cy="228600"/>
           </a:xfrm>
           <a:prstGeom prst="rect">
@@ -10905,8 +10645,8 @@
           </a:bodyPr>
           <a:lstStyle/>
           <a:p>
-            <a:pPr>
-              <a:defRPr sz="1300" b="0">
+            <a:pPr algn="ctr">
+              <a:defRPr sz="1400" b="1">
                 <a:solidFill>
                   <a:srgbClr val="182228"/>
                 </a:solidFill>
@@ -10914,21 +10654,91 @@
               </a:defRPr>
             </a:pPr>
             <a:r>
-              <a:t>baseline</a:t>
-            </a:r>
-          </a:p>
-        </p:txBody>
-      </p:sp>
-      <p:sp>
-        <p:nvSpPr>
-          <p:cNvPr id="11" name="TextBox 10"/>
-          <p:cNvSpPr txBox="1"/>
-          <p:nvPr/>
-        </p:nvSpPr>
-        <p:spPr>
-          <a:xfrm>
-            <a:off x="6400800" y="2807208"/>
-            <a:ext cx="1554480" cy="228600"/>
+              <a:t>Data 1: tumor</a:t>
+            </a:r>
+          </a:p>
+        </p:txBody>
+      </p:sp>
+      <p:sp>
+        <p:nvSpPr>
+          <p:cNvPr id="13" name="Rounded Rectangle 12"/>
+          <p:cNvSpPr/>
+          <p:nvPr/>
+        </p:nvSpPr>
+        <p:spPr>
+          <a:xfrm>
+            <a:off x="8275320" y="1783080"/>
+            <a:ext cx="3246120" cy="4114800"/>
+          </a:xfrm>
+          <a:prstGeom prst="roundRect">
+            <a:avLst/>
+          </a:prstGeom>
+          <a:solidFill>
+            <a:srgbClr val="FFFFFF"/>
+          </a:solidFill>
+          <a:ln w="8890">
+            <a:solidFill>
+              <a:srgbClr val="D2DBDB"/>
+            </a:solidFill>
+          </a:ln>
+        </p:spPr>
+        <p:style>
+          <a:lnRef idx="1">
+            <a:schemeClr val="accent1"/>
+          </a:lnRef>
+          <a:fillRef idx="3">
+            <a:schemeClr val="accent1"/>
+          </a:fillRef>
+          <a:effectRef idx="2">
+            <a:schemeClr val="accent1"/>
+          </a:effectRef>
+          <a:fontRef idx="minor">
+            <a:schemeClr val="lt1"/>
+          </a:fontRef>
+        </p:style>
+        <p:txBody>
+          <a:bodyPr rtlCol="0" anchor="ctr"/>
+          <a:lstStyle/>
+          <a:p>
+            <a:pPr algn="ctr"/>
+            <a:endParaRPr/>
+          </a:p>
+        </p:txBody>
+      </p:sp>
+      <p:pic>
+        <p:nvPicPr>
+          <p:cNvPr id="14" name="Picture 13" descr="task3_yolo_mask_example.png"/>
+          <p:cNvPicPr>
+            <a:picLocks noChangeAspect="1"/>
+          </p:cNvPicPr>
+          <p:nvPr/>
+        </p:nvPicPr>
+        <p:blipFill>
+          <a:blip r:embed="rId4"/>
+          <a:stretch>
+            <a:fillRect/>
+          </a:stretch>
+        </p:blipFill>
+        <p:spPr>
+          <a:xfrm>
+            <a:off x="8253802" y="2539024"/>
+            <a:ext cx="3272050" cy="1904960"/>
+          </a:xfrm>
+          <a:prstGeom prst="rect">
+            <a:avLst/>
+          </a:prstGeom>
+        </p:spPr>
+      </p:pic>
+      <p:sp>
+        <p:nvSpPr>
+          <p:cNvPr id="15" name="TextBox 14"/>
+          <p:cNvSpPr txBox="1"/>
+          <p:nvPr/>
+        </p:nvSpPr>
+        <p:spPr>
+          <a:xfrm>
+            <a:off x="8595360" y="4983480"/>
+            <a:ext cx="2560320" cy="228600"/>
           </a:xfrm>
           <a:prstGeom prst="rect">
             <a:avLst/>
@@ -10941,196 +10751,16 @@
           </a:bodyPr>
           <a:lstStyle/>
           <a:p>
-            <a:pPr>
+            <a:pPr algn="ctr">
               <a:defRPr sz="1400" b="1">
                 <a:solidFill>
-                  <a:srgbClr val="B2483E"/>
-                </a:solidFill>
-                <a:latin typeface="Aptos"/>
-              </a:defRPr>
-            </a:pPr>
-            <a:r>
-              <a:t>Distorted</a:t>
-            </a:r>
-          </a:p>
-        </p:txBody>
-      </p:sp>
-      <p:sp>
-        <p:nvSpPr>
-          <p:cNvPr id="12" name="TextBox 11"/>
-          <p:cNvSpPr txBox="1"/>
-          <p:nvPr/>
-        </p:nvSpPr>
-        <p:spPr>
-          <a:xfrm>
-            <a:off x="8046720" y="2807208"/>
-            <a:ext cx="2560320" cy="228600"/>
-          </a:xfrm>
-          <a:prstGeom prst="rect">
-            <a:avLst/>
-          </a:prstGeom>
-          <a:noFill/>
-        </p:spPr>
-        <p:txBody>
-          <a:bodyPr wrap="none" lIns="18288" tIns="9144" rIns="18288" bIns="9144">
-            <a:spAutoFit/>
-          </a:bodyPr>
-          <a:lstStyle/>
-          <a:p>
-            <a:pPr>
-              <a:defRPr sz="1300" b="0">
-                <a:solidFill>
                   <a:srgbClr val="182228"/>
                 </a:solidFill>
                 <a:latin typeface="Aptos"/>
               </a:defRPr>
             </a:pPr>
             <a:r>
-              <a:t>degradation</a:t>
-            </a:r>
-          </a:p>
-        </p:txBody>
-      </p:sp>
-      <p:sp>
-        <p:nvSpPr>
-          <p:cNvPr id="13" name="TextBox 12"/>
-          <p:cNvSpPr txBox="1"/>
-          <p:nvPr/>
-        </p:nvSpPr>
-        <p:spPr>
-          <a:xfrm>
-            <a:off x="6400800" y="3465576"/>
-            <a:ext cx="1554480" cy="228600"/>
-          </a:xfrm>
-          <a:prstGeom prst="rect">
-            <a:avLst/>
-          </a:prstGeom>
-          <a:noFill/>
-        </p:spPr>
-        <p:txBody>
-          <a:bodyPr wrap="none" lIns="18288" tIns="9144" rIns="18288" bIns="9144">
-            <a:spAutoFit/>
-          </a:bodyPr>
-          <a:lstStyle/>
-          <a:p>
-            <a:pPr>
-              <a:defRPr sz="1400" b="1">
-                <a:solidFill>
-                  <a:srgbClr val="008074"/>
-                </a:solidFill>
-                <a:latin typeface="Aptos"/>
-              </a:defRPr>
-            </a:pPr>
-            <a:r>
-              <a:t>Restored</a:t>
-            </a:r>
-          </a:p>
-        </p:txBody>
-      </p:sp>
-      <p:sp>
-        <p:nvSpPr>
-          <p:cNvPr id="14" name="TextBox 13"/>
-          <p:cNvSpPr txBox="1"/>
-          <p:nvPr/>
-        </p:nvSpPr>
-        <p:spPr>
-          <a:xfrm>
-            <a:off x="8046720" y="3465576"/>
-            <a:ext cx="2560320" cy="228600"/>
-          </a:xfrm>
-          <a:prstGeom prst="rect">
-            <a:avLst/>
-          </a:prstGeom>
-          <a:noFill/>
-        </p:spPr>
-        <p:txBody>
-          <a:bodyPr wrap="none" lIns="18288" tIns="9144" rIns="18288" bIns="9144">
-            <a:spAutoFit/>
-          </a:bodyPr>
-          <a:lstStyle/>
-          <a:p>
-            <a:pPr>
-              <a:defRPr sz="1300" b="0">
-                <a:solidFill>
-                  <a:srgbClr val="182228"/>
-                </a:solidFill>
-                <a:latin typeface="Aptos"/>
-              </a:defRPr>
-            </a:pPr>
-            <a:r>
-              <a:t>pre-processing recovery</a:t>
-            </a:r>
-          </a:p>
-        </p:txBody>
-      </p:sp>
-      <p:sp>
-        <p:nvSpPr>
-          <p:cNvPr id="15" name="TextBox 14"/>
-          <p:cNvSpPr txBox="1"/>
-          <p:nvPr/>
-        </p:nvSpPr>
-        <p:spPr>
-          <a:xfrm>
-            <a:off x="6400800" y="4123944"/>
-            <a:ext cx="1554480" cy="228600"/>
-          </a:xfrm>
-          <a:prstGeom prst="rect">
-            <a:avLst/>
-          </a:prstGeom>
-          <a:noFill/>
-        </p:spPr>
-        <p:txBody>
-          <a:bodyPr wrap="none" lIns="18288" tIns="9144" rIns="18288" bIns="9144">
-            <a:spAutoFit/>
-          </a:bodyPr>
-          <a:lstStyle/>
-          <a:p>
-            <a:pPr>
-              <a:defRPr sz="1400" b="1">
-                <a:solidFill>
-                  <a:srgbClr val="B88630"/>
-                </a:solidFill>
-                <a:latin typeface="Aptos"/>
-              </a:defRPr>
-            </a:pPr>
-            <a:r>
-              <a:t>Fine-tuned</a:t>
-            </a:r>
-          </a:p>
-        </p:txBody>
-      </p:sp>
-      <p:sp>
-        <p:nvSpPr>
-          <p:cNvPr id="16" name="TextBox 15"/>
-          <p:cNvSpPr txBox="1"/>
-          <p:nvPr/>
-        </p:nvSpPr>
-        <p:spPr>
-          <a:xfrm>
-            <a:off x="8046720" y="4123944"/>
-            <a:ext cx="2560320" cy="228600"/>
-          </a:xfrm>
-          <a:prstGeom prst="rect">
-            <a:avLst/>
-          </a:prstGeom>
-          <a:noFill/>
-        </p:spPr>
-        <p:txBody>
-          <a:bodyPr wrap="none" lIns="18288" tIns="9144" rIns="18288" bIns="9144">
-            <a:spAutoFit/>
-          </a:bodyPr>
-          <a:lstStyle/>
-          <a:p>
-            <a:pPr>
-              <a:defRPr sz="1300" b="0">
-                <a:solidFill>
-                  <a:srgbClr val="182228"/>
-                </a:solidFill>
-                <a:latin typeface="Aptos"/>
-              </a:defRPr>
-            </a:pPr>
-            <a:r>
-              <a:t>model adaptation</a:t>
+              <a:t>Data 2: mask</a:t>
             </a:r>
           </a:p>
         </p:txBody>
@@ -11177,15 +10807,15 @@
         <p:spPr>
           <a:xfrm>
             <a:off x="502920" y="320040"/>
-            <a:ext cx="4572000" cy="256032"/>
-          </a:xfrm>
-          <a:prstGeom prst="rect">
-            <a:avLst/>
-          </a:prstGeom>
-          <a:noFill/>
-        </p:spPr>
-        <p:txBody>
-          <a:bodyPr wrap="none" lIns="18288" tIns="9144" rIns="18288" bIns="9144">
+            <a:ext cx="4937760" cy="256032"/>
+          </a:xfrm>
+          <a:prstGeom prst="rect">
+            <a:avLst/>
+          </a:prstGeom>
+          <a:noFill/>
+        </p:spPr>
+        <p:txBody>
+          <a:bodyPr wrap="square">
             <a:spAutoFit/>
           </a:bodyPr>
           <a:lstStyle/>
@@ -11199,7 +10829,7 @@
               </a:defRPr>
             </a:pPr>
             <a:r>
-              <a:t>DATA PREPARATION</a:t>
+              <a:t>SHARED DISTORTION AND RESTORATION</a:t>
             </a:r>
           </a:p>
         </p:txBody>
@@ -11213,21 +10843,21 @@
         <p:spPr>
           <a:xfrm>
             <a:off x="502920" y="640080"/>
-            <a:ext cx="8961120" cy="603504"/>
-          </a:xfrm>
-          <a:prstGeom prst="rect">
-            <a:avLst/>
-          </a:prstGeom>
-          <a:noFill/>
-        </p:spPr>
-        <p:txBody>
-          <a:bodyPr wrap="none" lIns="18288" tIns="9144" rIns="18288" bIns="9144">
+            <a:ext cx="9326880" cy="566928"/>
+          </a:xfrm>
+          <a:prstGeom prst="rect">
+            <a:avLst/>
+          </a:prstGeom>
+          <a:noFill/>
+        </p:spPr>
+        <p:txBody>
+          <a:bodyPr wrap="square">
             <a:spAutoFit/>
           </a:bodyPr>
           <a:lstStyle/>
           <a:p>
             <a:pPr>
-              <a:defRPr sz="2400" b="1">
+              <a:defRPr sz="2300" b="1">
                 <a:solidFill>
                   <a:srgbClr val="182228"/>
                 </a:solidFill>
@@ -11235,7 +10865,7 @@
               </a:defRPr>
             </a:pPr>
             <a:r>
-              <a:t>Two datasets support two different outputs: class labels and masks.</a:t>
+              <a:t>Original, distorted, and restored images are compared together.</a:t>
             </a:r>
           </a:p>
         </p:txBody>
@@ -11249,15 +10879,15 @@
         <p:spPr>
           <a:xfrm>
             <a:off x="521207" y="1225296"/>
-            <a:ext cx="9052560" cy="292608"/>
-          </a:xfrm>
-          <a:prstGeom prst="rect">
-            <a:avLst/>
-          </a:prstGeom>
-          <a:noFill/>
-        </p:spPr>
-        <p:txBody>
-          <a:bodyPr wrap="none" lIns="18288" tIns="9144" rIns="18288" bIns="9144">
+            <a:ext cx="9875520" cy="292608"/>
+          </a:xfrm>
+          <a:prstGeom prst="rect">
+            <a:avLst/>
+          </a:prstGeom>
+          <a:noFill/>
+        </p:spPr>
+        <p:txBody>
+          <a:bodyPr wrap="square">
             <a:spAutoFit/>
           </a:bodyPr>
           <a:lstStyle/>
@@ -11271,7 +10901,7 @@
               </a:defRPr>
             </a:pPr>
             <a:r>
-              <a:t>Data 1 labels are folder names; Data 2 labels are segmentation polygons for YOLO.</a:t>
+              <a:t>Each used distortion is shown with its restored result so the before/after effect is visible.</a:t>
             </a:r>
           </a:p>
         </p:txBody>
@@ -11293,7 +10923,7 @@
           <a:noFill/>
         </p:spPr>
         <p:txBody>
-          <a:bodyPr wrap="none" lIns="18288" tIns="9144" rIns="18288" bIns="9144">
+          <a:bodyPr wrap="square">
             <a:spAutoFit/>
           </a:bodyPr>
           <a:lstStyle/>
@@ -11314,50 +10944,14 @@
       </p:sp>
       <p:sp>
         <p:nvSpPr>
-          <p:cNvPr id="6" name="TextBox 5"/>
-          <p:cNvSpPr txBox="1"/>
-          <p:nvPr/>
-        </p:nvSpPr>
-        <p:spPr>
-          <a:xfrm>
-            <a:off x="11292840" y="6446520"/>
-            <a:ext cx="411480" cy="182880"/>
-          </a:xfrm>
-          <a:prstGeom prst="rect">
-            <a:avLst/>
-          </a:prstGeom>
-          <a:noFill/>
-        </p:spPr>
-        <p:txBody>
-          <a:bodyPr wrap="none" lIns="18288" tIns="9144" rIns="18288" bIns="9144">
-            <a:spAutoFit/>
-          </a:bodyPr>
-          <a:lstStyle/>
-          <a:p>
-            <a:pPr algn="r">
-              <a:defRPr sz="800" b="0">
-                <a:solidFill>
-                  <a:srgbClr val="56636B"/>
-                </a:solidFill>
-                <a:latin typeface="Aptos"/>
-              </a:defRPr>
-            </a:pPr>
-            <a:r>
-              <a:t>05</a:t>
-            </a:r>
-          </a:p>
-        </p:txBody>
-      </p:sp>
-      <p:sp>
-        <p:nvSpPr>
-          <p:cNvPr id="7" name="Rounded Rectangle 6"/>
+          <p:cNvPr id="6" name="Rounded Rectangle 5"/>
           <p:cNvSpPr/>
           <p:nvPr/>
         </p:nvSpPr>
         <p:spPr>
           <a:xfrm>
-            <a:off x="685800" y="1783080"/>
-            <a:ext cx="3246120" cy="4114800"/>
+            <a:off x="502920" y="1719072"/>
+            <a:ext cx="2148840" cy="4526280"/>
           </a:xfrm>
           <a:prstGeom prst="roundRect">
             <a:avLst/>
@@ -11396,7 +10990,7 @@
       </p:sp>
       <p:pic>
         <p:nvPicPr>
-          <p:cNvPr id="8" name="Picture 7" descr="data1_no_tumor_example.jpg"/>
+          <p:cNvPr id="7" name="Picture 6" descr="image.png"/>
           <p:cNvPicPr>
             <a:picLocks noChangeAspect="1"/>
           </p:cNvPicPr>
@@ -11410,8 +11004,8 @@
         </p:blipFill>
         <p:spPr>
           <a:xfrm>
-            <a:off x="1033272" y="2057400"/>
-            <a:ext cx="2560320" cy="2560320"/>
+            <a:off x="713232" y="2331720"/>
+            <a:ext cx="1737360" cy="1737360"/>
           </a:xfrm>
           <a:prstGeom prst="rect">
             <a:avLst/>
@@ -11420,50 +11014,122 @@
       </p:pic>
       <p:sp>
         <p:nvSpPr>
+          <p:cNvPr id="8" name="TextBox 7"/>
+          <p:cNvSpPr txBox="1"/>
+          <p:nvPr/>
+        </p:nvSpPr>
+        <p:spPr>
+          <a:xfrm>
+            <a:off x="749808" y="4617720"/>
+            <a:ext cx="1645920" cy="256032"/>
+          </a:xfrm>
+          <a:prstGeom prst="rect">
+            <a:avLst/>
+          </a:prstGeom>
+          <a:noFill/>
+        </p:spPr>
+        <p:txBody>
+          <a:bodyPr wrap="square">
+            <a:spAutoFit/>
+          </a:bodyPr>
+          <a:lstStyle/>
+          <a:p>
+            <a:pPr algn="ctr">
+              <a:defRPr sz="1500" b="1">
+                <a:solidFill>
+                  <a:srgbClr val="182228"/>
+                </a:solidFill>
+                <a:latin typeface="Aptos"/>
+              </a:defRPr>
+            </a:pPr>
+            <a:r>
+              <a:t>Original</a:t>
+            </a:r>
+          </a:p>
+        </p:txBody>
+      </p:sp>
+      <p:sp>
+        <p:nvSpPr>
           <p:cNvPr id="9" name="TextBox 8"/>
           <p:cNvSpPr txBox="1"/>
           <p:nvPr/>
         </p:nvSpPr>
         <p:spPr>
           <a:xfrm>
-            <a:off x="1005840" y="4983480"/>
-            <a:ext cx="2560320" cy="228600"/>
-          </a:xfrm>
-          <a:prstGeom prst="rect">
-            <a:avLst/>
-          </a:prstGeom>
-          <a:noFill/>
-        </p:spPr>
-        <p:txBody>
-          <a:bodyPr wrap="none" lIns="18288" tIns="9144" rIns="18288" bIns="9144">
+            <a:off x="749808" y="4956048"/>
+            <a:ext cx="1645920" cy="228600"/>
+          </a:xfrm>
+          <a:prstGeom prst="rect">
+            <a:avLst/>
+          </a:prstGeom>
+          <a:noFill/>
+        </p:spPr>
+        <p:txBody>
+          <a:bodyPr wrap="square">
             <a:spAutoFit/>
           </a:bodyPr>
           <a:lstStyle/>
           <a:p>
             <a:pPr algn="ctr">
-              <a:defRPr sz="1400" b="1">
-                <a:solidFill>
-                  <a:srgbClr val="182228"/>
-                </a:solidFill>
-                <a:latin typeface="Aptos"/>
-              </a:defRPr>
-            </a:pPr>
-            <a:r>
-              <a:t>Data 1: no tumor</a:t>
-            </a:r>
-          </a:p>
-        </p:txBody>
-      </p:sp>
-      <p:sp>
-        <p:nvSpPr>
-          <p:cNvPr id="10" name="Rounded Rectangle 9"/>
+              <a:defRPr sz="950" b="0">
+                <a:solidFill>
+                  <a:srgbClr val="56636B"/>
+                </a:solidFill>
+                <a:latin typeface="Aptos"/>
+              </a:defRPr>
+            </a:pPr>
+            <a:r>
+              <a:t>clean baseline</a:t>
+            </a:r>
+          </a:p>
+        </p:txBody>
+      </p:sp>
+      <p:sp>
+        <p:nvSpPr>
+          <p:cNvPr id="10" name="TextBox 9"/>
+          <p:cNvSpPr txBox="1"/>
+          <p:nvPr/>
+        </p:nvSpPr>
+        <p:spPr>
+          <a:xfrm>
+            <a:off x="713232" y="5358384"/>
+            <a:ext cx="1737360" cy="384048"/>
+          </a:xfrm>
+          <a:prstGeom prst="rect">
+            <a:avLst/>
+          </a:prstGeom>
+          <a:noFill/>
+        </p:spPr>
+        <p:txBody>
+          <a:bodyPr wrap="square">
+            <a:spAutoFit/>
+          </a:bodyPr>
+          <a:lstStyle/>
+          <a:p>
+            <a:pPr algn="ctr">
+              <a:defRPr sz="900" b="0">
+                <a:solidFill>
+                  <a:srgbClr val="56636B"/>
+                </a:solidFill>
+                <a:latin typeface="Aptos"/>
+              </a:defRPr>
+            </a:pPr>
+            <a:r>
+              <a:t>used before all distortions</a:t>
+            </a:r>
+          </a:p>
+        </p:txBody>
+      </p:sp>
+      <p:sp>
+        <p:nvSpPr>
+          <p:cNvPr id="11" name="Rounded Rectangle 10"/>
           <p:cNvSpPr/>
           <p:nvPr/>
         </p:nvSpPr>
         <p:spPr>
           <a:xfrm>
-            <a:off x="4480560" y="1783080"/>
-            <a:ext cx="3246120" cy="4114800"/>
+            <a:off x="2880360" y="1719072"/>
+            <a:ext cx="4343400" cy="2148840"/>
           </a:xfrm>
           <a:prstGeom prst="roundRect">
             <a:avLst/>
@@ -11500,9 +11166,137 @@
           </a:p>
         </p:txBody>
       </p:sp>
+      <p:sp>
+        <p:nvSpPr>
+          <p:cNvPr id="12" name="TextBox 11"/>
+          <p:cNvSpPr txBox="1"/>
+          <p:nvPr/>
+        </p:nvSpPr>
+        <p:spPr>
+          <a:xfrm>
+            <a:off x="3044952" y="1856231"/>
+            <a:ext cx="3977639" cy="219456"/>
+          </a:xfrm>
+          <a:prstGeom prst="rect">
+            <a:avLst/>
+          </a:prstGeom>
+          <a:noFill/>
+        </p:spPr>
+        <p:txBody>
+          <a:bodyPr wrap="square">
+            <a:spAutoFit/>
+          </a:bodyPr>
+          <a:lstStyle/>
+          <a:p>
+            <a:pPr>
+              <a:defRPr sz="1250" b="1">
+                <a:solidFill>
+                  <a:srgbClr val="2666AC"/>
+                </a:solidFill>
+                <a:latin typeface="Aptos"/>
+              </a:defRPr>
+            </a:pPr>
+            <a:r>
+              <a:t>Gaussian noise</a:t>
+            </a:r>
+          </a:p>
+        </p:txBody>
+      </p:sp>
+      <p:sp>
+        <p:nvSpPr>
+          <p:cNvPr id="13" name="Rounded Rectangle 12"/>
+          <p:cNvSpPr/>
+          <p:nvPr/>
+        </p:nvSpPr>
+        <p:spPr>
+          <a:xfrm>
+            <a:off x="3063240" y="2176272"/>
+            <a:ext cx="1828800" cy="1325880"/>
+          </a:xfrm>
+          <a:prstGeom prst="roundRect">
+            <a:avLst/>
+          </a:prstGeom>
+          <a:solidFill>
+            <a:srgbClr val="F1F5F5"/>
+          </a:solidFill>
+          <a:ln w="8890">
+            <a:solidFill>
+              <a:srgbClr val="D2DBDB"/>
+            </a:solidFill>
+          </a:ln>
+        </p:spPr>
+        <p:style>
+          <a:lnRef idx="1">
+            <a:schemeClr val="accent1"/>
+          </a:lnRef>
+          <a:fillRef idx="3">
+            <a:schemeClr val="accent1"/>
+          </a:fillRef>
+          <a:effectRef idx="2">
+            <a:schemeClr val="accent1"/>
+          </a:effectRef>
+          <a:fontRef idx="minor">
+            <a:schemeClr val="lt1"/>
+          </a:fontRef>
+        </p:style>
+        <p:txBody>
+          <a:bodyPr rtlCol="0" anchor="ctr"/>
+          <a:lstStyle/>
+          <a:p>
+            <a:pPr algn="ctr"/>
+            <a:endParaRPr/>
+          </a:p>
+        </p:txBody>
+      </p:sp>
+      <p:sp>
+        <p:nvSpPr>
+          <p:cNvPr id="14" name="Rounded Rectangle 13"/>
+          <p:cNvSpPr/>
+          <p:nvPr/>
+        </p:nvSpPr>
+        <p:spPr>
+          <a:xfrm>
+            <a:off x="5166360" y="2176272"/>
+            <a:ext cx="1828800" cy="1325880"/>
+          </a:xfrm>
+          <a:prstGeom prst="roundRect">
+            <a:avLst/>
+          </a:prstGeom>
+          <a:solidFill>
+            <a:srgbClr val="F1F5F5"/>
+          </a:solidFill>
+          <a:ln w="8890">
+            <a:solidFill>
+              <a:srgbClr val="D2DBDB"/>
+            </a:solidFill>
+          </a:ln>
+        </p:spPr>
+        <p:style>
+          <a:lnRef idx="1">
+            <a:schemeClr val="accent1"/>
+          </a:lnRef>
+          <a:fillRef idx="3">
+            <a:schemeClr val="accent1"/>
+          </a:fillRef>
+          <a:effectRef idx="2">
+            <a:schemeClr val="accent1"/>
+          </a:effectRef>
+          <a:fontRef idx="minor">
+            <a:schemeClr val="lt1"/>
+          </a:fontRef>
+        </p:style>
+        <p:txBody>
+          <a:bodyPr rtlCol="0" anchor="ctr"/>
+          <a:lstStyle/>
+          <a:p>
+            <a:pPr algn="ctr"/>
+            <a:endParaRPr/>
+          </a:p>
+        </p:txBody>
+      </p:sp>
       <p:pic>
         <p:nvPicPr>
-          <p:cNvPr id="11" name="Picture 10" descr="data1_tumor_example.jpg"/>
+          <p:cNvPr id="15" name="Picture 14" descr="image.png"/>
           <p:cNvPicPr>
             <a:picLocks noChangeAspect="1"/>
           </p:cNvPicPr>
@@ -11516,60 +11310,155 @@
         </p:blipFill>
         <p:spPr>
           <a:xfrm>
-            <a:off x="4828032" y="2057400"/>
-            <a:ext cx="2560320" cy="2560320"/>
+            <a:off x="3447287" y="2249424"/>
+            <a:ext cx="1060704" cy="1060704"/>
           </a:xfrm>
           <a:prstGeom prst="rect">
             <a:avLst/>
           </a:prstGeom>
         </p:spPr>
       </p:pic>
-      <p:sp>
-        <p:nvSpPr>
-          <p:cNvPr id="12" name="TextBox 11"/>
-          <p:cNvSpPr txBox="1"/>
-          <p:nvPr/>
-        </p:nvSpPr>
-        <p:spPr>
-          <a:xfrm>
-            <a:off x="4800600" y="4983480"/>
-            <a:ext cx="2560320" cy="228600"/>
-          </a:xfrm>
-          <a:prstGeom prst="rect">
-            <a:avLst/>
-          </a:prstGeom>
-          <a:noFill/>
-        </p:spPr>
-        <p:txBody>
-          <a:bodyPr wrap="none" lIns="18288" tIns="9144" rIns="18288" bIns="9144">
+      <p:pic>
+        <p:nvPicPr>
+          <p:cNvPr id="16" name="Picture 15" descr="gaussian_noise_restored.png"/>
+          <p:cNvPicPr>
+            <a:picLocks noChangeAspect="1"/>
+          </p:cNvPicPr>
+          <p:nvPr/>
+        </p:nvPicPr>
+        <p:blipFill>
+          <a:blip r:embed="rId4"/>
+          <a:stretch>
+            <a:fillRect/>
+          </a:stretch>
+        </p:blipFill>
+        <p:spPr>
+          <a:xfrm>
+            <a:off x="5550407" y="2249424"/>
+            <a:ext cx="1060704" cy="1060704"/>
+          </a:xfrm>
+          <a:prstGeom prst="rect">
+            <a:avLst/>
+          </a:prstGeom>
+        </p:spPr>
+      </p:pic>
+      <p:sp>
+        <p:nvSpPr>
+          <p:cNvPr id="17" name="TextBox 16"/>
+          <p:cNvSpPr txBox="1"/>
+          <p:nvPr/>
+        </p:nvSpPr>
+        <p:spPr>
+          <a:xfrm>
+            <a:off x="3291840" y="3438144"/>
+            <a:ext cx="1417320" cy="164592"/>
+          </a:xfrm>
+          <a:prstGeom prst="rect">
+            <a:avLst/>
+          </a:prstGeom>
+          <a:noFill/>
+        </p:spPr>
+        <p:txBody>
+          <a:bodyPr wrap="square">
             <a:spAutoFit/>
           </a:bodyPr>
           <a:lstStyle/>
           <a:p>
             <a:pPr algn="ctr">
-              <a:defRPr sz="1400" b="1">
-                <a:solidFill>
-                  <a:srgbClr val="182228"/>
-                </a:solidFill>
-                <a:latin typeface="Aptos"/>
-              </a:defRPr>
-            </a:pPr>
-            <a:r>
-              <a:t>Data 1: tumor</a:t>
-            </a:r>
-          </a:p>
-        </p:txBody>
-      </p:sp>
-      <p:sp>
-        <p:nvSpPr>
-          <p:cNvPr id="13" name="Rounded Rectangle 12"/>
+              <a:defRPr sz="850" b="0">
+                <a:solidFill>
+                  <a:srgbClr val="56636B"/>
+                </a:solidFill>
+                <a:latin typeface="Aptos"/>
+              </a:defRPr>
+            </a:pPr>
+            <a:r>
+              <a:t>distorted</a:t>
+            </a:r>
+          </a:p>
+        </p:txBody>
+      </p:sp>
+      <p:sp>
+        <p:nvSpPr>
+          <p:cNvPr id="18" name="TextBox 17"/>
+          <p:cNvSpPr txBox="1"/>
+          <p:nvPr/>
+        </p:nvSpPr>
+        <p:spPr>
+          <a:xfrm>
+            <a:off x="5394960" y="3438144"/>
+            <a:ext cx="1417320" cy="164592"/>
+          </a:xfrm>
+          <a:prstGeom prst="rect">
+            <a:avLst/>
+          </a:prstGeom>
+          <a:noFill/>
+        </p:spPr>
+        <p:txBody>
+          <a:bodyPr wrap="square">
+            <a:spAutoFit/>
+          </a:bodyPr>
+          <a:lstStyle/>
+          <a:p>
+            <a:pPr algn="ctr">
+              <a:defRPr sz="850" b="0">
+                <a:solidFill>
+                  <a:srgbClr val="56636B"/>
+                </a:solidFill>
+                <a:latin typeface="Aptos"/>
+              </a:defRPr>
+            </a:pPr>
+            <a:r>
+              <a:t>restored</a:t>
+            </a:r>
+          </a:p>
+        </p:txBody>
+      </p:sp>
+      <p:cxnSp>
+        <p:nvCxnSpPr>
+          <p:cNvPr id="19" name="Connector 18"/>
+          <p:cNvCxnSpPr/>
+          <p:nvPr/>
+        </p:nvCxnSpPr>
+        <p:spPr>
+          <a:xfrm>
+            <a:off x="4919472" y="2834639"/>
+            <a:ext cx="201168" cy="0"/>
+          </a:xfrm>
+          <a:prstGeom prst="line">
+            <a:avLst/>
+          </a:prstGeom>
+          <a:ln w="17780">
+            <a:solidFill>
+              <a:srgbClr val="2666AC"/>
+            </a:solidFill>
+          </a:ln>
+        </p:spPr>
+        <p:style>
+          <a:lnRef idx="2">
+            <a:schemeClr val="accent1"/>
+          </a:lnRef>
+          <a:fillRef idx="0">
+            <a:schemeClr val="accent1"/>
+          </a:fillRef>
+          <a:effectRef idx="1">
+            <a:schemeClr val="accent1"/>
+          </a:effectRef>
+          <a:fontRef idx="minor">
+            <a:schemeClr val="tx1"/>
+          </a:fontRef>
+        </p:style>
+      </p:cxnSp>
+      <p:sp>
+        <p:nvSpPr>
+          <p:cNvPr id="20" name="Rounded Rectangle 19"/>
           <p:cNvSpPr/>
           <p:nvPr/>
         </p:nvSpPr>
         <p:spPr>
           <a:xfrm>
-            <a:off x="8275320" y="1783080"/>
-            <a:ext cx="3246120" cy="4114800"/>
+            <a:off x="7498079" y="1719072"/>
+            <a:ext cx="4343400" cy="2148840"/>
           </a:xfrm>
           <a:prstGeom prst="roundRect">
             <a:avLst/>
@@ -11606,62 +11495,979 @@
           </a:p>
         </p:txBody>
       </p:sp>
+      <p:sp>
+        <p:nvSpPr>
+          <p:cNvPr id="21" name="TextBox 20"/>
+          <p:cNvSpPr txBox="1"/>
+          <p:nvPr/>
+        </p:nvSpPr>
+        <p:spPr>
+          <a:xfrm>
+            <a:off x="7662671" y="1856231"/>
+            <a:ext cx="3977639" cy="219456"/>
+          </a:xfrm>
+          <a:prstGeom prst="rect">
+            <a:avLst/>
+          </a:prstGeom>
+          <a:noFill/>
+        </p:spPr>
+        <p:txBody>
+          <a:bodyPr wrap="square">
+            <a:spAutoFit/>
+          </a:bodyPr>
+          <a:lstStyle/>
+          <a:p>
+            <a:pPr>
+              <a:defRPr sz="1250" b="1">
+                <a:solidFill>
+                  <a:srgbClr val="B2483E"/>
+                </a:solidFill>
+                <a:latin typeface="Aptos"/>
+              </a:defRPr>
+            </a:pPr>
+            <a:r>
+              <a:t>Salt-and-pepper</a:t>
+            </a:r>
+          </a:p>
+        </p:txBody>
+      </p:sp>
+      <p:sp>
+        <p:nvSpPr>
+          <p:cNvPr id="22" name="Rounded Rectangle 21"/>
+          <p:cNvSpPr/>
+          <p:nvPr/>
+        </p:nvSpPr>
+        <p:spPr>
+          <a:xfrm>
+            <a:off x="7680959" y="2176272"/>
+            <a:ext cx="1828800" cy="1325880"/>
+          </a:xfrm>
+          <a:prstGeom prst="roundRect">
+            <a:avLst/>
+          </a:prstGeom>
+          <a:solidFill>
+            <a:srgbClr val="F1F5F5"/>
+          </a:solidFill>
+          <a:ln w="8890">
+            <a:solidFill>
+              <a:srgbClr val="D2DBDB"/>
+            </a:solidFill>
+          </a:ln>
+        </p:spPr>
+        <p:style>
+          <a:lnRef idx="1">
+            <a:schemeClr val="accent1"/>
+          </a:lnRef>
+          <a:fillRef idx="3">
+            <a:schemeClr val="accent1"/>
+          </a:fillRef>
+          <a:effectRef idx="2">
+            <a:schemeClr val="accent1"/>
+          </a:effectRef>
+          <a:fontRef idx="minor">
+            <a:schemeClr val="lt1"/>
+          </a:fontRef>
+        </p:style>
+        <p:txBody>
+          <a:bodyPr rtlCol="0" anchor="ctr"/>
+          <a:lstStyle/>
+          <a:p>
+            <a:pPr algn="ctr"/>
+            <a:endParaRPr/>
+          </a:p>
+        </p:txBody>
+      </p:sp>
+      <p:sp>
+        <p:nvSpPr>
+          <p:cNvPr id="23" name="Rounded Rectangle 22"/>
+          <p:cNvSpPr/>
+          <p:nvPr/>
+        </p:nvSpPr>
+        <p:spPr>
+          <a:xfrm>
+            <a:off x="9784080" y="2176272"/>
+            <a:ext cx="1828800" cy="1325880"/>
+          </a:xfrm>
+          <a:prstGeom prst="roundRect">
+            <a:avLst/>
+          </a:prstGeom>
+          <a:solidFill>
+            <a:srgbClr val="F1F5F5"/>
+          </a:solidFill>
+          <a:ln w="8890">
+            <a:solidFill>
+              <a:srgbClr val="D2DBDB"/>
+            </a:solidFill>
+          </a:ln>
+        </p:spPr>
+        <p:style>
+          <a:lnRef idx="1">
+            <a:schemeClr val="accent1"/>
+          </a:lnRef>
+          <a:fillRef idx="3">
+            <a:schemeClr val="accent1"/>
+          </a:fillRef>
+          <a:effectRef idx="2">
+            <a:schemeClr val="accent1"/>
+          </a:effectRef>
+          <a:fontRef idx="minor">
+            <a:schemeClr val="lt1"/>
+          </a:fontRef>
+        </p:style>
+        <p:txBody>
+          <a:bodyPr rtlCol="0" anchor="ctr"/>
+          <a:lstStyle/>
+          <a:p>
+            <a:pPr algn="ctr"/>
+            <a:endParaRPr/>
+          </a:p>
+        </p:txBody>
+      </p:sp>
       <p:pic>
         <p:nvPicPr>
-          <p:cNvPr id="14" name="Picture 13" descr="task3_yolo_mask_example.png"/>
+          <p:cNvPr id="24" name="Picture 23" descr="image.png"/>
           <p:cNvPicPr>
             <a:picLocks noChangeAspect="1"/>
           </p:cNvPicPr>
           <p:nvPr/>
         </p:nvPicPr>
         <p:blipFill>
-          <a:blip r:embed="rId4"/>
+          <a:blip r:embed="rId5"/>
           <a:stretch>
             <a:fillRect/>
           </a:stretch>
         </p:blipFill>
         <p:spPr>
           <a:xfrm>
-            <a:off x="8253802" y="2539024"/>
-            <a:ext cx="3272050" cy="1904960"/>
+            <a:off x="8065008" y="2249424"/>
+            <a:ext cx="1060704" cy="1060704"/>
           </a:xfrm>
           <a:prstGeom prst="rect">
             <a:avLst/>
           </a:prstGeom>
         </p:spPr>
       </p:pic>
-      <p:sp>
-        <p:nvSpPr>
-          <p:cNvPr id="15" name="TextBox 14"/>
-          <p:cNvSpPr txBox="1"/>
-          <p:nvPr/>
-        </p:nvSpPr>
-        <p:spPr>
-          <a:xfrm>
-            <a:off x="8595360" y="4983480"/>
-            <a:ext cx="2560320" cy="228600"/>
-          </a:xfrm>
-          <a:prstGeom prst="rect">
-            <a:avLst/>
-          </a:prstGeom>
-          <a:noFill/>
-        </p:spPr>
-        <p:txBody>
-          <a:bodyPr wrap="none" lIns="18288" tIns="9144" rIns="18288" bIns="9144">
+      <p:pic>
+        <p:nvPicPr>
+          <p:cNvPr id="25" name="Picture 24" descr="salt_and_pepper_restored.png"/>
+          <p:cNvPicPr>
+            <a:picLocks noChangeAspect="1"/>
+          </p:cNvPicPr>
+          <p:nvPr/>
+        </p:nvPicPr>
+        <p:blipFill>
+          <a:blip r:embed="rId6"/>
+          <a:stretch>
+            <a:fillRect/>
+          </a:stretch>
+        </p:blipFill>
+        <p:spPr>
+          <a:xfrm>
+            <a:off x="10168128" y="2249424"/>
+            <a:ext cx="1060704" cy="1060704"/>
+          </a:xfrm>
+          <a:prstGeom prst="rect">
+            <a:avLst/>
+          </a:prstGeom>
+        </p:spPr>
+      </p:pic>
+      <p:sp>
+        <p:nvSpPr>
+          <p:cNvPr id="26" name="TextBox 25"/>
+          <p:cNvSpPr txBox="1"/>
+          <p:nvPr/>
+        </p:nvSpPr>
+        <p:spPr>
+          <a:xfrm>
+            <a:off x="7909559" y="3438144"/>
+            <a:ext cx="1417320" cy="164592"/>
+          </a:xfrm>
+          <a:prstGeom prst="rect">
+            <a:avLst/>
+          </a:prstGeom>
+          <a:noFill/>
+        </p:spPr>
+        <p:txBody>
+          <a:bodyPr wrap="square">
             <a:spAutoFit/>
           </a:bodyPr>
           <a:lstStyle/>
           <a:p>
             <a:pPr algn="ctr">
-              <a:defRPr sz="1400" b="1">
-                <a:solidFill>
-                  <a:srgbClr val="182228"/>
-                </a:solidFill>
-                <a:latin typeface="Aptos"/>
-              </a:defRPr>
-            </a:pPr>
-            <a:r>
-              <a:t>Data 2: mask</a:t>
+              <a:defRPr sz="850" b="0">
+                <a:solidFill>
+                  <a:srgbClr val="56636B"/>
+                </a:solidFill>
+                <a:latin typeface="Aptos"/>
+              </a:defRPr>
+            </a:pPr>
+            <a:r>
+              <a:t>distorted</a:t>
+            </a:r>
+          </a:p>
+        </p:txBody>
+      </p:sp>
+      <p:sp>
+        <p:nvSpPr>
+          <p:cNvPr id="27" name="TextBox 26"/>
+          <p:cNvSpPr txBox="1"/>
+          <p:nvPr/>
+        </p:nvSpPr>
+        <p:spPr>
+          <a:xfrm>
+            <a:off x="10012680" y="3438144"/>
+            <a:ext cx="1417320" cy="164592"/>
+          </a:xfrm>
+          <a:prstGeom prst="rect">
+            <a:avLst/>
+          </a:prstGeom>
+          <a:noFill/>
+        </p:spPr>
+        <p:txBody>
+          <a:bodyPr wrap="square">
+            <a:spAutoFit/>
+          </a:bodyPr>
+          <a:lstStyle/>
+          <a:p>
+            <a:pPr algn="ctr">
+              <a:defRPr sz="850" b="0">
+                <a:solidFill>
+                  <a:srgbClr val="56636B"/>
+                </a:solidFill>
+                <a:latin typeface="Aptos"/>
+              </a:defRPr>
+            </a:pPr>
+            <a:r>
+              <a:t>restored</a:t>
+            </a:r>
+          </a:p>
+        </p:txBody>
+      </p:sp>
+      <p:cxnSp>
+        <p:nvCxnSpPr>
+          <p:cNvPr id="28" name="Connector 27"/>
+          <p:cNvCxnSpPr/>
+          <p:nvPr/>
+        </p:nvCxnSpPr>
+        <p:spPr>
+          <a:xfrm>
+            <a:off x="9537192" y="2834639"/>
+            <a:ext cx="201167" cy="0"/>
+          </a:xfrm>
+          <a:prstGeom prst="line">
+            <a:avLst/>
+          </a:prstGeom>
+          <a:ln w="17780">
+            <a:solidFill>
+              <a:srgbClr val="B2483E"/>
+            </a:solidFill>
+          </a:ln>
+        </p:spPr>
+        <p:style>
+          <a:lnRef idx="2">
+            <a:schemeClr val="accent1"/>
+          </a:lnRef>
+          <a:fillRef idx="0">
+            <a:schemeClr val="accent1"/>
+          </a:fillRef>
+          <a:effectRef idx="1">
+            <a:schemeClr val="accent1"/>
+          </a:effectRef>
+          <a:fontRef idx="minor">
+            <a:schemeClr val="tx1"/>
+          </a:fontRef>
+        </p:style>
+      </p:cxnSp>
+      <p:sp>
+        <p:nvSpPr>
+          <p:cNvPr id="29" name="Rounded Rectangle 28"/>
+          <p:cNvSpPr/>
+          <p:nvPr/>
+        </p:nvSpPr>
+        <p:spPr>
+          <a:xfrm>
+            <a:off x="2880360" y="4096512"/>
+            <a:ext cx="4343400" cy="2148840"/>
+          </a:xfrm>
+          <a:prstGeom prst="roundRect">
+            <a:avLst/>
+          </a:prstGeom>
+          <a:solidFill>
+            <a:srgbClr val="FFFFFF"/>
+          </a:solidFill>
+          <a:ln w="8890">
+            <a:solidFill>
+              <a:srgbClr val="D2DBDB"/>
+            </a:solidFill>
+          </a:ln>
+        </p:spPr>
+        <p:style>
+          <a:lnRef idx="1">
+            <a:schemeClr val="accent1"/>
+          </a:lnRef>
+          <a:fillRef idx="3">
+            <a:schemeClr val="accent1"/>
+          </a:fillRef>
+          <a:effectRef idx="2">
+            <a:schemeClr val="accent1"/>
+          </a:effectRef>
+          <a:fontRef idx="minor">
+            <a:schemeClr val="lt1"/>
+          </a:fontRef>
+        </p:style>
+        <p:txBody>
+          <a:bodyPr rtlCol="0" anchor="ctr"/>
+          <a:lstStyle/>
+          <a:p>
+            <a:pPr algn="ctr"/>
+            <a:endParaRPr/>
+          </a:p>
+        </p:txBody>
+      </p:sp>
+      <p:sp>
+        <p:nvSpPr>
+          <p:cNvPr id="30" name="TextBox 29"/>
+          <p:cNvSpPr txBox="1"/>
+          <p:nvPr/>
+        </p:nvSpPr>
+        <p:spPr>
+          <a:xfrm>
+            <a:off x="3044952" y="4233672"/>
+            <a:ext cx="3977639" cy="219456"/>
+          </a:xfrm>
+          <a:prstGeom prst="rect">
+            <a:avLst/>
+          </a:prstGeom>
+          <a:noFill/>
+        </p:spPr>
+        <p:txBody>
+          <a:bodyPr wrap="square">
+            <a:spAutoFit/>
+          </a:bodyPr>
+          <a:lstStyle/>
+          <a:p>
+            <a:pPr>
+              <a:defRPr sz="1250" b="1">
+                <a:solidFill>
+                  <a:srgbClr val="008074"/>
+                </a:solidFill>
+                <a:latin typeface="Aptos"/>
+              </a:defRPr>
+            </a:pPr>
+            <a:r>
+              <a:t>Gaussian blur</a:t>
+            </a:r>
+          </a:p>
+        </p:txBody>
+      </p:sp>
+      <p:sp>
+        <p:nvSpPr>
+          <p:cNvPr id="31" name="Rounded Rectangle 30"/>
+          <p:cNvSpPr/>
+          <p:nvPr/>
+        </p:nvSpPr>
+        <p:spPr>
+          <a:xfrm>
+            <a:off x="3063240" y="4553712"/>
+            <a:ext cx="1828800" cy="1325880"/>
+          </a:xfrm>
+          <a:prstGeom prst="roundRect">
+            <a:avLst/>
+          </a:prstGeom>
+          <a:solidFill>
+            <a:srgbClr val="F1F5F5"/>
+          </a:solidFill>
+          <a:ln w="8890">
+            <a:solidFill>
+              <a:srgbClr val="D2DBDB"/>
+            </a:solidFill>
+          </a:ln>
+        </p:spPr>
+        <p:style>
+          <a:lnRef idx="1">
+            <a:schemeClr val="accent1"/>
+          </a:lnRef>
+          <a:fillRef idx="3">
+            <a:schemeClr val="accent1"/>
+          </a:fillRef>
+          <a:effectRef idx="2">
+            <a:schemeClr val="accent1"/>
+          </a:effectRef>
+          <a:fontRef idx="minor">
+            <a:schemeClr val="lt1"/>
+          </a:fontRef>
+        </p:style>
+        <p:txBody>
+          <a:bodyPr rtlCol="0" anchor="ctr"/>
+          <a:lstStyle/>
+          <a:p>
+            <a:pPr algn="ctr"/>
+            <a:endParaRPr/>
+          </a:p>
+        </p:txBody>
+      </p:sp>
+      <p:sp>
+        <p:nvSpPr>
+          <p:cNvPr id="32" name="Rounded Rectangle 31"/>
+          <p:cNvSpPr/>
+          <p:nvPr/>
+        </p:nvSpPr>
+        <p:spPr>
+          <a:xfrm>
+            <a:off x="5166360" y="4553712"/>
+            <a:ext cx="1828800" cy="1325880"/>
+          </a:xfrm>
+          <a:prstGeom prst="roundRect">
+            <a:avLst/>
+          </a:prstGeom>
+          <a:solidFill>
+            <a:srgbClr val="F1F5F5"/>
+          </a:solidFill>
+          <a:ln w="8890">
+            <a:solidFill>
+              <a:srgbClr val="D2DBDB"/>
+            </a:solidFill>
+          </a:ln>
+        </p:spPr>
+        <p:style>
+          <a:lnRef idx="1">
+            <a:schemeClr val="accent1"/>
+          </a:lnRef>
+          <a:fillRef idx="3">
+            <a:schemeClr val="accent1"/>
+          </a:fillRef>
+          <a:effectRef idx="2">
+            <a:schemeClr val="accent1"/>
+          </a:effectRef>
+          <a:fontRef idx="minor">
+            <a:schemeClr val="lt1"/>
+          </a:fontRef>
+        </p:style>
+        <p:txBody>
+          <a:bodyPr rtlCol="0" anchor="ctr"/>
+          <a:lstStyle/>
+          <a:p>
+            <a:pPr algn="ctr"/>
+            <a:endParaRPr/>
+          </a:p>
+        </p:txBody>
+      </p:sp>
+      <p:pic>
+        <p:nvPicPr>
+          <p:cNvPr id="33" name="Picture 32" descr="image.png"/>
+          <p:cNvPicPr>
+            <a:picLocks noChangeAspect="1"/>
+          </p:cNvPicPr>
+          <p:nvPr/>
+        </p:nvPicPr>
+        <p:blipFill>
+          <a:blip r:embed="rId7"/>
+          <a:stretch>
+            <a:fillRect/>
+          </a:stretch>
+        </p:blipFill>
+        <p:spPr>
+          <a:xfrm>
+            <a:off x="3447287" y="4626864"/>
+            <a:ext cx="1060704" cy="1060704"/>
+          </a:xfrm>
+          <a:prstGeom prst="rect">
+            <a:avLst/>
+          </a:prstGeom>
+        </p:spPr>
+      </p:pic>
+      <p:pic>
+        <p:nvPicPr>
+          <p:cNvPr id="34" name="Picture 33" descr="gaussian_blur_restored.png"/>
+          <p:cNvPicPr>
+            <a:picLocks noChangeAspect="1"/>
+          </p:cNvPicPr>
+          <p:nvPr/>
+        </p:nvPicPr>
+        <p:blipFill>
+          <a:blip r:embed="rId8"/>
+          <a:stretch>
+            <a:fillRect/>
+          </a:stretch>
+        </p:blipFill>
+        <p:spPr>
+          <a:xfrm>
+            <a:off x="5550407" y="4626864"/>
+            <a:ext cx="1060704" cy="1060704"/>
+          </a:xfrm>
+          <a:prstGeom prst="rect">
+            <a:avLst/>
+          </a:prstGeom>
+        </p:spPr>
+      </p:pic>
+      <p:sp>
+        <p:nvSpPr>
+          <p:cNvPr id="35" name="TextBox 34"/>
+          <p:cNvSpPr txBox="1"/>
+          <p:nvPr/>
+        </p:nvSpPr>
+        <p:spPr>
+          <a:xfrm>
+            <a:off x="3291840" y="5815584"/>
+            <a:ext cx="1417320" cy="164592"/>
+          </a:xfrm>
+          <a:prstGeom prst="rect">
+            <a:avLst/>
+          </a:prstGeom>
+          <a:noFill/>
+        </p:spPr>
+        <p:txBody>
+          <a:bodyPr wrap="square">
+            <a:spAutoFit/>
+          </a:bodyPr>
+          <a:lstStyle/>
+          <a:p>
+            <a:pPr algn="ctr">
+              <a:defRPr sz="850" b="0">
+                <a:solidFill>
+                  <a:srgbClr val="56636B"/>
+                </a:solidFill>
+                <a:latin typeface="Aptos"/>
+              </a:defRPr>
+            </a:pPr>
+            <a:r>
+              <a:t>distorted</a:t>
+            </a:r>
+          </a:p>
+        </p:txBody>
+      </p:sp>
+      <p:sp>
+        <p:nvSpPr>
+          <p:cNvPr id="36" name="TextBox 35"/>
+          <p:cNvSpPr txBox="1"/>
+          <p:nvPr/>
+        </p:nvSpPr>
+        <p:spPr>
+          <a:xfrm>
+            <a:off x="5394960" y="5815584"/>
+            <a:ext cx="1417320" cy="164592"/>
+          </a:xfrm>
+          <a:prstGeom prst="rect">
+            <a:avLst/>
+          </a:prstGeom>
+          <a:noFill/>
+        </p:spPr>
+        <p:txBody>
+          <a:bodyPr wrap="square">
+            <a:spAutoFit/>
+          </a:bodyPr>
+          <a:lstStyle/>
+          <a:p>
+            <a:pPr algn="ctr">
+              <a:defRPr sz="850" b="0">
+                <a:solidFill>
+                  <a:srgbClr val="56636B"/>
+                </a:solidFill>
+                <a:latin typeface="Aptos"/>
+              </a:defRPr>
+            </a:pPr>
+            <a:r>
+              <a:t>restored</a:t>
+            </a:r>
+          </a:p>
+        </p:txBody>
+      </p:sp>
+      <p:cxnSp>
+        <p:nvCxnSpPr>
+          <p:cNvPr id="37" name="Connector 36"/>
+          <p:cNvCxnSpPr/>
+          <p:nvPr/>
+        </p:nvCxnSpPr>
+        <p:spPr>
+          <a:xfrm>
+            <a:off x="4919472" y="5212080"/>
+            <a:ext cx="201168" cy="0"/>
+          </a:xfrm>
+          <a:prstGeom prst="line">
+            <a:avLst/>
+          </a:prstGeom>
+          <a:ln w="17780">
+            <a:solidFill>
+              <a:srgbClr val="008074"/>
+            </a:solidFill>
+          </a:ln>
+        </p:spPr>
+        <p:style>
+          <a:lnRef idx="2">
+            <a:schemeClr val="accent1"/>
+          </a:lnRef>
+          <a:fillRef idx="0">
+            <a:schemeClr val="accent1"/>
+          </a:fillRef>
+          <a:effectRef idx="1">
+            <a:schemeClr val="accent1"/>
+          </a:effectRef>
+          <a:fontRef idx="minor">
+            <a:schemeClr val="tx1"/>
+          </a:fontRef>
+        </p:style>
+      </p:cxnSp>
+      <p:sp>
+        <p:nvSpPr>
+          <p:cNvPr id="38" name="Rounded Rectangle 37"/>
+          <p:cNvSpPr/>
+          <p:nvPr/>
+        </p:nvSpPr>
+        <p:spPr>
+          <a:xfrm>
+            <a:off x="7498079" y="4096512"/>
+            <a:ext cx="4343400" cy="2148840"/>
+          </a:xfrm>
+          <a:prstGeom prst="roundRect">
+            <a:avLst/>
+          </a:prstGeom>
+          <a:solidFill>
+            <a:srgbClr val="FFFFFF"/>
+          </a:solidFill>
+          <a:ln w="8890">
+            <a:solidFill>
+              <a:srgbClr val="D2DBDB"/>
+            </a:solidFill>
+          </a:ln>
+        </p:spPr>
+        <p:style>
+          <a:lnRef idx="1">
+            <a:schemeClr val="accent1"/>
+          </a:lnRef>
+          <a:fillRef idx="3">
+            <a:schemeClr val="accent1"/>
+          </a:fillRef>
+          <a:effectRef idx="2">
+            <a:schemeClr val="accent1"/>
+          </a:effectRef>
+          <a:fontRef idx="minor">
+            <a:schemeClr val="lt1"/>
+          </a:fontRef>
+        </p:style>
+        <p:txBody>
+          <a:bodyPr rtlCol="0" anchor="ctr"/>
+          <a:lstStyle/>
+          <a:p>
+            <a:pPr algn="ctr"/>
+            <a:endParaRPr/>
+          </a:p>
+        </p:txBody>
+      </p:sp>
+      <p:sp>
+        <p:nvSpPr>
+          <p:cNvPr id="39" name="TextBox 38"/>
+          <p:cNvSpPr txBox="1"/>
+          <p:nvPr/>
+        </p:nvSpPr>
+        <p:spPr>
+          <a:xfrm>
+            <a:off x="7662671" y="4233672"/>
+            <a:ext cx="3977639" cy="219456"/>
+          </a:xfrm>
+          <a:prstGeom prst="rect">
+            <a:avLst/>
+          </a:prstGeom>
+          <a:noFill/>
+        </p:spPr>
+        <p:txBody>
+          <a:bodyPr wrap="square">
+            <a:spAutoFit/>
+          </a:bodyPr>
+          <a:lstStyle/>
+          <a:p>
+            <a:pPr>
+              <a:defRPr sz="1250" b="1">
+                <a:solidFill>
+                  <a:srgbClr val="B88630"/>
+                </a:solidFill>
+                <a:latin typeface="Aptos"/>
+              </a:defRPr>
+            </a:pPr>
+            <a:r>
+              <a:t>Brightness / contrast</a:t>
+            </a:r>
+          </a:p>
+        </p:txBody>
+      </p:sp>
+      <p:sp>
+        <p:nvSpPr>
+          <p:cNvPr id="40" name="Rounded Rectangle 39"/>
+          <p:cNvSpPr/>
+          <p:nvPr/>
+        </p:nvSpPr>
+        <p:spPr>
+          <a:xfrm>
+            <a:off x="7680959" y="4553712"/>
+            <a:ext cx="1828800" cy="1325880"/>
+          </a:xfrm>
+          <a:prstGeom prst="roundRect">
+            <a:avLst/>
+          </a:prstGeom>
+          <a:solidFill>
+            <a:srgbClr val="F1F5F5"/>
+          </a:solidFill>
+          <a:ln w="8890">
+            <a:solidFill>
+              <a:srgbClr val="D2DBDB"/>
+            </a:solidFill>
+          </a:ln>
+        </p:spPr>
+        <p:style>
+          <a:lnRef idx="1">
+            <a:schemeClr val="accent1"/>
+          </a:lnRef>
+          <a:fillRef idx="3">
+            <a:schemeClr val="accent1"/>
+          </a:fillRef>
+          <a:effectRef idx="2">
+            <a:schemeClr val="accent1"/>
+          </a:effectRef>
+          <a:fontRef idx="minor">
+            <a:schemeClr val="lt1"/>
+          </a:fontRef>
+        </p:style>
+        <p:txBody>
+          <a:bodyPr rtlCol="0" anchor="ctr"/>
+          <a:lstStyle/>
+          <a:p>
+            <a:pPr algn="ctr"/>
+            <a:endParaRPr/>
+          </a:p>
+        </p:txBody>
+      </p:sp>
+      <p:sp>
+        <p:nvSpPr>
+          <p:cNvPr id="41" name="Rounded Rectangle 40"/>
+          <p:cNvSpPr/>
+          <p:nvPr/>
+        </p:nvSpPr>
+        <p:spPr>
+          <a:xfrm>
+            <a:off x="9784080" y="4553712"/>
+            <a:ext cx="1828800" cy="1325880"/>
+          </a:xfrm>
+          <a:prstGeom prst="roundRect">
+            <a:avLst/>
+          </a:prstGeom>
+          <a:solidFill>
+            <a:srgbClr val="F1F5F5"/>
+          </a:solidFill>
+          <a:ln w="8890">
+            <a:solidFill>
+              <a:srgbClr val="D2DBDB"/>
+            </a:solidFill>
+          </a:ln>
+        </p:spPr>
+        <p:style>
+          <a:lnRef idx="1">
+            <a:schemeClr val="accent1"/>
+          </a:lnRef>
+          <a:fillRef idx="3">
+            <a:schemeClr val="accent1"/>
+          </a:fillRef>
+          <a:effectRef idx="2">
+            <a:schemeClr val="accent1"/>
+          </a:effectRef>
+          <a:fontRef idx="minor">
+            <a:schemeClr val="lt1"/>
+          </a:fontRef>
+        </p:style>
+        <p:txBody>
+          <a:bodyPr rtlCol="0" anchor="ctr"/>
+          <a:lstStyle/>
+          <a:p>
+            <a:pPr algn="ctr"/>
+            <a:endParaRPr/>
+          </a:p>
+        </p:txBody>
+      </p:sp>
+      <p:pic>
+        <p:nvPicPr>
+          <p:cNvPr id="42" name="Picture 41" descr="image.png"/>
+          <p:cNvPicPr>
+            <a:picLocks noChangeAspect="1"/>
+          </p:cNvPicPr>
+          <p:nvPr/>
+        </p:nvPicPr>
+        <p:blipFill>
+          <a:blip r:embed="rId9"/>
+          <a:stretch>
+            <a:fillRect/>
+          </a:stretch>
+        </p:blipFill>
+        <p:spPr>
+          <a:xfrm>
+            <a:off x="8065008" y="4626864"/>
+            <a:ext cx="1060704" cy="1060704"/>
+          </a:xfrm>
+          <a:prstGeom prst="rect">
+            <a:avLst/>
+          </a:prstGeom>
+        </p:spPr>
+      </p:pic>
+      <p:pic>
+        <p:nvPicPr>
+          <p:cNvPr id="43" name="Picture 42" descr="brightness_contrast_restored.png"/>
+          <p:cNvPicPr>
+            <a:picLocks noChangeAspect="1"/>
+          </p:cNvPicPr>
+          <p:nvPr/>
+        </p:nvPicPr>
+        <p:blipFill>
+          <a:blip r:embed="rId10"/>
+          <a:stretch>
+            <a:fillRect/>
+          </a:stretch>
+        </p:blipFill>
+        <p:spPr>
+          <a:xfrm>
+            <a:off x="10168128" y="4626864"/>
+            <a:ext cx="1060704" cy="1060704"/>
+          </a:xfrm>
+          <a:prstGeom prst="rect">
+            <a:avLst/>
+          </a:prstGeom>
+        </p:spPr>
+      </p:pic>
+      <p:sp>
+        <p:nvSpPr>
+          <p:cNvPr id="44" name="TextBox 43"/>
+          <p:cNvSpPr txBox="1"/>
+          <p:nvPr/>
+        </p:nvSpPr>
+        <p:spPr>
+          <a:xfrm>
+            <a:off x="7909559" y="5815584"/>
+            <a:ext cx="1417320" cy="164592"/>
+          </a:xfrm>
+          <a:prstGeom prst="rect">
+            <a:avLst/>
+          </a:prstGeom>
+          <a:noFill/>
+        </p:spPr>
+        <p:txBody>
+          <a:bodyPr wrap="square">
+            <a:spAutoFit/>
+          </a:bodyPr>
+          <a:lstStyle/>
+          <a:p>
+            <a:pPr algn="ctr">
+              <a:defRPr sz="850" b="0">
+                <a:solidFill>
+                  <a:srgbClr val="56636B"/>
+                </a:solidFill>
+                <a:latin typeface="Aptos"/>
+              </a:defRPr>
+            </a:pPr>
+            <a:r>
+              <a:t>distorted</a:t>
+            </a:r>
+          </a:p>
+        </p:txBody>
+      </p:sp>
+      <p:sp>
+        <p:nvSpPr>
+          <p:cNvPr id="45" name="TextBox 44"/>
+          <p:cNvSpPr txBox="1"/>
+          <p:nvPr/>
+        </p:nvSpPr>
+        <p:spPr>
+          <a:xfrm>
+            <a:off x="10012680" y="5815584"/>
+            <a:ext cx="1417320" cy="164592"/>
+          </a:xfrm>
+          <a:prstGeom prst="rect">
+            <a:avLst/>
+          </a:prstGeom>
+          <a:noFill/>
+        </p:spPr>
+        <p:txBody>
+          <a:bodyPr wrap="square">
+            <a:spAutoFit/>
+          </a:bodyPr>
+          <a:lstStyle/>
+          <a:p>
+            <a:pPr algn="ctr">
+              <a:defRPr sz="850" b="0">
+                <a:solidFill>
+                  <a:srgbClr val="56636B"/>
+                </a:solidFill>
+                <a:latin typeface="Aptos"/>
+              </a:defRPr>
+            </a:pPr>
+            <a:r>
+              <a:t>restored</a:t>
+            </a:r>
+          </a:p>
+        </p:txBody>
+      </p:sp>
+      <p:cxnSp>
+        <p:nvCxnSpPr>
+          <p:cNvPr id="46" name="Connector 45"/>
+          <p:cNvCxnSpPr/>
+          <p:nvPr/>
+        </p:nvCxnSpPr>
+        <p:spPr>
+          <a:xfrm>
+            <a:off x="9537192" y="5212080"/>
+            <a:ext cx="201167" cy="0"/>
+          </a:xfrm>
+          <a:prstGeom prst="line">
+            <a:avLst/>
+          </a:prstGeom>
+          <a:ln w="17780">
+            <a:solidFill>
+              <a:srgbClr val="B88630"/>
+            </a:solidFill>
+          </a:ln>
+        </p:spPr>
+        <p:style>
+          <a:lnRef idx="2">
+            <a:schemeClr val="accent1"/>
+          </a:lnRef>
+          <a:fillRef idx="0">
+            <a:schemeClr val="accent1"/>
+          </a:fillRef>
+          <a:effectRef idx="1">
+            <a:schemeClr val="accent1"/>
+          </a:effectRef>
+          <a:fontRef idx="minor">
+            <a:schemeClr val="tx1"/>
+          </a:fontRef>
+        </p:style>
+      </p:cxnSp>
+      <p:sp>
+        <p:nvSpPr>
+          <p:cNvPr id="47" name="TextBox 46"/>
+          <p:cNvSpPr txBox="1"/>
+          <p:nvPr/>
+        </p:nvSpPr>
+        <p:spPr>
+          <a:xfrm>
+            <a:off x="11292840" y="6446520"/>
+            <a:ext cx="411480" cy="182880"/>
+          </a:xfrm>
+          <a:prstGeom prst="rect">
+            <a:avLst/>
+          </a:prstGeom>
+          <a:noFill/>
+        </p:spPr>
+        <p:txBody>
+          <a:bodyPr wrap="square">
+            <a:spAutoFit/>
+          </a:bodyPr>
+          <a:lstStyle/>
+          <a:p>
+            <a:pPr algn="r">
+              <a:defRPr sz="800" b="0">
+                <a:solidFill>
+                  <a:srgbClr val="56636B"/>
+                </a:solidFill>
+                <a:latin typeface="Aptos"/>
+              </a:defRPr>
+            </a:pPr>
+            <a:r>
+              <a:t>06</a:t>
             </a:r>
           </a:p>
         </p:txBody>
@@ -11730,7 +12536,7 @@
               </a:defRPr>
             </a:pPr>
             <a:r>
-              <a:t>SHARED DISTORTION AND RESTORATION</a:t>
+              <a:t>ADDITIONAL DISTORTIONS</a:t>
             </a:r>
           </a:p>
         </p:txBody>
@@ -11744,7 +12550,7 @@
         <p:spPr>
           <a:xfrm>
             <a:off x="502920" y="640080"/>
-            <a:ext cx="9326880" cy="566928"/>
+            <a:ext cx="9784080" cy="566928"/>
           </a:xfrm>
           <a:prstGeom prst="rect">
             <a:avLst/>
@@ -11766,7 +12572,7 @@
               </a:defRPr>
             </a:pPr>
             <a:r>
-              <a:t>Original, distorted, and restored images are compared together.</a:t>
+              <a:t>Original, distorted, and restored images for the other distortions.</a:t>
             </a:r>
           </a:p>
         </p:txBody>
@@ -11780,7 +12586,7 @@
         <p:spPr>
           <a:xfrm>
             <a:off x="521207" y="1225296"/>
-            <a:ext cx="9875520" cy="292608"/>
+            <a:ext cx="10058400" cy="292608"/>
           </a:xfrm>
           <a:prstGeom prst="rect">
             <a:avLst/>
@@ -11802,7 +12608,7 @@
               </a:defRPr>
             </a:pPr>
             <a:r>
-              <a:t>Each used distortion is shown with its restored result so the before/after effect is visible.</a:t>
+              <a:t>These methods were also implemented in the distortion/restoration pipeline and are shown with the same before/after structure as slide 6.</a:t>
             </a:r>
           </a:p>
         </p:txBody>
@@ -12098,7 +12904,7 @@
               </a:defRPr>
             </a:pPr>
             <a:r>
-              <a:t>Gaussian noise</a:t>
+              <a:t>Rotation</a:t>
             </a:r>
           </a:p>
         </p:txBody>
@@ -12197,7 +13003,7 @@
       </p:sp>
       <p:pic>
         <p:nvPicPr>
-          <p:cNvPr id="15" name="Picture 14" descr="image.png"/>
+          <p:cNvPr id="15" name="Picture 14" descr="rotation.png"/>
           <p:cNvPicPr>
             <a:picLocks noChangeAspect="1"/>
           </p:cNvPicPr>
@@ -12221,7 +13027,7 @@
       </p:pic>
       <p:pic>
         <p:nvPicPr>
-          <p:cNvPr id="16" name="Picture 15" descr="gaussian_noise_restored.png"/>
+          <p:cNvPr id="16" name="Picture 15" descr="rotation_restored.png"/>
           <p:cNvPicPr>
             <a:picLocks noChangeAspect="1"/>
           </p:cNvPicPr>
@@ -12421,13 +13227,13 @@
             <a:pPr>
               <a:defRPr sz="1250" b="1">
                 <a:solidFill>
-                  <a:srgbClr val="B2483E"/>
-                </a:solidFill>
-                <a:latin typeface="Aptos"/>
-              </a:defRPr>
-            </a:pPr>
-            <a:r>
-              <a:t>Salt-and-pepper</a:t>
+                  <a:srgbClr val="69559E"/>
+                </a:solidFill>
+                <a:latin typeface="Aptos"/>
+              </a:defRPr>
+            </a:pPr>
+            <a:r>
+              <a:t>Perspective warp</a:t>
             </a:r>
           </a:p>
         </p:txBody>
@@ -12526,7 +13332,7 @@
       </p:sp>
       <p:pic>
         <p:nvPicPr>
-          <p:cNvPr id="24" name="Picture 23" descr="image.png"/>
+          <p:cNvPr id="24" name="Picture 23" descr="perspective_warp.png"/>
           <p:cNvPicPr>
             <a:picLocks noChangeAspect="1"/>
           </p:cNvPicPr>
@@ -12550,7 +13356,7 @@
       </p:pic>
       <p:pic>
         <p:nvPicPr>
-          <p:cNvPr id="25" name="Picture 24" descr="salt_and_pepper_restored.png"/>
+          <p:cNvPr id="25" name="Picture 24" descr="perspective_warp_restored.png"/>
           <p:cNvPicPr>
             <a:picLocks noChangeAspect="1"/>
           </p:cNvPicPr>
@@ -12660,7 +13466,7 @@
           </a:prstGeom>
           <a:ln w="17780">
             <a:solidFill>
-              <a:srgbClr val="B2483E"/>
+              <a:srgbClr val="69559E"/>
             </a:solidFill>
           </a:ln>
         </p:spPr>
@@ -12750,13 +13556,13 @@
             <a:pPr>
               <a:defRPr sz="1250" b="1">
                 <a:solidFill>
-                  <a:srgbClr val="008074"/>
-                </a:solidFill>
-                <a:latin typeface="Aptos"/>
-              </a:defRPr>
-            </a:pPr>
-            <a:r>
-              <a:t>Gaussian blur</a:t>
+                  <a:srgbClr val="B2483E"/>
+                </a:solidFill>
+                <a:latin typeface="Aptos"/>
+              </a:defRPr>
+            </a:pPr>
+            <a:r>
+              <a:t>Barrel distortion</a:t>
             </a:r>
           </a:p>
         </p:txBody>
@@ -12855,7 +13661,7 @@
       </p:sp>
       <p:pic>
         <p:nvPicPr>
-          <p:cNvPr id="33" name="Picture 32" descr="image.png"/>
+          <p:cNvPr id="33" name="Picture 32" descr="barrel_distortion.png"/>
           <p:cNvPicPr>
             <a:picLocks noChangeAspect="1"/>
           </p:cNvPicPr>
@@ -12879,7 +13685,7 @@
       </p:pic>
       <p:pic>
         <p:nvPicPr>
-          <p:cNvPr id="34" name="Picture 33" descr="gaussian_blur_restored.png"/>
+          <p:cNvPr id="34" name="Picture 33" descr="barrel_distortion_restored.png"/>
           <p:cNvPicPr>
             <a:picLocks noChangeAspect="1"/>
           </p:cNvPicPr>
@@ -12989,7 +13795,7 @@
           </a:prstGeom>
           <a:ln w="17780">
             <a:solidFill>
-              <a:srgbClr val="008074"/>
+              <a:srgbClr val="B2483E"/>
             </a:solidFill>
           </a:ln>
         </p:spPr>
@@ -13085,7 +13891,7 @@
               </a:defRPr>
             </a:pPr>
             <a:r>
-              <a:t>Brightness / contrast</a:t>
+              <a:t>Pixelation</a:t>
             </a:r>
           </a:p>
         </p:txBody>
@@ -13184,7 +13990,7 @@
       </p:sp>
       <p:pic>
         <p:nvPicPr>
-          <p:cNvPr id="42" name="Picture 41" descr="image.png"/>
+          <p:cNvPr id="42" name="Picture 41" descr="pixelation.png"/>
           <p:cNvPicPr>
             <a:picLocks noChangeAspect="1"/>
           </p:cNvPicPr>
@@ -13208,7 +14014,7 @@
       </p:pic>
       <p:pic>
         <p:nvPicPr>
-          <p:cNvPr id="43" name="Picture 42" descr="brightness_contrast_restored.png"/>
+          <p:cNvPr id="43" name="Picture 42" descr="pixelation_restored.png"/>
           <p:cNvPicPr>
             <a:picLocks noChangeAspect="1"/>
           </p:cNvPicPr>
@@ -13368,7 +14174,7 @@
               </a:defRPr>
             </a:pPr>
             <a:r>
-              <a:t>06</a:t>
+              <a:t>07</a:t>
             </a:r>
           </a:p>
         </p:txBody>
@@ -13382,7 +14188,7 @@
 </file>
 
 <file path=ppt/slides/slide7.xml><?xml version="1.0" encoding="utf-8"?>
-<p:sld xmlns:a="http://schemas.openxmlformats.org/drawingml/2006/main" xmlns:p="http://schemas.openxmlformats.org/presentationml/2006/main" xmlns:r="http://schemas.openxmlformats.org/officeDocument/2006/relationships">
+<p:sld xmlns:a="http://schemas.openxmlformats.org/drawingml/2006/main" xmlns:r="http://schemas.openxmlformats.org/officeDocument/2006/relationships" xmlns:p="http://schemas.openxmlformats.org/presentationml/2006/main">
   <p:cSld>
     <p:bg>
       <p:bgPr>
@@ -13398,7 +14204,14 @@
         <p:cNvGrpSpPr/>
         <p:nvPr/>
       </p:nvGrpSpPr>
-      <p:grpSpPr/>
+      <p:grpSpPr>
+        <a:xfrm>
+          <a:off x="0" y="0"/>
+          <a:ext cx="0" cy="0"/>
+          <a:chOff x="0" y="0"/>
+          <a:chExt cx="0" cy="0"/>
+        </a:xfrm>
+      </p:grpSpPr>
       <p:sp>
         <p:nvSpPr>
           <p:cNvPr id="2" name="TextBox 1"/>
@@ -13430,7 +14243,7 @@
               </a:defRPr>
             </a:pPr>
             <a:r>
-              <a:t>ADDITIONAL DISTORTIONS</a:t>
+              <a:t>RESTORATION METHODS</a:t>
             </a:r>
           </a:p>
         </p:txBody>
@@ -13444,7 +14257,7 @@
         <p:spPr>
           <a:xfrm>
             <a:off x="502920" y="640080"/>
-            <a:ext cx="9784080" cy="566928"/>
+            <a:ext cx="8961120" cy="566928"/>
           </a:xfrm>
           <a:prstGeom prst="rect">
             <a:avLst/>
@@ -13458,7 +14271,7 @@
           <a:lstStyle/>
           <a:p>
             <a:pPr>
-              <a:defRPr sz="2300" b="1">
+              <a:defRPr sz="2400" b="1">
                 <a:solidFill>
                   <a:srgbClr val="182228"/>
                 </a:solidFill>
@@ -13466,7 +14279,7 @@
               </a:defRPr>
             </a:pPr>
             <a:r>
-              <a:t>Original, distorted, and restored images for the other distortions.</a:t>
+              <a:t>How the restorations work after distortion.</a:t>
             </a:r>
           </a:p>
         </p:txBody>
@@ -13480,7 +14293,7 @@
         <p:spPr>
           <a:xfrm>
             <a:off x="521207" y="1225296"/>
-            <a:ext cx="10058400" cy="292608"/>
+            <a:ext cx="9875520" cy="292608"/>
           </a:xfrm>
           <a:prstGeom prst="rect">
             <a:avLst/>
@@ -13502,7 +14315,7 @@
               </a:defRPr>
             </a:pPr>
             <a:r>
-              <a:t>These methods were also implemented in the distortion/restoration pipeline and are shown with the same before/after structure as slide 6.</a:t>
+              <a:t>Each restoration is a simple image-processing step that tries to recover useful MRI structure before measuring the task.</a:t>
             </a:r>
           </a:p>
         </p:txBody>
@@ -13551,8 +14364,8 @@
         </p:nvSpPr>
         <p:spPr>
           <a:xfrm>
-            <a:off x="502920" y="1719072"/>
-            <a:ext cx="2148840" cy="4526280"/>
+            <a:off x="685800" y="1783080"/>
+            <a:ext cx="5166360" cy="1965960"/>
           </a:xfrm>
           <a:prstGeom prst="roundRect">
             <a:avLst/>
@@ -13585,33 +14398,46 @@
           <a:lstStyle/>
           <a:p>
             <a:pPr algn="ctr"/>
-          </a:p>
-        </p:txBody>
-      </p:sp>
-      <p:pic>
-        <p:nvPicPr>
-          <p:cNvPr id="7" name="Picture 6" descr="image.png"/>
-          <p:cNvPicPr>
-            <a:picLocks noChangeAspect="1"/>
-          </p:cNvPicPr>
-          <p:nvPr/>
-        </p:nvPicPr>
-        <p:blipFill>
-          <a:blip r:embed="rId2"/>
-          <a:stretch>
-            <a:fillRect/>
-          </a:stretch>
-        </p:blipFill>
-        <p:spPr>
-          <a:xfrm>
-            <a:off x="713232" y="2331720"/>
-            <a:ext cx="1737360" cy="1737360"/>
-          </a:xfrm>
-          <a:prstGeom prst="rect">
-            <a:avLst/>
-          </a:prstGeom>
-        </p:spPr>
-      </p:pic>
+            <a:endParaRPr/>
+          </a:p>
+        </p:txBody>
+      </p:sp>
+      <p:sp>
+        <p:nvSpPr>
+          <p:cNvPr id="7" name="TextBox 6"/>
+          <p:cNvSpPr txBox="1"/>
+          <p:nvPr/>
+        </p:nvSpPr>
+        <p:spPr>
+          <a:xfrm>
+            <a:off x="886968" y="1947672"/>
+            <a:ext cx="3108960" cy="256032"/>
+          </a:xfrm>
+          <a:prstGeom prst="rect">
+            <a:avLst/>
+          </a:prstGeom>
+          <a:noFill/>
+        </p:spPr>
+        <p:txBody>
+          <a:bodyPr wrap="square">
+            <a:spAutoFit/>
+          </a:bodyPr>
+          <a:lstStyle/>
+          <a:p>
+            <a:pPr>
+              <a:defRPr sz="1500" b="1">
+                <a:solidFill>
+                  <a:srgbClr val="2666AC"/>
+                </a:solidFill>
+                <a:latin typeface="Aptos"/>
+              </a:defRPr>
+            </a:pPr>
+            <a:r>
+              <a:t>Gaussian noise</a:t>
+            </a:r>
+          </a:p>
+        </p:txBody>
+      </p:sp>
       <p:sp>
         <p:nvSpPr>
           <p:cNvPr id="8" name="TextBox 7"/>
@@ -13620,8 +14446,8 @@
         </p:nvSpPr>
         <p:spPr>
           <a:xfrm>
-            <a:off x="749808" y="4617720"/>
-            <a:ext cx="1645920" cy="256032"/>
+            <a:off x="886968" y="2313432"/>
+            <a:ext cx="4617720" cy="502920"/>
           </a:xfrm>
           <a:prstGeom prst="rect">
             <a:avLst/>
@@ -13634,8 +14460,136 @@
           </a:bodyPr>
           <a:lstStyle/>
           <a:p>
+            <a:pPr>
+              <a:defRPr sz="1050" b="0">
+                <a:solidFill>
+                  <a:srgbClr val="182228"/>
+                </a:solidFill>
+                <a:latin typeface="Aptos"/>
+              </a:defRPr>
+            </a:pPr>
+            <a:r>
+              <a:t>Light Gaussian smoothing reduces random pixel noise, then unsharp masking brings edges back.</a:t>
+            </a:r>
+          </a:p>
+        </p:txBody>
+      </p:sp>
+      <p:sp>
+        <p:nvSpPr>
+          <p:cNvPr id="9" name="Rounded Rectangle 8"/>
+          <p:cNvSpPr/>
+          <p:nvPr/>
+        </p:nvSpPr>
+        <p:spPr>
+          <a:xfrm>
+            <a:off x="1005840" y="3026664"/>
+            <a:ext cx="1554480" cy="384048"/>
+          </a:xfrm>
+          <a:prstGeom prst="roundRect">
+            <a:avLst/>
+          </a:prstGeom>
+          <a:solidFill>
+            <a:srgbClr val="F1F5F5"/>
+          </a:solidFill>
+          <a:ln w="8890">
+            <a:solidFill>
+              <a:srgbClr val="D2DBDB"/>
+            </a:solidFill>
+          </a:ln>
+        </p:spPr>
+        <p:style>
+          <a:lnRef idx="1">
+            <a:schemeClr val="accent1"/>
+          </a:lnRef>
+          <a:fillRef idx="3">
+            <a:schemeClr val="accent1"/>
+          </a:fillRef>
+          <a:effectRef idx="2">
+            <a:schemeClr val="accent1"/>
+          </a:effectRef>
+          <a:fontRef idx="minor">
+            <a:schemeClr val="lt1"/>
+          </a:fontRef>
+        </p:style>
+        <p:txBody>
+          <a:bodyPr rtlCol="0" anchor="ctr"/>
+          <a:lstStyle/>
+          <a:p>
+            <a:pPr algn="ctr"/>
+            <a:endParaRPr/>
+          </a:p>
+        </p:txBody>
+      </p:sp>
+      <p:sp>
+        <p:nvSpPr>
+          <p:cNvPr id="10" name="Rounded Rectangle 9"/>
+          <p:cNvSpPr/>
+          <p:nvPr/>
+        </p:nvSpPr>
+        <p:spPr>
+          <a:xfrm>
+            <a:off x="3227832" y="3026664"/>
+            <a:ext cx="1554480" cy="384048"/>
+          </a:xfrm>
+          <a:prstGeom prst="roundRect">
+            <a:avLst/>
+          </a:prstGeom>
+          <a:solidFill>
+            <a:srgbClr val="F1F5F5"/>
+          </a:solidFill>
+          <a:ln w="8890">
+            <a:solidFill>
+              <a:srgbClr val="D2DBDB"/>
+            </a:solidFill>
+          </a:ln>
+        </p:spPr>
+        <p:style>
+          <a:lnRef idx="1">
+            <a:schemeClr val="accent1"/>
+          </a:lnRef>
+          <a:fillRef idx="3">
+            <a:schemeClr val="accent1"/>
+          </a:fillRef>
+          <a:effectRef idx="2">
+            <a:schemeClr val="accent1"/>
+          </a:effectRef>
+          <a:fontRef idx="minor">
+            <a:schemeClr val="lt1"/>
+          </a:fontRef>
+        </p:style>
+        <p:txBody>
+          <a:bodyPr rtlCol="0" anchor="ctr"/>
+          <a:lstStyle/>
+          <a:p>
+            <a:pPr algn="ctr"/>
+            <a:endParaRPr/>
+          </a:p>
+        </p:txBody>
+      </p:sp>
+      <p:sp>
+        <p:nvSpPr>
+          <p:cNvPr id="11" name="TextBox 10"/>
+          <p:cNvSpPr txBox="1"/>
+          <p:nvPr/>
+        </p:nvSpPr>
+        <p:spPr>
+          <a:xfrm>
+            <a:off x="1097280" y="3118104"/>
+            <a:ext cx="1371600" cy="146304"/>
+          </a:xfrm>
+          <a:prstGeom prst="rect">
+            <a:avLst/>
+          </a:prstGeom>
+          <a:noFill/>
+        </p:spPr>
+        <p:txBody>
+          <a:bodyPr wrap="square">
+            <a:spAutoFit/>
+          </a:bodyPr>
+          <a:lstStyle/>
+          <a:p>
             <a:pPr algn="ctr">
-              <a:defRPr sz="1500" b="1">
+              <a:defRPr sz="850" b="1">
                 <a:solidFill>
                   <a:srgbClr val="182228"/>
                 </a:solidFill>
@@ -13643,21 +14597,21 @@
               </a:defRPr>
             </a:pPr>
             <a:r>
-              <a:t>Original</a:t>
-            </a:r>
-          </a:p>
-        </p:txBody>
-      </p:sp>
-      <p:sp>
-        <p:nvSpPr>
-          <p:cNvPr id="9" name="TextBox 8"/>
-          <p:cNvSpPr txBox="1"/>
-          <p:nvPr/>
-        </p:nvSpPr>
-        <p:spPr>
-          <a:xfrm>
-            <a:off x="749808" y="4956048"/>
-            <a:ext cx="1645920" cy="228600"/>
+              <a:t>smooth</a:t>
+            </a:r>
+          </a:p>
+        </p:txBody>
+      </p:sp>
+      <p:sp>
+        <p:nvSpPr>
+          <p:cNvPr id="12" name="TextBox 11"/>
+          <p:cNvSpPr txBox="1"/>
+          <p:nvPr/>
+        </p:nvSpPr>
+        <p:spPr>
+          <a:xfrm>
+            <a:off x="3319272" y="3118104"/>
+            <a:ext cx="1371600" cy="146304"/>
           </a:xfrm>
           <a:prstGeom prst="rect">
             <a:avLst/>
@@ -13671,65 +14625,64 @@
           <a:lstStyle/>
           <a:p>
             <a:pPr algn="ctr">
-              <a:defRPr sz="950" b="0">
-                <a:solidFill>
-                  <a:srgbClr val="56636B"/>
-                </a:solidFill>
-                <a:latin typeface="Aptos"/>
-              </a:defRPr>
-            </a:pPr>
-            <a:r>
-              <a:t>clean baseline</a:t>
-            </a:r>
-          </a:p>
-        </p:txBody>
-      </p:sp>
-      <p:sp>
-        <p:nvSpPr>
-          <p:cNvPr id="10" name="TextBox 9"/>
-          <p:cNvSpPr txBox="1"/>
-          <p:nvPr/>
-        </p:nvSpPr>
-        <p:spPr>
-          <a:xfrm>
-            <a:off x="713232" y="5358384"/>
-            <a:ext cx="1737360" cy="384048"/>
-          </a:xfrm>
-          <a:prstGeom prst="rect">
-            <a:avLst/>
-          </a:prstGeom>
-          <a:noFill/>
-        </p:spPr>
-        <p:txBody>
-          <a:bodyPr wrap="square">
-            <a:spAutoFit/>
-          </a:bodyPr>
-          <a:lstStyle/>
-          <a:p>
-            <a:pPr algn="ctr">
-              <a:defRPr sz="900" b="0">
-                <a:solidFill>
-                  <a:srgbClr val="56636B"/>
-                </a:solidFill>
-                <a:latin typeface="Aptos"/>
-              </a:defRPr>
-            </a:pPr>
-            <a:r>
-              <a:t>used before all distortions</a:t>
-            </a:r>
-          </a:p>
-        </p:txBody>
-      </p:sp>
-      <p:sp>
-        <p:nvSpPr>
-          <p:cNvPr id="11" name="Rounded Rectangle 10"/>
+              <a:defRPr sz="850" b="1">
+                <a:solidFill>
+                  <a:srgbClr val="182228"/>
+                </a:solidFill>
+                <a:latin typeface="Aptos"/>
+              </a:defRPr>
+            </a:pPr>
+            <a:r>
+              <a:t>sharpen</a:t>
+            </a:r>
+          </a:p>
+        </p:txBody>
+      </p:sp>
+      <p:cxnSp>
+        <p:nvCxnSpPr>
+          <p:cNvPr id="13" name="Connector 12"/>
+          <p:cNvCxnSpPr/>
+          <p:nvPr/>
+        </p:nvCxnSpPr>
+        <p:spPr>
+          <a:xfrm>
+            <a:off x="2606040" y="3218688"/>
+            <a:ext cx="548640" cy="0"/>
+          </a:xfrm>
+          <a:prstGeom prst="line">
+            <a:avLst/>
+          </a:prstGeom>
+          <a:ln w="20320">
+            <a:solidFill>
+              <a:srgbClr val="2666AC"/>
+            </a:solidFill>
+          </a:ln>
+        </p:spPr>
+        <p:style>
+          <a:lnRef idx="2">
+            <a:schemeClr val="accent1"/>
+          </a:lnRef>
+          <a:fillRef idx="0">
+            <a:schemeClr val="accent1"/>
+          </a:fillRef>
+          <a:effectRef idx="1">
+            <a:schemeClr val="accent1"/>
+          </a:effectRef>
+          <a:fontRef idx="minor">
+            <a:schemeClr val="tx1"/>
+          </a:fontRef>
+        </p:style>
+      </p:cxnSp>
+      <p:sp>
+        <p:nvSpPr>
+          <p:cNvPr id="14" name="Rounded Rectangle 13"/>
           <p:cNvSpPr/>
           <p:nvPr/>
         </p:nvSpPr>
         <p:spPr>
           <a:xfrm>
-            <a:off x="2880360" y="1719072"/>
-            <a:ext cx="4343400" cy="2148840"/>
+            <a:off x="6263640" y="1783080"/>
+            <a:ext cx="5166360" cy="1965960"/>
           </a:xfrm>
           <a:prstGeom prst="roundRect">
             <a:avLst/>
@@ -13762,19 +14715,20 @@
           <a:lstStyle/>
           <a:p>
             <a:pPr algn="ctr"/>
-          </a:p>
-        </p:txBody>
-      </p:sp>
-      <p:sp>
-        <p:nvSpPr>
-          <p:cNvPr id="12" name="TextBox 11"/>
-          <p:cNvSpPr txBox="1"/>
-          <p:nvPr/>
-        </p:nvSpPr>
-        <p:spPr>
-          <a:xfrm>
-            <a:off x="3044952" y="1856231"/>
-            <a:ext cx="3977639" cy="219456"/>
+            <a:endParaRPr/>
+          </a:p>
+        </p:txBody>
+      </p:sp>
+      <p:sp>
+        <p:nvSpPr>
+          <p:cNvPr id="15" name="TextBox 14"/>
+          <p:cNvSpPr txBox="1"/>
+          <p:nvPr/>
+        </p:nvSpPr>
+        <p:spPr>
+          <a:xfrm>
+            <a:off x="6464807" y="1947672"/>
+            <a:ext cx="3108960" cy="256032"/>
           </a:xfrm>
           <a:prstGeom prst="rect">
             <a:avLst/>
@@ -13788,29 +14742,65 @@
           <a:lstStyle/>
           <a:p>
             <a:pPr>
-              <a:defRPr sz="1250" b="1">
-                <a:solidFill>
-                  <a:srgbClr val="2666AC"/>
-                </a:solidFill>
-                <a:latin typeface="Aptos"/>
-              </a:defRPr>
-            </a:pPr>
-            <a:r>
-              <a:t>Rotation</a:t>
-            </a:r>
-          </a:p>
-        </p:txBody>
-      </p:sp>
-      <p:sp>
-        <p:nvSpPr>
-          <p:cNvPr id="13" name="Rounded Rectangle 12"/>
+              <a:defRPr sz="1500" b="1">
+                <a:solidFill>
+                  <a:srgbClr val="B2483E"/>
+                </a:solidFill>
+                <a:latin typeface="Aptos"/>
+              </a:defRPr>
+            </a:pPr>
+            <a:r>
+              <a:t>Salt-and-pepper</a:t>
+            </a:r>
+          </a:p>
+        </p:txBody>
+      </p:sp>
+      <p:sp>
+        <p:nvSpPr>
+          <p:cNvPr id="16" name="TextBox 15"/>
+          <p:cNvSpPr txBox="1"/>
+          <p:nvPr/>
+        </p:nvSpPr>
+        <p:spPr>
+          <a:xfrm>
+            <a:off x="6464807" y="2313432"/>
+            <a:ext cx="4617720" cy="502920"/>
+          </a:xfrm>
+          <a:prstGeom prst="rect">
+            <a:avLst/>
+          </a:prstGeom>
+          <a:noFill/>
+        </p:spPr>
+        <p:txBody>
+          <a:bodyPr wrap="square">
+            <a:spAutoFit/>
+          </a:bodyPr>
+          <a:lstStyle/>
+          <a:p>
+            <a:pPr>
+              <a:defRPr sz="1050" b="0">
+                <a:solidFill>
+                  <a:srgbClr val="182228"/>
+                </a:solidFill>
+                <a:latin typeface="Aptos"/>
+              </a:defRPr>
+            </a:pPr>
+            <a:r>
+              <a:t>A median filter replaces isolated black/white pixels using nearby values while preserving edges.</a:t>
+            </a:r>
+          </a:p>
+        </p:txBody>
+      </p:sp>
+      <p:sp>
+        <p:nvSpPr>
+          <p:cNvPr id="17" name="Rounded Rectangle 16"/>
           <p:cNvSpPr/>
           <p:nvPr/>
         </p:nvSpPr>
         <p:spPr>
           <a:xfrm>
-            <a:off x="3063240" y="2176272"/>
-            <a:ext cx="1828800" cy="1325880"/>
+            <a:off x="6583679" y="3026664"/>
+            <a:ext cx="1554480" cy="384048"/>
           </a:xfrm>
           <a:prstGeom prst="roundRect">
             <a:avLst/>
@@ -13843,19 +14833,20 @@
           <a:lstStyle/>
           <a:p>
             <a:pPr algn="ctr"/>
-          </a:p>
-        </p:txBody>
-      </p:sp>
-      <p:sp>
-        <p:nvSpPr>
-          <p:cNvPr id="14" name="Rounded Rectangle 13"/>
+            <a:endParaRPr/>
+          </a:p>
+        </p:txBody>
+      </p:sp>
+      <p:sp>
+        <p:nvSpPr>
+          <p:cNvPr id="18" name="Rounded Rectangle 17"/>
           <p:cNvSpPr/>
           <p:nvPr/>
         </p:nvSpPr>
         <p:spPr>
           <a:xfrm>
-            <a:off x="5166360" y="2176272"/>
-            <a:ext cx="1828800" cy="1325880"/>
+            <a:off x="8805672" y="3026664"/>
+            <a:ext cx="1554480" cy="384048"/>
           </a:xfrm>
           <a:prstGeom prst="roundRect">
             <a:avLst/>
@@ -13888,67 +14879,20 @@
           <a:lstStyle/>
           <a:p>
             <a:pPr algn="ctr"/>
-          </a:p>
-        </p:txBody>
-      </p:sp>
-      <p:pic>
-        <p:nvPicPr>
-          <p:cNvPr id="15" name="Picture 14" descr="rotation.png"/>
-          <p:cNvPicPr>
-            <a:picLocks noChangeAspect="1"/>
-          </p:cNvPicPr>
-          <p:nvPr/>
-        </p:nvPicPr>
-        <p:blipFill>
-          <a:blip r:embed="rId3"/>
-          <a:stretch>
-            <a:fillRect/>
-          </a:stretch>
-        </p:blipFill>
-        <p:spPr>
-          <a:xfrm>
-            <a:off x="3447287" y="2249424"/>
-            <a:ext cx="1060704" cy="1060704"/>
-          </a:xfrm>
-          <a:prstGeom prst="rect">
-            <a:avLst/>
-          </a:prstGeom>
-        </p:spPr>
-      </p:pic>
-      <p:pic>
-        <p:nvPicPr>
-          <p:cNvPr id="16" name="Picture 15" descr="rotation_restored.png"/>
-          <p:cNvPicPr>
-            <a:picLocks noChangeAspect="1"/>
-          </p:cNvPicPr>
-          <p:nvPr/>
-        </p:nvPicPr>
-        <p:blipFill>
-          <a:blip r:embed="rId4"/>
-          <a:stretch>
-            <a:fillRect/>
-          </a:stretch>
-        </p:blipFill>
-        <p:spPr>
-          <a:xfrm>
-            <a:off x="5550407" y="2249424"/>
-            <a:ext cx="1060704" cy="1060704"/>
-          </a:xfrm>
-          <a:prstGeom prst="rect">
-            <a:avLst/>
-          </a:prstGeom>
-        </p:spPr>
-      </p:pic>
-      <p:sp>
-        <p:nvSpPr>
-          <p:cNvPr id="17" name="TextBox 16"/>
-          <p:cNvSpPr txBox="1"/>
-          <p:nvPr/>
-        </p:nvSpPr>
-        <p:spPr>
-          <a:xfrm>
-            <a:off x="3291840" y="3438144"/>
-            <a:ext cx="1417320" cy="164592"/>
+            <a:endParaRPr/>
+          </a:p>
+        </p:txBody>
+      </p:sp>
+      <p:sp>
+        <p:nvSpPr>
+          <p:cNvPr id="19" name="TextBox 18"/>
+          <p:cNvSpPr txBox="1"/>
+          <p:nvPr/>
+        </p:nvSpPr>
+        <p:spPr>
+          <a:xfrm>
+            <a:off x="6675120" y="3118104"/>
+            <a:ext cx="1371600" cy="146304"/>
           </a:xfrm>
           <a:prstGeom prst="rect">
             <a:avLst/>
@@ -13962,29 +14906,29 @@
           <a:lstStyle/>
           <a:p>
             <a:pPr algn="ctr">
-              <a:defRPr sz="850" b="0">
-                <a:solidFill>
-                  <a:srgbClr val="56636B"/>
-                </a:solidFill>
-                <a:latin typeface="Aptos"/>
-              </a:defRPr>
-            </a:pPr>
-            <a:r>
-              <a:t>distorted</a:t>
-            </a:r>
-          </a:p>
-        </p:txBody>
-      </p:sp>
-      <p:sp>
-        <p:nvSpPr>
-          <p:cNvPr id="18" name="TextBox 17"/>
-          <p:cNvSpPr txBox="1"/>
-          <p:nvPr/>
-        </p:nvSpPr>
-        <p:spPr>
-          <a:xfrm>
-            <a:off x="5394960" y="3438144"/>
-            <a:ext cx="1417320" cy="164592"/>
+              <a:defRPr sz="850" b="1">
+                <a:solidFill>
+                  <a:srgbClr val="182228"/>
+                </a:solidFill>
+                <a:latin typeface="Aptos"/>
+              </a:defRPr>
+            </a:pPr>
+            <a:r>
+              <a:t>median</a:t>
+            </a:r>
+          </a:p>
+        </p:txBody>
+      </p:sp>
+      <p:sp>
+        <p:nvSpPr>
+          <p:cNvPr id="20" name="TextBox 19"/>
+          <p:cNvSpPr txBox="1"/>
+          <p:nvPr/>
+        </p:nvSpPr>
+        <p:spPr>
+          <a:xfrm>
+            <a:off x="8897112" y="3118104"/>
+            <a:ext cx="1371600" cy="146304"/>
           </a:xfrm>
           <a:prstGeom prst="rect">
             <a:avLst/>
@@ -13998,36 +14942,36 @@
           <a:lstStyle/>
           <a:p>
             <a:pPr algn="ctr">
-              <a:defRPr sz="850" b="0">
-                <a:solidFill>
-                  <a:srgbClr val="56636B"/>
-                </a:solidFill>
-                <a:latin typeface="Aptos"/>
-              </a:defRPr>
-            </a:pPr>
-            <a:r>
-              <a:t>restored</a:t>
+              <a:defRPr sz="850" b="1">
+                <a:solidFill>
+                  <a:srgbClr val="182228"/>
+                </a:solidFill>
+                <a:latin typeface="Aptos"/>
+              </a:defRPr>
+            </a:pPr>
+            <a:r>
+              <a:t>remove specks</a:t>
             </a:r>
           </a:p>
         </p:txBody>
       </p:sp>
       <p:cxnSp>
         <p:nvCxnSpPr>
-          <p:cNvPr id="19" name="Connector 18"/>
+          <p:cNvPr id="21" name="Connector 20"/>
           <p:cNvCxnSpPr/>
           <p:nvPr/>
         </p:nvCxnSpPr>
         <p:spPr>
           <a:xfrm>
-            <a:off x="4919472" y="2834639"/>
-            <a:ext cx="201168" cy="0"/>
+            <a:off x="8183879" y="3218688"/>
+            <a:ext cx="548641" cy="0"/>
           </a:xfrm>
           <a:prstGeom prst="line">
             <a:avLst/>
           </a:prstGeom>
-          <a:ln w="17780">
+          <a:ln w="20320">
             <a:solidFill>
-              <a:srgbClr val="2666AC"/>
+              <a:srgbClr val="B2483E"/>
             </a:solidFill>
           </a:ln>
         </p:spPr>
@@ -14048,14 +14992,14 @@
       </p:cxnSp>
       <p:sp>
         <p:nvSpPr>
-          <p:cNvPr id="20" name="Rounded Rectangle 19"/>
+          <p:cNvPr id="22" name="Rounded Rectangle 21"/>
           <p:cNvSpPr/>
           <p:nvPr/>
         </p:nvSpPr>
         <p:spPr>
           <a:xfrm>
-            <a:off x="7498079" y="1719072"/>
-            <a:ext cx="4343400" cy="2148840"/>
+            <a:off x="685800" y="4096512"/>
+            <a:ext cx="5166360" cy="1965960"/>
           </a:xfrm>
           <a:prstGeom prst="roundRect">
             <a:avLst/>
@@ -14088,19 +15032,20 @@
           <a:lstStyle/>
           <a:p>
             <a:pPr algn="ctr"/>
-          </a:p>
-        </p:txBody>
-      </p:sp>
-      <p:sp>
-        <p:nvSpPr>
-          <p:cNvPr id="21" name="TextBox 20"/>
-          <p:cNvSpPr txBox="1"/>
-          <p:nvPr/>
-        </p:nvSpPr>
-        <p:spPr>
-          <a:xfrm>
-            <a:off x="7662671" y="1856231"/>
-            <a:ext cx="3977639" cy="219456"/>
+            <a:endParaRPr/>
+          </a:p>
+        </p:txBody>
+      </p:sp>
+      <p:sp>
+        <p:nvSpPr>
+          <p:cNvPr id="23" name="TextBox 22"/>
+          <p:cNvSpPr txBox="1"/>
+          <p:nvPr/>
+        </p:nvSpPr>
+        <p:spPr>
+          <a:xfrm>
+            <a:off x="886968" y="4261104"/>
+            <a:ext cx="3108960" cy="256032"/>
           </a:xfrm>
           <a:prstGeom prst="rect">
             <a:avLst/>
@@ -14114,29 +15059,65 @@
           <a:lstStyle/>
           <a:p>
             <a:pPr>
-              <a:defRPr sz="1250" b="1">
-                <a:solidFill>
-                  <a:srgbClr val="69559E"/>
-                </a:solidFill>
-                <a:latin typeface="Aptos"/>
-              </a:defRPr>
-            </a:pPr>
-            <a:r>
-              <a:t>Perspective warp</a:t>
-            </a:r>
-          </a:p>
-        </p:txBody>
-      </p:sp>
-      <p:sp>
-        <p:nvSpPr>
-          <p:cNvPr id="22" name="Rounded Rectangle 21"/>
+              <a:defRPr sz="1500" b="1">
+                <a:solidFill>
+                  <a:srgbClr val="008074"/>
+                </a:solidFill>
+                <a:latin typeface="Aptos"/>
+              </a:defRPr>
+            </a:pPr>
+            <a:r>
+              <a:t>Gaussian blur</a:t>
+            </a:r>
+          </a:p>
+        </p:txBody>
+      </p:sp>
+      <p:sp>
+        <p:nvSpPr>
+          <p:cNvPr id="24" name="TextBox 23"/>
+          <p:cNvSpPr txBox="1"/>
+          <p:nvPr/>
+        </p:nvSpPr>
+        <p:spPr>
+          <a:xfrm>
+            <a:off x="886968" y="4626864"/>
+            <a:ext cx="4617720" cy="502920"/>
+          </a:xfrm>
+          <a:prstGeom prst="rect">
+            <a:avLst/>
+          </a:prstGeom>
+          <a:noFill/>
+        </p:spPr>
+        <p:txBody>
+          <a:bodyPr wrap="square">
+            <a:spAutoFit/>
+          </a:bodyPr>
+          <a:lstStyle/>
+          <a:p>
+            <a:pPr>
+              <a:defRPr sz="1050" b="0">
+                <a:solidFill>
+                  <a:srgbClr val="182228"/>
+                </a:solidFill>
+                <a:latin typeface="Aptos"/>
+              </a:defRPr>
+            </a:pPr>
+            <a:r>
+              <a:t>Unsharp masking boosts local contrast so softened edges become clearer again.</a:t>
+            </a:r>
+          </a:p>
+        </p:txBody>
+      </p:sp>
+      <p:sp>
+        <p:nvSpPr>
+          <p:cNvPr id="25" name="Rounded Rectangle 24"/>
           <p:cNvSpPr/>
           <p:nvPr/>
         </p:nvSpPr>
         <p:spPr>
           <a:xfrm>
-            <a:off x="7680959" y="2176272"/>
-            <a:ext cx="1828800" cy="1325880"/>
+            <a:off x="1005840" y="5340096"/>
+            <a:ext cx="1554480" cy="384048"/>
           </a:xfrm>
           <a:prstGeom prst="roundRect">
             <a:avLst/>
@@ -14169,19 +15150,20 @@
           <a:lstStyle/>
           <a:p>
             <a:pPr algn="ctr"/>
-          </a:p>
-        </p:txBody>
-      </p:sp>
-      <p:sp>
-        <p:nvSpPr>
-          <p:cNvPr id="23" name="Rounded Rectangle 22"/>
+            <a:endParaRPr/>
+          </a:p>
+        </p:txBody>
+      </p:sp>
+      <p:sp>
+        <p:nvSpPr>
+          <p:cNvPr id="26" name="Rounded Rectangle 25"/>
           <p:cNvSpPr/>
           <p:nvPr/>
         </p:nvSpPr>
         <p:spPr>
           <a:xfrm>
-            <a:off x="9784080" y="2176272"/>
-            <a:ext cx="1828800" cy="1325880"/>
+            <a:off x="3227832" y="5340096"/>
+            <a:ext cx="1554480" cy="384048"/>
           </a:xfrm>
           <a:prstGeom prst="roundRect">
             <a:avLst/>
@@ -14214,67 +15196,20 @@
           <a:lstStyle/>
           <a:p>
             <a:pPr algn="ctr"/>
-          </a:p>
-        </p:txBody>
-      </p:sp>
-      <p:pic>
-        <p:nvPicPr>
-          <p:cNvPr id="24" name="Picture 23" descr="perspective_warp.png"/>
-          <p:cNvPicPr>
-            <a:picLocks noChangeAspect="1"/>
-          </p:cNvPicPr>
-          <p:nvPr/>
-        </p:nvPicPr>
-        <p:blipFill>
-          <a:blip r:embed="rId5"/>
-          <a:stretch>
-            <a:fillRect/>
-          </a:stretch>
-        </p:blipFill>
-        <p:spPr>
-          <a:xfrm>
-            <a:off x="8065008" y="2249424"/>
-            <a:ext cx="1060704" cy="1060704"/>
-          </a:xfrm>
-          <a:prstGeom prst="rect">
-            <a:avLst/>
-          </a:prstGeom>
-        </p:spPr>
-      </p:pic>
-      <p:pic>
-        <p:nvPicPr>
-          <p:cNvPr id="25" name="Picture 24" descr="perspective_warp_restored.png"/>
-          <p:cNvPicPr>
-            <a:picLocks noChangeAspect="1"/>
-          </p:cNvPicPr>
-          <p:nvPr/>
-        </p:nvPicPr>
-        <p:blipFill>
-          <a:blip r:embed="rId6"/>
-          <a:stretch>
-            <a:fillRect/>
-          </a:stretch>
-        </p:blipFill>
-        <p:spPr>
-          <a:xfrm>
-            <a:off x="10168128" y="2249424"/>
-            <a:ext cx="1060704" cy="1060704"/>
-          </a:xfrm>
-          <a:prstGeom prst="rect">
-            <a:avLst/>
-          </a:prstGeom>
-        </p:spPr>
-      </p:pic>
-      <p:sp>
-        <p:nvSpPr>
-          <p:cNvPr id="26" name="TextBox 25"/>
-          <p:cNvSpPr txBox="1"/>
-          <p:nvPr/>
-        </p:nvSpPr>
-        <p:spPr>
-          <a:xfrm>
-            <a:off x="7909559" y="3438144"/>
-            <a:ext cx="1417320" cy="164592"/>
+            <a:endParaRPr/>
+          </a:p>
+        </p:txBody>
+      </p:sp>
+      <p:sp>
+        <p:nvSpPr>
+          <p:cNvPr id="27" name="TextBox 26"/>
+          <p:cNvSpPr txBox="1"/>
+          <p:nvPr/>
+        </p:nvSpPr>
+        <p:spPr>
+          <a:xfrm>
+            <a:off x="1097280" y="5431536"/>
+            <a:ext cx="1371600" cy="146304"/>
           </a:xfrm>
           <a:prstGeom prst="rect">
             <a:avLst/>
@@ -14288,29 +15223,29 @@
           <a:lstStyle/>
           <a:p>
             <a:pPr algn="ctr">
-              <a:defRPr sz="850" b="0">
-                <a:solidFill>
-                  <a:srgbClr val="56636B"/>
-                </a:solidFill>
-                <a:latin typeface="Aptos"/>
-              </a:defRPr>
-            </a:pPr>
-            <a:r>
-              <a:t>distorted</a:t>
-            </a:r>
-          </a:p>
-        </p:txBody>
-      </p:sp>
-      <p:sp>
-        <p:nvSpPr>
-          <p:cNvPr id="27" name="TextBox 26"/>
-          <p:cNvSpPr txBox="1"/>
-          <p:nvPr/>
-        </p:nvSpPr>
-        <p:spPr>
-          <a:xfrm>
-            <a:off x="10012680" y="3438144"/>
-            <a:ext cx="1417320" cy="164592"/>
+              <a:defRPr sz="850" b="1">
+                <a:solidFill>
+                  <a:srgbClr val="182228"/>
+                </a:solidFill>
+                <a:latin typeface="Aptos"/>
+              </a:defRPr>
+            </a:pPr>
+            <a:r>
+              <a:t>edge boost</a:t>
+            </a:r>
+          </a:p>
+        </p:txBody>
+      </p:sp>
+      <p:sp>
+        <p:nvSpPr>
+          <p:cNvPr id="28" name="TextBox 27"/>
+          <p:cNvSpPr txBox="1"/>
+          <p:nvPr/>
+        </p:nvSpPr>
+        <p:spPr>
+          <a:xfrm>
+            <a:off x="3319272" y="5431536"/>
+            <a:ext cx="1371600" cy="146304"/>
           </a:xfrm>
           <a:prstGeom prst="rect">
             <a:avLst/>
@@ -14324,36 +15259,36 @@
           <a:lstStyle/>
           <a:p>
             <a:pPr algn="ctr">
-              <a:defRPr sz="850" b="0">
-                <a:solidFill>
-                  <a:srgbClr val="56636B"/>
-                </a:solidFill>
-                <a:latin typeface="Aptos"/>
-              </a:defRPr>
-            </a:pPr>
-            <a:r>
-              <a:t>restored</a:t>
+              <a:defRPr sz="850" b="1">
+                <a:solidFill>
+                  <a:srgbClr val="182228"/>
+                </a:solidFill>
+                <a:latin typeface="Aptos"/>
+              </a:defRPr>
+            </a:pPr>
+            <a:r>
+              <a:t>sharpen</a:t>
             </a:r>
           </a:p>
         </p:txBody>
       </p:sp>
       <p:cxnSp>
         <p:nvCxnSpPr>
-          <p:cNvPr id="28" name="Connector 27"/>
+          <p:cNvPr id="29" name="Connector 28"/>
           <p:cNvCxnSpPr/>
           <p:nvPr/>
         </p:nvCxnSpPr>
         <p:spPr>
           <a:xfrm>
-            <a:off x="9537192" y="2834639"/>
-            <a:ext cx="201167" cy="0"/>
+            <a:off x="2606040" y="5532120"/>
+            <a:ext cx="548640" cy="0"/>
           </a:xfrm>
           <a:prstGeom prst="line">
             <a:avLst/>
           </a:prstGeom>
-          <a:ln w="17780">
+          <a:ln w="20320">
             <a:solidFill>
-              <a:srgbClr val="69559E"/>
+              <a:srgbClr val="008074"/>
             </a:solidFill>
           </a:ln>
         </p:spPr>
@@ -14374,14 +15309,14 @@
       </p:cxnSp>
       <p:sp>
         <p:nvSpPr>
-          <p:cNvPr id="29" name="Rounded Rectangle 28"/>
+          <p:cNvPr id="30" name="Rounded Rectangle 29"/>
           <p:cNvSpPr/>
           <p:nvPr/>
         </p:nvSpPr>
         <p:spPr>
           <a:xfrm>
-            <a:off x="2880360" y="4096512"/>
-            <a:ext cx="4343400" cy="2148840"/>
+            <a:off x="6263640" y="4096512"/>
+            <a:ext cx="5166360" cy="1965960"/>
           </a:xfrm>
           <a:prstGeom prst="roundRect">
             <a:avLst/>
@@ -14414,19 +15349,20 @@
           <a:lstStyle/>
           <a:p>
             <a:pPr algn="ctr"/>
-          </a:p>
-        </p:txBody>
-      </p:sp>
-      <p:sp>
-        <p:nvSpPr>
-          <p:cNvPr id="30" name="TextBox 29"/>
-          <p:cNvSpPr txBox="1"/>
-          <p:nvPr/>
-        </p:nvSpPr>
-        <p:spPr>
-          <a:xfrm>
-            <a:off x="3044952" y="4233672"/>
-            <a:ext cx="3977639" cy="219456"/>
+            <a:endParaRPr/>
+          </a:p>
+        </p:txBody>
+      </p:sp>
+      <p:sp>
+        <p:nvSpPr>
+          <p:cNvPr id="31" name="TextBox 30"/>
+          <p:cNvSpPr txBox="1"/>
+          <p:nvPr/>
+        </p:nvSpPr>
+        <p:spPr>
+          <a:xfrm>
+            <a:off x="6464807" y="4261104"/>
+            <a:ext cx="3108960" cy="256032"/>
           </a:xfrm>
           <a:prstGeom prst="rect">
             <a:avLst/>
@@ -14440,29 +15376,65 @@
           <a:lstStyle/>
           <a:p>
             <a:pPr>
-              <a:defRPr sz="1250" b="1">
-                <a:solidFill>
-                  <a:srgbClr val="B2483E"/>
-                </a:solidFill>
-                <a:latin typeface="Aptos"/>
-              </a:defRPr>
-            </a:pPr>
-            <a:r>
-              <a:t>Barrel distortion</a:t>
-            </a:r>
-          </a:p>
-        </p:txBody>
-      </p:sp>
-      <p:sp>
-        <p:nvSpPr>
-          <p:cNvPr id="31" name="Rounded Rectangle 30"/>
+              <a:defRPr sz="1500" b="1">
+                <a:solidFill>
+                  <a:srgbClr val="B88630"/>
+                </a:solidFill>
+                <a:latin typeface="Aptos"/>
+              </a:defRPr>
+            </a:pPr>
+            <a:r>
+              <a:t>Brightness / contrast</a:t>
+            </a:r>
+          </a:p>
+        </p:txBody>
+      </p:sp>
+      <p:sp>
+        <p:nvSpPr>
+          <p:cNvPr id="32" name="TextBox 31"/>
+          <p:cNvSpPr txBox="1"/>
+          <p:nvPr/>
+        </p:nvSpPr>
+        <p:spPr>
+          <a:xfrm>
+            <a:off x="6464807" y="4626864"/>
+            <a:ext cx="4617720" cy="502920"/>
+          </a:xfrm>
+          <a:prstGeom prst="rect">
+            <a:avLst/>
+          </a:prstGeom>
+          <a:noFill/>
+        </p:spPr>
+        <p:txBody>
+          <a:bodyPr wrap="square">
+            <a:spAutoFit/>
+          </a:bodyPr>
+          <a:lstStyle/>
+          <a:p>
+            <a:pPr>
+              <a:defRPr sz="1050" b="0">
+                <a:solidFill>
+                  <a:srgbClr val="182228"/>
+                </a:solidFill>
+                <a:latin typeface="Aptos"/>
+              </a:defRPr>
+            </a:pPr>
+            <a:r>
+              <a:t>Autocontrast spreads useful intensities, then contrast normalization brings the image back to a stable range.</a:t>
+            </a:r>
+          </a:p>
+        </p:txBody>
+      </p:sp>
+      <p:sp>
+        <p:nvSpPr>
+          <p:cNvPr id="33" name="Rounded Rectangle 32"/>
           <p:cNvSpPr/>
           <p:nvPr/>
         </p:nvSpPr>
         <p:spPr>
           <a:xfrm>
-            <a:off x="3063240" y="4553712"/>
-            <a:ext cx="1828800" cy="1325880"/>
+            <a:off x="6583679" y="5340096"/>
+            <a:ext cx="1554480" cy="384048"/>
           </a:xfrm>
           <a:prstGeom prst="roundRect">
             <a:avLst/>
@@ -14495,19 +15467,20 @@
           <a:lstStyle/>
           <a:p>
             <a:pPr algn="ctr"/>
-          </a:p>
-        </p:txBody>
-      </p:sp>
-      <p:sp>
-        <p:nvSpPr>
-          <p:cNvPr id="32" name="Rounded Rectangle 31"/>
+            <a:endParaRPr/>
+          </a:p>
+        </p:txBody>
+      </p:sp>
+      <p:sp>
+        <p:nvSpPr>
+          <p:cNvPr id="34" name="Rounded Rectangle 33"/>
           <p:cNvSpPr/>
           <p:nvPr/>
         </p:nvSpPr>
         <p:spPr>
           <a:xfrm>
-            <a:off x="5166360" y="4553712"/>
-            <a:ext cx="1828800" cy="1325880"/>
+            <a:off x="8805672" y="5340096"/>
+            <a:ext cx="1554480" cy="384048"/>
           </a:xfrm>
           <a:prstGeom prst="roundRect">
             <a:avLst/>
@@ -14540,57 +15513,10 @@
           <a:lstStyle/>
           <a:p>
             <a:pPr algn="ctr"/>
-          </a:p>
-        </p:txBody>
-      </p:sp>
-      <p:pic>
-        <p:nvPicPr>
-          <p:cNvPr id="33" name="Picture 32" descr="barrel_distortion.png"/>
-          <p:cNvPicPr>
-            <a:picLocks noChangeAspect="1"/>
-          </p:cNvPicPr>
-          <p:nvPr/>
-        </p:nvPicPr>
-        <p:blipFill>
-          <a:blip r:embed="rId7"/>
-          <a:stretch>
-            <a:fillRect/>
-          </a:stretch>
-        </p:blipFill>
-        <p:spPr>
-          <a:xfrm>
-            <a:off x="3447287" y="4626864"/>
-            <a:ext cx="1060704" cy="1060704"/>
-          </a:xfrm>
-          <a:prstGeom prst="rect">
-            <a:avLst/>
-          </a:prstGeom>
-        </p:spPr>
-      </p:pic>
-      <p:pic>
-        <p:nvPicPr>
-          <p:cNvPr id="34" name="Picture 33" descr="barrel_distortion_restored.png"/>
-          <p:cNvPicPr>
-            <a:picLocks noChangeAspect="1"/>
-          </p:cNvPicPr>
-          <p:nvPr/>
-        </p:nvPicPr>
-        <p:blipFill>
-          <a:blip r:embed="rId8"/>
-          <a:stretch>
-            <a:fillRect/>
-          </a:stretch>
-        </p:blipFill>
-        <p:spPr>
-          <a:xfrm>
-            <a:off x="5550407" y="4626864"/>
-            <a:ext cx="1060704" cy="1060704"/>
-          </a:xfrm>
-          <a:prstGeom prst="rect">
-            <a:avLst/>
-          </a:prstGeom>
-        </p:spPr>
-      </p:pic>
+            <a:endParaRPr/>
+          </a:p>
+        </p:txBody>
+      </p:sp>
       <p:sp>
         <p:nvSpPr>
           <p:cNvPr id="35" name="TextBox 34"/>
@@ -14599,8 +15525,8 @@
         </p:nvSpPr>
         <p:spPr>
           <a:xfrm>
-            <a:off x="3291840" y="5815584"/>
-            <a:ext cx="1417320" cy="164592"/>
+            <a:off x="6675120" y="5431536"/>
+            <a:ext cx="1371600" cy="146304"/>
           </a:xfrm>
           <a:prstGeom prst="rect">
             <a:avLst/>
@@ -14614,15 +15540,15 @@
           <a:lstStyle/>
           <a:p>
             <a:pPr algn="ctr">
-              <a:defRPr sz="850" b="0">
-                <a:solidFill>
-                  <a:srgbClr val="56636B"/>
-                </a:solidFill>
-                <a:latin typeface="Aptos"/>
-              </a:defRPr>
-            </a:pPr>
-            <a:r>
-              <a:t>distorted</a:t>
+              <a:defRPr sz="850" b="1">
+                <a:solidFill>
+                  <a:srgbClr val="182228"/>
+                </a:solidFill>
+                <a:latin typeface="Aptos"/>
+              </a:defRPr>
+            </a:pPr>
+            <a:r>
+              <a:t>normalize</a:t>
             </a:r>
           </a:p>
         </p:txBody>
@@ -14635,8 +15561,8 @@
         </p:nvSpPr>
         <p:spPr>
           <a:xfrm>
-            <a:off x="5394960" y="5815584"/>
-            <a:ext cx="1417320" cy="164592"/>
+            <a:off x="8897112" y="5431536"/>
+            <a:ext cx="1371600" cy="146304"/>
           </a:xfrm>
           <a:prstGeom prst="rect">
             <a:avLst/>
@@ -14650,15 +15576,15 @@
           <a:lstStyle/>
           <a:p>
             <a:pPr algn="ctr">
-              <a:defRPr sz="850" b="0">
-                <a:solidFill>
-                  <a:srgbClr val="56636B"/>
-                </a:solidFill>
-                <a:latin typeface="Aptos"/>
-              </a:defRPr>
-            </a:pPr>
-            <a:r>
-              <a:t>restored</a:t>
+              <a:defRPr sz="850" b="1">
+                <a:solidFill>
+                  <a:srgbClr val="182228"/>
+                </a:solidFill>
+                <a:latin typeface="Aptos"/>
+              </a:defRPr>
+            </a:pPr>
+            <a:r>
+              <a:t>rebalance</a:t>
             </a:r>
           </a:p>
         </p:txBody>
@@ -14671,15 +15597,15 @@
         </p:nvCxnSpPr>
         <p:spPr>
           <a:xfrm>
-            <a:off x="4919472" y="5212080"/>
-            <a:ext cx="201168" cy="0"/>
+            <a:off x="8183879" y="5532120"/>
+            <a:ext cx="548641" cy="0"/>
           </a:xfrm>
           <a:prstGeom prst="line">
             <a:avLst/>
           </a:prstGeom>
-          <a:ln w="17780">
+          <a:ln w="20320">
             <a:solidFill>
-              <a:srgbClr val="B2483E"/>
+              <a:srgbClr val="B88630"/>
             </a:solidFill>
           </a:ln>
         </p:spPr>
@@ -14700,333 +15626,7 @@
       </p:cxnSp>
       <p:sp>
         <p:nvSpPr>
-          <p:cNvPr id="38" name="Rounded Rectangle 37"/>
-          <p:cNvSpPr/>
-          <p:nvPr/>
-        </p:nvSpPr>
-        <p:spPr>
-          <a:xfrm>
-            <a:off x="7498079" y="4096512"/>
-            <a:ext cx="4343400" cy="2148840"/>
-          </a:xfrm>
-          <a:prstGeom prst="roundRect">
-            <a:avLst/>
-          </a:prstGeom>
-          <a:solidFill>
-            <a:srgbClr val="FFFFFF"/>
-          </a:solidFill>
-          <a:ln w="8890">
-            <a:solidFill>
-              <a:srgbClr val="D2DBDB"/>
-            </a:solidFill>
-          </a:ln>
-        </p:spPr>
-        <p:style>
-          <a:lnRef idx="1">
-            <a:schemeClr val="accent1"/>
-          </a:lnRef>
-          <a:fillRef idx="3">
-            <a:schemeClr val="accent1"/>
-          </a:fillRef>
-          <a:effectRef idx="2">
-            <a:schemeClr val="accent1"/>
-          </a:effectRef>
-          <a:fontRef idx="minor">
-            <a:schemeClr val="lt1"/>
-          </a:fontRef>
-        </p:style>
-        <p:txBody>
-          <a:bodyPr rtlCol="0" anchor="ctr"/>
-          <a:lstStyle/>
-          <a:p>
-            <a:pPr algn="ctr"/>
-          </a:p>
-        </p:txBody>
-      </p:sp>
-      <p:sp>
-        <p:nvSpPr>
-          <p:cNvPr id="39" name="TextBox 38"/>
-          <p:cNvSpPr txBox="1"/>
-          <p:nvPr/>
-        </p:nvSpPr>
-        <p:spPr>
-          <a:xfrm>
-            <a:off x="7662671" y="4233672"/>
-            <a:ext cx="3977639" cy="219456"/>
-          </a:xfrm>
-          <a:prstGeom prst="rect">
-            <a:avLst/>
-          </a:prstGeom>
-          <a:noFill/>
-        </p:spPr>
-        <p:txBody>
-          <a:bodyPr wrap="square">
-            <a:spAutoFit/>
-          </a:bodyPr>
-          <a:lstStyle/>
-          <a:p>
-            <a:pPr>
-              <a:defRPr sz="1250" b="1">
-                <a:solidFill>
-                  <a:srgbClr val="B88630"/>
-                </a:solidFill>
-                <a:latin typeface="Aptos"/>
-              </a:defRPr>
-            </a:pPr>
-            <a:r>
-              <a:t>Pixelation</a:t>
-            </a:r>
-          </a:p>
-        </p:txBody>
-      </p:sp>
-      <p:sp>
-        <p:nvSpPr>
-          <p:cNvPr id="40" name="Rounded Rectangle 39"/>
-          <p:cNvSpPr/>
-          <p:nvPr/>
-        </p:nvSpPr>
-        <p:spPr>
-          <a:xfrm>
-            <a:off x="7680959" y="4553712"/>
-            <a:ext cx="1828800" cy="1325880"/>
-          </a:xfrm>
-          <a:prstGeom prst="roundRect">
-            <a:avLst/>
-          </a:prstGeom>
-          <a:solidFill>
-            <a:srgbClr val="F1F5F5"/>
-          </a:solidFill>
-          <a:ln w="8890">
-            <a:solidFill>
-              <a:srgbClr val="D2DBDB"/>
-            </a:solidFill>
-          </a:ln>
-        </p:spPr>
-        <p:style>
-          <a:lnRef idx="1">
-            <a:schemeClr val="accent1"/>
-          </a:lnRef>
-          <a:fillRef idx="3">
-            <a:schemeClr val="accent1"/>
-          </a:fillRef>
-          <a:effectRef idx="2">
-            <a:schemeClr val="accent1"/>
-          </a:effectRef>
-          <a:fontRef idx="minor">
-            <a:schemeClr val="lt1"/>
-          </a:fontRef>
-        </p:style>
-        <p:txBody>
-          <a:bodyPr rtlCol="0" anchor="ctr"/>
-          <a:lstStyle/>
-          <a:p>
-            <a:pPr algn="ctr"/>
-          </a:p>
-        </p:txBody>
-      </p:sp>
-      <p:sp>
-        <p:nvSpPr>
-          <p:cNvPr id="41" name="Rounded Rectangle 40"/>
-          <p:cNvSpPr/>
-          <p:nvPr/>
-        </p:nvSpPr>
-        <p:spPr>
-          <a:xfrm>
-            <a:off x="9784080" y="4553712"/>
-            <a:ext cx="1828800" cy="1325880"/>
-          </a:xfrm>
-          <a:prstGeom prst="roundRect">
-            <a:avLst/>
-          </a:prstGeom>
-          <a:solidFill>
-            <a:srgbClr val="F1F5F5"/>
-          </a:solidFill>
-          <a:ln w="8890">
-            <a:solidFill>
-              <a:srgbClr val="D2DBDB"/>
-            </a:solidFill>
-          </a:ln>
-        </p:spPr>
-        <p:style>
-          <a:lnRef idx="1">
-            <a:schemeClr val="accent1"/>
-          </a:lnRef>
-          <a:fillRef idx="3">
-            <a:schemeClr val="accent1"/>
-          </a:fillRef>
-          <a:effectRef idx="2">
-            <a:schemeClr val="accent1"/>
-          </a:effectRef>
-          <a:fontRef idx="minor">
-            <a:schemeClr val="lt1"/>
-          </a:fontRef>
-        </p:style>
-        <p:txBody>
-          <a:bodyPr rtlCol="0" anchor="ctr"/>
-          <a:lstStyle/>
-          <a:p>
-            <a:pPr algn="ctr"/>
-          </a:p>
-        </p:txBody>
-      </p:sp>
-      <p:pic>
-        <p:nvPicPr>
-          <p:cNvPr id="42" name="Picture 41" descr="pixelation.png"/>
-          <p:cNvPicPr>
-            <a:picLocks noChangeAspect="1"/>
-          </p:cNvPicPr>
-          <p:nvPr/>
-        </p:nvPicPr>
-        <p:blipFill>
-          <a:blip r:embed="rId9"/>
-          <a:stretch>
-            <a:fillRect/>
-          </a:stretch>
-        </p:blipFill>
-        <p:spPr>
-          <a:xfrm>
-            <a:off x="8065008" y="4626864"/>
-            <a:ext cx="1060704" cy="1060704"/>
-          </a:xfrm>
-          <a:prstGeom prst="rect">
-            <a:avLst/>
-          </a:prstGeom>
-        </p:spPr>
-      </p:pic>
-      <p:pic>
-        <p:nvPicPr>
-          <p:cNvPr id="43" name="Picture 42" descr="pixelation_restored.png"/>
-          <p:cNvPicPr>
-            <a:picLocks noChangeAspect="1"/>
-          </p:cNvPicPr>
-          <p:nvPr/>
-        </p:nvPicPr>
-        <p:blipFill>
-          <a:blip r:embed="rId10"/>
-          <a:stretch>
-            <a:fillRect/>
-          </a:stretch>
-        </p:blipFill>
-        <p:spPr>
-          <a:xfrm>
-            <a:off x="10168128" y="4626864"/>
-            <a:ext cx="1060704" cy="1060704"/>
-          </a:xfrm>
-          <a:prstGeom prst="rect">
-            <a:avLst/>
-          </a:prstGeom>
-        </p:spPr>
-      </p:pic>
-      <p:sp>
-        <p:nvSpPr>
-          <p:cNvPr id="44" name="TextBox 43"/>
-          <p:cNvSpPr txBox="1"/>
-          <p:nvPr/>
-        </p:nvSpPr>
-        <p:spPr>
-          <a:xfrm>
-            <a:off x="7909559" y="5815584"/>
-            <a:ext cx="1417320" cy="164592"/>
-          </a:xfrm>
-          <a:prstGeom prst="rect">
-            <a:avLst/>
-          </a:prstGeom>
-          <a:noFill/>
-        </p:spPr>
-        <p:txBody>
-          <a:bodyPr wrap="square">
-            <a:spAutoFit/>
-          </a:bodyPr>
-          <a:lstStyle/>
-          <a:p>
-            <a:pPr algn="ctr">
-              <a:defRPr sz="850" b="0">
-                <a:solidFill>
-                  <a:srgbClr val="56636B"/>
-                </a:solidFill>
-                <a:latin typeface="Aptos"/>
-              </a:defRPr>
-            </a:pPr>
-            <a:r>
-              <a:t>distorted</a:t>
-            </a:r>
-          </a:p>
-        </p:txBody>
-      </p:sp>
-      <p:sp>
-        <p:nvSpPr>
-          <p:cNvPr id="45" name="TextBox 44"/>
-          <p:cNvSpPr txBox="1"/>
-          <p:nvPr/>
-        </p:nvSpPr>
-        <p:spPr>
-          <a:xfrm>
-            <a:off x="10012680" y="5815584"/>
-            <a:ext cx="1417320" cy="164592"/>
-          </a:xfrm>
-          <a:prstGeom prst="rect">
-            <a:avLst/>
-          </a:prstGeom>
-          <a:noFill/>
-        </p:spPr>
-        <p:txBody>
-          <a:bodyPr wrap="square">
-            <a:spAutoFit/>
-          </a:bodyPr>
-          <a:lstStyle/>
-          <a:p>
-            <a:pPr algn="ctr">
-              <a:defRPr sz="850" b="0">
-                <a:solidFill>
-                  <a:srgbClr val="56636B"/>
-                </a:solidFill>
-                <a:latin typeface="Aptos"/>
-              </a:defRPr>
-            </a:pPr>
-            <a:r>
-              <a:t>restored</a:t>
-            </a:r>
-          </a:p>
-        </p:txBody>
-      </p:sp>
-      <p:cxnSp>
-        <p:nvCxnSpPr>
-          <p:cNvPr id="46" name="Connector 45"/>
-          <p:cNvCxnSpPr/>
-          <p:nvPr/>
-        </p:nvCxnSpPr>
-        <p:spPr>
-          <a:xfrm>
-            <a:off x="9537192" y="5212080"/>
-            <a:ext cx="201167" cy="0"/>
-          </a:xfrm>
-          <a:prstGeom prst="line">
-            <a:avLst/>
-          </a:prstGeom>
-          <a:ln w="17780">
-            <a:solidFill>
-              <a:srgbClr val="B88630"/>
-            </a:solidFill>
-          </a:ln>
-        </p:spPr>
-        <p:style>
-          <a:lnRef idx="2">
-            <a:schemeClr val="accent1"/>
-          </a:lnRef>
-          <a:fillRef idx="0">
-            <a:schemeClr val="accent1"/>
-          </a:fillRef>
-          <a:effectRef idx="1">
-            <a:schemeClr val="accent1"/>
-          </a:effectRef>
-          <a:fontRef idx="minor">
-            <a:schemeClr val="tx1"/>
-          </a:fontRef>
-        </p:style>
-      </p:cxnSp>
-      <p:sp>
-        <p:nvSpPr>
-          <p:cNvPr id="47" name="TextBox 46"/>
+          <p:cNvPr id="38" name="TextBox 37"/>
           <p:cNvSpPr txBox="1"/>
           <p:nvPr/>
         </p:nvSpPr>
@@ -15069,1468 +15669,6 @@
 </file>
 
 <file path=ppt/slides/slide8.xml><?xml version="1.0" encoding="utf-8"?>
-<p:sld xmlns:a="http://schemas.openxmlformats.org/drawingml/2006/main" xmlns:p="http://schemas.openxmlformats.org/presentationml/2006/main" xmlns:r="http://schemas.openxmlformats.org/officeDocument/2006/relationships">
-  <p:cSld>
-    <p:bg>
-      <p:bgPr>
-        <a:solidFill>
-          <a:srgbClr val="F7F9F7"/>
-        </a:solidFill>
-        <a:effectLst/>
-      </p:bgPr>
-    </p:bg>
-    <p:spTree>
-      <p:nvGrpSpPr>
-        <p:cNvPr id="1" name=""/>
-        <p:cNvGrpSpPr/>
-        <p:nvPr/>
-      </p:nvGrpSpPr>
-      <p:grpSpPr/>
-      <p:sp>
-        <p:nvSpPr>
-          <p:cNvPr id="2" name="TextBox 1"/>
-          <p:cNvSpPr txBox="1"/>
-          <p:nvPr/>
-        </p:nvSpPr>
-        <p:spPr>
-          <a:xfrm>
-            <a:off x="502920" y="320040"/>
-            <a:ext cx="4937760" cy="256032"/>
-          </a:xfrm>
-          <a:prstGeom prst="rect">
-            <a:avLst/>
-          </a:prstGeom>
-          <a:noFill/>
-        </p:spPr>
-        <p:txBody>
-          <a:bodyPr wrap="square">
-            <a:spAutoFit/>
-          </a:bodyPr>
-          <a:lstStyle/>
-          <a:p>
-            <a:pPr>
-              <a:defRPr sz="900" b="1">
-                <a:solidFill>
-                  <a:srgbClr val="008074"/>
-                </a:solidFill>
-                <a:latin typeface="Aptos"/>
-              </a:defRPr>
-            </a:pPr>
-            <a:r>
-              <a:t>RESTORATION METHODS</a:t>
-            </a:r>
-          </a:p>
-        </p:txBody>
-      </p:sp>
-      <p:sp>
-        <p:nvSpPr>
-          <p:cNvPr id="3" name="TextBox 2"/>
-          <p:cNvSpPr txBox="1"/>
-          <p:nvPr/>
-        </p:nvSpPr>
-        <p:spPr>
-          <a:xfrm>
-            <a:off x="502920" y="640080"/>
-            <a:ext cx="8961120" cy="566928"/>
-          </a:xfrm>
-          <a:prstGeom prst="rect">
-            <a:avLst/>
-          </a:prstGeom>
-          <a:noFill/>
-        </p:spPr>
-        <p:txBody>
-          <a:bodyPr wrap="square">
-            <a:spAutoFit/>
-          </a:bodyPr>
-          <a:lstStyle/>
-          <a:p>
-            <a:pPr>
-              <a:defRPr sz="2400" b="1">
-                <a:solidFill>
-                  <a:srgbClr val="182228"/>
-                </a:solidFill>
-                <a:latin typeface="Aptos"/>
-              </a:defRPr>
-            </a:pPr>
-            <a:r>
-              <a:t>How the restorations work after distortion.</a:t>
-            </a:r>
-          </a:p>
-        </p:txBody>
-      </p:sp>
-      <p:sp>
-        <p:nvSpPr>
-          <p:cNvPr id="4" name="TextBox 3"/>
-          <p:cNvSpPr txBox="1"/>
-          <p:nvPr/>
-        </p:nvSpPr>
-        <p:spPr>
-          <a:xfrm>
-            <a:off x="521207" y="1225296"/>
-            <a:ext cx="9875520" cy="292608"/>
-          </a:xfrm>
-          <a:prstGeom prst="rect">
-            <a:avLst/>
-          </a:prstGeom>
-          <a:noFill/>
-        </p:spPr>
-        <p:txBody>
-          <a:bodyPr wrap="square">
-            <a:spAutoFit/>
-          </a:bodyPr>
-          <a:lstStyle/>
-          <a:p>
-            <a:pPr>
-              <a:defRPr sz="1050" b="0">
-                <a:solidFill>
-                  <a:srgbClr val="56636B"/>
-                </a:solidFill>
-                <a:latin typeface="Aptos"/>
-              </a:defRPr>
-            </a:pPr>
-            <a:r>
-              <a:t>Each restoration is a simple image-processing step that tries to recover useful MRI structure before measuring the task.</a:t>
-            </a:r>
-          </a:p>
-        </p:txBody>
-      </p:sp>
-      <p:sp>
-        <p:nvSpPr>
-          <p:cNvPr id="5" name="TextBox 4"/>
-          <p:cNvSpPr txBox="1"/>
-          <p:nvPr/>
-        </p:nvSpPr>
-        <p:spPr>
-          <a:xfrm>
-            <a:off x="9692640" y="347472"/>
-            <a:ext cx="1920240" cy="228600"/>
-          </a:xfrm>
-          <a:prstGeom prst="rect">
-            <a:avLst/>
-          </a:prstGeom>
-          <a:noFill/>
-        </p:spPr>
-        <p:txBody>
-          <a:bodyPr wrap="square">
-            <a:spAutoFit/>
-          </a:bodyPr>
-          <a:lstStyle/>
-          <a:p>
-            <a:pPr algn="r">
-              <a:defRPr sz="850" b="0">
-                <a:solidFill>
-                  <a:srgbClr val="56636B"/>
-                </a:solidFill>
-                <a:latin typeface="Aptos"/>
-              </a:defRPr>
-            </a:pPr>
-            <a:r>
-              <a:t>Brain MRI robustness</a:t>
-            </a:r>
-          </a:p>
-        </p:txBody>
-      </p:sp>
-      <p:sp>
-        <p:nvSpPr>
-          <p:cNvPr id="6" name="Rounded Rectangle 5"/>
-          <p:cNvSpPr/>
-          <p:nvPr/>
-        </p:nvSpPr>
-        <p:spPr>
-          <a:xfrm>
-            <a:off x="685800" y="1783080"/>
-            <a:ext cx="5166360" cy="1965960"/>
-          </a:xfrm>
-          <a:prstGeom prst="roundRect">
-            <a:avLst/>
-          </a:prstGeom>
-          <a:solidFill>
-            <a:srgbClr val="FFFFFF"/>
-          </a:solidFill>
-          <a:ln w="8890">
-            <a:solidFill>
-              <a:srgbClr val="D2DBDB"/>
-            </a:solidFill>
-          </a:ln>
-        </p:spPr>
-        <p:style>
-          <a:lnRef idx="1">
-            <a:schemeClr val="accent1"/>
-          </a:lnRef>
-          <a:fillRef idx="3">
-            <a:schemeClr val="accent1"/>
-          </a:fillRef>
-          <a:effectRef idx="2">
-            <a:schemeClr val="accent1"/>
-          </a:effectRef>
-          <a:fontRef idx="minor">
-            <a:schemeClr val="lt1"/>
-          </a:fontRef>
-        </p:style>
-        <p:txBody>
-          <a:bodyPr rtlCol="0" anchor="ctr"/>
-          <a:lstStyle/>
-          <a:p>
-            <a:pPr algn="ctr"/>
-          </a:p>
-        </p:txBody>
-      </p:sp>
-      <p:sp>
-        <p:nvSpPr>
-          <p:cNvPr id="7" name="TextBox 6"/>
-          <p:cNvSpPr txBox="1"/>
-          <p:nvPr/>
-        </p:nvSpPr>
-        <p:spPr>
-          <a:xfrm>
-            <a:off x="886968" y="1947672"/>
-            <a:ext cx="3108960" cy="256032"/>
-          </a:xfrm>
-          <a:prstGeom prst="rect">
-            <a:avLst/>
-          </a:prstGeom>
-          <a:noFill/>
-        </p:spPr>
-        <p:txBody>
-          <a:bodyPr wrap="square">
-            <a:spAutoFit/>
-          </a:bodyPr>
-          <a:lstStyle/>
-          <a:p>
-            <a:pPr>
-              <a:defRPr sz="1500" b="1">
-                <a:solidFill>
-                  <a:srgbClr val="2666AC"/>
-                </a:solidFill>
-                <a:latin typeface="Aptos"/>
-              </a:defRPr>
-            </a:pPr>
-            <a:r>
-              <a:t>Gaussian noise</a:t>
-            </a:r>
-          </a:p>
-        </p:txBody>
-      </p:sp>
-      <p:sp>
-        <p:nvSpPr>
-          <p:cNvPr id="8" name="TextBox 7"/>
-          <p:cNvSpPr txBox="1"/>
-          <p:nvPr/>
-        </p:nvSpPr>
-        <p:spPr>
-          <a:xfrm>
-            <a:off x="886968" y="2313432"/>
-            <a:ext cx="4617720" cy="502920"/>
-          </a:xfrm>
-          <a:prstGeom prst="rect">
-            <a:avLst/>
-          </a:prstGeom>
-          <a:noFill/>
-        </p:spPr>
-        <p:txBody>
-          <a:bodyPr wrap="square">
-            <a:spAutoFit/>
-          </a:bodyPr>
-          <a:lstStyle/>
-          <a:p>
-            <a:pPr>
-              <a:defRPr sz="1050" b="0">
-                <a:solidFill>
-                  <a:srgbClr val="182228"/>
-                </a:solidFill>
-                <a:latin typeface="Aptos"/>
-              </a:defRPr>
-            </a:pPr>
-            <a:r>
-              <a:t>Light Gaussian smoothing reduces random pixel noise, then unsharp masking brings edges back.</a:t>
-            </a:r>
-          </a:p>
-        </p:txBody>
-      </p:sp>
-      <p:sp>
-        <p:nvSpPr>
-          <p:cNvPr id="9" name="Rounded Rectangle 8"/>
-          <p:cNvSpPr/>
-          <p:nvPr/>
-        </p:nvSpPr>
-        <p:spPr>
-          <a:xfrm>
-            <a:off x="1005840" y="3026664"/>
-            <a:ext cx="1554480" cy="384048"/>
-          </a:xfrm>
-          <a:prstGeom prst="roundRect">
-            <a:avLst/>
-          </a:prstGeom>
-          <a:solidFill>
-            <a:srgbClr val="F1F5F5"/>
-          </a:solidFill>
-          <a:ln w="8890">
-            <a:solidFill>
-              <a:srgbClr val="D2DBDB"/>
-            </a:solidFill>
-          </a:ln>
-        </p:spPr>
-        <p:style>
-          <a:lnRef idx="1">
-            <a:schemeClr val="accent1"/>
-          </a:lnRef>
-          <a:fillRef idx="3">
-            <a:schemeClr val="accent1"/>
-          </a:fillRef>
-          <a:effectRef idx="2">
-            <a:schemeClr val="accent1"/>
-          </a:effectRef>
-          <a:fontRef idx="minor">
-            <a:schemeClr val="lt1"/>
-          </a:fontRef>
-        </p:style>
-        <p:txBody>
-          <a:bodyPr rtlCol="0" anchor="ctr"/>
-          <a:lstStyle/>
-          <a:p>
-            <a:pPr algn="ctr"/>
-          </a:p>
-        </p:txBody>
-      </p:sp>
-      <p:sp>
-        <p:nvSpPr>
-          <p:cNvPr id="10" name="Rounded Rectangle 9"/>
-          <p:cNvSpPr/>
-          <p:nvPr/>
-        </p:nvSpPr>
-        <p:spPr>
-          <a:xfrm>
-            <a:off x="3227832" y="3026664"/>
-            <a:ext cx="1554480" cy="384048"/>
-          </a:xfrm>
-          <a:prstGeom prst="roundRect">
-            <a:avLst/>
-          </a:prstGeom>
-          <a:solidFill>
-            <a:srgbClr val="F1F5F5"/>
-          </a:solidFill>
-          <a:ln w="8890">
-            <a:solidFill>
-              <a:srgbClr val="D2DBDB"/>
-            </a:solidFill>
-          </a:ln>
-        </p:spPr>
-        <p:style>
-          <a:lnRef idx="1">
-            <a:schemeClr val="accent1"/>
-          </a:lnRef>
-          <a:fillRef idx="3">
-            <a:schemeClr val="accent1"/>
-          </a:fillRef>
-          <a:effectRef idx="2">
-            <a:schemeClr val="accent1"/>
-          </a:effectRef>
-          <a:fontRef idx="minor">
-            <a:schemeClr val="lt1"/>
-          </a:fontRef>
-        </p:style>
-        <p:txBody>
-          <a:bodyPr rtlCol="0" anchor="ctr"/>
-          <a:lstStyle/>
-          <a:p>
-            <a:pPr algn="ctr"/>
-          </a:p>
-        </p:txBody>
-      </p:sp>
-      <p:sp>
-        <p:nvSpPr>
-          <p:cNvPr id="11" name="TextBox 10"/>
-          <p:cNvSpPr txBox="1"/>
-          <p:nvPr/>
-        </p:nvSpPr>
-        <p:spPr>
-          <a:xfrm>
-            <a:off x="1097280" y="3118104"/>
-            <a:ext cx="1371600" cy="146304"/>
-          </a:xfrm>
-          <a:prstGeom prst="rect">
-            <a:avLst/>
-          </a:prstGeom>
-          <a:noFill/>
-        </p:spPr>
-        <p:txBody>
-          <a:bodyPr wrap="square">
-            <a:spAutoFit/>
-          </a:bodyPr>
-          <a:lstStyle/>
-          <a:p>
-            <a:pPr algn="ctr">
-              <a:defRPr sz="850" b="1">
-                <a:solidFill>
-                  <a:srgbClr val="182228"/>
-                </a:solidFill>
-                <a:latin typeface="Aptos"/>
-              </a:defRPr>
-            </a:pPr>
-            <a:r>
-              <a:t>smooth</a:t>
-            </a:r>
-          </a:p>
-        </p:txBody>
-      </p:sp>
-      <p:sp>
-        <p:nvSpPr>
-          <p:cNvPr id="12" name="TextBox 11"/>
-          <p:cNvSpPr txBox="1"/>
-          <p:nvPr/>
-        </p:nvSpPr>
-        <p:spPr>
-          <a:xfrm>
-            <a:off x="3319272" y="3118104"/>
-            <a:ext cx="1371600" cy="146304"/>
-          </a:xfrm>
-          <a:prstGeom prst="rect">
-            <a:avLst/>
-          </a:prstGeom>
-          <a:noFill/>
-        </p:spPr>
-        <p:txBody>
-          <a:bodyPr wrap="square">
-            <a:spAutoFit/>
-          </a:bodyPr>
-          <a:lstStyle/>
-          <a:p>
-            <a:pPr algn="ctr">
-              <a:defRPr sz="850" b="1">
-                <a:solidFill>
-                  <a:srgbClr val="182228"/>
-                </a:solidFill>
-                <a:latin typeface="Aptos"/>
-              </a:defRPr>
-            </a:pPr>
-            <a:r>
-              <a:t>sharpen</a:t>
-            </a:r>
-          </a:p>
-        </p:txBody>
-      </p:sp>
-      <p:cxnSp>
-        <p:nvCxnSpPr>
-          <p:cNvPr id="13" name="Connector 12"/>
-          <p:cNvCxnSpPr/>
-          <p:nvPr/>
-        </p:nvCxnSpPr>
-        <p:spPr>
-          <a:xfrm>
-            <a:off x="2606040" y="3218688"/>
-            <a:ext cx="548640" cy="0"/>
-          </a:xfrm>
-          <a:prstGeom prst="line">
-            <a:avLst/>
-          </a:prstGeom>
-          <a:ln w="20320">
-            <a:solidFill>
-              <a:srgbClr val="2666AC"/>
-            </a:solidFill>
-          </a:ln>
-        </p:spPr>
-        <p:style>
-          <a:lnRef idx="2">
-            <a:schemeClr val="accent1"/>
-          </a:lnRef>
-          <a:fillRef idx="0">
-            <a:schemeClr val="accent1"/>
-          </a:fillRef>
-          <a:effectRef idx="1">
-            <a:schemeClr val="accent1"/>
-          </a:effectRef>
-          <a:fontRef idx="minor">
-            <a:schemeClr val="tx1"/>
-          </a:fontRef>
-        </p:style>
-      </p:cxnSp>
-      <p:sp>
-        <p:nvSpPr>
-          <p:cNvPr id="14" name="Rounded Rectangle 13"/>
-          <p:cNvSpPr/>
-          <p:nvPr/>
-        </p:nvSpPr>
-        <p:spPr>
-          <a:xfrm>
-            <a:off x="6263640" y="1783080"/>
-            <a:ext cx="5166360" cy="1965960"/>
-          </a:xfrm>
-          <a:prstGeom prst="roundRect">
-            <a:avLst/>
-          </a:prstGeom>
-          <a:solidFill>
-            <a:srgbClr val="FFFFFF"/>
-          </a:solidFill>
-          <a:ln w="8890">
-            <a:solidFill>
-              <a:srgbClr val="D2DBDB"/>
-            </a:solidFill>
-          </a:ln>
-        </p:spPr>
-        <p:style>
-          <a:lnRef idx="1">
-            <a:schemeClr val="accent1"/>
-          </a:lnRef>
-          <a:fillRef idx="3">
-            <a:schemeClr val="accent1"/>
-          </a:fillRef>
-          <a:effectRef idx="2">
-            <a:schemeClr val="accent1"/>
-          </a:effectRef>
-          <a:fontRef idx="minor">
-            <a:schemeClr val="lt1"/>
-          </a:fontRef>
-        </p:style>
-        <p:txBody>
-          <a:bodyPr rtlCol="0" anchor="ctr"/>
-          <a:lstStyle/>
-          <a:p>
-            <a:pPr algn="ctr"/>
-          </a:p>
-        </p:txBody>
-      </p:sp>
-      <p:sp>
-        <p:nvSpPr>
-          <p:cNvPr id="15" name="TextBox 14"/>
-          <p:cNvSpPr txBox="1"/>
-          <p:nvPr/>
-        </p:nvSpPr>
-        <p:spPr>
-          <a:xfrm>
-            <a:off x="6464807" y="1947672"/>
-            <a:ext cx="3108960" cy="256032"/>
-          </a:xfrm>
-          <a:prstGeom prst="rect">
-            <a:avLst/>
-          </a:prstGeom>
-          <a:noFill/>
-        </p:spPr>
-        <p:txBody>
-          <a:bodyPr wrap="square">
-            <a:spAutoFit/>
-          </a:bodyPr>
-          <a:lstStyle/>
-          <a:p>
-            <a:pPr>
-              <a:defRPr sz="1500" b="1">
-                <a:solidFill>
-                  <a:srgbClr val="B2483E"/>
-                </a:solidFill>
-                <a:latin typeface="Aptos"/>
-              </a:defRPr>
-            </a:pPr>
-            <a:r>
-              <a:t>Salt-and-pepper</a:t>
-            </a:r>
-          </a:p>
-        </p:txBody>
-      </p:sp>
-      <p:sp>
-        <p:nvSpPr>
-          <p:cNvPr id="16" name="TextBox 15"/>
-          <p:cNvSpPr txBox="1"/>
-          <p:nvPr/>
-        </p:nvSpPr>
-        <p:spPr>
-          <a:xfrm>
-            <a:off x="6464807" y="2313432"/>
-            <a:ext cx="4617720" cy="502920"/>
-          </a:xfrm>
-          <a:prstGeom prst="rect">
-            <a:avLst/>
-          </a:prstGeom>
-          <a:noFill/>
-        </p:spPr>
-        <p:txBody>
-          <a:bodyPr wrap="square">
-            <a:spAutoFit/>
-          </a:bodyPr>
-          <a:lstStyle/>
-          <a:p>
-            <a:pPr>
-              <a:defRPr sz="1050" b="0">
-                <a:solidFill>
-                  <a:srgbClr val="182228"/>
-                </a:solidFill>
-                <a:latin typeface="Aptos"/>
-              </a:defRPr>
-            </a:pPr>
-            <a:r>
-              <a:t>A median filter replaces isolated black/white pixels using nearby values while preserving edges.</a:t>
-            </a:r>
-          </a:p>
-        </p:txBody>
-      </p:sp>
-      <p:sp>
-        <p:nvSpPr>
-          <p:cNvPr id="17" name="Rounded Rectangle 16"/>
-          <p:cNvSpPr/>
-          <p:nvPr/>
-        </p:nvSpPr>
-        <p:spPr>
-          <a:xfrm>
-            <a:off x="6583679" y="3026664"/>
-            <a:ext cx="1554480" cy="384048"/>
-          </a:xfrm>
-          <a:prstGeom prst="roundRect">
-            <a:avLst/>
-          </a:prstGeom>
-          <a:solidFill>
-            <a:srgbClr val="F1F5F5"/>
-          </a:solidFill>
-          <a:ln w="8890">
-            <a:solidFill>
-              <a:srgbClr val="D2DBDB"/>
-            </a:solidFill>
-          </a:ln>
-        </p:spPr>
-        <p:style>
-          <a:lnRef idx="1">
-            <a:schemeClr val="accent1"/>
-          </a:lnRef>
-          <a:fillRef idx="3">
-            <a:schemeClr val="accent1"/>
-          </a:fillRef>
-          <a:effectRef idx="2">
-            <a:schemeClr val="accent1"/>
-          </a:effectRef>
-          <a:fontRef idx="minor">
-            <a:schemeClr val="lt1"/>
-          </a:fontRef>
-        </p:style>
-        <p:txBody>
-          <a:bodyPr rtlCol="0" anchor="ctr"/>
-          <a:lstStyle/>
-          <a:p>
-            <a:pPr algn="ctr"/>
-          </a:p>
-        </p:txBody>
-      </p:sp>
-      <p:sp>
-        <p:nvSpPr>
-          <p:cNvPr id="18" name="Rounded Rectangle 17"/>
-          <p:cNvSpPr/>
-          <p:nvPr/>
-        </p:nvSpPr>
-        <p:spPr>
-          <a:xfrm>
-            <a:off x="8805672" y="3026664"/>
-            <a:ext cx="1554480" cy="384048"/>
-          </a:xfrm>
-          <a:prstGeom prst="roundRect">
-            <a:avLst/>
-          </a:prstGeom>
-          <a:solidFill>
-            <a:srgbClr val="F1F5F5"/>
-          </a:solidFill>
-          <a:ln w="8890">
-            <a:solidFill>
-              <a:srgbClr val="D2DBDB"/>
-            </a:solidFill>
-          </a:ln>
-        </p:spPr>
-        <p:style>
-          <a:lnRef idx="1">
-            <a:schemeClr val="accent1"/>
-          </a:lnRef>
-          <a:fillRef idx="3">
-            <a:schemeClr val="accent1"/>
-          </a:fillRef>
-          <a:effectRef idx="2">
-            <a:schemeClr val="accent1"/>
-          </a:effectRef>
-          <a:fontRef idx="minor">
-            <a:schemeClr val="lt1"/>
-          </a:fontRef>
-        </p:style>
-        <p:txBody>
-          <a:bodyPr rtlCol="0" anchor="ctr"/>
-          <a:lstStyle/>
-          <a:p>
-            <a:pPr algn="ctr"/>
-          </a:p>
-        </p:txBody>
-      </p:sp>
-      <p:sp>
-        <p:nvSpPr>
-          <p:cNvPr id="19" name="TextBox 18"/>
-          <p:cNvSpPr txBox="1"/>
-          <p:nvPr/>
-        </p:nvSpPr>
-        <p:spPr>
-          <a:xfrm>
-            <a:off x="6675120" y="3118104"/>
-            <a:ext cx="1371600" cy="146304"/>
-          </a:xfrm>
-          <a:prstGeom prst="rect">
-            <a:avLst/>
-          </a:prstGeom>
-          <a:noFill/>
-        </p:spPr>
-        <p:txBody>
-          <a:bodyPr wrap="square">
-            <a:spAutoFit/>
-          </a:bodyPr>
-          <a:lstStyle/>
-          <a:p>
-            <a:pPr algn="ctr">
-              <a:defRPr sz="850" b="1">
-                <a:solidFill>
-                  <a:srgbClr val="182228"/>
-                </a:solidFill>
-                <a:latin typeface="Aptos"/>
-              </a:defRPr>
-            </a:pPr>
-            <a:r>
-              <a:t>median</a:t>
-            </a:r>
-          </a:p>
-        </p:txBody>
-      </p:sp>
-      <p:sp>
-        <p:nvSpPr>
-          <p:cNvPr id="20" name="TextBox 19"/>
-          <p:cNvSpPr txBox="1"/>
-          <p:nvPr/>
-        </p:nvSpPr>
-        <p:spPr>
-          <a:xfrm>
-            <a:off x="8897112" y="3118104"/>
-            <a:ext cx="1371600" cy="146304"/>
-          </a:xfrm>
-          <a:prstGeom prst="rect">
-            <a:avLst/>
-          </a:prstGeom>
-          <a:noFill/>
-        </p:spPr>
-        <p:txBody>
-          <a:bodyPr wrap="square">
-            <a:spAutoFit/>
-          </a:bodyPr>
-          <a:lstStyle/>
-          <a:p>
-            <a:pPr algn="ctr">
-              <a:defRPr sz="850" b="1">
-                <a:solidFill>
-                  <a:srgbClr val="182228"/>
-                </a:solidFill>
-                <a:latin typeface="Aptos"/>
-              </a:defRPr>
-            </a:pPr>
-            <a:r>
-              <a:t>remove specks</a:t>
-            </a:r>
-          </a:p>
-        </p:txBody>
-      </p:sp>
-      <p:cxnSp>
-        <p:nvCxnSpPr>
-          <p:cNvPr id="21" name="Connector 20"/>
-          <p:cNvCxnSpPr/>
-          <p:nvPr/>
-        </p:nvCxnSpPr>
-        <p:spPr>
-          <a:xfrm>
-            <a:off x="8183879" y="3218688"/>
-            <a:ext cx="548641" cy="0"/>
-          </a:xfrm>
-          <a:prstGeom prst="line">
-            <a:avLst/>
-          </a:prstGeom>
-          <a:ln w="20320">
-            <a:solidFill>
-              <a:srgbClr val="B2483E"/>
-            </a:solidFill>
-          </a:ln>
-        </p:spPr>
-        <p:style>
-          <a:lnRef idx="2">
-            <a:schemeClr val="accent1"/>
-          </a:lnRef>
-          <a:fillRef idx="0">
-            <a:schemeClr val="accent1"/>
-          </a:fillRef>
-          <a:effectRef idx="1">
-            <a:schemeClr val="accent1"/>
-          </a:effectRef>
-          <a:fontRef idx="minor">
-            <a:schemeClr val="tx1"/>
-          </a:fontRef>
-        </p:style>
-      </p:cxnSp>
-      <p:sp>
-        <p:nvSpPr>
-          <p:cNvPr id="22" name="Rounded Rectangle 21"/>
-          <p:cNvSpPr/>
-          <p:nvPr/>
-        </p:nvSpPr>
-        <p:spPr>
-          <a:xfrm>
-            <a:off x="685800" y="4096512"/>
-            <a:ext cx="5166360" cy="1965960"/>
-          </a:xfrm>
-          <a:prstGeom prst="roundRect">
-            <a:avLst/>
-          </a:prstGeom>
-          <a:solidFill>
-            <a:srgbClr val="FFFFFF"/>
-          </a:solidFill>
-          <a:ln w="8890">
-            <a:solidFill>
-              <a:srgbClr val="D2DBDB"/>
-            </a:solidFill>
-          </a:ln>
-        </p:spPr>
-        <p:style>
-          <a:lnRef idx="1">
-            <a:schemeClr val="accent1"/>
-          </a:lnRef>
-          <a:fillRef idx="3">
-            <a:schemeClr val="accent1"/>
-          </a:fillRef>
-          <a:effectRef idx="2">
-            <a:schemeClr val="accent1"/>
-          </a:effectRef>
-          <a:fontRef idx="minor">
-            <a:schemeClr val="lt1"/>
-          </a:fontRef>
-        </p:style>
-        <p:txBody>
-          <a:bodyPr rtlCol="0" anchor="ctr"/>
-          <a:lstStyle/>
-          <a:p>
-            <a:pPr algn="ctr"/>
-          </a:p>
-        </p:txBody>
-      </p:sp>
-      <p:sp>
-        <p:nvSpPr>
-          <p:cNvPr id="23" name="TextBox 22"/>
-          <p:cNvSpPr txBox="1"/>
-          <p:nvPr/>
-        </p:nvSpPr>
-        <p:spPr>
-          <a:xfrm>
-            <a:off x="886968" y="4261104"/>
-            <a:ext cx="3108960" cy="256032"/>
-          </a:xfrm>
-          <a:prstGeom prst="rect">
-            <a:avLst/>
-          </a:prstGeom>
-          <a:noFill/>
-        </p:spPr>
-        <p:txBody>
-          <a:bodyPr wrap="square">
-            <a:spAutoFit/>
-          </a:bodyPr>
-          <a:lstStyle/>
-          <a:p>
-            <a:pPr>
-              <a:defRPr sz="1500" b="1">
-                <a:solidFill>
-                  <a:srgbClr val="008074"/>
-                </a:solidFill>
-                <a:latin typeface="Aptos"/>
-              </a:defRPr>
-            </a:pPr>
-            <a:r>
-              <a:t>Gaussian blur</a:t>
-            </a:r>
-          </a:p>
-        </p:txBody>
-      </p:sp>
-      <p:sp>
-        <p:nvSpPr>
-          <p:cNvPr id="24" name="TextBox 23"/>
-          <p:cNvSpPr txBox="1"/>
-          <p:nvPr/>
-        </p:nvSpPr>
-        <p:spPr>
-          <a:xfrm>
-            <a:off x="886968" y="4626864"/>
-            <a:ext cx="4617720" cy="502920"/>
-          </a:xfrm>
-          <a:prstGeom prst="rect">
-            <a:avLst/>
-          </a:prstGeom>
-          <a:noFill/>
-        </p:spPr>
-        <p:txBody>
-          <a:bodyPr wrap="square">
-            <a:spAutoFit/>
-          </a:bodyPr>
-          <a:lstStyle/>
-          <a:p>
-            <a:pPr>
-              <a:defRPr sz="1050" b="0">
-                <a:solidFill>
-                  <a:srgbClr val="182228"/>
-                </a:solidFill>
-                <a:latin typeface="Aptos"/>
-              </a:defRPr>
-            </a:pPr>
-            <a:r>
-              <a:t>Unsharp masking boosts local contrast so softened edges become clearer again.</a:t>
-            </a:r>
-          </a:p>
-        </p:txBody>
-      </p:sp>
-      <p:sp>
-        <p:nvSpPr>
-          <p:cNvPr id="25" name="Rounded Rectangle 24"/>
-          <p:cNvSpPr/>
-          <p:nvPr/>
-        </p:nvSpPr>
-        <p:spPr>
-          <a:xfrm>
-            <a:off x="1005840" y="5340096"/>
-            <a:ext cx="1554480" cy="384048"/>
-          </a:xfrm>
-          <a:prstGeom prst="roundRect">
-            <a:avLst/>
-          </a:prstGeom>
-          <a:solidFill>
-            <a:srgbClr val="F1F5F5"/>
-          </a:solidFill>
-          <a:ln w="8890">
-            <a:solidFill>
-              <a:srgbClr val="D2DBDB"/>
-            </a:solidFill>
-          </a:ln>
-        </p:spPr>
-        <p:style>
-          <a:lnRef idx="1">
-            <a:schemeClr val="accent1"/>
-          </a:lnRef>
-          <a:fillRef idx="3">
-            <a:schemeClr val="accent1"/>
-          </a:fillRef>
-          <a:effectRef idx="2">
-            <a:schemeClr val="accent1"/>
-          </a:effectRef>
-          <a:fontRef idx="minor">
-            <a:schemeClr val="lt1"/>
-          </a:fontRef>
-        </p:style>
-        <p:txBody>
-          <a:bodyPr rtlCol="0" anchor="ctr"/>
-          <a:lstStyle/>
-          <a:p>
-            <a:pPr algn="ctr"/>
-          </a:p>
-        </p:txBody>
-      </p:sp>
-      <p:sp>
-        <p:nvSpPr>
-          <p:cNvPr id="26" name="Rounded Rectangle 25"/>
-          <p:cNvSpPr/>
-          <p:nvPr/>
-        </p:nvSpPr>
-        <p:spPr>
-          <a:xfrm>
-            <a:off x="3227832" y="5340096"/>
-            <a:ext cx="1554480" cy="384048"/>
-          </a:xfrm>
-          <a:prstGeom prst="roundRect">
-            <a:avLst/>
-          </a:prstGeom>
-          <a:solidFill>
-            <a:srgbClr val="F1F5F5"/>
-          </a:solidFill>
-          <a:ln w="8890">
-            <a:solidFill>
-              <a:srgbClr val="D2DBDB"/>
-            </a:solidFill>
-          </a:ln>
-        </p:spPr>
-        <p:style>
-          <a:lnRef idx="1">
-            <a:schemeClr val="accent1"/>
-          </a:lnRef>
-          <a:fillRef idx="3">
-            <a:schemeClr val="accent1"/>
-          </a:fillRef>
-          <a:effectRef idx="2">
-            <a:schemeClr val="accent1"/>
-          </a:effectRef>
-          <a:fontRef idx="minor">
-            <a:schemeClr val="lt1"/>
-          </a:fontRef>
-        </p:style>
-        <p:txBody>
-          <a:bodyPr rtlCol="0" anchor="ctr"/>
-          <a:lstStyle/>
-          <a:p>
-            <a:pPr algn="ctr"/>
-          </a:p>
-        </p:txBody>
-      </p:sp>
-      <p:sp>
-        <p:nvSpPr>
-          <p:cNvPr id="27" name="TextBox 26"/>
-          <p:cNvSpPr txBox="1"/>
-          <p:nvPr/>
-        </p:nvSpPr>
-        <p:spPr>
-          <a:xfrm>
-            <a:off x="1097280" y="5431536"/>
-            <a:ext cx="1371600" cy="146304"/>
-          </a:xfrm>
-          <a:prstGeom prst="rect">
-            <a:avLst/>
-          </a:prstGeom>
-          <a:noFill/>
-        </p:spPr>
-        <p:txBody>
-          <a:bodyPr wrap="square">
-            <a:spAutoFit/>
-          </a:bodyPr>
-          <a:lstStyle/>
-          <a:p>
-            <a:pPr algn="ctr">
-              <a:defRPr sz="850" b="1">
-                <a:solidFill>
-                  <a:srgbClr val="182228"/>
-                </a:solidFill>
-                <a:latin typeface="Aptos"/>
-              </a:defRPr>
-            </a:pPr>
-            <a:r>
-              <a:t>edge boost</a:t>
-            </a:r>
-          </a:p>
-        </p:txBody>
-      </p:sp>
-      <p:sp>
-        <p:nvSpPr>
-          <p:cNvPr id="28" name="TextBox 27"/>
-          <p:cNvSpPr txBox="1"/>
-          <p:nvPr/>
-        </p:nvSpPr>
-        <p:spPr>
-          <a:xfrm>
-            <a:off x="3319272" y="5431536"/>
-            <a:ext cx="1371600" cy="146304"/>
-          </a:xfrm>
-          <a:prstGeom prst="rect">
-            <a:avLst/>
-          </a:prstGeom>
-          <a:noFill/>
-        </p:spPr>
-        <p:txBody>
-          <a:bodyPr wrap="square">
-            <a:spAutoFit/>
-          </a:bodyPr>
-          <a:lstStyle/>
-          <a:p>
-            <a:pPr algn="ctr">
-              <a:defRPr sz="850" b="1">
-                <a:solidFill>
-                  <a:srgbClr val="182228"/>
-                </a:solidFill>
-                <a:latin typeface="Aptos"/>
-              </a:defRPr>
-            </a:pPr>
-            <a:r>
-              <a:t>sharpen</a:t>
-            </a:r>
-          </a:p>
-        </p:txBody>
-      </p:sp>
-      <p:cxnSp>
-        <p:nvCxnSpPr>
-          <p:cNvPr id="29" name="Connector 28"/>
-          <p:cNvCxnSpPr/>
-          <p:nvPr/>
-        </p:nvCxnSpPr>
-        <p:spPr>
-          <a:xfrm>
-            <a:off x="2606040" y="5532120"/>
-            <a:ext cx="548640" cy="0"/>
-          </a:xfrm>
-          <a:prstGeom prst="line">
-            <a:avLst/>
-          </a:prstGeom>
-          <a:ln w="20320">
-            <a:solidFill>
-              <a:srgbClr val="008074"/>
-            </a:solidFill>
-          </a:ln>
-        </p:spPr>
-        <p:style>
-          <a:lnRef idx="2">
-            <a:schemeClr val="accent1"/>
-          </a:lnRef>
-          <a:fillRef idx="0">
-            <a:schemeClr val="accent1"/>
-          </a:fillRef>
-          <a:effectRef idx="1">
-            <a:schemeClr val="accent1"/>
-          </a:effectRef>
-          <a:fontRef idx="minor">
-            <a:schemeClr val="tx1"/>
-          </a:fontRef>
-        </p:style>
-      </p:cxnSp>
-      <p:sp>
-        <p:nvSpPr>
-          <p:cNvPr id="30" name="Rounded Rectangle 29"/>
-          <p:cNvSpPr/>
-          <p:nvPr/>
-        </p:nvSpPr>
-        <p:spPr>
-          <a:xfrm>
-            <a:off x="6263640" y="4096512"/>
-            <a:ext cx="5166360" cy="1965960"/>
-          </a:xfrm>
-          <a:prstGeom prst="roundRect">
-            <a:avLst/>
-          </a:prstGeom>
-          <a:solidFill>
-            <a:srgbClr val="FFFFFF"/>
-          </a:solidFill>
-          <a:ln w="8890">
-            <a:solidFill>
-              <a:srgbClr val="D2DBDB"/>
-            </a:solidFill>
-          </a:ln>
-        </p:spPr>
-        <p:style>
-          <a:lnRef idx="1">
-            <a:schemeClr val="accent1"/>
-          </a:lnRef>
-          <a:fillRef idx="3">
-            <a:schemeClr val="accent1"/>
-          </a:fillRef>
-          <a:effectRef idx="2">
-            <a:schemeClr val="accent1"/>
-          </a:effectRef>
-          <a:fontRef idx="minor">
-            <a:schemeClr val="lt1"/>
-          </a:fontRef>
-        </p:style>
-        <p:txBody>
-          <a:bodyPr rtlCol="0" anchor="ctr"/>
-          <a:lstStyle/>
-          <a:p>
-            <a:pPr algn="ctr"/>
-          </a:p>
-        </p:txBody>
-      </p:sp>
-      <p:sp>
-        <p:nvSpPr>
-          <p:cNvPr id="31" name="TextBox 30"/>
-          <p:cNvSpPr txBox="1"/>
-          <p:nvPr/>
-        </p:nvSpPr>
-        <p:spPr>
-          <a:xfrm>
-            <a:off x="6464807" y="4261104"/>
-            <a:ext cx="3108960" cy="256032"/>
-          </a:xfrm>
-          <a:prstGeom prst="rect">
-            <a:avLst/>
-          </a:prstGeom>
-          <a:noFill/>
-        </p:spPr>
-        <p:txBody>
-          <a:bodyPr wrap="square">
-            <a:spAutoFit/>
-          </a:bodyPr>
-          <a:lstStyle/>
-          <a:p>
-            <a:pPr>
-              <a:defRPr sz="1500" b="1">
-                <a:solidFill>
-                  <a:srgbClr val="B88630"/>
-                </a:solidFill>
-                <a:latin typeface="Aptos"/>
-              </a:defRPr>
-            </a:pPr>
-            <a:r>
-              <a:t>Brightness / contrast</a:t>
-            </a:r>
-          </a:p>
-        </p:txBody>
-      </p:sp>
-      <p:sp>
-        <p:nvSpPr>
-          <p:cNvPr id="32" name="TextBox 31"/>
-          <p:cNvSpPr txBox="1"/>
-          <p:nvPr/>
-        </p:nvSpPr>
-        <p:spPr>
-          <a:xfrm>
-            <a:off x="6464807" y="4626864"/>
-            <a:ext cx="4617720" cy="502920"/>
-          </a:xfrm>
-          <a:prstGeom prst="rect">
-            <a:avLst/>
-          </a:prstGeom>
-          <a:noFill/>
-        </p:spPr>
-        <p:txBody>
-          <a:bodyPr wrap="square">
-            <a:spAutoFit/>
-          </a:bodyPr>
-          <a:lstStyle/>
-          <a:p>
-            <a:pPr>
-              <a:defRPr sz="1050" b="0">
-                <a:solidFill>
-                  <a:srgbClr val="182228"/>
-                </a:solidFill>
-                <a:latin typeface="Aptos"/>
-              </a:defRPr>
-            </a:pPr>
-            <a:r>
-              <a:t>Autocontrast spreads useful intensities, then contrast normalization brings the image back to a stable range.</a:t>
-            </a:r>
-          </a:p>
-        </p:txBody>
-      </p:sp>
-      <p:sp>
-        <p:nvSpPr>
-          <p:cNvPr id="33" name="Rounded Rectangle 32"/>
-          <p:cNvSpPr/>
-          <p:nvPr/>
-        </p:nvSpPr>
-        <p:spPr>
-          <a:xfrm>
-            <a:off x="6583679" y="5340096"/>
-            <a:ext cx="1554480" cy="384048"/>
-          </a:xfrm>
-          <a:prstGeom prst="roundRect">
-            <a:avLst/>
-          </a:prstGeom>
-          <a:solidFill>
-            <a:srgbClr val="F1F5F5"/>
-          </a:solidFill>
-          <a:ln w="8890">
-            <a:solidFill>
-              <a:srgbClr val="D2DBDB"/>
-            </a:solidFill>
-          </a:ln>
-        </p:spPr>
-        <p:style>
-          <a:lnRef idx="1">
-            <a:schemeClr val="accent1"/>
-          </a:lnRef>
-          <a:fillRef idx="3">
-            <a:schemeClr val="accent1"/>
-          </a:fillRef>
-          <a:effectRef idx="2">
-            <a:schemeClr val="accent1"/>
-          </a:effectRef>
-          <a:fontRef idx="minor">
-            <a:schemeClr val="lt1"/>
-          </a:fontRef>
-        </p:style>
-        <p:txBody>
-          <a:bodyPr rtlCol="0" anchor="ctr"/>
-          <a:lstStyle/>
-          <a:p>
-            <a:pPr algn="ctr"/>
-          </a:p>
-        </p:txBody>
-      </p:sp>
-      <p:sp>
-        <p:nvSpPr>
-          <p:cNvPr id="34" name="Rounded Rectangle 33"/>
-          <p:cNvSpPr/>
-          <p:nvPr/>
-        </p:nvSpPr>
-        <p:spPr>
-          <a:xfrm>
-            <a:off x="8805672" y="5340096"/>
-            <a:ext cx="1554480" cy="384048"/>
-          </a:xfrm>
-          <a:prstGeom prst="roundRect">
-            <a:avLst/>
-          </a:prstGeom>
-          <a:solidFill>
-            <a:srgbClr val="F1F5F5"/>
-          </a:solidFill>
-          <a:ln w="8890">
-            <a:solidFill>
-              <a:srgbClr val="D2DBDB"/>
-            </a:solidFill>
-          </a:ln>
-        </p:spPr>
-        <p:style>
-          <a:lnRef idx="1">
-            <a:schemeClr val="accent1"/>
-          </a:lnRef>
-          <a:fillRef idx="3">
-            <a:schemeClr val="accent1"/>
-          </a:fillRef>
-          <a:effectRef idx="2">
-            <a:schemeClr val="accent1"/>
-          </a:effectRef>
-          <a:fontRef idx="minor">
-            <a:schemeClr val="lt1"/>
-          </a:fontRef>
-        </p:style>
-        <p:txBody>
-          <a:bodyPr rtlCol="0" anchor="ctr"/>
-          <a:lstStyle/>
-          <a:p>
-            <a:pPr algn="ctr"/>
-          </a:p>
-        </p:txBody>
-      </p:sp>
-      <p:sp>
-        <p:nvSpPr>
-          <p:cNvPr id="35" name="TextBox 34"/>
-          <p:cNvSpPr txBox="1"/>
-          <p:nvPr/>
-        </p:nvSpPr>
-        <p:spPr>
-          <a:xfrm>
-            <a:off x="6675120" y="5431536"/>
-            <a:ext cx="1371600" cy="146304"/>
-          </a:xfrm>
-          <a:prstGeom prst="rect">
-            <a:avLst/>
-          </a:prstGeom>
-          <a:noFill/>
-        </p:spPr>
-        <p:txBody>
-          <a:bodyPr wrap="square">
-            <a:spAutoFit/>
-          </a:bodyPr>
-          <a:lstStyle/>
-          <a:p>
-            <a:pPr algn="ctr">
-              <a:defRPr sz="850" b="1">
-                <a:solidFill>
-                  <a:srgbClr val="182228"/>
-                </a:solidFill>
-                <a:latin typeface="Aptos"/>
-              </a:defRPr>
-            </a:pPr>
-            <a:r>
-              <a:t>normalize</a:t>
-            </a:r>
-          </a:p>
-        </p:txBody>
-      </p:sp>
-      <p:sp>
-        <p:nvSpPr>
-          <p:cNvPr id="36" name="TextBox 35"/>
-          <p:cNvSpPr txBox="1"/>
-          <p:nvPr/>
-        </p:nvSpPr>
-        <p:spPr>
-          <a:xfrm>
-            <a:off x="8897112" y="5431536"/>
-            <a:ext cx="1371600" cy="146304"/>
-          </a:xfrm>
-          <a:prstGeom prst="rect">
-            <a:avLst/>
-          </a:prstGeom>
-          <a:noFill/>
-        </p:spPr>
-        <p:txBody>
-          <a:bodyPr wrap="square">
-            <a:spAutoFit/>
-          </a:bodyPr>
-          <a:lstStyle/>
-          <a:p>
-            <a:pPr algn="ctr">
-              <a:defRPr sz="850" b="1">
-                <a:solidFill>
-                  <a:srgbClr val="182228"/>
-                </a:solidFill>
-                <a:latin typeface="Aptos"/>
-              </a:defRPr>
-            </a:pPr>
-            <a:r>
-              <a:t>rebalance</a:t>
-            </a:r>
-          </a:p>
-        </p:txBody>
-      </p:sp>
-      <p:cxnSp>
-        <p:nvCxnSpPr>
-          <p:cNvPr id="37" name="Connector 36"/>
-          <p:cNvCxnSpPr/>
-          <p:nvPr/>
-        </p:nvCxnSpPr>
-        <p:spPr>
-          <a:xfrm>
-            <a:off x="8183879" y="5532120"/>
-            <a:ext cx="548641" cy="0"/>
-          </a:xfrm>
-          <a:prstGeom prst="line">
-            <a:avLst/>
-          </a:prstGeom>
-          <a:ln w="20320">
-            <a:solidFill>
-              <a:srgbClr val="B88630"/>
-            </a:solidFill>
-          </a:ln>
-        </p:spPr>
-        <p:style>
-          <a:lnRef idx="2">
-            <a:schemeClr val="accent1"/>
-          </a:lnRef>
-          <a:fillRef idx="0">
-            <a:schemeClr val="accent1"/>
-          </a:fillRef>
-          <a:effectRef idx="1">
-            <a:schemeClr val="accent1"/>
-          </a:effectRef>
-          <a:fontRef idx="minor">
-            <a:schemeClr val="tx1"/>
-          </a:fontRef>
-        </p:style>
-      </p:cxnSp>
-      <p:sp>
-        <p:nvSpPr>
-          <p:cNvPr id="38" name="TextBox 37"/>
-          <p:cNvSpPr txBox="1"/>
-          <p:nvPr/>
-        </p:nvSpPr>
-        <p:spPr>
-          <a:xfrm>
-            <a:off x="11292840" y="6446520"/>
-            <a:ext cx="411480" cy="182880"/>
-          </a:xfrm>
-          <a:prstGeom prst="rect">
-            <a:avLst/>
-          </a:prstGeom>
-          <a:noFill/>
-        </p:spPr>
-        <p:txBody>
-          <a:bodyPr wrap="square">
-            <a:spAutoFit/>
-          </a:bodyPr>
-          <a:lstStyle/>
-          <a:p>
-            <a:pPr algn="r">
-              <a:defRPr sz="800" b="0">
-                <a:solidFill>
-                  <a:srgbClr val="56636B"/>
-                </a:solidFill>
-                <a:latin typeface="Aptos"/>
-              </a:defRPr>
-            </a:pPr>
-            <a:r>
-              <a:t>07</a:t>
-            </a:r>
-          </a:p>
-        </p:txBody>
-      </p:sp>
-    </p:spTree>
-  </p:cSld>
-  <p:clrMapOvr>
-    <a:masterClrMapping/>
-  </p:clrMapOvr>
-</p:sld>
-</file>
-
-<file path=ppt/slides/slide9.xml><?xml version="1.0" encoding="utf-8"?>
 <p:sld xmlns:a="http://schemas.openxmlformats.org/drawingml/2006/main" xmlns:r="http://schemas.openxmlformats.org/officeDocument/2006/relationships" xmlns:p="http://schemas.openxmlformats.org/presentationml/2006/main">
   <p:cSld>
     <p:bg>
@@ -16694,6 +15832,643 @@
             </a:pPr>
             <a:r>
               <a:t>Downsample x2, reconstruct, and measure image fidelity with PSNR.</a:t>
+            </a:r>
+          </a:p>
+        </p:txBody>
+      </p:sp>
+    </p:spTree>
+  </p:cSld>
+  <p:clrMapOvr>
+    <a:masterClrMapping/>
+  </p:clrMapOvr>
+</p:sld>
+</file>
+
+<file path=ppt/slides/slide9.xml><?xml version="1.0" encoding="utf-8"?>
+<p:sld xmlns:a="http://schemas.openxmlformats.org/drawingml/2006/main" xmlns:r="http://schemas.openxmlformats.org/officeDocument/2006/relationships" xmlns:p="http://schemas.openxmlformats.org/presentationml/2006/main">
+  <p:cSld>
+    <p:bg>
+      <p:bgPr>
+        <a:solidFill>
+          <a:srgbClr val="F7F9F7"/>
+        </a:solidFill>
+        <a:effectLst/>
+      </p:bgPr>
+    </p:bg>
+    <p:spTree>
+      <p:nvGrpSpPr>
+        <p:cNvPr id="1" name=""/>
+        <p:cNvGrpSpPr/>
+        <p:nvPr/>
+      </p:nvGrpSpPr>
+      <p:grpSpPr>
+        <a:xfrm>
+          <a:off x="0" y="0"/>
+          <a:ext cx="0" cy="0"/>
+          <a:chOff x="0" y="0"/>
+          <a:chExt cx="0" cy="0"/>
+        </a:xfrm>
+      </p:grpSpPr>
+      <p:sp>
+        <p:nvSpPr>
+          <p:cNvPr id="2" name="TextBox 1"/>
+          <p:cNvSpPr txBox="1"/>
+          <p:nvPr/>
+        </p:nvSpPr>
+        <p:spPr>
+          <a:xfrm>
+            <a:off x="502920" y="320040"/>
+            <a:ext cx="4572000" cy="256032"/>
+          </a:xfrm>
+          <a:prstGeom prst="rect">
+            <a:avLst/>
+          </a:prstGeom>
+          <a:noFill/>
+        </p:spPr>
+        <p:txBody>
+          <a:bodyPr wrap="none" lIns="18288" tIns="9144" rIns="18288" bIns="9144">
+            <a:spAutoFit/>
+          </a:bodyPr>
+          <a:lstStyle/>
+          <a:p>
+            <a:pPr>
+              <a:defRPr sz="900" b="1">
+                <a:solidFill>
+                  <a:srgbClr val="008074"/>
+                </a:solidFill>
+                <a:latin typeface="Aptos"/>
+              </a:defRPr>
+            </a:pPr>
+            <a:r>
+              <a:t>TASK 1 | CLEAN SUPER-RESOLUTION</a:t>
+            </a:r>
+          </a:p>
+        </p:txBody>
+      </p:sp>
+      <p:sp>
+        <p:nvSpPr>
+          <p:cNvPr id="3" name="TextBox 2"/>
+          <p:cNvSpPr txBox="1"/>
+          <p:nvPr/>
+        </p:nvSpPr>
+        <p:spPr>
+          <a:xfrm>
+            <a:off x="502920" y="640080"/>
+            <a:ext cx="8961120" cy="603504"/>
+          </a:xfrm>
+          <a:prstGeom prst="rect">
+            <a:avLst/>
+          </a:prstGeom>
+          <a:noFill/>
+        </p:spPr>
+        <p:txBody>
+          <a:bodyPr wrap="none" lIns="18288" tIns="9144" rIns="18288" bIns="9144">
+            <a:spAutoFit/>
+          </a:bodyPr>
+          <a:lstStyle/>
+          <a:p>
+            <a:pPr>
+              <a:defRPr sz="2400" b="1">
+                <a:solidFill>
+                  <a:srgbClr val="182228"/>
+                </a:solidFill>
+                <a:latin typeface="Aptos"/>
+              </a:defRPr>
+            </a:pPr>
+            <a:r>
+              <a:t>Lanczos gives the strongest clean PSNR on the selected MRI image.</a:t>
+            </a:r>
+          </a:p>
+        </p:txBody>
+      </p:sp>
+      <p:sp>
+        <p:nvSpPr>
+          <p:cNvPr id="4" name="TextBox 3"/>
+          <p:cNvSpPr txBox="1"/>
+          <p:nvPr/>
+        </p:nvSpPr>
+        <p:spPr>
+          <a:xfrm>
+            <a:off x="521207" y="1225296"/>
+            <a:ext cx="9052560" cy="292608"/>
+          </a:xfrm>
+          <a:prstGeom prst="rect">
+            <a:avLst/>
+          </a:prstGeom>
+          <a:noFill/>
+        </p:spPr>
+        <p:txBody>
+          <a:bodyPr wrap="none" lIns="18288" tIns="9144" rIns="18288" bIns="9144">
+            <a:spAutoFit/>
+          </a:bodyPr>
+          <a:lstStyle/>
+          <a:p>
+            <a:pPr>
+              <a:defRPr sz="1050" b="0">
+                <a:solidFill>
+                  <a:srgbClr val="56636B"/>
+                </a:solidFill>
+                <a:latin typeface="Aptos"/>
+              </a:defRPr>
+            </a:pPr>
+            <a:r>
+              <a:t>Sharpened_lanczos is used in the SNR/level experiments to compare distorted and restored images.</a:t>
+            </a:r>
+          </a:p>
+        </p:txBody>
+      </p:sp>
+      <p:sp>
+        <p:nvSpPr>
+          <p:cNvPr id="5" name="TextBox 4"/>
+          <p:cNvSpPr txBox="1"/>
+          <p:nvPr/>
+        </p:nvSpPr>
+        <p:spPr>
+          <a:xfrm>
+            <a:off x="9692640" y="347472"/>
+            <a:ext cx="1920240" cy="228600"/>
+          </a:xfrm>
+          <a:prstGeom prst="rect">
+            <a:avLst/>
+          </a:prstGeom>
+          <a:noFill/>
+        </p:spPr>
+        <p:txBody>
+          <a:bodyPr wrap="none" lIns="18288" tIns="9144" rIns="18288" bIns="9144">
+            <a:spAutoFit/>
+          </a:bodyPr>
+          <a:lstStyle/>
+          <a:p>
+            <a:pPr algn="r">
+              <a:defRPr sz="850" b="0">
+                <a:solidFill>
+                  <a:srgbClr val="56636B"/>
+                </a:solidFill>
+                <a:latin typeface="Aptos"/>
+              </a:defRPr>
+            </a:pPr>
+            <a:r>
+              <a:t>Brain MRI robustness</a:t>
+            </a:r>
+          </a:p>
+        </p:txBody>
+      </p:sp>
+      <p:sp>
+        <p:nvSpPr>
+          <p:cNvPr id="6" name="TextBox 5"/>
+          <p:cNvSpPr txBox="1"/>
+          <p:nvPr/>
+        </p:nvSpPr>
+        <p:spPr>
+          <a:xfrm>
+            <a:off x="11292840" y="6446520"/>
+            <a:ext cx="411480" cy="182880"/>
+          </a:xfrm>
+          <a:prstGeom prst="rect">
+            <a:avLst/>
+          </a:prstGeom>
+          <a:noFill/>
+        </p:spPr>
+        <p:txBody>
+          <a:bodyPr wrap="none" lIns="18288" tIns="9144" rIns="18288" bIns="9144">
+            <a:spAutoFit/>
+          </a:bodyPr>
+          <a:lstStyle/>
+          <a:p>
+            <a:pPr algn="r">
+              <a:defRPr sz="800" b="0">
+                <a:solidFill>
+                  <a:srgbClr val="56636B"/>
+                </a:solidFill>
+                <a:latin typeface="Aptos"/>
+              </a:defRPr>
+            </a:pPr>
+            <a:r>
+              <a:t>08</a:t>
+            </a:r>
+          </a:p>
+        </p:txBody>
+      </p:sp>
+      <p:sp>
+        <p:nvSpPr>
+          <p:cNvPr id="7" name="Rounded Rectangle 6"/>
+          <p:cNvSpPr/>
+          <p:nvPr/>
+        </p:nvSpPr>
+        <p:spPr>
+          <a:xfrm>
+            <a:off x="594360" y="1645920"/>
+            <a:ext cx="6629400" cy="4434840"/>
+          </a:xfrm>
+          <a:prstGeom prst="roundRect">
+            <a:avLst/>
+          </a:prstGeom>
+          <a:solidFill>
+            <a:srgbClr val="FFFFFF"/>
+          </a:solidFill>
+          <a:ln w="8890">
+            <a:solidFill>
+              <a:srgbClr val="D6DEDE"/>
+            </a:solidFill>
+          </a:ln>
+        </p:spPr>
+        <p:style>
+          <a:lnRef idx="1">
+            <a:schemeClr val="accent1"/>
+          </a:lnRef>
+          <a:fillRef idx="3">
+            <a:schemeClr val="accent1"/>
+          </a:fillRef>
+          <a:effectRef idx="2">
+            <a:schemeClr val="accent1"/>
+          </a:effectRef>
+          <a:fontRef idx="minor">
+            <a:schemeClr val="lt1"/>
+          </a:fontRef>
+        </p:style>
+        <p:txBody>
+          <a:bodyPr rtlCol="0" anchor="ctr"/>
+          <a:lstStyle/>
+          <a:p>
+            <a:pPr algn="ctr"/>
+            <a:endParaRPr/>
+          </a:p>
+        </p:txBody>
+      </p:sp>
+      <p:pic>
+        <p:nvPicPr>
+          <p:cNvPr id="8" name="Picture 7" descr="super_resolution_grid.png"/>
+          <p:cNvPicPr>
+            <a:picLocks noChangeAspect="1"/>
+          </p:cNvPicPr>
+          <p:nvPr/>
+        </p:nvPicPr>
+        <p:blipFill>
+          <a:blip r:embed="rId2"/>
+          <a:stretch>
+            <a:fillRect/>
+          </a:stretch>
+        </p:blipFill>
+        <p:spPr>
+          <a:xfrm>
+            <a:off x="1797231" y="1645920"/>
+            <a:ext cx="4223657" cy="4434840"/>
+          </a:xfrm>
+          <a:prstGeom prst="rect">
+            <a:avLst/>
+          </a:prstGeom>
+        </p:spPr>
+      </p:pic>
+      <p:sp>
+        <p:nvSpPr>
+          <p:cNvPr id="9" name="Rounded Rectangle 8"/>
+          <p:cNvSpPr/>
+          <p:nvPr/>
+        </p:nvSpPr>
+        <p:spPr>
+          <a:xfrm>
+            <a:off x="7635240" y="1874519"/>
+            <a:ext cx="2240280" cy="914400"/>
+          </a:xfrm>
+          <a:prstGeom prst="roundRect">
+            <a:avLst/>
+          </a:prstGeom>
+          <a:solidFill>
+            <a:srgbClr val="FAFCFC"/>
+          </a:solidFill>
+          <a:ln w="8890">
+            <a:solidFill>
+              <a:srgbClr val="D2DBDB"/>
+            </a:solidFill>
+          </a:ln>
+        </p:spPr>
+        <p:style>
+          <a:lnRef idx="1">
+            <a:schemeClr val="accent1"/>
+          </a:lnRef>
+          <a:fillRef idx="3">
+            <a:schemeClr val="accent1"/>
+          </a:fillRef>
+          <a:effectRef idx="2">
+            <a:schemeClr val="accent1"/>
+          </a:effectRef>
+          <a:fontRef idx="minor">
+            <a:schemeClr val="lt1"/>
+          </a:fontRef>
+        </p:style>
+        <p:txBody>
+          <a:bodyPr rtlCol="0" anchor="ctr"/>
+          <a:lstStyle/>
+          <a:p>
+            <a:pPr algn="ctr"/>
+            <a:endParaRPr/>
+          </a:p>
+        </p:txBody>
+      </p:sp>
+      <p:sp>
+        <p:nvSpPr>
+          <p:cNvPr id="10" name="TextBox 9"/>
+          <p:cNvSpPr txBox="1"/>
+          <p:nvPr/>
+        </p:nvSpPr>
+        <p:spPr>
+          <a:xfrm>
+            <a:off x="7799831" y="1984248"/>
+            <a:ext cx="1874519" cy="320040"/>
+          </a:xfrm>
+          <a:prstGeom prst="rect">
+            <a:avLst/>
+          </a:prstGeom>
+          <a:noFill/>
+        </p:spPr>
+        <p:txBody>
+          <a:bodyPr wrap="none" lIns="18288" tIns="9144" rIns="18288" bIns="9144">
+            <a:spAutoFit/>
+          </a:bodyPr>
+          <a:lstStyle/>
+          <a:p>
+            <a:pPr>
+              <a:defRPr sz="2100" b="1">
+                <a:solidFill>
+                  <a:srgbClr val="2666AC"/>
+                </a:solidFill>
+                <a:latin typeface="Aptos"/>
+              </a:defRPr>
+            </a:pPr>
+            <a:r>
+              <a:t>29.62</a:t>
+            </a:r>
+          </a:p>
+        </p:txBody>
+      </p:sp>
+      <p:sp>
+        <p:nvSpPr>
+          <p:cNvPr id="11" name="TextBox 10"/>
+          <p:cNvSpPr txBox="1"/>
+          <p:nvPr/>
+        </p:nvSpPr>
+        <p:spPr>
+          <a:xfrm>
+            <a:off x="7799831" y="2404872"/>
+            <a:ext cx="1901952" cy="228600"/>
+          </a:xfrm>
+          <a:prstGeom prst="rect">
+            <a:avLst/>
+          </a:prstGeom>
+          <a:noFill/>
+        </p:spPr>
+        <p:txBody>
+          <a:bodyPr wrap="none" lIns="18288" tIns="9144" rIns="18288" bIns="9144">
+            <a:spAutoFit/>
+          </a:bodyPr>
+          <a:lstStyle/>
+          <a:p>
+            <a:pPr>
+              <a:defRPr sz="850" b="0">
+                <a:solidFill>
+                  <a:srgbClr val="56636B"/>
+                </a:solidFill>
+                <a:latin typeface="Aptos"/>
+              </a:defRPr>
+            </a:pPr>
+            <a:r>
+              <a:t>Best clean PSNR: Lanczos</a:t>
+            </a:r>
+          </a:p>
+        </p:txBody>
+      </p:sp>
+      <p:sp>
+        <p:nvSpPr>
+          <p:cNvPr id="12" name="Rounded Rectangle 11"/>
+          <p:cNvSpPr/>
+          <p:nvPr/>
+        </p:nvSpPr>
+        <p:spPr>
+          <a:xfrm>
+            <a:off x="7635240" y="2971800"/>
+            <a:ext cx="2240280" cy="914400"/>
+          </a:xfrm>
+          <a:prstGeom prst="roundRect">
+            <a:avLst/>
+          </a:prstGeom>
+          <a:solidFill>
+            <a:srgbClr val="FAFCFC"/>
+          </a:solidFill>
+          <a:ln w="8890">
+            <a:solidFill>
+              <a:srgbClr val="D2DBDB"/>
+            </a:solidFill>
+          </a:ln>
+        </p:spPr>
+        <p:style>
+          <a:lnRef idx="1">
+            <a:schemeClr val="accent1"/>
+          </a:lnRef>
+          <a:fillRef idx="3">
+            <a:schemeClr val="accent1"/>
+          </a:fillRef>
+          <a:effectRef idx="2">
+            <a:schemeClr val="accent1"/>
+          </a:effectRef>
+          <a:fontRef idx="minor">
+            <a:schemeClr val="lt1"/>
+          </a:fontRef>
+        </p:style>
+        <p:txBody>
+          <a:bodyPr rtlCol="0" anchor="ctr"/>
+          <a:lstStyle/>
+          <a:p>
+            <a:pPr algn="ctr"/>
+            <a:endParaRPr/>
+          </a:p>
+        </p:txBody>
+      </p:sp>
+      <p:sp>
+        <p:nvSpPr>
+          <p:cNvPr id="13" name="TextBox 12"/>
+          <p:cNvSpPr txBox="1"/>
+          <p:nvPr/>
+        </p:nvSpPr>
+        <p:spPr>
+          <a:xfrm>
+            <a:off x="7799831" y="3081528"/>
+            <a:ext cx="1874519" cy="320040"/>
+          </a:xfrm>
+          <a:prstGeom prst="rect">
+            <a:avLst/>
+          </a:prstGeom>
+          <a:noFill/>
+        </p:spPr>
+        <p:txBody>
+          <a:bodyPr wrap="none" lIns="18288" tIns="9144" rIns="18288" bIns="9144">
+            <a:spAutoFit/>
+          </a:bodyPr>
+          <a:lstStyle/>
+          <a:p>
+            <a:pPr>
+              <a:defRPr sz="2100" b="1">
+                <a:solidFill>
+                  <a:srgbClr val="008074"/>
+                </a:solidFill>
+                <a:latin typeface="Aptos"/>
+              </a:defRPr>
+            </a:pPr>
+            <a:r>
+              <a:t>26.87</a:t>
+            </a:r>
+          </a:p>
+        </p:txBody>
+      </p:sp>
+      <p:sp>
+        <p:nvSpPr>
+          <p:cNvPr id="14" name="TextBox 13"/>
+          <p:cNvSpPr txBox="1"/>
+          <p:nvPr/>
+        </p:nvSpPr>
+        <p:spPr>
+          <a:xfrm>
+            <a:off x="7799831" y="3502152"/>
+            <a:ext cx="1901952" cy="228600"/>
+          </a:xfrm>
+          <a:prstGeom prst="rect">
+            <a:avLst/>
+          </a:prstGeom>
+          <a:noFill/>
+        </p:spPr>
+        <p:txBody>
+          <a:bodyPr wrap="none" lIns="18288" tIns="9144" rIns="18288" bIns="9144">
+            <a:spAutoFit/>
+          </a:bodyPr>
+          <a:lstStyle/>
+          <a:p>
+            <a:pPr>
+              <a:defRPr sz="850" b="0">
+                <a:solidFill>
+                  <a:srgbClr val="56636B"/>
+                </a:solidFill>
+                <a:latin typeface="Aptos"/>
+              </a:defRPr>
+            </a:pPr>
+            <a:r>
+              <a:t>Sharpened_lanczos PSNR</a:t>
+            </a:r>
+          </a:p>
+        </p:txBody>
+      </p:sp>
+      <p:sp>
+        <p:nvSpPr>
+          <p:cNvPr id="15" name="Rounded Rectangle 14"/>
+          <p:cNvSpPr/>
+          <p:nvPr/>
+        </p:nvSpPr>
+        <p:spPr>
+          <a:xfrm>
+            <a:off x="7635240" y="4069080"/>
+            <a:ext cx="2240280" cy="914400"/>
+          </a:xfrm>
+          <a:prstGeom prst="roundRect">
+            <a:avLst/>
+          </a:prstGeom>
+          <a:solidFill>
+            <a:srgbClr val="FAFCFC"/>
+          </a:solidFill>
+          <a:ln w="8890">
+            <a:solidFill>
+              <a:srgbClr val="D2DBDB"/>
+            </a:solidFill>
+          </a:ln>
+        </p:spPr>
+        <p:style>
+          <a:lnRef idx="1">
+            <a:schemeClr val="accent1"/>
+          </a:lnRef>
+          <a:fillRef idx="3">
+            <a:schemeClr val="accent1"/>
+          </a:fillRef>
+          <a:effectRef idx="2">
+            <a:schemeClr val="accent1"/>
+          </a:effectRef>
+          <a:fontRef idx="minor">
+            <a:schemeClr val="lt1"/>
+          </a:fontRef>
+        </p:style>
+        <p:txBody>
+          <a:bodyPr rtlCol="0" anchor="ctr"/>
+          <a:lstStyle/>
+          <a:p>
+            <a:pPr algn="ctr"/>
+            <a:endParaRPr/>
+          </a:p>
+        </p:txBody>
+      </p:sp>
+      <p:sp>
+        <p:nvSpPr>
+          <p:cNvPr id="16" name="TextBox 15"/>
+          <p:cNvSpPr txBox="1"/>
+          <p:nvPr/>
+        </p:nvSpPr>
+        <p:spPr>
+          <a:xfrm>
+            <a:off x="7799831" y="4178808"/>
+            <a:ext cx="1874519" cy="320040"/>
+          </a:xfrm>
+          <a:prstGeom prst="rect">
+            <a:avLst/>
+          </a:prstGeom>
+          <a:noFill/>
+        </p:spPr>
+        <p:txBody>
+          <a:bodyPr wrap="none" lIns="18288" tIns="9144" rIns="18288" bIns="9144">
+            <a:spAutoFit/>
+          </a:bodyPr>
+          <a:lstStyle/>
+          <a:p>
+            <a:pPr>
+              <a:defRPr sz="2100" b="1">
+                <a:solidFill>
+                  <a:srgbClr val="B88630"/>
+                </a:solidFill>
+                <a:latin typeface="Aptos"/>
+              </a:defRPr>
+            </a:pPr>
+            <a:r>
+              <a:t>98.38</a:t>
+            </a:r>
+          </a:p>
+        </p:txBody>
+      </p:sp>
+      <p:sp>
+        <p:nvSpPr>
+          <p:cNvPr id="17" name="TextBox 16"/>
+          <p:cNvSpPr txBox="1"/>
+          <p:nvPr/>
+        </p:nvSpPr>
+        <p:spPr>
+          <a:xfrm>
+            <a:off x="7799831" y="4599432"/>
+            <a:ext cx="1901952" cy="228600"/>
+          </a:xfrm>
+          <a:prstGeom prst="rect">
+            <a:avLst/>
+          </a:prstGeom>
+          <a:noFill/>
+        </p:spPr>
+        <p:txBody>
+          <a:bodyPr wrap="none" lIns="18288" tIns="9144" rIns="18288" bIns="9144">
+            <a:spAutoFit/>
+          </a:bodyPr>
+          <a:lstStyle/>
+          <a:p>
+            <a:pPr>
+              <a:defRPr sz="850" b="0">
+                <a:solidFill>
+                  <a:srgbClr val="56636B"/>
+                </a:solidFill>
+                <a:latin typeface="Aptos"/>
+              </a:defRPr>
+            </a:pPr>
+            <a:r>
+              <a:t>Best reconstruction score</a:t>
             </a:r>
           </a:p>
         </p:txBody>
